--- a/docs/curso/slides/m10-indicadores.pptx
+++ b/docs/curso/slides/m10-indicadores.pptx
@@ -2179,6 +2179,54 @@
           <a:chExt cx="0" cy="0"/>
         </a:xfrm>
       </p:grpSpPr>
+      <p:sp>
+        <p:nvSpPr>
+          <p:cNvPr id="25" name="Slide Number Placeholder 0"/>
+          <p:cNvSpPr>
+            <a:spLocks noGrp="1"/>
+          </p:cNvSpPr>
+          <p:nvPr>
+            <p:ph type="sldNum" sz="quarter" idx="4294967295"/>
+          </p:nvPr>
+        </p:nvSpPr>
+        <p:spPr>
+          <a:xfrm>
+            <a:off x="11292840" y="6556248"/>
+            <a:ext cx="548640" cy="256032"/>
+          </a:xfrm>
+          <a:prstGeom prst="rect">
+            <a:avLst/>
+          </a:prstGeom>
+          <a:extLst>
+            <a:ext uri="{C572A759-6A51-4108-AA02-DFA0A04FC94B}">
+              <ma14:wrappingTextBoxFlag xmlns:ma14="http://schemas.microsoft.com/office/mac/drawingml/2011/main" val="0"/>
+            </a:ext>
+          </a:extLst>
+        </p:spPr>
+        <p:txBody>
+          <a:bodyPr/>
+          <a:lstStyle>
+            <a:lvl1pPr>
+              <a:defRPr sz="900">
+                <a:solidFill>
+                  <a:srgbClr val="1B3A6B"/>
+                </a:solidFill>
+                <a:latin typeface="Arial"/>
+                <a:ea typeface="Arial"/>
+                <a:cs typeface="Arial"/>
+              </a:defRPr>
+            </a:lvl1pPr>
+          </a:lstStyle>
+          <a:p>
+            <a:pPr algn="r"/>
+            <a:fld id="{F7021451-1387-4CA6-816F-3879F97B5CBC}" type="slidenum">
+              <a:rPr b="1" lang="en-US"/>
+              <a:t>1000</a:t>
+            </a:fld>
+            <a:endParaRPr lang="en-US"/>
+          </a:p>
+        </p:txBody>
+      </p:sp>
     </p:spTree>
   </p:cSld>
   <p:clrMapOvr>
@@ -2204,6 +2252,54 @@
           <a:chExt cx="0" cy="0"/>
         </a:xfrm>
       </p:grpSpPr>
+      <p:sp>
+        <p:nvSpPr>
+          <p:cNvPr id="25" name="Slide Number Placeholder 0"/>
+          <p:cNvSpPr>
+            <a:spLocks noGrp="1"/>
+          </p:cNvSpPr>
+          <p:nvPr>
+            <p:ph type="sldNum" sz="quarter" idx="4294967295"/>
+          </p:nvPr>
+        </p:nvSpPr>
+        <p:spPr>
+          <a:xfrm>
+            <a:off x="11292840" y="6556248"/>
+            <a:ext cx="548640" cy="256032"/>
+          </a:xfrm>
+          <a:prstGeom prst="rect">
+            <a:avLst/>
+          </a:prstGeom>
+          <a:extLst>
+            <a:ext uri="{C572A759-6A51-4108-AA02-DFA0A04FC94B}">
+              <ma14:wrappingTextBoxFlag xmlns:ma14="http://schemas.microsoft.com/office/mac/drawingml/2011/main" val="0"/>
+            </a:ext>
+          </a:extLst>
+        </p:spPr>
+        <p:txBody>
+          <a:bodyPr/>
+          <a:lstStyle>
+            <a:lvl1pPr>
+              <a:defRPr sz="900">
+                <a:solidFill>
+                  <a:srgbClr val="1B3A6B"/>
+                </a:solidFill>
+                <a:latin typeface="Arial"/>
+                <a:ea typeface="Arial"/>
+                <a:cs typeface="Arial"/>
+              </a:defRPr>
+            </a:lvl1pPr>
+          </a:lstStyle>
+          <a:p>
+            <a:pPr algn="r"/>
+            <a:fld id="{F7021451-1387-4CA6-816F-3879F97B5CBC}" type="slidenum">
+              <a:rPr b="1" lang="en-US"/>
+              <a:t>null</a:t>
+            </a:fld>
+            <a:endParaRPr lang="en-US"/>
+          </a:p>
+        </p:txBody>
+      </p:sp>
     </p:spTree>
   </p:cSld>
   <p:clrMap bg1="lt1" tx1="dk1" bg2="lt2" tx2="dk2" accent1="accent1" accent2="accent2" accent3="accent3" accent4="accent4" accent5="accent5" accent6="accent6" hlink="hlink" folHlink="folHlink"/>
@@ -3017,7 +3113,7 @@
         </p:blipFill>
         <p:spPr>
           <a:xfrm>
-            <a:off x="411480" y="6547104"/>
+            <a:off x="548640" y="6547104"/>
             <a:ext cx="274320" cy="274320"/>
           </a:xfrm>
           <a:prstGeom prst="rect">
@@ -3033,7 +3129,7 @@
         </p:nvSpPr>
         <p:spPr>
           <a:xfrm>
-            <a:off x="749808" y="6528816"/>
+            <a:off x="886968" y="6528816"/>
             <a:ext cx="6400800" cy="310896"/>
           </a:xfrm>
           <a:prstGeom prst="rect">
@@ -3073,7 +3169,7 @@
         <p:spPr>
           <a:xfrm>
             <a:off x="7132320" y="6528816"/>
-            <a:ext cx="4663440" cy="310896"/>
+            <a:ext cx="4023360" cy="310896"/>
           </a:xfrm>
           <a:prstGeom prst="rect">
             <a:avLst/>
@@ -3111,7 +3207,7 @@
         </p:nvSpPr>
         <p:spPr>
           <a:xfrm>
-            <a:off x="411480" y="384048"/>
+            <a:off x="548640" y="384048"/>
             <a:ext cx="82296" cy="658368"/>
           </a:xfrm>
           <a:prstGeom prst="rect">
@@ -3131,7 +3227,7 @@
         </p:nvSpPr>
         <p:spPr>
           <a:xfrm>
-            <a:off x="640080" y="292608"/>
+            <a:off x="777240" y="292608"/>
             <a:ext cx="10972800" cy="274320"/>
           </a:xfrm>
           <a:prstGeom prst="rect">
@@ -3170,8 +3266,8 @@
         </p:nvSpPr>
         <p:spPr>
           <a:xfrm>
-            <a:off x="640080" y="530352"/>
-            <a:ext cx="11155680" cy="566928"/>
+            <a:off x="777240" y="530352"/>
+            <a:ext cx="10881360" cy="566928"/>
           </a:xfrm>
           <a:prstGeom prst="rect">
             <a:avLst/>
@@ -3211,12 +3307,12 @@
         </p:nvSpPr>
         <p:spPr>
           <a:xfrm>
-            <a:off x="411480" y="1325880"/>
-            <a:ext cx="3611880" cy="4937760"/>
+            <a:off x="548640" y="1325880"/>
+            <a:ext cx="3514344" cy="4937760"/>
           </a:xfrm>
           <a:prstGeom prst="roundRect">
             <a:avLst>
-              <a:gd name="adj" fmla="val 2025"/>
+              <a:gd name="adj" fmla="val 2082"/>
             </a:avLst>
           </a:prstGeom>
           <a:solidFill>
@@ -3245,8 +3341,8 @@
         </p:nvSpPr>
         <p:spPr>
           <a:xfrm>
-            <a:off x="411480" y="1325880"/>
-            <a:ext cx="3611880" cy="109728"/>
+            <a:off x="548640" y="1325880"/>
+            <a:ext cx="3514344" cy="109728"/>
           </a:xfrm>
           <a:prstGeom prst="rect">
             <a:avLst/>
@@ -3265,8 +3361,8 @@
         </p:nvSpPr>
         <p:spPr>
           <a:xfrm>
-            <a:off x="685800" y="1554480"/>
-            <a:ext cx="3063240" cy="685800"/>
+            <a:off x="822960" y="1554480"/>
+            <a:ext cx="2965704" cy="685800"/>
           </a:xfrm>
           <a:prstGeom prst="rect">
             <a:avLst/>
@@ -3306,8 +3402,8 @@
         </p:nvSpPr>
         <p:spPr>
           <a:xfrm>
-            <a:off x="685800" y="2286000"/>
-            <a:ext cx="3063240" cy="3749040"/>
+            <a:off x="822960" y="2286000"/>
+            <a:ext cx="2965704" cy="3749040"/>
           </a:xfrm>
           <a:prstGeom prst="rect">
             <a:avLst/>
@@ -3329,7 +3425,7 @@
               <a:buChar char="●"/>
             </a:pPr>
             <a:r>
-              <a:rPr lang="en-US" sz="1200" dirty="0">
+              <a:rPr lang="en-US" sz="1500" dirty="0">
                 <a:solidFill>
                   <a:srgbClr val="1F2937"/>
                 </a:solidFill>
@@ -3339,7 +3435,7 @@
               </a:rPr>
               <a:t>Geração do mês × esperada × mesmo mês do ano anterior</a:t>
             </a:r>
-            <a:endParaRPr lang="en-US" sz="1200" dirty="0"/>
+            <a:endParaRPr lang="en-US" sz="1500" dirty="0"/>
           </a:p>
           <a:p>
             <a:pPr marL="342900" indent="-342900">
@@ -3350,7 +3446,7 @@
               <a:buChar char="●"/>
             </a:pPr>
             <a:r>
-              <a:rPr lang="en-US" sz="1200" dirty="0">
+              <a:rPr lang="en-US" sz="1500" dirty="0">
                 <a:solidFill>
                   <a:srgbClr val="1F2937"/>
                 </a:solidFill>
@@ -3360,7 +3456,7 @@
               </a:rPr>
               <a:t>Ocupação da usina e nº de clientes</a:t>
             </a:r>
-            <a:endParaRPr lang="en-US" sz="1200" dirty="0"/>
+            <a:endParaRPr lang="en-US" sz="1500" dirty="0"/>
           </a:p>
           <a:p>
             <a:pPr marL="342900" indent="-342900">
@@ -3371,7 +3467,7 @@
               <a:buChar char="●"/>
             </a:pPr>
             <a:r>
-              <a:rPr lang="en-US" sz="1200" dirty="0">
+              <a:rPr lang="en-US" sz="1500" dirty="0">
                 <a:solidFill>
                   <a:srgbClr val="1F2937"/>
                 </a:solidFill>
@@ -3381,7 +3477,7 @@
               </a:rPr>
               <a:t>Energia compensada nos clientes</a:t>
             </a:r>
-            <a:endParaRPr lang="en-US" sz="1200" dirty="0"/>
+            <a:endParaRPr lang="en-US" sz="1500" dirty="0"/>
           </a:p>
           <a:p>
             <a:pPr marL="342900" indent="-342900">
@@ -3392,7 +3488,7 @@
               <a:buChar char="●"/>
             </a:pPr>
             <a:r>
-              <a:rPr lang="en-US" sz="1200" dirty="0">
+              <a:rPr lang="en-US" sz="1500" dirty="0">
                 <a:solidFill>
                   <a:srgbClr val="1F2937"/>
                 </a:solidFill>
@@ -3402,7 +3498,7 @@
               </a:rPr>
               <a:t>Valor do crédito no mês · receita da usina · taxa de administração · repasse</a:t>
             </a:r>
-            <a:endParaRPr lang="en-US" sz="1200" dirty="0"/>
+            <a:endParaRPr lang="en-US" sz="1500" dirty="0"/>
           </a:p>
           <a:p>
             <a:pPr marL="342900" indent="-342900">
@@ -3413,7 +3509,7 @@
               <a:buChar char="●"/>
             </a:pPr>
             <a:r>
-              <a:rPr lang="en-US" sz="1200" dirty="0">
+              <a:rPr lang="en-US" sz="1500" dirty="0">
                 <a:solidFill>
                   <a:srgbClr val="1F2937"/>
                 </a:solidFill>
@@ -3423,7 +3519,7 @@
               </a:rPr>
               <a:t>Ocorrências (O&amp;M, paradas) e próximos passos</a:t>
             </a:r>
-            <a:endParaRPr lang="en-US" sz="1200" dirty="0"/>
+            <a:endParaRPr lang="en-US" sz="1500" dirty="0"/>
           </a:p>
         </p:txBody>
       </p:sp>
@@ -3435,12 +3531,12 @@
         </p:nvSpPr>
         <p:spPr>
           <a:xfrm>
-            <a:off x="4297680" y="1325880"/>
-            <a:ext cx="3611880" cy="4937760"/>
+            <a:off x="4337304" y="1325880"/>
+            <a:ext cx="3514344" cy="4937760"/>
           </a:xfrm>
           <a:prstGeom prst="roundRect">
             <a:avLst>
-              <a:gd name="adj" fmla="val 2025"/>
+              <a:gd name="adj" fmla="val 2082"/>
             </a:avLst>
           </a:prstGeom>
           <a:solidFill>
@@ -3469,8 +3565,8 @@
         </p:nvSpPr>
         <p:spPr>
           <a:xfrm>
-            <a:off x="4297680" y="1325880"/>
-            <a:ext cx="3611880" cy="109728"/>
+            <a:off x="4337304" y="1325880"/>
+            <a:ext cx="3514344" cy="109728"/>
           </a:xfrm>
           <a:prstGeom prst="rect">
             <a:avLst/>
@@ -3489,8 +3585,8 @@
         </p:nvSpPr>
         <p:spPr>
           <a:xfrm>
-            <a:off x="4572000" y="1554480"/>
-            <a:ext cx="3063240" cy="685800"/>
+            <a:off x="4611624" y="1554480"/>
+            <a:ext cx="2965704" cy="685800"/>
           </a:xfrm>
           <a:prstGeom prst="rect">
             <a:avLst/>
@@ -3530,8 +3626,8 @@
         </p:nvSpPr>
         <p:spPr>
           <a:xfrm>
-            <a:off x="4572000" y="2286000"/>
-            <a:ext cx="3063240" cy="3749040"/>
+            <a:off x="4611624" y="2286000"/>
+            <a:ext cx="2965704" cy="3749040"/>
           </a:xfrm>
           <a:prstGeom prst="rect">
             <a:avLst/>
@@ -3553,7 +3649,7 @@
               <a:buChar char="●"/>
             </a:pPr>
             <a:r>
-              <a:rPr lang="en-US" sz="1300" dirty="0">
+              <a:rPr lang="en-US" sz="1700" dirty="0">
                 <a:solidFill>
                   <a:srgbClr val="1F2937"/>
                 </a:solidFill>
@@ -3563,7 +3659,7 @@
               </a:rPr>
               <a:t>Portfólio: usinas, MWp, MWh/mês, ocupação média</a:t>
             </a:r>
-            <a:endParaRPr lang="en-US" sz="1300" dirty="0"/>
+            <a:endParaRPr lang="en-US" sz="1700" dirty="0"/>
           </a:p>
           <a:p>
             <a:pPr marL="342900" indent="-342900">
@@ -3574,7 +3670,7 @@
               <a:buChar char="●"/>
             </a:pPr>
             <a:r>
-              <a:rPr lang="en-US" sz="1300" dirty="0">
+              <a:rPr lang="en-US" sz="1700" dirty="0">
                 <a:solidFill>
                   <a:srgbClr val="1F2937"/>
                 </a:solidFill>
@@ -3584,7 +3680,7 @@
               </a:rPr>
               <a:t>Receita por usina e rentabilidade anualizada (repasse ÷ investimento)</a:t>
             </a:r>
-            <a:endParaRPr lang="en-US" sz="1300" dirty="0"/>
+            <a:endParaRPr lang="en-US" sz="1700" dirty="0"/>
           </a:p>
           <a:p>
             <a:pPr marL="342900" indent="-342900">
@@ -3595,7 +3691,7 @@
               <a:buChar char="●"/>
             </a:pPr>
             <a:r>
-              <a:rPr lang="en-US" sz="1300" dirty="0">
+              <a:rPr lang="en-US" sz="1700" dirty="0">
                 <a:solidFill>
                   <a:srgbClr val="1F2937"/>
                 </a:solidFill>
@@ -3605,7 +3701,7 @@
               </a:rPr>
               <a:t>Histórico: geração real × projetada; inadimplência; churn</a:t>
             </a:r>
-            <a:endParaRPr lang="en-US" sz="1300" dirty="0"/>
+            <a:endParaRPr lang="en-US" sz="1700" dirty="0"/>
           </a:p>
           <a:p>
             <a:pPr marL="342900" indent="-342900">
@@ -3616,7 +3712,7 @@
               <a:buChar char="●"/>
             </a:pPr>
             <a:r>
-              <a:rPr lang="en-US" sz="1300" dirty="0">
+              <a:rPr lang="en-US" sz="1700" dirty="0">
                 <a:solidFill>
                   <a:srgbClr val="1F2937"/>
                 </a:solidFill>
@@ -3626,7 +3722,7 @@
               </a:rPr>
               <a:t>Riscos e regulação (Fio B, 2029)</a:t>
             </a:r>
-            <a:endParaRPr lang="en-US" sz="1300" dirty="0"/>
+            <a:endParaRPr lang="en-US" sz="1700" dirty="0"/>
           </a:p>
         </p:txBody>
       </p:sp>
@@ -3638,12 +3734,12 @@
         </p:nvSpPr>
         <p:spPr>
           <a:xfrm>
-            <a:off x="8183880" y="1325880"/>
-            <a:ext cx="3611880" cy="4937760"/>
+            <a:off x="8125968" y="1325880"/>
+            <a:ext cx="3514344" cy="4937760"/>
           </a:xfrm>
           <a:prstGeom prst="roundRect">
             <a:avLst>
-              <a:gd name="adj" fmla="val 2025"/>
+              <a:gd name="adj" fmla="val 2082"/>
             </a:avLst>
           </a:prstGeom>
           <a:solidFill>
@@ -3672,8 +3768,8 @@
         </p:nvSpPr>
         <p:spPr>
           <a:xfrm>
-            <a:off x="8183880" y="1325880"/>
-            <a:ext cx="3611880" cy="109728"/>
+            <a:off x="8125968" y="1325880"/>
+            <a:ext cx="3514344" cy="109728"/>
           </a:xfrm>
           <a:prstGeom prst="rect">
             <a:avLst/>
@@ -3692,8 +3788,8 @@
         </p:nvSpPr>
         <p:spPr>
           <a:xfrm>
-            <a:off x="8458200" y="1554480"/>
-            <a:ext cx="3063240" cy="685800"/>
+            <a:off x="8400288" y="1554480"/>
+            <a:ext cx="2965704" cy="685800"/>
           </a:xfrm>
           <a:prstGeom prst="rect">
             <a:avLst/>
@@ -3733,8 +3829,8 @@
         </p:nvSpPr>
         <p:spPr>
           <a:xfrm>
-            <a:off x="8458200" y="2286000"/>
-            <a:ext cx="3063240" cy="3749040"/>
+            <a:off x="8400288" y="2286000"/>
+            <a:ext cx="2965704" cy="3749040"/>
           </a:xfrm>
           <a:prstGeom prst="rect">
             <a:avLst/>
@@ -3756,7 +3852,7 @@
               <a:buChar char="●"/>
             </a:pPr>
             <a:r>
-              <a:rPr lang="en-US" sz="1600" dirty="0">
+              <a:rPr lang="en-US" sz="1700" dirty="0">
                 <a:solidFill>
                   <a:srgbClr val="1F2937"/>
                 </a:solidFill>
@@ -3766,7 +3862,7 @@
               </a:rPr>
               <a:t>Mesma data todo mês</a:t>
             </a:r>
-            <a:endParaRPr lang="en-US" sz="1600" dirty="0"/>
+            <a:endParaRPr lang="en-US" sz="1700" dirty="0"/>
           </a:p>
           <a:p>
             <a:pPr marL="342900" indent="-342900">
@@ -3777,7 +3873,7 @@
               <a:buChar char="●"/>
             </a:pPr>
             <a:r>
-              <a:rPr lang="en-US" sz="1600" dirty="0">
+              <a:rPr lang="en-US" sz="1700" dirty="0">
                 <a:solidFill>
                   <a:srgbClr val="1F2937"/>
                 </a:solidFill>
@@ -3787,7 +3883,7 @@
               </a:rPr>
               <a:t>mesmo formato</a:t>
             </a:r>
-            <a:endParaRPr lang="en-US" sz="1600" dirty="0"/>
+            <a:endParaRPr lang="en-US" sz="1700" dirty="0"/>
           </a:p>
           <a:p>
             <a:pPr marL="342900" indent="-342900">
@@ -3798,7 +3894,7 @@
               <a:buChar char="●"/>
             </a:pPr>
             <a:r>
-              <a:rPr lang="en-US" sz="1600" dirty="0">
+              <a:rPr lang="en-US" sz="1700" dirty="0">
                 <a:solidFill>
                   <a:srgbClr val="1F2937"/>
                 </a:solidFill>
@@ -3808,7 +3904,7 @@
               </a:rPr>
               <a:t>números que batem com o extrato</a:t>
             </a:r>
-            <a:endParaRPr lang="en-US" sz="1600" dirty="0"/>
+            <a:endParaRPr lang="en-US" sz="1700" dirty="0"/>
           </a:p>
           <a:p>
             <a:pPr marL="342900" indent="-342900">
@@ -3819,7 +3915,7 @@
               <a:buChar char="●"/>
             </a:pPr>
             <a:r>
-              <a:rPr lang="en-US" sz="1600" dirty="0">
+              <a:rPr lang="en-US" sz="1700" dirty="0">
                 <a:solidFill>
                   <a:srgbClr val="1F2937"/>
                 </a:solidFill>
@@ -3829,7 +3925,55 @@
               </a:rPr>
               <a:t>más notícias primeiro</a:t>
             </a:r>
-            <a:endParaRPr lang="en-US" sz="1600" dirty="0"/>
+            <a:endParaRPr lang="en-US" sz="1700" dirty="0"/>
+          </a:p>
+        </p:txBody>
+      </p:sp>
+      <p:sp>
+        <p:nvSpPr>
+          <p:cNvPr id="25" name="Slide Number Placeholder 0"/>
+          <p:cNvSpPr>
+            <a:spLocks noGrp="1"/>
+          </p:cNvSpPr>
+          <p:nvPr>
+            <p:ph type="sldNum" sz="quarter" idx="4294967295"/>
+          </p:nvPr>
+        </p:nvSpPr>
+        <p:spPr>
+          <a:xfrm>
+            <a:off x="11292840" y="6556248"/>
+            <a:ext cx="548640" cy="256032"/>
+          </a:xfrm>
+          <a:prstGeom prst="rect">
+            <a:avLst/>
+          </a:prstGeom>
+          <a:extLst>
+            <a:ext uri="{C572A759-6A51-4108-AA02-DFA0A04FC94B}">
+              <ma14:wrappingTextBoxFlag xmlns:ma14="http://schemas.microsoft.com/office/mac/drawingml/2011/main" val="0"/>
+            </a:ext>
+          </a:extLst>
+        </p:spPr>
+        <p:txBody>
+          <a:bodyPr/>
+          <a:lstStyle>
+            <a:lvl1pPr>
+              <a:defRPr sz="900">
+                <a:solidFill>
+                  <a:srgbClr val="1B3A6B"/>
+                </a:solidFill>
+                <a:latin typeface="Arial"/>
+                <a:ea typeface="Arial"/>
+                <a:cs typeface="Arial"/>
+              </a:defRPr>
+            </a:lvl1pPr>
+          </a:lstStyle>
+          <a:p>
+            <a:pPr algn="r"/>
+            <a:fld id="{F7021451-1387-4CA6-816F-3879F97B5CBC}" type="slidenum">
+              <a:rPr b="1" lang="en-US"/>
+              <a:t>10</a:t>
+            </a:fld>
+            <a:endParaRPr lang="en-US"/>
           </a:p>
         </p:txBody>
       </p:sp>
@@ -3906,7 +4050,7 @@
         </p:blipFill>
         <p:spPr>
           <a:xfrm>
-            <a:off x="411480" y="6547104"/>
+            <a:off x="548640" y="6547104"/>
             <a:ext cx="274320" cy="274320"/>
           </a:xfrm>
           <a:prstGeom prst="rect">
@@ -3922,7 +4066,7 @@
         </p:nvSpPr>
         <p:spPr>
           <a:xfrm>
-            <a:off x="749808" y="6528816"/>
+            <a:off x="886968" y="6528816"/>
             <a:ext cx="6400800" cy="310896"/>
           </a:xfrm>
           <a:prstGeom prst="rect">
@@ -3962,7 +4106,7 @@
         <p:spPr>
           <a:xfrm>
             <a:off x="7132320" y="6528816"/>
-            <a:ext cx="4663440" cy="310896"/>
+            <a:ext cx="4023360" cy="310896"/>
           </a:xfrm>
           <a:prstGeom prst="rect">
             <a:avLst/>
@@ -4000,7 +4144,7 @@
         </p:nvSpPr>
         <p:spPr>
           <a:xfrm>
-            <a:off x="411480" y="384048"/>
+            <a:off x="548640" y="384048"/>
             <a:ext cx="82296" cy="658368"/>
           </a:xfrm>
           <a:prstGeom prst="rect">
@@ -4020,7 +4164,7 @@
         </p:nvSpPr>
         <p:spPr>
           <a:xfrm>
-            <a:off x="640080" y="292608"/>
+            <a:off x="777240" y="292608"/>
             <a:ext cx="10972800" cy="274320"/>
           </a:xfrm>
           <a:prstGeom prst="rect">
@@ -4059,8 +4203,8 @@
         </p:nvSpPr>
         <p:spPr>
           <a:xfrm>
-            <a:off x="640080" y="530352"/>
-            <a:ext cx="11155680" cy="566928"/>
+            <a:off x="777240" y="530352"/>
+            <a:ext cx="10881360" cy="566928"/>
           </a:xfrm>
           <a:prstGeom prst="rect">
             <a:avLst/>
@@ -4100,12 +4244,12 @@
         </p:nvSpPr>
         <p:spPr>
           <a:xfrm>
-            <a:off x="411480" y="1325880"/>
-            <a:ext cx="3642360" cy="4892040"/>
+            <a:off x="548640" y="1325880"/>
+            <a:ext cx="3544824" cy="4892040"/>
           </a:xfrm>
           <a:prstGeom prst="roundRect">
             <a:avLst>
-              <a:gd name="adj" fmla="val 2008"/>
+              <a:gd name="adj" fmla="val 2064"/>
             </a:avLst>
           </a:prstGeom>
           <a:solidFill>
@@ -4134,7 +4278,7 @@
         </p:nvSpPr>
         <p:spPr>
           <a:xfrm>
-            <a:off x="594360" y="1508760"/>
+            <a:off x="731520" y="1508760"/>
             <a:ext cx="457200" cy="457200"/>
           </a:xfrm>
           <a:prstGeom prst="ellipse">
@@ -4154,7 +4298,7 @@
         </p:nvSpPr>
         <p:spPr>
           <a:xfrm>
-            <a:off x="594360" y="1508760"/>
+            <a:off x="731520" y="1508760"/>
             <a:ext cx="457200" cy="457200"/>
           </a:xfrm>
           <a:prstGeom prst="rect">
@@ -4193,8 +4337,8 @@
         </p:nvSpPr>
         <p:spPr>
           <a:xfrm>
-            <a:off x="1188720" y="1435608"/>
-            <a:ext cx="2727960" cy="4672584"/>
+            <a:off x="1325880" y="1435608"/>
+            <a:ext cx="2630424" cy="4672584"/>
           </a:xfrm>
           <a:prstGeom prst="rect">
             <a:avLst/>
@@ -4234,12 +4378,12 @@
         </p:nvSpPr>
         <p:spPr>
           <a:xfrm>
-            <a:off x="4282440" y="1325880"/>
-            <a:ext cx="3642360" cy="4892040"/>
+            <a:off x="4322064" y="1325880"/>
+            <a:ext cx="3544824" cy="4892040"/>
           </a:xfrm>
           <a:prstGeom prst="roundRect">
             <a:avLst>
-              <a:gd name="adj" fmla="val 2008"/>
+              <a:gd name="adj" fmla="val 2064"/>
             </a:avLst>
           </a:prstGeom>
           <a:solidFill>
@@ -4268,7 +4412,7 @@
         </p:nvSpPr>
         <p:spPr>
           <a:xfrm>
-            <a:off x="4465320" y="1508760"/>
+            <a:off x="4504944" y="1508760"/>
             <a:ext cx="457200" cy="457200"/>
           </a:xfrm>
           <a:prstGeom prst="ellipse">
@@ -4288,7 +4432,7 @@
         </p:nvSpPr>
         <p:spPr>
           <a:xfrm>
-            <a:off x="4465320" y="1508760"/>
+            <a:off x="4504944" y="1508760"/>
             <a:ext cx="457200" cy="457200"/>
           </a:xfrm>
           <a:prstGeom prst="rect">
@@ -4327,8 +4471,8 @@
         </p:nvSpPr>
         <p:spPr>
           <a:xfrm>
-            <a:off x="5059680" y="1435608"/>
-            <a:ext cx="2727960" cy="4672584"/>
+            <a:off x="5099304" y="1435608"/>
+            <a:ext cx="2630424" cy="4672584"/>
           </a:xfrm>
           <a:prstGeom prst="rect">
             <a:avLst/>
@@ -4368,12 +4512,12 @@
         </p:nvSpPr>
         <p:spPr>
           <a:xfrm>
-            <a:off x="8153400" y="1325880"/>
-            <a:ext cx="3642360" cy="4892040"/>
+            <a:off x="8095488" y="1325880"/>
+            <a:ext cx="3544824" cy="4892040"/>
           </a:xfrm>
           <a:prstGeom prst="roundRect">
             <a:avLst>
-              <a:gd name="adj" fmla="val 2008"/>
+              <a:gd name="adj" fmla="val 2064"/>
             </a:avLst>
           </a:prstGeom>
           <a:solidFill>
@@ -4402,7 +4546,7 @@
         </p:nvSpPr>
         <p:spPr>
           <a:xfrm>
-            <a:off x="8336280" y="1508760"/>
+            <a:off x="8278368" y="1508760"/>
             <a:ext cx="457200" cy="457200"/>
           </a:xfrm>
           <a:prstGeom prst="ellipse">
@@ -4422,7 +4566,7 @@
         </p:nvSpPr>
         <p:spPr>
           <a:xfrm>
-            <a:off x="8336280" y="1508760"/>
+            <a:off x="8278368" y="1508760"/>
             <a:ext cx="457200" cy="457200"/>
           </a:xfrm>
           <a:prstGeom prst="rect">
@@ -4461,8 +4605,8 @@
         </p:nvSpPr>
         <p:spPr>
           <a:xfrm>
-            <a:off x="8930640" y="1435608"/>
-            <a:ext cx="2727960" cy="4672584"/>
+            <a:off x="8872728" y="1435608"/>
+            <a:ext cx="2630424" cy="4672584"/>
           </a:xfrm>
           <a:prstGeom prst="rect">
             <a:avLst/>
@@ -4491,6 +4635,54 @@
               <a:t>mesma data, mesmo formato, números que batem</a:t>
             </a:r>
             <a:endParaRPr lang="en-US" sz="1800" dirty="0"/>
+          </a:p>
+        </p:txBody>
+      </p:sp>
+      <p:sp>
+        <p:nvSpPr>
+          <p:cNvPr id="25" name="Slide Number Placeholder 0"/>
+          <p:cNvSpPr>
+            <a:spLocks noGrp="1"/>
+          </p:cNvSpPr>
+          <p:nvPr>
+            <p:ph type="sldNum" sz="quarter" idx="4294967295"/>
+          </p:nvPr>
+        </p:nvSpPr>
+        <p:spPr>
+          <a:xfrm>
+            <a:off x="11292840" y="6556248"/>
+            <a:ext cx="548640" cy="256032"/>
+          </a:xfrm>
+          <a:prstGeom prst="rect">
+            <a:avLst/>
+          </a:prstGeom>
+          <a:extLst>
+            <a:ext uri="{C572A759-6A51-4108-AA02-DFA0A04FC94B}">
+              <ma14:wrappingTextBoxFlag xmlns:ma14="http://schemas.microsoft.com/office/mac/drawingml/2011/main" val="0"/>
+            </a:ext>
+          </a:extLst>
+        </p:spPr>
+        <p:txBody>
+          <a:bodyPr/>
+          <a:lstStyle>
+            <a:lvl1pPr>
+              <a:defRPr sz="900">
+                <a:solidFill>
+                  <a:srgbClr val="1B3A6B"/>
+                </a:solidFill>
+                <a:latin typeface="Arial"/>
+                <a:ea typeface="Arial"/>
+                <a:cs typeface="Arial"/>
+              </a:defRPr>
+            </a:lvl1pPr>
+          </a:lstStyle>
+          <a:p>
+            <a:pPr algn="r"/>
+            <a:fld id="{F7021451-1387-4CA6-816F-3879F97B5CBC}" type="slidenum">
+              <a:rPr b="1" lang="en-US"/>
+              <a:t>11</a:t>
+            </a:fld>
+            <a:endParaRPr lang="en-US"/>
           </a:p>
         </p:txBody>
       </p:sp>
@@ -4554,6 +4746,45 @@
         </p:nvSpPr>
         <p:spPr>
           <a:xfrm>
+            <a:off x="457200" y="548640"/>
+            <a:ext cx="3474720" cy="1737360"/>
+          </a:xfrm>
+          <a:prstGeom prst="rect">
+            <a:avLst/>
+          </a:prstGeom>
+          <a:noFill/>
+          <a:ln/>
+        </p:spPr>
+        <p:txBody>
+          <a:bodyPr wrap="square" rtlCol="0" anchor="ctr"/>
+          <a:lstStyle/>
+          <a:p>
+            <a:pPr indent="0" marL="0">
+              <a:buNone/>
+            </a:pPr>
+            <a:r>
+              <a:rPr lang="en-US" sz="11000" b="1" dirty="0">
+                <a:solidFill>
+                  <a:srgbClr val="11396F"/>
+                </a:solidFill>
+                <a:latin typeface="Arial" pitchFamily="34" charset="0"/>
+                <a:ea typeface="Arial" pitchFamily="34" charset="-122"/>
+                <a:cs typeface="Arial" pitchFamily="34" charset="-120"/>
+              </a:rPr>
+              <a:t>04</a:t>
+            </a:r>
+            <a:endParaRPr lang="en-US" sz="11000" dirty="0"/>
+          </a:p>
+        </p:txBody>
+      </p:sp>
+      <p:sp>
+        <p:nvSpPr>
+          <p:cNvPr id="4" name="Text 2"/>
+          <p:cNvSpPr/>
+          <p:nvPr/>
+        </p:nvSpPr>
+        <p:spPr>
+          <a:xfrm>
             <a:off x="548640" y="2194560"/>
             <a:ext cx="3291840" cy="548640"/>
           </a:xfrm>
@@ -4587,7 +4818,46 @@
       </p:sp>
       <p:sp>
         <p:nvSpPr>
-          <p:cNvPr id="4" name="Text 2"/>
+          <p:cNvPr id="5" name="Text 3"/>
+          <p:cNvSpPr/>
+          <p:nvPr/>
+        </p:nvSpPr>
+        <p:spPr>
+          <a:xfrm>
+            <a:off x="548640" y="3200400"/>
+            <a:ext cx="3383280" cy="457200"/>
+          </a:xfrm>
+          <a:prstGeom prst="rect">
+            <a:avLst/>
+          </a:prstGeom>
+          <a:noFill/>
+          <a:ln/>
+        </p:spPr>
+        <p:txBody>
+          <a:bodyPr wrap="square" rtlCol="0" anchor="ctr"/>
+          <a:lstStyle/>
+          <a:p>
+            <a:pPr indent="0" marL="0">
+              <a:buNone/>
+            </a:pPr>
+            <a:r>
+              <a:rPr lang="en-US" sz="1100" dirty="0">
+                <a:solidFill>
+                  <a:srgbClr val="C7D2E3"/>
+                </a:solidFill>
+                <a:latin typeface="Arial" pitchFamily="34" charset="0"/>
+                <a:ea typeface="Arial" pitchFamily="34" charset="-122"/>
+                <a:cs typeface="Arial" pitchFamily="34" charset="-120"/>
+              </a:rPr>
+              <a:t>M10 · Etapa 4 · Gestão e estratégia</a:t>
+            </a:r>
+            <a:endParaRPr lang="en-US" sz="1100" dirty="0"/>
+          </a:p>
+        </p:txBody>
+      </p:sp>
+      <p:sp>
+        <p:nvSpPr>
+          <p:cNvPr id="6" name="Text 4"/>
           <p:cNvSpPr/>
           <p:nvPr/>
         </p:nvSpPr>
@@ -4626,7 +4896,7 @@
       </p:sp>
       <p:pic>
         <p:nvPicPr>
-          <p:cNvPr id="5" name="Image 0" descr="/www/wwwroot/rexar/gdsolar/docs/curso/slides/assets/logo-gdsolar.png">    </p:cNvPr>
+          <p:cNvPr id="7" name="Image 0" descr="/www/wwwroot/rexar/gdsolar/docs/curso/slides/assets/logo-gdsolar.png">    </p:cNvPr>
           <p:cNvPicPr>
             <a:picLocks noChangeAspect="1"/>
           </p:cNvPicPr>
@@ -4650,7 +4920,7 @@
       </p:pic>
       <p:sp>
         <p:nvSpPr>
-          <p:cNvPr id="6" name="Text 3"/>
+          <p:cNvPr id="8" name="Text 5"/>
           <p:cNvSpPr/>
           <p:nvPr/>
         </p:nvSpPr>
@@ -4691,7 +4961,7 @@
       </p:sp>
       <p:sp>
         <p:nvSpPr>
-          <p:cNvPr id="7" name="Text 4"/>
+          <p:cNvPr id="9" name="Text 6"/>
           <p:cNvSpPr/>
           <p:nvPr/>
         </p:nvSpPr>
@@ -4732,7 +5002,7 @@
       </p:sp>
       <p:sp>
         <p:nvSpPr>
-          <p:cNvPr id="8" name="Text 5"/>
+          <p:cNvPr id="10" name="Text 7"/>
           <p:cNvSpPr/>
           <p:nvPr/>
         </p:nvSpPr>
@@ -4869,7 +5139,7 @@
         </p:blipFill>
         <p:spPr>
           <a:xfrm>
-            <a:off x="411480" y="6547104"/>
+            <a:off x="548640" y="6547104"/>
             <a:ext cx="274320" cy="274320"/>
           </a:xfrm>
           <a:prstGeom prst="rect">
@@ -4885,7 +5155,7 @@
         </p:nvSpPr>
         <p:spPr>
           <a:xfrm>
-            <a:off x="749808" y="6528816"/>
+            <a:off x="886968" y="6528816"/>
             <a:ext cx="6400800" cy="310896"/>
           </a:xfrm>
           <a:prstGeom prst="rect">
@@ -4925,7 +5195,7 @@
         <p:spPr>
           <a:xfrm>
             <a:off x="7132320" y="6528816"/>
-            <a:ext cx="4663440" cy="310896"/>
+            <a:ext cx="4023360" cy="310896"/>
           </a:xfrm>
           <a:prstGeom prst="rect">
             <a:avLst/>
@@ -4963,7 +5233,7 @@
         </p:nvSpPr>
         <p:spPr>
           <a:xfrm>
-            <a:off x="411480" y="384048"/>
+            <a:off x="548640" y="384048"/>
             <a:ext cx="82296" cy="658368"/>
           </a:xfrm>
           <a:prstGeom prst="rect">
@@ -4983,7 +5253,7 @@
         </p:nvSpPr>
         <p:spPr>
           <a:xfrm>
-            <a:off x="640080" y="292608"/>
+            <a:off x="777240" y="292608"/>
             <a:ext cx="10972800" cy="274320"/>
           </a:xfrm>
           <a:prstGeom prst="rect">
@@ -5022,8 +5292,8 @@
         </p:nvSpPr>
         <p:spPr>
           <a:xfrm>
-            <a:off x="640080" y="530352"/>
-            <a:ext cx="11155680" cy="566928"/>
+            <a:off x="777240" y="530352"/>
+            <a:ext cx="10881360" cy="566928"/>
           </a:xfrm>
           <a:prstGeom prst="rect">
             <a:avLst/>
@@ -5063,12 +5333,12 @@
         </p:nvSpPr>
         <p:spPr>
           <a:xfrm>
-            <a:off x="411480" y="1325880"/>
-            <a:ext cx="3642360" cy="4892040"/>
+            <a:off x="548640" y="1325880"/>
+            <a:ext cx="3544824" cy="4892040"/>
           </a:xfrm>
           <a:prstGeom prst="roundRect">
             <a:avLst>
-              <a:gd name="adj" fmla="val 2008"/>
+              <a:gd name="adj" fmla="val 2064"/>
             </a:avLst>
           </a:prstGeom>
           <a:solidFill>
@@ -5097,7 +5367,7 @@
         </p:nvSpPr>
         <p:spPr>
           <a:xfrm>
-            <a:off x="594360" y="1508760"/>
+            <a:off x="731520" y="1508760"/>
             <a:ext cx="457200" cy="457200"/>
           </a:xfrm>
           <a:prstGeom prst="ellipse">
@@ -5117,7 +5387,7 @@
         </p:nvSpPr>
         <p:spPr>
           <a:xfrm>
-            <a:off x="594360" y="1508760"/>
+            <a:off x="731520" y="1508760"/>
             <a:ext cx="457200" cy="457200"/>
           </a:xfrm>
           <a:prstGeom prst="rect">
@@ -5156,8 +5426,8 @@
         </p:nvSpPr>
         <p:spPr>
           <a:xfrm>
-            <a:off x="1188720" y="1435608"/>
-            <a:ext cx="2727960" cy="4672584"/>
+            <a:off x="1325880" y="1435608"/>
+            <a:ext cx="2630424" cy="4672584"/>
           </a:xfrm>
           <a:prstGeom prst="rect">
             <a:avLst/>
@@ -5175,7 +5445,7 @@
               <a:buNone/>
             </a:pPr>
             <a:r>
-              <a:rPr lang="en-US" sz="1600" dirty="0">
+              <a:rPr lang="en-US" sz="1800" dirty="0">
                 <a:solidFill>
                   <a:srgbClr val="1F2937"/>
                 </a:solidFill>
@@ -5185,7 +5455,7 @@
               </a:rPr>
               <a:t>Com base no dashboard e no cockpit, escreva 3 decisões para a próxima semana (o quê</a:t>
             </a:r>
-            <a:endParaRPr lang="en-US" sz="1600" dirty="0"/>
+            <a:endParaRPr lang="en-US" sz="1800" dirty="0"/>
           </a:p>
         </p:txBody>
       </p:sp>
@@ -5197,12 +5467,12 @@
         </p:nvSpPr>
         <p:spPr>
           <a:xfrm>
-            <a:off x="4282440" y="1325880"/>
-            <a:ext cx="3642360" cy="4892040"/>
+            <a:off x="4322064" y="1325880"/>
+            <a:ext cx="3544824" cy="4892040"/>
           </a:xfrm>
           <a:prstGeom prst="roundRect">
             <a:avLst>
-              <a:gd name="adj" fmla="val 2008"/>
+              <a:gd name="adj" fmla="val 2064"/>
             </a:avLst>
           </a:prstGeom>
           <a:solidFill>
@@ -5231,7 +5501,7 @@
         </p:nvSpPr>
         <p:spPr>
           <a:xfrm>
-            <a:off x="4465320" y="1508760"/>
+            <a:off x="4504944" y="1508760"/>
             <a:ext cx="457200" cy="457200"/>
           </a:xfrm>
           <a:prstGeom prst="ellipse">
@@ -5251,7 +5521,7 @@
         </p:nvSpPr>
         <p:spPr>
           <a:xfrm>
-            <a:off x="4465320" y="1508760"/>
+            <a:off x="4504944" y="1508760"/>
             <a:ext cx="457200" cy="457200"/>
           </a:xfrm>
           <a:prstGeom prst="rect">
@@ -5290,8 +5560,8 @@
         </p:nvSpPr>
         <p:spPr>
           <a:xfrm>
-            <a:off x="5059680" y="1435608"/>
-            <a:ext cx="2727960" cy="4672584"/>
+            <a:off x="5099304" y="1435608"/>
+            <a:ext cx="2630424" cy="4672584"/>
           </a:xfrm>
           <a:prstGeom prst="rect">
             <a:avLst/>
@@ -5309,7 +5579,7 @@
               <a:buNone/>
             </a:pPr>
             <a:r>
-              <a:rPr lang="en-US" sz="1600" dirty="0">
+              <a:rPr lang="en-US" sz="1800" dirty="0">
                 <a:solidFill>
                   <a:srgbClr val="1F2937"/>
                 </a:solidFill>
@@ -5319,7 +5589,7 @@
               </a:rPr>
               <a:t>quem</a:t>
             </a:r>
-            <a:endParaRPr lang="en-US" sz="1600" dirty="0"/>
+            <a:endParaRPr lang="en-US" sz="1800" dirty="0"/>
           </a:p>
         </p:txBody>
       </p:sp>
@@ -5331,12 +5601,12 @@
         </p:nvSpPr>
         <p:spPr>
           <a:xfrm>
-            <a:off x="8153400" y="1325880"/>
-            <a:ext cx="3642360" cy="4892040"/>
+            <a:off x="8095488" y="1325880"/>
+            <a:ext cx="3544824" cy="4892040"/>
           </a:xfrm>
           <a:prstGeom prst="roundRect">
             <a:avLst>
-              <a:gd name="adj" fmla="val 2008"/>
+              <a:gd name="adj" fmla="val 2064"/>
             </a:avLst>
           </a:prstGeom>
           <a:solidFill>
@@ -5365,7 +5635,7 @@
         </p:nvSpPr>
         <p:spPr>
           <a:xfrm>
-            <a:off x="8336280" y="1508760"/>
+            <a:off x="8278368" y="1508760"/>
             <a:ext cx="457200" cy="457200"/>
           </a:xfrm>
           <a:prstGeom prst="ellipse">
@@ -5385,7 +5655,7 @@
         </p:nvSpPr>
         <p:spPr>
           <a:xfrm>
-            <a:off x="8336280" y="1508760"/>
+            <a:off x="8278368" y="1508760"/>
             <a:ext cx="457200" cy="457200"/>
           </a:xfrm>
           <a:prstGeom prst="rect">
@@ -5424,8 +5694,8 @@
         </p:nvSpPr>
         <p:spPr>
           <a:xfrm>
-            <a:off x="8930640" y="1435608"/>
-            <a:ext cx="2727960" cy="4672584"/>
+            <a:off x="8872728" y="1435608"/>
+            <a:ext cx="2630424" cy="4672584"/>
           </a:xfrm>
           <a:prstGeom prst="rect">
             <a:avLst/>
@@ -5443,7 +5713,7 @@
               <a:buNone/>
             </a:pPr>
             <a:r>
-              <a:rPr lang="en-US" sz="1600" dirty="0">
+              <a:rPr lang="en-US" sz="1800" dirty="0">
                 <a:solidFill>
                   <a:srgbClr val="1F2937"/>
                 </a:solidFill>
@@ -5453,7 +5723,55 @@
               </a:rPr>
               <a:t>até quando)</a:t>
             </a:r>
-            <a:endParaRPr lang="en-US" sz="1600" dirty="0"/>
+            <a:endParaRPr lang="en-US" sz="1800" dirty="0"/>
+          </a:p>
+        </p:txBody>
+      </p:sp>
+      <p:sp>
+        <p:nvSpPr>
+          <p:cNvPr id="25" name="Slide Number Placeholder 0"/>
+          <p:cNvSpPr>
+            <a:spLocks noGrp="1"/>
+          </p:cNvSpPr>
+          <p:nvPr>
+            <p:ph type="sldNum" sz="quarter" idx="4294967295"/>
+          </p:nvPr>
+        </p:nvSpPr>
+        <p:spPr>
+          <a:xfrm>
+            <a:off x="11292840" y="6556248"/>
+            <a:ext cx="548640" cy="256032"/>
+          </a:xfrm>
+          <a:prstGeom prst="rect">
+            <a:avLst/>
+          </a:prstGeom>
+          <a:extLst>
+            <a:ext uri="{C572A759-6A51-4108-AA02-DFA0A04FC94B}">
+              <ma14:wrappingTextBoxFlag xmlns:ma14="http://schemas.microsoft.com/office/mac/drawingml/2011/main" val="0"/>
+            </a:ext>
+          </a:extLst>
+        </p:spPr>
+        <p:txBody>
+          <a:bodyPr/>
+          <a:lstStyle>
+            <a:lvl1pPr>
+              <a:defRPr sz="900">
+                <a:solidFill>
+                  <a:srgbClr val="1B3A6B"/>
+                </a:solidFill>
+                <a:latin typeface="Arial"/>
+                <a:ea typeface="Arial"/>
+                <a:cs typeface="Arial"/>
+              </a:defRPr>
+            </a:lvl1pPr>
+          </a:lstStyle>
+          <a:p>
+            <a:pPr algn="r"/>
+            <a:fld id="{F7021451-1387-4CA6-816F-3879F97B5CBC}" type="slidenum">
+              <a:rPr b="1" lang="en-US"/>
+              <a:t>13</a:t>
+            </a:fld>
+            <a:endParaRPr lang="en-US"/>
           </a:p>
         </p:txBody>
       </p:sp>
@@ -5530,7 +5848,7 @@
         </p:blipFill>
         <p:spPr>
           <a:xfrm>
-            <a:off x="411480" y="6547104"/>
+            <a:off x="548640" y="6547104"/>
             <a:ext cx="274320" cy="274320"/>
           </a:xfrm>
           <a:prstGeom prst="rect">
@@ -5546,7 +5864,7 @@
         </p:nvSpPr>
         <p:spPr>
           <a:xfrm>
-            <a:off x="749808" y="6528816"/>
+            <a:off x="886968" y="6528816"/>
             <a:ext cx="6400800" cy="310896"/>
           </a:xfrm>
           <a:prstGeom prst="rect">
@@ -5586,7 +5904,7 @@
         <p:spPr>
           <a:xfrm>
             <a:off x="7132320" y="6528816"/>
-            <a:ext cx="4663440" cy="310896"/>
+            <a:ext cx="4023360" cy="310896"/>
           </a:xfrm>
           <a:prstGeom prst="rect">
             <a:avLst/>
@@ -5624,7 +5942,7 @@
         </p:nvSpPr>
         <p:spPr>
           <a:xfrm>
-            <a:off x="411480" y="384048"/>
+            <a:off x="548640" y="384048"/>
             <a:ext cx="82296" cy="658368"/>
           </a:xfrm>
           <a:prstGeom prst="rect">
@@ -5644,7 +5962,7 @@
         </p:nvSpPr>
         <p:spPr>
           <a:xfrm>
-            <a:off x="640080" y="292608"/>
+            <a:off x="777240" y="292608"/>
             <a:ext cx="10972800" cy="274320"/>
           </a:xfrm>
           <a:prstGeom prst="rect">
@@ -5683,8 +6001,8 @@
         </p:nvSpPr>
         <p:spPr>
           <a:xfrm>
-            <a:off x="640080" y="530352"/>
-            <a:ext cx="11155680" cy="566928"/>
+            <a:off x="777240" y="530352"/>
+            <a:ext cx="10881360" cy="566928"/>
           </a:xfrm>
           <a:prstGeom prst="rect">
             <a:avLst/>
@@ -5987,6 +6305,54 @@
               <a:t>Funil de faturas · alertas abertos · ranking de consultores · ações pendentes com link</a:t>
             </a:r>
             <a:endParaRPr lang="en-US" sz="1500" dirty="0"/>
+          </a:p>
+        </p:txBody>
+      </p:sp>
+      <p:sp>
+        <p:nvSpPr>
+          <p:cNvPr id="25" name="Slide Number Placeholder 0"/>
+          <p:cNvSpPr>
+            <a:spLocks noGrp="1"/>
+          </p:cNvSpPr>
+          <p:nvPr>
+            <p:ph type="sldNum" sz="quarter" idx="4294967295"/>
+          </p:nvPr>
+        </p:nvSpPr>
+        <p:spPr>
+          <a:xfrm>
+            <a:off x="11292840" y="6556248"/>
+            <a:ext cx="548640" cy="256032"/>
+          </a:xfrm>
+          <a:prstGeom prst="rect">
+            <a:avLst/>
+          </a:prstGeom>
+          <a:extLst>
+            <a:ext uri="{C572A759-6A51-4108-AA02-DFA0A04FC94B}">
+              <ma14:wrappingTextBoxFlag xmlns:ma14="http://schemas.microsoft.com/office/mac/drawingml/2011/main" val="0"/>
+            </a:ext>
+          </a:extLst>
+        </p:spPr>
+        <p:txBody>
+          <a:bodyPr/>
+          <a:lstStyle>
+            <a:lvl1pPr>
+              <a:defRPr sz="900">
+                <a:solidFill>
+                  <a:srgbClr val="1B3A6B"/>
+                </a:solidFill>
+                <a:latin typeface="Arial"/>
+                <a:ea typeface="Arial"/>
+                <a:cs typeface="Arial"/>
+              </a:defRPr>
+            </a:lvl1pPr>
+          </a:lstStyle>
+          <a:p>
+            <a:pPr algn="r"/>
+            <a:fld id="{F7021451-1387-4CA6-816F-3879F97B5CBC}" type="slidenum">
+              <a:rPr b="1" lang="en-US"/>
+              <a:t>14</a:t>
+            </a:fld>
+            <a:endParaRPr lang="en-US"/>
           </a:p>
         </p:txBody>
       </p:sp>
@@ -6063,7 +6429,7 @@
         </p:blipFill>
         <p:spPr>
           <a:xfrm>
-            <a:off x="411480" y="6547104"/>
+            <a:off x="548640" y="6547104"/>
             <a:ext cx="274320" cy="274320"/>
           </a:xfrm>
           <a:prstGeom prst="rect">
@@ -6079,7 +6445,7 @@
         </p:nvSpPr>
         <p:spPr>
           <a:xfrm>
-            <a:off x="749808" y="6528816"/>
+            <a:off x="886968" y="6528816"/>
             <a:ext cx="6400800" cy="310896"/>
           </a:xfrm>
           <a:prstGeom prst="rect">
@@ -6119,7 +6485,7 @@
         <p:spPr>
           <a:xfrm>
             <a:off x="7132320" y="6528816"/>
-            <a:ext cx="4663440" cy="310896"/>
+            <a:ext cx="4023360" cy="310896"/>
           </a:xfrm>
           <a:prstGeom prst="rect">
             <a:avLst/>
@@ -6157,7 +6523,7 @@
         </p:nvSpPr>
         <p:spPr>
           <a:xfrm>
-            <a:off x="411480" y="384048"/>
+            <a:off x="548640" y="384048"/>
             <a:ext cx="82296" cy="658368"/>
           </a:xfrm>
           <a:prstGeom prst="rect">
@@ -6177,7 +6543,7 @@
         </p:nvSpPr>
         <p:spPr>
           <a:xfrm>
-            <a:off x="640080" y="292608"/>
+            <a:off x="777240" y="292608"/>
             <a:ext cx="10972800" cy="274320"/>
           </a:xfrm>
           <a:prstGeom prst="rect">
@@ -6216,8 +6582,8 @@
         </p:nvSpPr>
         <p:spPr>
           <a:xfrm>
-            <a:off x="640080" y="530352"/>
-            <a:ext cx="11155680" cy="566928"/>
+            <a:off x="777240" y="530352"/>
+            <a:ext cx="10881360" cy="566928"/>
           </a:xfrm>
           <a:prstGeom prst="rect">
             <a:avLst/>
@@ -6307,6 +6673,54 @@
           </a:prstGeom>
         </p:spPr>
       </p:pic>
+      <p:sp>
+        <p:nvSpPr>
+          <p:cNvPr id="25" name="Slide Number Placeholder 0"/>
+          <p:cNvSpPr>
+            <a:spLocks noGrp="1"/>
+          </p:cNvSpPr>
+          <p:nvPr>
+            <p:ph type="sldNum" sz="quarter" idx="4294967295"/>
+          </p:nvPr>
+        </p:nvSpPr>
+        <p:spPr>
+          <a:xfrm>
+            <a:off x="11292840" y="6556248"/>
+            <a:ext cx="548640" cy="256032"/>
+          </a:xfrm>
+          <a:prstGeom prst="rect">
+            <a:avLst/>
+          </a:prstGeom>
+          <a:extLst>
+            <a:ext uri="{C572A759-6A51-4108-AA02-DFA0A04FC94B}">
+              <ma14:wrappingTextBoxFlag xmlns:ma14="http://schemas.microsoft.com/office/mac/drawingml/2011/main" val="0"/>
+            </a:ext>
+          </a:extLst>
+        </p:spPr>
+        <p:txBody>
+          <a:bodyPr/>
+          <a:lstStyle>
+            <a:lvl1pPr>
+              <a:defRPr sz="900">
+                <a:solidFill>
+                  <a:srgbClr val="1B3A6B"/>
+                </a:solidFill>
+                <a:latin typeface="Arial"/>
+                <a:ea typeface="Arial"/>
+                <a:cs typeface="Arial"/>
+              </a:defRPr>
+            </a:lvl1pPr>
+          </a:lstStyle>
+          <a:p>
+            <a:pPr algn="r"/>
+            <a:fld id="{F7021451-1387-4CA6-816F-3879F97B5CBC}" type="slidenum">
+              <a:rPr b="1" lang="en-US"/>
+              <a:t>15</a:t>
+            </a:fld>
+            <a:endParaRPr lang="en-US"/>
+          </a:p>
+        </p:txBody>
+      </p:sp>
     </p:spTree>
   </p:cSld>
   <p:clrMapOvr>
@@ -6367,6 +6781,45 @@
         </p:nvSpPr>
         <p:spPr>
           <a:xfrm>
+            <a:off x="457200" y="548640"/>
+            <a:ext cx="3474720" cy="1737360"/>
+          </a:xfrm>
+          <a:prstGeom prst="rect">
+            <a:avLst/>
+          </a:prstGeom>
+          <a:noFill/>
+          <a:ln/>
+        </p:spPr>
+        <p:txBody>
+          <a:bodyPr wrap="square" rtlCol="0" anchor="ctr"/>
+          <a:lstStyle/>
+          <a:p>
+            <a:pPr indent="0" marL="0">
+              <a:buNone/>
+            </a:pPr>
+            <a:r>
+              <a:rPr lang="en-US" sz="11000" b="1" dirty="0">
+                <a:solidFill>
+                  <a:srgbClr val="11396F"/>
+                </a:solidFill>
+                <a:latin typeface="Arial" pitchFamily="34" charset="0"/>
+                <a:ea typeface="Arial" pitchFamily="34" charset="-122"/>
+                <a:cs typeface="Arial" pitchFamily="34" charset="-120"/>
+              </a:rPr>
+              <a:t>05</a:t>
+            </a:r>
+            <a:endParaRPr lang="en-US" sz="11000" dirty="0"/>
+          </a:p>
+        </p:txBody>
+      </p:sp>
+      <p:sp>
+        <p:nvSpPr>
+          <p:cNvPr id="4" name="Text 2"/>
+          <p:cNvSpPr/>
+          <p:nvPr/>
+        </p:nvSpPr>
+        <p:spPr>
+          <a:xfrm>
             <a:off x="548640" y="2194560"/>
             <a:ext cx="3291840" cy="548640"/>
           </a:xfrm>
@@ -6400,7 +6853,46 @@
       </p:sp>
       <p:sp>
         <p:nvSpPr>
-          <p:cNvPr id="4" name="Text 2"/>
+          <p:cNvPr id="5" name="Text 3"/>
+          <p:cNvSpPr/>
+          <p:nvPr/>
+        </p:nvSpPr>
+        <p:spPr>
+          <a:xfrm>
+            <a:off x="548640" y="3200400"/>
+            <a:ext cx="3383280" cy="457200"/>
+          </a:xfrm>
+          <a:prstGeom prst="rect">
+            <a:avLst/>
+          </a:prstGeom>
+          <a:noFill/>
+          <a:ln/>
+        </p:spPr>
+        <p:txBody>
+          <a:bodyPr wrap="square" rtlCol="0" anchor="ctr"/>
+          <a:lstStyle/>
+          <a:p>
+            <a:pPr indent="0" marL="0">
+              <a:buNone/>
+            </a:pPr>
+            <a:r>
+              <a:rPr lang="en-US" sz="1100" dirty="0">
+                <a:solidFill>
+                  <a:srgbClr val="C7D2E3"/>
+                </a:solidFill>
+                <a:latin typeface="Arial" pitchFamily="34" charset="0"/>
+                <a:ea typeface="Arial" pitchFamily="34" charset="-122"/>
+                <a:cs typeface="Arial" pitchFamily="34" charset="-120"/>
+              </a:rPr>
+              <a:t>M10 · Etapa 4 · Gestão e estratégia</a:t>
+            </a:r>
+            <a:endParaRPr lang="en-US" sz="1100" dirty="0"/>
+          </a:p>
+        </p:txBody>
+      </p:sp>
+      <p:sp>
+        <p:nvSpPr>
+          <p:cNvPr id="6" name="Text 4"/>
           <p:cNvSpPr/>
           <p:nvPr/>
         </p:nvSpPr>
@@ -6439,7 +6931,7 @@
       </p:sp>
       <p:pic>
         <p:nvPicPr>
-          <p:cNvPr id="5" name="Image 0" descr="/www/wwwroot/rexar/gdsolar/docs/curso/slides/assets/logo-gdsolar.png">    </p:cNvPr>
+          <p:cNvPr id="7" name="Image 0" descr="/www/wwwroot/rexar/gdsolar/docs/curso/slides/assets/logo-gdsolar.png">    </p:cNvPr>
           <p:cNvPicPr>
             <a:picLocks noChangeAspect="1"/>
           </p:cNvPicPr>
@@ -6463,7 +6955,7 @@
       </p:pic>
       <p:sp>
         <p:nvSpPr>
-          <p:cNvPr id="6" name="Text 3"/>
+          <p:cNvPr id="8" name="Text 5"/>
           <p:cNvSpPr/>
           <p:nvPr/>
         </p:nvSpPr>
@@ -6504,7 +6996,7 @@
       </p:sp>
       <p:sp>
         <p:nvSpPr>
-          <p:cNvPr id="7" name="Text 4"/>
+          <p:cNvPr id="9" name="Text 6"/>
           <p:cNvSpPr/>
           <p:nvPr/>
         </p:nvSpPr>
@@ -6545,7 +7037,7 @@
       </p:sp>
       <p:sp>
         <p:nvSpPr>
-          <p:cNvPr id="8" name="Text 5"/>
+          <p:cNvPr id="10" name="Text 7"/>
           <p:cNvSpPr/>
           <p:nvPr/>
         </p:nvSpPr>
@@ -6661,7 +7153,7 @@
         </p:blipFill>
         <p:spPr>
           <a:xfrm>
-            <a:off x="411480" y="6547104"/>
+            <a:off x="548640" y="6547104"/>
             <a:ext cx="274320" cy="274320"/>
           </a:xfrm>
           <a:prstGeom prst="rect">
@@ -6677,7 +7169,7 @@
         </p:nvSpPr>
         <p:spPr>
           <a:xfrm>
-            <a:off x="749808" y="6528816"/>
+            <a:off x="886968" y="6528816"/>
             <a:ext cx="6400800" cy="310896"/>
           </a:xfrm>
           <a:prstGeom prst="rect">
@@ -6717,7 +7209,7 @@
         <p:spPr>
           <a:xfrm>
             <a:off x="7132320" y="6528816"/>
-            <a:ext cx="4663440" cy="310896"/>
+            <a:ext cx="4023360" cy="310896"/>
           </a:xfrm>
           <a:prstGeom prst="rect">
             <a:avLst/>
@@ -6755,7 +7247,7 @@
         </p:nvSpPr>
         <p:spPr>
           <a:xfrm>
-            <a:off x="411480" y="384048"/>
+            <a:off x="548640" y="384048"/>
             <a:ext cx="82296" cy="658368"/>
           </a:xfrm>
           <a:prstGeom prst="rect">
@@ -6775,7 +7267,7 @@
         </p:nvSpPr>
         <p:spPr>
           <a:xfrm>
-            <a:off x="640080" y="292608"/>
+            <a:off x="777240" y="292608"/>
             <a:ext cx="10972800" cy="274320"/>
           </a:xfrm>
           <a:prstGeom prst="rect">
@@ -6814,8 +7306,8 @@
         </p:nvSpPr>
         <p:spPr>
           <a:xfrm>
-            <a:off x="640080" y="530352"/>
-            <a:ext cx="11155680" cy="566928"/>
+            <a:off x="777240" y="530352"/>
+            <a:ext cx="10881360" cy="566928"/>
           </a:xfrm>
           <a:prstGeom prst="rect">
             <a:avLst/>
@@ -7169,6 +7661,54 @@
               <a:t>Para os clientes: relatório de economia · Para o produtor: relatório mensal de 1 página</a:t>
             </a:r>
             <a:endParaRPr lang="en-US" sz="1500" dirty="0"/>
+          </a:p>
+        </p:txBody>
+      </p:sp>
+      <p:sp>
+        <p:nvSpPr>
+          <p:cNvPr id="25" name="Slide Number Placeholder 0"/>
+          <p:cNvSpPr>
+            <a:spLocks noGrp="1"/>
+          </p:cNvSpPr>
+          <p:nvPr>
+            <p:ph type="sldNum" sz="quarter" idx="4294967295"/>
+          </p:nvPr>
+        </p:nvSpPr>
+        <p:spPr>
+          <a:xfrm>
+            <a:off x="11292840" y="6556248"/>
+            <a:ext cx="548640" cy="256032"/>
+          </a:xfrm>
+          <a:prstGeom prst="rect">
+            <a:avLst/>
+          </a:prstGeom>
+          <a:extLst>
+            <a:ext uri="{C572A759-6A51-4108-AA02-DFA0A04FC94B}">
+              <ma14:wrappingTextBoxFlag xmlns:ma14="http://schemas.microsoft.com/office/mac/drawingml/2011/main" val="0"/>
+            </a:ext>
+          </a:extLst>
+        </p:spPr>
+        <p:txBody>
+          <a:bodyPr/>
+          <a:lstStyle>
+            <a:lvl1pPr>
+              <a:defRPr sz="900">
+                <a:solidFill>
+                  <a:srgbClr val="1B3A6B"/>
+                </a:solidFill>
+                <a:latin typeface="Arial"/>
+                <a:ea typeface="Arial"/>
+                <a:cs typeface="Arial"/>
+              </a:defRPr>
+            </a:lvl1pPr>
+          </a:lstStyle>
+          <a:p>
+            <a:pPr algn="r"/>
+            <a:fld id="{F7021451-1387-4CA6-816F-3879F97B5CBC}" type="slidenum">
+              <a:rPr b="1" lang="en-US"/>
+              <a:t>17</a:t>
+            </a:fld>
+            <a:endParaRPr lang="en-US"/>
           </a:p>
         </p:txBody>
       </p:sp>
@@ -7245,7 +7785,7 @@
         </p:blipFill>
         <p:spPr>
           <a:xfrm>
-            <a:off x="411480" y="6547104"/>
+            <a:off x="548640" y="6547104"/>
             <a:ext cx="274320" cy="274320"/>
           </a:xfrm>
           <a:prstGeom prst="rect">
@@ -7261,7 +7801,7 @@
         </p:nvSpPr>
         <p:spPr>
           <a:xfrm>
-            <a:off x="749808" y="6528816"/>
+            <a:off x="886968" y="6528816"/>
             <a:ext cx="6400800" cy="310896"/>
           </a:xfrm>
           <a:prstGeom prst="rect">
@@ -7301,7 +7841,7 @@
         <p:spPr>
           <a:xfrm>
             <a:off x="7132320" y="6528816"/>
-            <a:ext cx="4663440" cy="310896"/>
+            <a:ext cx="4023360" cy="310896"/>
           </a:xfrm>
           <a:prstGeom prst="rect">
             <a:avLst/>
@@ -7339,7 +7879,7 @@
         </p:nvSpPr>
         <p:spPr>
           <a:xfrm>
-            <a:off x="411480" y="384048"/>
+            <a:off x="548640" y="384048"/>
             <a:ext cx="82296" cy="658368"/>
           </a:xfrm>
           <a:prstGeom prst="rect">
@@ -7359,7 +7899,7 @@
         </p:nvSpPr>
         <p:spPr>
           <a:xfrm>
-            <a:off x="640080" y="292608"/>
+            <a:off x="777240" y="292608"/>
             <a:ext cx="10972800" cy="274320"/>
           </a:xfrm>
           <a:prstGeom prst="rect">
@@ -7398,8 +7938,8 @@
         </p:nvSpPr>
         <p:spPr>
           <a:xfrm>
-            <a:off x="640080" y="530352"/>
-            <a:ext cx="11155680" cy="566928"/>
+            <a:off x="777240" y="530352"/>
+            <a:ext cx="10881360" cy="566928"/>
           </a:xfrm>
           <a:prstGeom prst="rect">
             <a:avLst/>
@@ -7489,6 +8029,54 @@
           </a:prstGeom>
         </p:spPr>
       </p:pic>
+      <p:sp>
+        <p:nvSpPr>
+          <p:cNvPr id="25" name="Slide Number Placeholder 0"/>
+          <p:cNvSpPr>
+            <a:spLocks noGrp="1"/>
+          </p:cNvSpPr>
+          <p:nvPr>
+            <p:ph type="sldNum" sz="quarter" idx="4294967295"/>
+          </p:nvPr>
+        </p:nvSpPr>
+        <p:spPr>
+          <a:xfrm>
+            <a:off x="11292840" y="6556248"/>
+            <a:ext cx="548640" cy="256032"/>
+          </a:xfrm>
+          <a:prstGeom prst="rect">
+            <a:avLst/>
+          </a:prstGeom>
+          <a:extLst>
+            <a:ext uri="{C572A759-6A51-4108-AA02-DFA0A04FC94B}">
+              <ma14:wrappingTextBoxFlag xmlns:ma14="http://schemas.microsoft.com/office/mac/drawingml/2011/main" val="0"/>
+            </a:ext>
+          </a:extLst>
+        </p:spPr>
+        <p:txBody>
+          <a:bodyPr/>
+          <a:lstStyle>
+            <a:lvl1pPr>
+              <a:defRPr sz="900">
+                <a:solidFill>
+                  <a:srgbClr val="1B3A6B"/>
+                </a:solidFill>
+                <a:latin typeface="Arial"/>
+                <a:ea typeface="Arial"/>
+                <a:cs typeface="Arial"/>
+              </a:defRPr>
+            </a:lvl1pPr>
+          </a:lstStyle>
+          <a:p>
+            <a:pPr algn="r"/>
+            <a:fld id="{F7021451-1387-4CA6-816F-3879F97B5CBC}" type="slidenum">
+              <a:rPr b="1" lang="en-US"/>
+              <a:t>18</a:t>
+            </a:fld>
+            <a:endParaRPr lang="en-US"/>
+          </a:p>
+        </p:txBody>
+      </p:sp>
     </p:spTree>
   </p:cSld>
   <p:clrMapOvr>
@@ -7562,7 +8150,7 @@
         </p:blipFill>
         <p:spPr>
           <a:xfrm>
-            <a:off x="411480" y="6547104"/>
+            <a:off x="548640" y="6547104"/>
             <a:ext cx="274320" cy="274320"/>
           </a:xfrm>
           <a:prstGeom prst="rect">
@@ -7578,7 +8166,7 @@
         </p:nvSpPr>
         <p:spPr>
           <a:xfrm>
-            <a:off x="749808" y="6528816"/>
+            <a:off x="886968" y="6528816"/>
             <a:ext cx="6400800" cy="310896"/>
           </a:xfrm>
           <a:prstGeom prst="rect">
@@ -7618,7 +8206,7 @@
         <p:spPr>
           <a:xfrm>
             <a:off x="7132320" y="6528816"/>
-            <a:ext cx="4663440" cy="310896"/>
+            <a:ext cx="4023360" cy="310896"/>
           </a:xfrm>
           <a:prstGeom prst="rect">
             <a:avLst/>
@@ -7656,7 +8244,7 @@
         </p:nvSpPr>
         <p:spPr>
           <a:xfrm>
-            <a:off x="411480" y="384048"/>
+            <a:off x="548640" y="384048"/>
             <a:ext cx="82296" cy="658368"/>
           </a:xfrm>
           <a:prstGeom prst="rect">
@@ -7676,7 +8264,7 @@
         </p:nvSpPr>
         <p:spPr>
           <a:xfrm>
-            <a:off x="640080" y="292608"/>
+            <a:off x="777240" y="292608"/>
             <a:ext cx="10972800" cy="274320"/>
           </a:xfrm>
           <a:prstGeom prst="rect">
@@ -7715,8 +8303,8 @@
         </p:nvSpPr>
         <p:spPr>
           <a:xfrm>
-            <a:off x="640080" y="530352"/>
-            <a:ext cx="11155680" cy="566928"/>
+            <a:off x="777240" y="530352"/>
+            <a:ext cx="10881360" cy="566928"/>
           </a:xfrm>
           <a:prstGeom prst="rect">
             <a:avLst/>
@@ -7756,8 +8344,8 @@
         </p:nvSpPr>
         <p:spPr>
           <a:xfrm>
-            <a:off x="411480" y="1325880"/>
-            <a:ext cx="5577840" cy="411480"/>
+            <a:off x="548640" y="1325880"/>
+            <a:ext cx="5394960" cy="411480"/>
           </a:xfrm>
           <a:prstGeom prst="rect">
             <a:avLst/>
@@ -7795,8 +8383,8 @@
         </p:nvSpPr>
         <p:spPr>
           <a:xfrm>
-            <a:off x="411480" y="1783080"/>
-            <a:ext cx="5577840" cy="4480560"/>
+            <a:off x="548640" y="1783080"/>
+            <a:ext cx="5394960" cy="4480560"/>
           </a:xfrm>
           <a:prstGeom prst="rect">
             <a:avLst/>
@@ -7879,8 +8467,8 @@
         </p:nvSpPr>
         <p:spPr>
           <a:xfrm>
-            <a:off x="6309360" y="1325880"/>
-            <a:ext cx="5486400" cy="4937760"/>
+            <a:off x="6172200" y="1325880"/>
+            <a:ext cx="5468112" cy="4937760"/>
           </a:xfrm>
           <a:prstGeom prst="roundRect">
             <a:avLst>
@@ -7901,8 +8489,8 @@
         </p:nvSpPr>
         <p:spPr>
           <a:xfrm>
-            <a:off x="6629400" y="1554480"/>
-            <a:ext cx="4846320" cy="4480560"/>
+            <a:off x="6492240" y="1554480"/>
+            <a:ext cx="4828032" cy="4480560"/>
           </a:xfrm>
           <a:prstGeom prst="rect">
             <a:avLst/>
@@ -7946,6 +8534,54 @@
               <a:t>Relatório mensal da minha operação (meses 1 e 2 do laboratório): painel de 12 indicadores com meta e resultado, comentário de 5 linhas sobre o mês, relatório da usina para o produtor e o relatório de economia de 3 clientes exportados.</a:t>
             </a:r>
             <a:endParaRPr lang="en-US" sz="1300" dirty="0"/>
+          </a:p>
+        </p:txBody>
+      </p:sp>
+      <p:sp>
+        <p:nvSpPr>
+          <p:cNvPr id="25" name="Slide Number Placeholder 0"/>
+          <p:cNvSpPr>
+            <a:spLocks noGrp="1"/>
+          </p:cNvSpPr>
+          <p:nvPr>
+            <p:ph type="sldNum" sz="quarter" idx="4294967295"/>
+          </p:nvPr>
+        </p:nvSpPr>
+        <p:spPr>
+          <a:xfrm>
+            <a:off x="11292840" y="6556248"/>
+            <a:ext cx="548640" cy="256032"/>
+          </a:xfrm>
+          <a:prstGeom prst="rect">
+            <a:avLst/>
+          </a:prstGeom>
+          <a:extLst>
+            <a:ext uri="{C572A759-6A51-4108-AA02-DFA0A04FC94B}">
+              <ma14:wrappingTextBoxFlag xmlns:ma14="http://schemas.microsoft.com/office/mac/drawingml/2011/main" val="0"/>
+            </a:ext>
+          </a:extLst>
+        </p:spPr>
+        <p:txBody>
+          <a:bodyPr/>
+          <a:lstStyle>
+            <a:lvl1pPr>
+              <a:defRPr sz="900">
+                <a:solidFill>
+                  <a:srgbClr val="1B3A6B"/>
+                </a:solidFill>
+                <a:latin typeface="Arial"/>
+                <a:ea typeface="Arial"/>
+                <a:cs typeface="Arial"/>
+              </a:defRPr>
+            </a:lvl1pPr>
+          </a:lstStyle>
+          <a:p>
+            <a:pPr algn="r"/>
+            <a:fld id="{F7021451-1387-4CA6-816F-3879F97B5CBC}" type="slidenum">
+              <a:rPr b="1" lang="en-US"/>
+              <a:t>19</a:t>
+            </a:fld>
+            <a:endParaRPr lang="en-US"/>
           </a:p>
         </p:txBody>
       </p:sp>
@@ -8009,6 +8645,45 @@
         </p:nvSpPr>
         <p:spPr>
           <a:xfrm>
+            <a:off x="457200" y="548640"/>
+            <a:ext cx="3474720" cy="1737360"/>
+          </a:xfrm>
+          <a:prstGeom prst="rect">
+            <a:avLst/>
+          </a:prstGeom>
+          <a:noFill/>
+          <a:ln/>
+        </p:spPr>
+        <p:txBody>
+          <a:bodyPr wrap="square" rtlCol="0" anchor="ctr"/>
+          <a:lstStyle/>
+          <a:p>
+            <a:pPr indent="0" marL="0">
+              <a:buNone/>
+            </a:pPr>
+            <a:r>
+              <a:rPr lang="en-US" sz="11000" b="1" dirty="0">
+                <a:solidFill>
+                  <a:srgbClr val="11396F"/>
+                </a:solidFill>
+                <a:latin typeface="Arial" pitchFamily="34" charset="0"/>
+                <a:ea typeface="Arial" pitchFamily="34" charset="-122"/>
+                <a:cs typeface="Arial" pitchFamily="34" charset="-120"/>
+              </a:rPr>
+              <a:t>01</a:t>
+            </a:r>
+            <a:endParaRPr lang="en-US" sz="11000" dirty="0"/>
+          </a:p>
+        </p:txBody>
+      </p:sp>
+      <p:sp>
+        <p:nvSpPr>
+          <p:cNvPr id="4" name="Text 2"/>
+          <p:cNvSpPr/>
+          <p:nvPr/>
+        </p:nvSpPr>
+        <p:spPr>
+          <a:xfrm>
             <a:off x="548640" y="2194560"/>
             <a:ext cx="3291840" cy="548640"/>
           </a:xfrm>
@@ -8042,7 +8717,46 @@
       </p:sp>
       <p:sp>
         <p:nvSpPr>
-          <p:cNvPr id="4" name="Text 2"/>
+          <p:cNvPr id="5" name="Text 3"/>
+          <p:cNvSpPr/>
+          <p:nvPr/>
+        </p:nvSpPr>
+        <p:spPr>
+          <a:xfrm>
+            <a:off x="548640" y="3200400"/>
+            <a:ext cx="3383280" cy="457200"/>
+          </a:xfrm>
+          <a:prstGeom prst="rect">
+            <a:avLst/>
+          </a:prstGeom>
+          <a:noFill/>
+          <a:ln/>
+        </p:spPr>
+        <p:txBody>
+          <a:bodyPr wrap="square" rtlCol="0" anchor="ctr"/>
+          <a:lstStyle/>
+          <a:p>
+            <a:pPr indent="0" marL="0">
+              <a:buNone/>
+            </a:pPr>
+            <a:r>
+              <a:rPr lang="en-US" sz="1100" dirty="0">
+                <a:solidFill>
+                  <a:srgbClr val="C7D2E3"/>
+                </a:solidFill>
+                <a:latin typeface="Arial" pitchFamily="34" charset="0"/>
+                <a:ea typeface="Arial" pitchFamily="34" charset="-122"/>
+                <a:cs typeface="Arial" pitchFamily="34" charset="-120"/>
+              </a:rPr>
+              <a:t>M10 · Etapa 4 · Gestão e estratégia</a:t>
+            </a:r>
+            <a:endParaRPr lang="en-US" sz="1100" dirty="0"/>
+          </a:p>
+        </p:txBody>
+      </p:sp>
+      <p:sp>
+        <p:nvSpPr>
+          <p:cNvPr id="6" name="Text 4"/>
           <p:cNvSpPr/>
           <p:nvPr/>
         </p:nvSpPr>
@@ -8081,7 +8795,7 @@
       </p:sp>
       <p:pic>
         <p:nvPicPr>
-          <p:cNvPr id="5" name="Image 0" descr="/www/wwwroot/rexar/gdsolar/docs/curso/slides/assets/logo-gdsolar.png">    </p:cNvPr>
+          <p:cNvPr id="7" name="Image 0" descr="/www/wwwroot/rexar/gdsolar/docs/curso/slides/assets/logo-gdsolar.png">    </p:cNvPr>
           <p:cNvPicPr>
             <a:picLocks noChangeAspect="1"/>
           </p:cNvPicPr>
@@ -8105,7 +8819,7 @@
       </p:pic>
       <p:sp>
         <p:nvSpPr>
-          <p:cNvPr id="6" name="Text 3"/>
+          <p:cNvPr id="8" name="Text 5"/>
           <p:cNvSpPr/>
           <p:nvPr/>
         </p:nvSpPr>
@@ -8146,7 +8860,7 @@
       </p:sp>
       <p:sp>
         <p:nvSpPr>
-          <p:cNvPr id="7" name="Text 4"/>
+          <p:cNvPr id="9" name="Text 6"/>
           <p:cNvSpPr/>
           <p:nvPr/>
         </p:nvSpPr>
@@ -8187,7 +8901,7 @@
       </p:sp>
       <p:sp>
         <p:nvSpPr>
-          <p:cNvPr id="8" name="Text 5"/>
+          <p:cNvPr id="10" name="Text 7"/>
           <p:cNvSpPr/>
           <p:nvPr/>
         </p:nvSpPr>
@@ -8387,7 +9101,7 @@
         </p:blipFill>
         <p:spPr>
           <a:xfrm>
-            <a:off x="411480" y="6547104"/>
+            <a:off x="548640" y="6547104"/>
             <a:ext cx="274320" cy="274320"/>
           </a:xfrm>
           <a:prstGeom prst="rect">
@@ -8403,7 +9117,7 @@
         </p:nvSpPr>
         <p:spPr>
           <a:xfrm>
-            <a:off x="749808" y="6528816"/>
+            <a:off x="886968" y="6528816"/>
             <a:ext cx="6400800" cy="310896"/>
           </a:xfrm>
           <a:prstGeom prst="rect">
@@ -8443,7 +9157,7 @@
         <p:spPr>
           <a:xfrm>
             <a:off x="7132320" y="6528816"/>
-            <a:ext cx="4663440" cy="310896"/>
+            <a:ext cx="4023360" cy="310896"/>
           </a:xfrm>
           <a:prstGeom prst="rect">
             <a:avLst/>
@@ -8481,7 +9195,7 @@
         </p:nvSpPr>
         <p:spPr>
           <a:xfrm>
-            <a:off x="411480" y="384048"/>
+            <a:off x="548640" y="384048"/>
             <a:ext cx="82296" cy="658368"/>
           </a:xfrm>
           <a:prstGeom prst="rect">
@@ -8501,7 +9215,7 @@
         </p:nvSpPr>
         <p:spPr>
           <a:xfrm>
-            <a:off x="640080" y="292608"/>
+            <a:off x="777240" y="292608"/>
             <a:ext cx="10972800" cy="274320"/>
           </a:xfrm>
           <a:prstGeom prst="rect">
@@ -8540,8 +9254,8 @@
         </p:nvSpPr>
         <p:spPr>
           <a:xfrm>
-            <a:off x="640080" y="530352"/>
-            <a:ext cx="11155680" cy="566928"/>
+            <a:off x="777240" y="530352"/>
+            <a:ext cx="10881360" cy="566928"/>
           </a:xfrm>
           <a:prstGeom prst="rect">
             <a:avLst/>
@@ -8581,12 +9295,12 @@
         </p:nvSpPr>
         <p:spPr>
           <a:xfrm>
-            <a:off x="411480" y="1325880"/>
-            <a:ext cx="3611880" cy="4937760"/>
+            <a:off x="548640" y="1325880"/>
+            <a:ext cx="3514344" cy="4937760"/>
           </a:xfrm>
           <a:prstGeom prst="roundRect">
             <a:avLst>
-              <a:gd name="adj" fmla="val 2025"/>
+              <a:gd name="adj" fmla="val 2082"/>
             </a:avLst>
           </a:prstGeom>
           <a:solidFill>
@@ -8615,8 +9329,8 @@
         </p:nvSpPr>
         <p:spPr>
           <a:xfrm>
-            <a:off x="411480" y="1325880"/>
-            <a:ext cx="3611880" cy="109728"/>
+            <a:off x="548640" y="1325880"/>
+            <a:ext cx="3514344" cy="109728"/>
           </a:xfrm>
           <a:prstGeom prst="rect">
             <a:avLst/>
@@ -8635,8 +9349,8 @@
         </p:nvSpPr>
         <p:spPr>
           <a:xfrm>
-            <a:off x="685800" y="1554480"/>
-            <a:ext cx="3063240" cy="685800"/>
+            <a:off x="822960" y="1554480"/>
+            <a:ext cx="2965704" cy="685800"/>
           </a:xfrm>
           <a:prstGeom prst="rect">
             <a:avLst/>
@@ -8676,8 +9390,8 @@
         </p:nvSpPr>
         <p:spPr>
           <a:xfrm>
-            <a:off x="685800" y="2286000"/>
-            <a:ext cx="3063240" cy="3749040"/>
+            <a:off x="822960" y="2286000"/>
+            <a:ext cx="2965704" cy="3749040"/>
           </a:xfrm>
           <a:prstGeom prst="rect">
             <a:avLst/>
@@ -8698,7 +9412,7 @@
               <a:buNone/>
             </a:pPr>
             <a:r>
-              <a:rPr lang="en-US" sz="1300" dirty="0">
+              <a:rPr lang="en-US" sz="1700" dirty="0">
                 <a:solidFill>
                   <a:srgbClr val="1F2937"/>
                 </a:solidFill>
@@ -8708,7 +9422,7 @@
               </a:rPr>
               <a:t>1. Taxa de ocupação = alocada ÷ disponível · meta 90–98%</a:t>
             </a:r>
-            <a:endParaRPr lang="en-US" sz="1300" dirty="0"/>
+            <a:endParaRPr lang="en-US" sz="1700" dirty="0"/>
           </a:p>
           <a:p>
             <a:pPr indent="0" marL="0">
@@ -8718,7 +9432,7 @@
               <a:buNone/>
             </a:pPr>
             <a:r>
-              <a:rPr lang="en-US" sz="1300" dirty="0">
+              <a:rPr lang="en-US" sz="1700" dirty="0">
                 <a:solidFill>
                   <a:srgbClr val="1F2937"/>
                 </a:solidFill>
@@ -8728,7 +9442,7 @@
               </a:rPr>
               <a:t>2. Desempenho de geração = gerada ÷ esperada no mês · meta ≥ 95%</a:t>
             </a:r>
-            <a:endParaRPr lang="en-US" sz="1300" dirty="0"/>
+            <a:endParaRPr lang="en-US" sz="1700" dirty="0"/>
           </a:p>
           <a:p>
             <a:pPr indent="0" marL="0">
@@ -8738,7 +9452,7 @@
               <a:buNone/>
             </a:pPr>
             <a:r>
-              <a:rPr lang="en-US" sz="1300" dirty="0">
+              <a:rPr lang="en-US" sz="1700" dirty="0">
                 <a:solidFill>
                   <a:srgbClr val="1F2937"/>
                 </a:solidFill>
@@ -8748,7 +9462,7 @@
               </a:rPr>
               <a:t>3. Energia compensada ÷ alocada · meta ≥ 95% (créditos chegando)</a:t>
             </a:r>
-            <a:endParaRPr lang="en-US" sz="1300" dirty="0"/>
+            <a:endParaRPr lang="en-US" sz="1700" dirty="0"/>
           </a:p>
         </p:txBody>
       </p:sp>
@@ -8760,12 +9474,12 @@
         </p:nvSpPr>
         <p:spPr>
           <a:xfrm>
-            <a:off x="4297680" y="1325880"/>
-            <a:ext cx="3611880" cy="4937760"/>
+            <a:off x="4337304" y="1325880"/>
+            <a:ext cx="3514344" cy="4937760"/>
           </a:xfrm>
           <a:prstGeom prst="roundRect">
             <a:avLst>
-              <a:gd name="adj" fmla="val 2025"/>
+              <a:gd name="adj" fmla="val 2082"/>
             </a:avLst>
           </a:prstGeom>
           <a:solidFill>
@@ -8794,8 +9508,8 @@
         </p:nvSpPr>
         <p:spPr>
           <a:xfrm>
-            <a:off x="4297680" y="1325880"/>
-            <a:ext cx="3611880" cy="109728"/>
+            <a:off x="4337304" y="1325880"/>
+            <a:ext cx="3514344" cy="109728"/>
           </a:xfrm>
           <a:prstGeom prst="rect">
             <a:avLst/>
@@ -8814,8 +9528,8 @@
         </p:nvSpPr>
         <p:spPr>
           <a:xfrm>
-            <a:off x="4572000" y="1554480"/>
-            <a:ext cx="3063240" cy="685800"/>
+            <a:off x="4611624" y="1554480"/>
+            <a:ext cx="2965704" cy="685800"/>
           </a:xfrm>
           <a:prstGeom prst="rect">
             <a:avLst/>
@@ -8855,8 +9569,8 @@
         </p:nvSpPr>
         <p:spPr>
           <a:xfrm>
-            <a:off x="4572000" y="2286000"/>
-            <a:ext cx="3063240" cy="3749040"/>
+            <a:off x="4611624" y="2286000"/>
+            <a:ext cx="2965704" cy="3749040"/>
           </a:xfrm>
           <a:prstGeom prst="rect">
             <a:avLst/>
@@ -8877,7 +9591,7 @@
               <a:buNone/>
             </a:pPr>
             <a:r>
-              <a:rPr lang="en-US" sz="1300" dirty="0">
+              <a:rPr lang="en-US" sz="1700" dirty="0">
                 <a:solidFill>
                   <a:srgbClr val="1F2937"/>
                 </a:solidFill>
@@ -8887,7 +9601,7 @@
               </a:rPr>
               <a:t>4. Novos clientes (e kWh vendidos) no mês · meta do plano</a:t>
             </a:r>
-            <a:endParaRPr lang="en-US" sz="1300" dirty="0"/>
+            <a:endParaRPr lang="en-US" sz="1700" dirty="0"/>
           </a:p>
           <a:p>
             <a:pPr indent="0" marL="0">
@@ -8897,7 +9611,7 @@
               <a:buNone/>
             </a:pPr>
             <a:r>
-              <a:rPr lang="en-US" sz="1300" dirty="0">
+              <a:rPr lang="en-US" sz="1700" dirty="0">
                 <a:solidFill>
                   <a:srgbClr val="1F2937"/>
                 </a:solidFill>
@@ -8907,7 +9621,7 @@
               </a:rPr>
               <a:t>5. Conversão: proposta → cliente pagante · referência 25–40%</a:t>
             </a:r>
-            <a:endParaRPr lang="en-US" sz="1300" dirty="0"/>
+            <a:endParaRPr lang="en-US" sz="1700" dirty="0"/>
           </a:p>
           <a:p>
             <a:pPr indent="0" marL="0">
@@ -8917,7 +9631,7 @@
               <a:buNone/>
             </a:pPr>
             <a:r>
-              <a:rPr lang="en-US" sz="1300" dirty="0">
+              <a:rPr lang="en-US" sz="1700" dirty="0">
                 <a:solidFill>
                   <a:srgbClr val="1F2937"/>
                 </a:solidFill>
@@ -8927,7 +9641,7 @@
               </a:rPr>
               <a:t>6. Custo de aquisição (CAC) = gasto comercial ÷ novos clientes</a:t>
             </a:r>
-            <a:endParaRPr lang="en-US" sz="1300" dirty="0"/>
+            <a:endParaRPr lang="en-US" sz="1700" dirty="0"/>
           </a:p>
         </p:txBody>
       </p:sp>
@@ -8939,12 +9653,12 @@
         </p:nvSpPr>
         <p:spPr>
           <a:xfrm>
-            <a:off x="8183880" y="1325880"/>
-            <a:ext cx="3611880" cy="4937760"/>
+            <a:off x="8125968" y="1325880"/>
+            <a:ext cx="3514344" cy="4937760"/>
           </a:xfrm>
           <a:prstGeom prst="roundRect">
             <a:avLst>
-              <a:gd name="adj" fmla="val 2025"/>
+              <a:gd name="adj" fmla="val 2082"/>
             </a:avLst>
           </a:prstGeom>
           <a:solidFill>
@@ -8973,8 +9687,8 @@
         </p:nvSpPr>
         <p:spPr>
           <a:xfrm>
-            <a:off x="8183880" y="1325880"/>
-            <a:ext cx="3611880" cy="109728"/>
+            <a:off x="8125968" y="1325880"/>
+            <a:ext cx="3514344" cy="109728"/>
           </a:xfrm>
           <a:prstGeom prst="rect">
             <a:avLst/>
@@ -8993,8 +9707,8 @@
         </p:nvSpPr>
         <p:spPr>
           <a:xfrm>
-            <a:off x="8458200" y="1554480"/>
-            <a:ext cx="3063240" cy="685800"/>
+            <a:off x="8400288" y="1554480"/>
+            <a:ext cx="2965704" cy="685800"/>
           </a:xfrm>
           <a:prstGeom prst="rect">
             <a:avLst/>
@@ -9034,8 +9748,8 @@
         </p:nvSpPr>
         <p:spPr>
           <a:xfrm>
-            <a:off x="8458200" y="2286000"/>
-            <a:ext cx="3063240" cy="3749040"/>
+            <a:off x="8400288" y="2286000"/>
+            <a:ext cx="2965704" cy="3749040"/>
           </a:xfrm>
           <a:prstGeom prst="rect">
             <a:avLst/>
@@ -9056,7 +9770,7 @@
               <a:buNone/>
             </a:pPr>
             <a:r>
-              <a:rPr lang="en-US" sz="1200" dirty="0">
+              <a:rPr lang="en-US" sz="1600" dirty="0">
                 <a:solidFill>
                   <a:srgbClr val="1F2937"/>
                 </a:solidFill>
@@ -9066,7 +9780,7 @@
               </a:rPr>
               <a:t>7. Receita da gestora (taxa de administração) no mês</a:t>
             </a:r>
-            <a:endParaRPr lang="en-US" sz="1200" dirty="0"/>
+            <a:endParaRPr lang="en-US" sz="1600" dirty="0"/>
           </a:p>
           <a:p>
             <a:pPr indent="0" marL="0">
@@ -9076,7 +9790,7 @@
               <a:buNone/>
             </a:pPr>
             <a:r>
-              <a:rPr lang="en-US" sz="1200" dirty="0">
+              <a:rPr lang="en-US" sz="1600" dirty="0">
                 <a:solidFill>
                   <a:srgbClr val="1F2937"/>
                 </a:solidFill>
@@ -9086,7 +9800,7 @@
               </a:rPr>
               <a:t>8. Taxa de recebimento = recebido ÷ faturado no mês · meta ≥ 95%</a:t>
             </a:r>
-            <a:endParaRPr lang="en-US" sz="1200" dirty="0"/>
+            <a:endParaRPr lang="en-US" sz="1600" dirty="0"/>
           </a:p>
           <a:p>
             <a:pPr indent="0" marL="0">
@@ -9096,7 +9810,7 @@
               <a:buNone/>
             </a:pPr>
             <a:r>
-              <a:rPr lang="en-US" sz="1200" dirty="0">
+              <a:rPr lang="en-US" sz="1600" dirty="0">
                 <a:solidFill>
                   <a:srgbClr val="1F2937"/>
                 </a:solidFill>
@@ -9106,7 +9820,7 @@
               </a:rPr>
               <a:t>9. Inadimplência &gt; 30 dias (% do faturado) · meta ≤ 3%</a:t>
             </a:r>
-            <a:endParaRPr lang="en-US" sz="1200" dirty="0"/>
+            <a:endParaRPr lang="en-US" sz="1600" dirty="0"/>
           </a:p>
           <a:p>
             <a:pPr indent="0" marL="0">
@@ -9116,7 +9830,7 @@
               <a:buNone/>
             </a:pPr>
             <a:r>
-              <a:rPr lang="en-US" sz="1200" dirty="0">
+              <a:rPr lang="en-US" sz="1600" dirty="0">
                 <a:solidFill>
                   <a:srgbClr val="1F2937"/>
                 </a:solidFill>
@@ -9126,7 +9840,55 @@
               </a:rPr>
               <a:t>10. Margem de contribuição por kWh e resultado vs. ponto de equilíbrio</a:t>
             </a:r>
-            <a:endParaRPr lang="en-US" sz="1200" dirty="0"/>
+            <a:endParaRPr lang="en-US" sz="1600" dirty="0"/>
+          </a:p>
+        </p:txBody>
+      </p:sp>
+      <p:sp>
+        <p:nvSpPr>
+          <p:cNvPr id="25" name="Slide Number Placeholder 0"/>
+          <p:cNvSpPr>
+            <a:spLocks noGrp="1"/>
+          </p:cNvSpPr>
+          <p:nvPr>
+            <p:ph type="sldNum" sz="quarter" idx="4294967295"/>
+          </p:nvPr>
+        </p:nvSpPr>
+        <p:spPr>
+          <a:xfrm>
+            <a:off x="11292840" y="6556248"/>
+            <a:ext cx="548640" cy="256032"/>
+          </a:xfrm>
+          <a:prstGeom prst="rect">
+            <a:avLst/>
+          </a:prstGeom>
+          <a:extLst>
+            <a:ext uri="{C572A759-6A51-4108-AA02-DFA0A04FC94B}">
+              <ma14:wrappingTextBoxFlag xmlns:ma14="http://schemas.microsoft.com/office/mac/drawingml/2011/main" val="0"/>
+            </a:ext>
+          </a:extLst>
+        </p:spPr>
+        <p:txBody>
+          <a:bodyPr/>
+          <a:lstStyle>
+            <a:lvl1pPr>
+              <a:defRPr sz="900">
+                <a:solidFill>
+                  <a:srgbClr val="1B3A6B"/>
+                </a:solidFill>
+                <a:latin typeface="Arial"/>
+                <a:ea typeface="Arial"/>
+                <a:cs typeface="Arial"/>
+              </a:defRPr>
+            </a:lvl1pPr>
+          </a:lstStyle>
+          <a:p>
+            <a:pPr algn="r"/>
+            <a:fld id="{F7021451-1387-4CA6-816F-3879F97B5CBC}" type="slidenum">
+              <a:rPr b="1" lang="en-US"/>
+              <a:t>3</a:t>
+            </a:fld>
+            <a:endParaRPr lang="en-US"/>
           </a:p>
         </p:txBody>
       </p:sp>
@@ -9203,7 +9965,7 @@
         </p:blipFill>
         <p:spPr>
           <a:xfrm>
-            <a:off x="411480" y="6547104"/>
+            <a:off x="548640" y="6547104"/>
             <a:ext cx="274320" cy="274320"/>
           </a:xfrm>
           <a:prstGeom prst="rect">
@@ -9219,7 +9981,7 @@
         </p:nvSpPr>
         <p:spPr>
           <a:xfrm>
-            <a:off x="749808" y="6528816"/>
+            <a:off x="886968" y="6528816"/>
             <a:ext cx="6400800" cy="310896"/>
           </a:xfrm>
           <a:prstGeom prst="rect">
@@ -9259,7 +10021,7 @@
         <p:spPr>
           <a:xfrm>
             <a:off x="7132320" y="6528816"/>
-            <a:ext cx="4663440" cy="310896"/>
+            <a:ext cx="4023360" cy="310896"/>
           </a:xfrm>
           <a:prstGeom prst="rect">
             <a:avLst/>
@@ -9297,7 +10059,7 @@
         </p:nvSpPr>
         <p:spPr>
           <a:xfrm>
-            <a:off x="411480" y="384048"/>
+            <a:off x="548640" y="384048"/>
             <a:ext cx="82296" cy="658368"/>
           </a:xfrm>
           <a:prstGeom prst="rect">
@@ -9317,7 +10079,7 @@
         </p:nvSpPr>
         <p:spPr>
           <a:xfrm>
-            <a:off x="640080" y="292608"/>
+            <a:off x="777240" y="292608"/>
             <a:ext cx="10972800" cy="274320"/>
           </a:xfrm>
           <a:prstGeom prst="rect">
@@ -9356,8 +10118,8 @@
         </p:nvSpPr>
         <p:spPr>
           <a:xfrm>
-            <a:off x="640080" y="530352"/>
-            <a:ext cx="11155680" cy="566928"/>
+            <a:off x="777240" y="530352"/>
+            <a:ext cx="10881360" cy="566928"/>
           </a:xfrm>
           <a:prstGeom prst="rect">
             <a:avLst/>
@@ -9397,8 +10159,8 @@
         </p:nvSpPr>
         <p:spPr>
           <a:xfrm>
-            <a:off x="411480" y="1325880"/>
-            <a:ext cx="5554980" cy="4937760"/>
+            <a:off x="548640" y="1325880"/>
+            <a:ext cx="5408676" cy="4937760"/>
           </a:xfrm>
           <a:prstGeom prst="roundRect">
             <a:avLst>
@@ -9431,8 +10193,8 @@
         </p:nvSpPr>
         <p:spPr>
           <a:xfrm>
-            <a:off x="411480" y="1325880"/>
-            <a:ext cx="5554980" cy="109728"/>
+            <a:off x="548640" y="1325880"/>
+            <a:ext cx="5408676" cy="109728"/>
           </a:xfrm>
           <a:prstGeom prst="rect">
             <a:avLst/>
@@ -9451,8 +10213,8 @@
         </p:nvSpPr>
         <p:spPr>
           <a:xfrm>
-            <a:off x="685800" y="1554480"/>
-            <a:ext cx="5006340" cy="685800"/>
+            <a:off x="822960" y="1554480"/>
+            <a:ext cx="4860036" cy="685800"/>
           </a:xfrm>
           <a:prstGeom prst="rect">
             <a:avLst/>
@@ -9492,8 +10254,8 @@
         </p:nvSpPr>
         <p:spPr>
           <a:xfrm>
-            <a:off x="685800" y="2286000"/>
-            <a:ext cx="5006340" cy="3749040"/>
+            <a:off x="822960" y="2286000"/>
+            <a:ext cx="4860036" cy="3749040"/>
           </a:xfrm>
           <a:prstGeom prst="rect">
             <a:avLst/>
@@ -9556,8 +10318,8 @@
         </p:nvSpPr>
         <p:spPr>
           <a:xfrm>
-            <a:off x="6240780" y="1325880"/>
-            <a:ext cx="5554980" cy="4937760"/>
+            <a:off x="6231636" y="1325880"/>
+            <a:ext cx="5408676" cy="4937760"/>
           </a:xfrm>
           <a:prstGeom prst="roundRect">
             <a:avLst>
@@ -9590,8 +10352,8 @@
         </p:nvSpPr>
         <p:spPr>
           <a:xfrm>
-            <a:off x="6240780" y="1325880"/>
-            <a:ext cx="5554980" cy="109728"/>
+            <a:off x="6231636" y="1325880"/>
+            <a:ext cx="5408676" cy="109728"/>
           </a:xfrm>
           <a:prstGeom prst="rect">
             <a:avLst/>
@@ -9610,8 +10372,8 @@
         </p:nvSpPr>
         <p:spPr>
           <a:xfrm>
-            <a:off x="6515100" y="1554480"/>
-            <a:ext cx="5006340" cy="685800"/>
+            <a:off x="6505956" y="1554480"/>
+            <a:ext cx="4860036" cy="685800"/>
           </a:xfrm>
           <a:prstGeom prst="rect">
             <a:avLst/>
@@ -9651,8 +10413,8 @@
         </p:nvSpPr>
         <p:spPr>
           <a:xfrm>
-            <a:off x="6515100" y="2286000"/>
-            <a:ext cx="5006340" cy="3749040"/>
+            <a:off x="6505956" y="2286000"/>
+            <a:ext cx="4860036" cy="3749040"/>
           </a:xfrm>
           <a:prstGeom prst="rect">
             <a:avLst/>
@@ -9748,6 +10510,54 @@
               <a:t>revisão mensal (e semanal para ocupação, recebimento e inadimplência)</a:t>
             </a:r>
             <a:endParaRPr lang="en-US" sz="1700" dirty="0"/>
+          </a:p>
+        </p:txBody>
+      </p:sp>
+      <p:sp>
+        <p:nvSpPr>
+          <p:cNvPr id="25" name="Slide Number Placeholder 0"/>
+          <p:cNvSpPr>
+            <a:spLocks noGrp="1"/>
+          </p:cNvSpPr>
+          <p:nvPr>
+            <p:ph type="sldNum" sz="quarter" idx="4294967295"/>
+          </p:nvPr>
+        </p:nvSpPr>
+        <p:spPr>
+          <a:xfrm>
+            <a:off x="11292840" y="6556248"/>
+            <a:ext cx="548640" cy="256032"/>
+          </a:xfrm>
+          <a:prstGeom prst="rect">
+            <a:avLst/>
+          </a:prstGeom>
+          <a:extLst>
+            <a:ext uri="{C572A759-6A51-4108-AA02-DFA0A04FC94B}">
+              <ma14:wrappingTextBoxFlag xmlns:ma14="http://schemas.microsoft.com/office/mac/drawingml/2011/main" val="0"/>
+            </a:ext>
+          </a:extLst>
+        </p:spPr>
+        <p:txBody>
+          <a:bodyPr/>
+          <a:lstStyle>
+            <a:lvl1pPr>
+              <a:defRPr sz="900">
+                <a:solidFill>
+                  <a:srgbClr val="1B3A6B"/>
+                </a:solidFill>
+                <a:latin typeface="Arial"/>
+                <a:ea typeface="Arial"/>
+                <a:cs typeface="Arial"/>
+              </a:defRPr>
+            </a:lvl1pPr>
+          </a:lstStyle>
+          <a:p>
+            <a:pPr algn="r"/>
+            <a:fld id="{F7021451-1387-4CA6-816F-3879F97B5CBC}" type="slidenum">
+              <a:rPr b="1" lang="en-US"/>
+              <a:t>4</a:t>
+            </a:fld>
+            <a:endParaRPr lang="en-US"/>
           </a:p>
         </p:txBody>
       </p:sp>
@@ -9811,6 +10621,45 @@
         </p:nvSpPr>
         <p:spPr>
           <a:xfrm>
+            <a:off x="457200" y="548640"/>
+            <a:ext cx="3474720" cy="1737360"/>
+          </a:xfrm>
+          <a:prstGeom prst="rect">
+            <a:avLst/>
+          </a:prstGeom>
+          <a:noFill/>
+          <a:ln/>
+        </p:spPr>
+        <p:txBody>
+          <a:bodyPr wrap="square" rtlCol="0" anchor="ctr"/>
+          <a:lstStyle/>
+          <a:p>
+            <a:pPr indent="0" marL="0">
+              <a:buNone/>
+            </a:pPr>
+            <a:r>
+              <a:rPr lang="en-US" sz="11000" b="1" dirty="0">
+                <a:solidFill>
+                  <a:srgbClr val="11396F"/>
+                </a:solidFill>
+                <a:latin typeface="Arial" pitchFamily="34" charset="0"/>
+                <a:ea typeface="Arial" pitchFamily="34" charset="-122"/>
+                <a:cs typeface="Arial" pitchFamily="34" charset="-120"/>
+              </a:rPr>
+              <a:t>02</a:t>
+            </a:r>
+            <a:endParaRPr lang="en-US" sz="11000" dirty="0"/>
+          </a:p>
+        </p:txBody>
+      </p:sp>
+      <p:sp>
+        <p:nvSpPr>
+          <p:cNvPr id="4" name="Text 2"/>
+          <p:cNvSpPr/>
+          <p:nvPr/>
+        </p:nvSpPr>
+        <p:spPr>
+          <a:xfrm>
             <a:off x="548640" y="2194560"/>
             <a:ext cx="3291840" cy="548640"/>
           </a:xfrm>
@@ -9844,7 +10693,46 @@
       </p:sp>
       <p:sp>
         <p:nvSpPr>
-          <p:cNvPr id="4" name="Text 2"/>
+          <p:cNvPr id="5" name="Text 3"/>
+          <p:cNvSpPr/>
+          <p:nvPr/>
+        </p:nvSpPr>
+        <p:spPr>
+          <a:xfrm>
+            <a:off x="548640" y="3200400"/>
+            <a:ext cx="3383280" cy="457200"/>
+          </a:xfrm>
+          <a:prstGeom prst="rect">
+            <a:avLst/>
+          </a:prstGeom>
+          <a:noFill/>
+          <a:ln/>
+        </p:spPr>
+        <p:txBody>
+          <a:bodyPr wrap="square" rtlCol="0" anchor="ctr"/>
+          <a:lstStyle/>
+          <a:p>
+            <a:pPr indent="0" marL="0">
+              <a:buNone/>
+            </a:pPr>
+            <a:r>
+              <a:rPr lang="en-US" sz="1100" dirty="0">
+                <a:solidFill>
+                  <a:srgbClr val="C7D2E3"/>
+                </a:solidFill>
+                <a:latin typeface="Arial" pitchFamily="34" charset="0"/>
+                <a:ea typeface="Arial" pitchFamily="34" charset="-122"/>
+                <a:cs typeface="Arial" pitchFamily="34" charset="-120"/>
+              </a:rPr>
+              <a:t>M10 · Etapa 4 · Gestão e estratégia</a:t>
+            </a:r>
+            <a:endParaRPr lang="en-US" sz="1100" dirty="0"/>
+          </a:p>
+        </p:txBody>
+      </p:sp>
+      <p:sp>
+        <p:nvSpPr>
+          <p:cNvPr id="6" name="Text 4"/>
           <p:cNvSpPr/>
           <p:nvPr/>
         </p:nvSpPr>
@@ -9883,7 +10771,7 @@
       </p:sp>
       <p:pic>
         <p:nvPicPr>
-          <p:cNvPr id="5" name="Image 0" descr="/www/wwwroot/rexar/gdsolar/docs/curso/slides/assets/logo-gdsolar.png">    </p:cNvPr>
+          <p:cNvPr id="7" name="Image 0" descr="/www/wwwroot/rexar/gdsolar/docs/curso/slides/assets/logo-gdsolar.png">    </p:cNvPr>
           <p:cNvPicPr>
             <a:picLocks noChangeAspect="1"/>
           </p:cNvPicPr>
@@ -9907,7 +10795,7 @@
       </p:pic>
       <p:sp>
         <p:nvSpPr>
-          <p:cNvPr id="6" name="Text 3"/>
+          <p:cNvPr id="8" name="Text 5"/>
           <p:cNvSpPr/>
           <p:nvPr/>
         </p:nvSpPr>
@@ -9948,7 +10836,7 @@
       </p:sp>
       <p:sp>
         <p:nvSpPr>
-          <p:cNvPr id="7" name="Text 4"/>
+          <p:cNvPr id="9" name="Text 6"/>
           <p:cNvSpPr/>
           <p:nvPr/>
         </p:nvSpPr>
@@ -9989,7 +10877,7 @@
       </p:sp>
       <p:sp>
         <p:nvSpPr>
-          <p:cNvPr id="8" name="Text 5"/>
+          <p:cNvPr id="10" name="Text 7"/>
           <p:cNvSpPr/>
           <p:nvPr/>
         </p:nvSpPr>
@@ -10147,7 +11035,7 @@
         </p:blipFill>
         <p:spPr>
           <a:xfrm>
-            <a:off x="411480" y="6547104"/>
+            <a:off x="548640" y="6547104"/>
             <a:ext cx="274320" cy="274320"/>
           </a:xfrm>
           <a:prstGeom prst="rect">
@@ -10163,7 +11051,7 @@
         </p:nvSpPr>
         <p:spPr>
           <a:xfrm>
-            <a:off x="749808" y="6528816"/>
+            <a:off x="886968" y="6528816"/>
             <a:ext cx="6400800" cy="310896"/>
           </a:xfrm>
           <a:prstGeom prst="rect">
@@ -10203,7 +11091,7 @@
         <p:spPr>
           <a:xfrm>
             <a:off x="7132320" y="6528816"/>
-            <a:ext cx="4663440" cy="310896"/>
+            <a:ext cx="4023360" cy="310896"/>
           </a:xfrm>
           <a:prstGeom prst="rect">
             <a:avLst/>
@@ -10241,7 +11129,7 @@
         </p:nvSpPr>
         <p:spPr>
           <a:xfrm>
-            <a:off x="411480" y="384048"/>
+            <a:off x="548640" y="384048"/>
             <a:ext cx="82296" cy="658368"/>
           </a:xfrm>
           <a:prstGeom prst="rect">
@@ -10261,7 +11149,7 @@
         </p:nvSpPr>
         <p:spPr>
           <a:xfrm>
-            <a:off x="640080" y="292608"/>
+            <a:off x="777240" y="292608"/>
             <a:ext cx="10972800" cy="274320"/>
           </a:xfrm>
           <a:prstGeom prst="rect">
@@ -10300,8 +11188,8 @@
         </p:nvSpPr>
         <p:spPr>
           <a:xfrm>
-            <a:off x="640080" y="530352"/>
-            <a:ext cx="11155680" cy="566928"/>
+            <a:off x="777240" y="530352"/>
+            <a:ext cx="10881360" cy="566928"/>
           </a:xfrm>
           <a:prstGeom prst="rect">
             <a:avLst/>
@@ -10341,8 +11229,8 @@
         </p:nvSpPr>
         <p:spPr>
           <a:xfrm>
-            <a:off x="411480" y="1325880"/>
-            <a:ext cx="5554980" cy="4937760"/>
+            <a:off x="548640" y="1325880"/>
+            <a:ext cx="5408676" cy="4937760"/>
           </a:xfrm>
           <a:prstGeom prst="roundRect">
             <a:avLst>
@@ -10375,8 +11263,8 @@
         </p:nvSpPr>
         <p:spPr>
           <a:xfrm>
-            <a:off x="411480" y="1325880"/>
-            <a:ext cx="5554980" cy="109728"/>
+            <a:off x="548640" y="1325880"/>
+            <a:ext cx="5408676" cy="109728"/>
           </a:xfrm>
           <a:prstGeom prst="rect">
             <a:avLst/>
@@ -10395,8 +11283,8 @@
         </p:nvSpPr>
         <p:spPr>
           <a:xfrm>
-            <a:off x="685800" y="1554480"/>
-            <a:ext cx="5006340" cy="685800"/>
+            <a:off x="822960" y="1554480"/>
+            <a:ext cx="4860036" cy="685800"/>
           </a:xfrm>
           <a:prstGeom prst="rect">
             <a:avLst/>
@@ -10436,8 +11324,8 @@
         </p:nvSpPr>
         <p:spPr>
           <a:xfrm>
-            <a:off x="685800" y="2286000"/>
-            <a:ext cx="5006340" cy="3749040"/>
+            <a:off x="822960" y="2286000"/>
+            <a:ext cx="4860036" cy="3749040"/>
           </a:xfrm>
           <a:prstGeom prst="rect">
             <a:avLst/>
@@ -10565,8 +11453,8 @@
         </p:nvSpPr>
         <p:spPr>
           <a:xfrm>
-            <a:off x="6240780" y="1325880"/>
-            <a:ext cx="5554980" cy="4937760"/>
+            <a:off x="6231636" y="1325880"/>
+            <a:ext cx="5408676" cy="4937760"/>
           </a:xfrm>
           <a:prstGeom prst="roundRect">
             <a:avLst>
@@ -10599,8 +11487,8 @@
         </p:nvSpPr>
         <p:spPr>
           <a:xfrm>
-            <a:off x="6240780" y="1325880"/>
-            <a:ext cx="5554980" cy="109728"/>
+            <a:off x="6231636" y="1325880"/>
+            <a:ext cx="5408676" cy="109728"/>
           </a:xfrm>
           <a:prstGeom prst="rect">
             <a:avLst/>
@@ -10619,8 +11507,8 @@
         </p:nvSpPr>
         <p:spPr>
           <a:xfrm>
-            <a:off x="6515100" y="1554480"/>
-            <a:ext cx="5006340" cy="685800"/>
+            <a:off x="6505956" y="1554480"/>
+            <a:ext cx="4860036" cy="685800"/>
           </a:xfrm>
           <a:prstGeom prst="rect">
             <a:avLst/>
@@ -10660,8 +11548,8 @@
         </p:nvSpPr>
         <p:spPr>
           <a:xfrm>
-            <a:off x="6515100" y="2286000"/>
-            <a:ext cx="5006340" cy="3749040"/>
+            <a:off x="6505956" y="2286000"/>
+            <a:ext cx="4860036" cy="3749040"/>
           </a:xfrm>
           <a:prstGeom prst="rect">
             <a:avLst/>
@@ -10683,7 +11571,7 @@
               <a:buChar char="●"/>
             </a:pPr>
             <a:r>
-              <a:rPr lang="en-US" sz="1600" dirty="0">
+              <a:rPr lang="en-US" sz="1700" dirty="0">
                 <a:solidFill>
                   <a:srgbClr val="1F2937"/>
                 </a:solidFill>
@@ -10693,7 +11581,7 @@
               </a:rPr>
               <a:t>Prova social com números</a:t>
             </a:r>
-            <a:endParaRPr lang="en-US" sz="1600" dirty="0"/>
+            <a:endParaRPr lang="en-US" sz="1700" dirty="0"/>
           </a:p>
           <a:p>
             <a:pPr marL="342900" indent="-342900">
@@ -10704,7 +11592,7 @@
               <a:buChar char="●"/>
             </a:pPr>
             <a:r>
-              <a:rPr lang="en-US" sz="1600" dirty="0">
+              <a:rPr lang="en-US" sz="1700" dirty="0">
                 <a:solidFill>
                   <a:srgbClr val="1F2937"/>
                 </a:solidFill>
@@ -10714,7 +11602,7 @@
               </a:rPr>
               <a:t>'clientes do seu setor economizam em média R$ X/mês'</a:t>
             </a:r>
-            <a:endParaRPr lang="en-US" sz="1600" dirty="0"/>
+            <a:endParaRPr lang="en-US" sz="1700" dirty="0"/>
           </a:p>
           <a:p>
             <a:pPr marL="342900" indent="-342900">
@@ -10725,7 +11613,7 @@
               <a:buChar char="●"/>
             </a:pPr>
             <a:r>
-              <a:rPr lang="en-US" sz="1600" dirty="0">
+              <a:rPr lang="en-US" sz="1700" dirty="0">
                 <a:solidFill>
                   <a:srgbClr val="1F2937"/>
                 </a:solidFill>
@@ -10735,7 +11623,55 @@
               </a:rPr>
               <a:t>indicação: 'mostre seu relatório para um amigo'</a:t>
             </a:r>
-            <a:endParaRPr lang="en-US" sz="1600" dirty="0"/>
+            <a:endParaRPr lang="en-US" sz="1700" dirty="0"/>
+          </a:p>
+        </p:txBody>
+      </p:sp>
+      <p:sp>
+        <p:nvSpPr>
+          <p:cNvPr id="25" name="Slide Number Placeholder 0"/>
+          <p:cNvSpPr>
+            <a:spLocks noGrp="1"/>
+          </p:cNvSpPr>
+          <p:nvPr>
+            <p:ph type="sldNum" sz="quarter" idx="4294967295"/>
+          </p:nvPr>
+        </p:nvSpPr>
+        <p:spPr>
+          <a:xfrm>
+            <a:off x="11292840" y="6556248"/>
+            <a:ext cx="548640" cy="256032"/>
+          </a:xfrm>
+          <a:prstGeom prst="rect">
+            <a:avLst/>
+          </a:prstGeom>
+          <a:extLst>
+            <a:ext uri="{C572A759-6A51-4108-AA02-DFA0A04FC94B}">
+              <ma14:wrappingTextBoxFlag xmlns:ma14="http://schemas.microsoft.com/office/mac/drawingml/2011/main" val="0"/>
+            </a:ext>
+          </a:extLst>
+        </p:spPr>
+        <p:txBody>
+          <a:bodyPr/>
+          <a:lstStyle>
+            <a:lvl1pPr>
+              <a:defRPr sz="900">
+                <a:solidFill>
+                  <a:srgbClr val="1B3A6B"/>
+                </a:solidFill>
+                <a:latin typeface="Arial"/>
+                <a:ea typeface="Arial"/>
+                <a:cs typeface="Arial"/>
+              </a:defRPr>
+            </a:lvl1pPr>
+          </a:lstStyle>
+          <a:p>
+            <a:pPr algn="r"/>
+            <a:fld id="{F7021451-1387-4CA6-816F-3879F97B5CBC}" type="slidenum">
+              <a:rPr b="1" lang="en-US"/>
+              <a:t>6</a:t>
+            </a:fld>
+            <a:endParaRPr lang="en-US"/>
           </a:p>
         </p:txBody>
       </p:sp>
@@ -10812,7 +11748,7 @@
         </p:blipFill>
         <p:spPr>
           <a:xfrm>
-            <a:off x="411480" y="6547104"/>
+            <a:off x="548640" y="6547104"/>
             <a:ext cx="274320" cy="274320"/>
           </a:xfrm>
           <a:prstGeom prst="rect">
@@ -10828,7 +11764,7 @@
         </p:nvSpPr>
         <p:spPr>
           <a:xfrm>
-            <a:off x="749808" y="6528816"/>
+            <a:off x="886968" y="6528816"/>
             <a:ext cx="6400800" cy="310896"/>
           </a:xfrm>
           <a:prstGeom prst="rect">
@@ -10868,7 +11804,7 @@
         <p:spPr>
           <a:xfrm>
             <a:off x="7132320" y="6528816"/>
-            <a:ext cx="4663440" cy="310896"/>
+            <a:ext cx="4023360" cy="310896"/>
           </a:xfrm>
           <a:prstGeom prst="rect">
             <a:avLst/>
@@ -10906,7 +11842,7 @@
         </p:nvSpPr>
         <p:spPr>
           <a:xfrm>
-            <a:off x="411480" y="384048"/>
+            <a:off x="548640" y="384048"/>
             <a:ext cx="82296" cy="658368"/>
           </a:xfrm>
           <a:prstGeom prst="rect">
@@ -10926,7 +11862,7 @@
         </p:nvSpPr>
         <p:spPr>
           <a:xfrm>
-            <a:off x="640080" y="292608"/>
+            <a:off x="777240" y="292608"/>
             <a:ext cx="10972800" cy="274320"/>
           </a:xfrm>
           <a:prstGeom prst="rect">
@@ -10965,8 +11901,8 @@
         </p:nvSpPr>
         <p:spPr>
           <a:xfrm>
-            <a:off x="640080" y="530352"/>
-            <a:ext cx="11155680" cy="566928"/>
+            <a:off x="777240" y="530352"/>
+            <a:ext cx="10881360" cy="566928"/>
           </a:xfrm>
           <a:prstGeom prst="rect">
             <a:avLst/>
@@ -11167,6 +12103,54 @@
               <a:t>Total economizado · economia média/mês · mês a mês · PDF e Excel</a:t>
             </a:r>
             <a:endParaRPr lang="en-US" sz="1500" dirty="0"/>
+          </a:p>
+        </p:txBody>
+      </p:sp>
+      <p:sp>
+        <p:nvSpPr>
+          <p:cNvPr id="25" name="Slide Number Placeholder 0"/>
+          <p:cNvSpPr>
+            <a:spLocks noGrp="1"/>
+          </p:cNvSpPr>
+          <p:nvPr>
+            <p:ph type="sldNum" sz="quarter" idx="4294967295"/>
+          </p:nvPr>
+        </p:nvSpPr>
+        <p:spPr>
+          <a:xfrm>
+            <a:off x="11292840" y="6556248"/>
+            <a:ext cx="548640" cy="256032"/>
+          </a:xfrm>
+          <a:prstGeom prst="rect">
+            <a:avLst/>
+          </a:prstGeom>
+          <a:extLst>
+            <a:ext uri="{C572A759-6A51-4108-AA02-DFA0A04FC94B}">
+              <ma14:wrappingTextBoxFlag xmlns:ma14="http://schemas.microsoft.com/office/mac/drawingml/2011/main" val="0"/>
+            </a:ext>
+          </a:extLst>
+        </p:spPr>
+        <p:txBody>
+          <a:bodyPr/>
+          <a:lstStyle>
+            <a:lvl1pPr>
+              <a:defRPr sz="900">
+                <a:solidFill>
+                  <a:srgbClr val="1B3A6B"/>
+                </a:solidFill>
+                <a:latin typeface="Arial"/>
+                <a:ea typeface="Arial"/>
+                <a:cs typeface="Arial"/>
+              </a:defRPr>
+            </a:lvl1pPr>
+          </a:lstStyle>
+          <a:p>
+            <a:pPr algn="r"/>
+            <a:fld id="{F7021451-1387-4CA6-816F-3879F97B5CBC}" type="slidenum">
+              <a:rPr b="1" lang="en-US"/>
+              <a:t>7</a:t>
+            </a:fld>
+            <a:endParaRPr lang="en-US"/>
           </a:p>
         </p:txBody>
       </p:sp>
@@ -11243,7 +12227,7 @@
         </p:blipFill>
         <p:spPr>
           <a:xfrm>
-            <a:off x="411480" y="6547104"/>
+            <a:off x="548640" y="6547104"/>
             <a:ext cx="274320" cy="274320"/>
           </a:xfrm>
           <a:prstGeom prst="rect">
@@ -11259,7 +12243,7 @@
         </p:nvSpPr>
         <p:spPr>
           <a:xfrm>
-            <a:off x="749808" y="6528816"/>
+            <a:off x="886968" y="6528816"/>
             <a:ext cx="6400800" cy="310896"/>
           </a:xfrm>
           <a:prstGeom prst="rect">
@@ -11299,7 +12283,7 @@
         <p:spPr>
           <a:xfrm>
             <a:off x="7132320" y="6528816"/>
-            <a:ext cx="4663440" cy="310896"/>
+            <a:ext cx="4023360" cy="310896"/>
           </a:xfrm>
           <a:prstGeom prst="rect">
             <a:avLst/>
@@ -11337,7 +12321,7 @@
         </p:nvSpPr>
         <p:spPr>
           <a:xfrm>
-            <a:off x="411480" y="384048"/>
+            <a:off x="548640" y="384048"/>
             <a:ext cx="82296" cy="658368"/>
           </a:xfrm>
           <a:prstGeom prst="rect">
@@ -11357,7 +12341,7 @@
         </p:nvSpPr>
         <p:spPr>
           <a:xfrm>
-            <a:off x="640080" y="292608"/>
+            <a:off x="777240" y="292608"/>
             <a:ext cx="10972800" cy="274320"/>
           </a:xfrm>
           <a:prstGeom prst="rect">
@@ -11396,8 +12380,8 @@
         </p:nvSpPr>
         <p:spPr>
           <a:xfrm>
-            <a:off x="640080" y="530352"/>
-            <a:ext cx="11155680" cy="566928"/>
+            <a:off x="777240" y="530352"/>
+            <a:ext cx="10881360" cy="566928"/>
           </a:xfrm>
           <a:prstGeom prst="rect">
             <a:avLst/>
@@ -11437,12 +12421,12 @@
         </p:nvSpPr>
         <p:spPr>
           <a:xfrm>
-            <a:off x="411480" y="1325880"/>
-            <a:ext cx="3642360" cy="4892040"/>
+            <a:off x="548640" y="1325880"/>
+            <a:ext cx="3544824" cy="4892040"/>
           </a:xfrm>
           <a:prstGeom prst="roundRect">
             <a:avLst>
-              <a:gd name="adj" fmla="val 2008"/>
+              <a:gd name="adj" fmla="val 2064"/>
             </a:avLst>
           </a:prstGeom>
           <a:solidFill>
@@ -11471,7 +12455,7 @@
         </p:nvSpPr>
         <p:spPr>
           <a:xfrm>
-            <a:off x="594360" y="1508760"/>
+            <a:off x="731520" y="1508760"/>
             <a:ext cx="457200" cy="457200"/>
           </a:xfrm>
           <a:prstGeom prst="ellipse">
@@ -11491,7 +12475,7 @@
         </p:nvSpPr>
         <p:spPr>
           <a:xfrm>
-            <a:off x="594360" y="1508760"/>
+            <a:off x="731520" y="1508760"/>
             <a:ext cx="457200" cy="457200"/>
           </a:xfrm>
           <a:prstGeom prst="rect">
@@ -11530,8 +12514,8 @@
         </p:nvSpPr>
         <p:spPr>
           <a:xfrm>
-            <a:off x="1188720" y="1435608"/>
-            <a:ext cx="2727960" cy="4672584"/>
+            <a:off x="1325880" y="1435608"/>
+            <a:ext cx="2630424" cy="4672584"/>
           </a:xfrm>
           <a:prstGeom prst="rect">
             <a:avLst/>
@@ -11571,12 +12555,12 @@
         </p:nvSpPr>
         <p:spPr>
           <a:xfrm>
-            <a:off x="4282440" y="1325880"/>
-            <a:ext cx="3642360" cy="4892040"/>
+            <a:off x="4322064" y="1325880"/>
+            <a:ext cx="3544824" cy="4892040"/>
           </a:xfrm>
           <a:prstGeom prst="roundRect">
             <a:avLst>
-              <a:gd name="adj" fmla="val 2008"/>
+              <a:gd name="adj" fmla="val 2064"/>
             </a:avLst>
           </a:prstGeom>
           <a:solidFill>
@@ -11605,7 +12589,7 @@
         </p:nvSpPr>
         <p:spPr>
           <a:xfrm>
-            <a:off x="4465320" y="1508760"/>
+            <a:off x="4504944" y="1508760"/>
             <a:ext cx="457200" cy="457200"/>
           </a:xfrm>
           <a:prstGeom prst="ellipse">
@@ -11625,7 +12609,7 @@
         </p:nvSpPr>
         <p:spPr>
           <a:xfrm>
-            <a:off x="4465320" y="1508760"/>
+            <a:off x="4504944" y="1508760"/>
             <a:ext cx="457200" cy="457200"/>
           </a:xfrm>
           <a:prstGeom prst="rect">
@@ -11664,8 +12648,8 @@
         </p:nvSpPr>
         <p:spPr>
           <a:xfrm>
-            <a:off x="5059680" y="1435608"/>
-            <a:ext cx="2727960" cy="4672584"/>
+            <a:off x="5099304" y="1435608"/>
+            <a:ext cx="2630424" cy="4672584"/>
           </a:xfrm>
           <a:prstGeom prst="rect">
             <a:avLst/>
@@ -11705,12 +12689,12 @@
         </p:nvSpPr>
         <p:spPr>
           <a:xfrm>
-            <a:off x="8153400" y="1325880"/>
-            <a:ext cx="3642360" cy="4892040"/>
+            <a:off x="8095488" y="1325880"/>
+            <a:ext cx="3544824" cy="4892040"/>
           </a:xfrm>
           <a:prstGeom prst="roundRect">
             <a:avLst>
-              <a:gd name="adj" fmla="val 2008"/>
+              <a:gd name="adj" fmla="val 2064"/>
             </a:avLst>
           </a:prstGeom>
           <a:solidFill>
@@ -11739,7 +12723,7 @@
         </p:nvSpPr>
         <p:spPr>
           <a:xfrm>
-            <a:off x="8336280" y="1508760"/>
+            <a:off x="8278368" y="1508760"/>
             <a:ext cx="457200" cy="457200"/>
           </a:xfrm>
           <a:prstGeom prst="ellipse">
@@ -11759,7 +12743,7 @@
         </p:nvSpPr>
         <p:spPr>
           <a:xfrm>
-            <a:off x="8336280" y="1508760"/>
+            <a:off x="8278368" y="1508760"/>
             <a:ext cx="457200" cy="457200"/>
           </a:xfrm>
           <a:prstGeom prst="rect">
@@ -11798,8 +12782,8 @@
         </p:nvSpPr>
         <p:spPr>
           <a:xfrm>
-            <a:off x="8930640" y="1435608"/>
-            <a:ext cx="2727960" cy="4672584"/>
+            <a:off x="8872728" y="1435608"/>
+            <a:ext cx="2630424" cy="4672584"/>
           </a:xfrm>
           <a:prstGeom prst="rect">
             <a:avLst/>
@@ -11828,6 +12812,54 @@
               <a:t>prova social</a:t>
             </a:r>
             <a:endParaRPr lang="en-US" sz="1800" dirty="0"/>
+          </a:p>
+        </p:txBody>
+      </p:sp>
+      <p:sp>
+        <p:nvSpPr>
+          <p:cNvPr id="25" name="Slide Number Placeholder 0"/>
+          <p:cNvSpPr>
+            <a:spLocks noGrp="1"/>
+          </p:cNvSpPr>
+          <p:nvPr>
+            <p:ph type="sldNum" sz="quarter" idx="4294967295"/>
+          </p:nvPr>
+        </p:nvSpPr>
+        <p:spPr>
+          <a:xfrm>
+            <a:off x="11292840" y="6556248"/>
+            <a:ext cx="548640" cy="256032"/>
+          </a:xfrm>
+          <a:prstGeom prst="rect">
+            <a:avLst/>
+          </a:prstGeom>
+          <a:extLst>
+            <a:ext uri="{C572A759-6A51-4108-AA02-DFA0A04FC94B}">
+              <ma14:wrappingTextBoxFlag xmlns:ma14="http://schemas.microsoft.com/office/mac/drawingml/2011/main" val="0"/>
+            </a:ext>
+          </a:extLst>
+        </p:spPr>
+        <p:txBody>
+          <a:bodyPr/>
+          <a:lstStyle>
+            <a:lvl1pPr>
+              <a:defRPr sz="900">
+                <a:solidFill>
+                  <a:srgbClr val="1B3A6B"/>
+                </a:solidFill>
+                <a:latin typeface="Arial"/>
+                <a:ea typeface="Arial"/>
+                <a:cs typeface="Arial"/>
+              </a:defRPr>
+            </a:lvl1pPr>
+          </a:lstStyle>
+          <a:p>
+            <a:pPr algn="r"/>
+            <a:fld id="{F7021451-1387-4CA6-816F-3879F97B5CBC}" type="slidenum">
+              <a:rPr b="1" lang="en-US"/>
+              <a:t>8</a:t>
+            </a:fld>
+            <a:endParaRPr lang="en-US"/>
           </a:p>
         </p:txBody>
       </p:sp>
@@ -11891,6 +12923,45 @@
         </p:nvSpPr>
         <p:spPr>
           <a:xfrm>
+            <a:off x="457200" y="548640"/>
+            <a:ext cx="3474720" cy="1737360"/>
+          </a:xfrm>
+          <a:prstGeom prst="rect">
+            <a:avLst/>
+          </a:prstGeom>
+          <a:noFill/>
+          <a:ln/>
+        </p:spPr>
+        <p:txBody>
+          <a:bodyPr wrap="square" rtlCol="0" anchor="ctr"/>
+          <a:lstStyle/>
+          <a:p>
+            <a:pPr indent="0" marL="0">
+              <a:buNone/>
+            </a:pPr>
+            <a:r>
+              <a:rPr lang="en-US" sz="11000" b="1" dirty="0">
+                <a:solidFill>
+                  <a:srgbClr val="11396F"/>
+                </a:solidFill>
+                <a:latin typeface="Arial" pitchFamily="34" charset="0"/>
+                <a:ea typeface="Arial" pitchFamily="34" charset="-122"/>
+                <a:cs typeface="Arial" pitchFamily="34" charset="-120"/>
+              </a:rPr>
+              <a:t>03</a:t>
+            </a:r>
+            <a:endParaRPr lang="en-US" sz="11000" dirty="0"/>
+          </a:p>
+        </p:txBody>
+      </p:sp>
+      <p:sp>
+        <p:nvSpPr>
+          <p:cNvPr id="4" name="Text 2"/>
+          <p:cNvSpPr/>
+          <p:nvPr/>
+        </p:nvSpPr>
+        <p:spPr>
+          <a:xfrm>
             <a:off x="548640" y="2194560"/>
             <a:ext cx="3291840" cy="548640"/>
           </a:xfrm>
@@ -11924,7 +12995,46 @@
       </p:sp>
       <p:sp>
         <p:nvSpPr>
-          <p:cNvPr id="4" name="Text 2"/>
+          <p:cNvPr id="5" name="Text 3"/>
+          <p:cNvSpPr/>
+          <p:nvPr/>
+        </p:nvSpPr>
+        <p:spPr>
+          <a:xfrm>
+            <a:off x="548640" y="3200400"/>
+            <a:ext cx="3383280" cy="457200"/>
+          </a:xfrm>
+          <a:prstGeom prst="rect">
+            <a:avLst/>
+          </a:prstGeom>
+          <a:noFill/>
+          <a:ln/>
+        </p:spPr>
+        <p:txBody>
+          <a:bodyPr wrap="square" rtlCol="0" anchor="ctr"/>
+          <a:lstStyle/>
+          <a:p>
+            <a:pPr indent="0" marL="0">
+              <a:buNone/>
+            </a:pPr>
+            <a:r>
+              <a:rPr lang="en-US" sz="1100" dirty="0">
+                <a:solidFill>
+                  <a:srgbClr val="C7D2E3"/>
+                </a:solidFill>
+                <a:latin typeface="Arial" pitchFamily="34" charset="0"/>
+                <a:ea typeface="Arial" pitchFamily="34" charset="-122"/>
+                <a:cs typeface="Arial" pitchFamily="34" charset="-120"/>
+              </a:rPr>
+              <a:t>M10 · Etapa 4 · Gestão e estratégia</a:t>
+            </a:r>
+            <a:endParaRPr lang="en-US" sz="1100" dirty="0"/>
+          </a:p>
+        </p:txBody>
+      </p:sp>
+      <p:sp>
+        <p:nvSpPr>
+          <p:cNvPr id="6" name="Text 4"/>
           <p:cNvSpPr/>
           <p:nvPr/>
         </p:nvSpPr>
@@ -11963,7 +13073,7 @@
       </p:sp>
       <p:pic>
         <p:nvPicPr>
-          <p:cNvPr id="5" name="Image 0" descr="/www/wwwroot/rexar/gdsolar/docs/curso/slides/assets/logo-gdsolar.png">    </p:cNvPr>
+          <p:cNvPr id="7" name="Image 0" descr="/www/wwwroot/rexar/gdsolar/docs/curso/slides/assets/logo-gdsolar.png">    </p:cNvPr>
           <p:cNvPicPr>
             <a:picLocks noChangeAspect="1"/>
           </p:cNvPicPr>
@@ -11987,7 +13097,7 @@
       </p:pic>
       <p:sp>
         <p:nvSpPr>
-          <p:cNvPr id="6" name="Text 3"/>
+          <p:cNvPr id="8" name="Text 5"/>
           <p:cNvSpPr/>
           <p:nvPr/>
         </p:nvSpPr>
@@ -12028,7 +13138,7 @@
       </p:sp>
       <p:sp>
         <p:nvSpPr>
-          <p:cNvPr id="7" name="Text 4"/>
+          <p:cNvPr id="9" name="Text 6"/>
           <p:cNvSpPr/>
           <p:nvPr/>
         </p:nvSpPr>
@@ -12069,7 +13179,7 @@
       </p:sp>
       <p:sp>
         <p:nvSpPr>
-          <p:cNvPr id="8" name="Text 5"/>
+          <p:cNvPr id="10" name="Text 7"/>
           <p:cNvSpPr/>
           <p:nvPr/>
         </p:nvSpPr>

--- a/docs/curso/slides/m10-indicadores.pptx
+++ b/docs/curso/slides/m10-indicadores.pptx
@@ -24,9 +24,13 @@
     <p:sldId id="272" r:id="rId18"/>
     <p:sldId id="273" r:id="rId19"/>
     <p:sldId id="274" r:id="rId20"/>
+    <p:sldId id="275" r:id="rId21"/>
+    <p:sldId id="276" r:id="rId22"/>
+    <p:sldId id="277" r:id="rId23"/>
+    <p:sldId id="278" r:id="rId24"/>
   </p:sldIdLst>
   <p:notesMasterIdLst>
-    <p:notesMasterId r:id="rId21"/>
+    <p:notesMasterId r:id="rId25"/>
   </p:notesMasterIdLst>
   <p:sldSz cx="12192000" cy="6858000"/>
   <p:notesSz cx="6858000" cy="12192000"/>
@@ -608,9 +612,9 @@
           <a:p>
             <a:r>
               <a:rPr lang="en-US" dirty="0"/>
-              <a:t>O relatório mensal do produtor cabe em uma página. Geração do mês, comparada com a esperada e com o mesmo mês do ano anterior. Ocupação da usina e número de clientes. Energia compensada nos clientes. O valor do crédito no mês, a receita da usina, a taxa de administração e o repasse que ele vai receber. E as ocorrências — limpeza, falhas, manutenção — com os próximos passos. Os números de geração e de usina vêm da plataforma: do registro de geração mensal e do relatório por usina. O produtor também vê a geração diretamente no portal dele. Hoje, o extrato do repasse é montado por você a partir desses relatórios, com a regra do contrato; deixe esse cálculo numa planilha padronizada, conferida todo mês.
-Para investidores — quem financia ou pode financiar a próxima usina —, o relatório é trimestral e mostra o portfólio: quantas usinas, quantos megawatts-pico, quantos megawatts-hora por mês, a ocupação média. Mostra a receita de cada usina e a rentabilidade anualizada, que é o repasse anual dividido pelo investimento. O histórico de geração real contra a projetada, a inadimplência e o churn — porque o investidor sabe que a receita depende de clientes que pagam e ficam. E uma seção honesta de riscos, incluindo a regulação. Investidor sério desconfia de relatório só com boas notícias.
-Quatro regras de credibilidade. Envie na mesma data todo mês. Use sempre o mesmo formato, para que dê para comparar. Garanta que os números batem com o dinheiro que caiu na conta do produtor. E, quando houver má notícia — uma queda de geração, um cliente grande que saiu —, conte primeiro, com o plano de ação. É isso que faz o produtor renovar e o investidor voltar.</a:t>
+              <a:t>Para o produtor, uma página por mês com os itens da tela, e um repasse que bate com o extrato.
+Para o investidor, um relatório trimestral de portfólio, com uma seção honesta de riscos.
+Mesma data, mesmo formato, números que batem e más notícias contadas primeiro. É isso que faz o produtor renovar.</a:t>
             </a:r>
             <a:endParaRPr lang="en-US" dirty="0"/>
           </a:p>
@@ -698,7 +702,7 @@
           <a:p>
             <a:r>
               <a:rPr lang="en-US" dirty="0"/>
-              <a:t>Resumindo: uma página por mês para o produtor, um relatório trimestral de portfólio para investidores, sempre na mesma data, no mesmo formato e com números que batem. Nos laboratórios a seguir, você vai tirar esses números da plataforma.</a:t>
+              <a:t/>
             </a:r>
             <a:endParaRPr lang="en-US" dirty="0"/>
           </a:p>
@@ -874,7 +878,7 @@
           <a:p>
             <a:r>
               <a:rPr lang="en-US" dirty="0"/>
-              <a:t>Agora, o exercício. Olhando para o dashboard e o cockpit da sua empresa do laboratório, escreva três decisões para a próxima semana, cada uma com o quê, quem e até quando. Por exemplo: "vincular os dois clientes sem usina à usina dois, operador, até quarta". Ou: "o consultor B tem a maior inadimplência; revisar com ele as vendas do mês, gestor, sexta". Decisão concreta é o que transforma um painel bonito em gestão.</a:t>
+              <a:t>Escreva três decisões concretas, cada uma com o quê, quem e até quando. Decisão concreta transforma painel em gestão.</a:t>
             </a:r>
             <a:endParaRPr lang="en-US" dirty="0"/>
           </a:p>
@@ -962,9 +966,9 @@
           <a:p>
             <a:r>
               <a:rPr lang="en-US" dirty="0"/>
-              <a:t>Comece pelo dashboard do administrador. Ele é o painel do dia a dia: clientes ativos e em prospecção, propostas, faturas esperando revisão, cobranças em aberto e vencidas, quanto há a receber, a receita do mês e, importante, os pagamentos e os avisos do Mercado Pago com falha. Ele responde: o que está travado hoje?
-Agora, o cockpit executivo, no menu Relatórios, Relatório Geral. Ele é o painel do dono. No topo, a energia da frota inteira: disponível, alocada e o saldo. Abaixo, as usinas críticas, sem saldo, e as com saldo baixo. E um número que vale dinheiro: clientes sem usina — gente que assinou e ainda não está recebendo créditos. Cada cliente nessa lista é receita atrasada e um risco de cancelamento. Na sua empresa do laboratório, quantos clientes estão sem usina? Por quê?
-Continuando no cockpit: o funil de revisão das faturas, mostrando onde elas estão paradas; os alertas abertos; o ranking dos consultores; o crescimento mês a mês de clientes, usinas e vínculos; e uma lista de ações pendentes, cada uma com um link direto para resolver. É a lista de prioridades da semana, pronta.</a:t>
+              <a:t>No dashboard: filas, valores a receber e falhas de pagamento. O que está travado hoje?
+No cockpit, em Relatórios, Relatório Geral: energia da frota, usinas críticas e clientes sem usina.
+Veja o funil de faturas, os alertas abertos, o ranking de consultores e as ações pendentes com link.</a:t>
             </a:r>
             <a:endParaRPr lang="en-US" dirty="0"/>
           </a:p>
@@ -1228,10 +1232,10 @@
           <a:p>
             <a:r>
               <a:rPr lang="en-US" dirty="0"/>
-              <a:t>Abra Relatórios, Executivo, e filtre o período do mês dois. Você vê a situação da carteira, das propostas, dos contratos, das faturas e das usinas, e a evolução financeira: cobrado, recebido e vencido por mês. Daqui saem a taxa de recebimento e a inadimplência. Abra também o relatório financeiro e o de cobranças, para o detalhe por cliente e por status. Exporte o executivo em PDF: é o anexo do seu relatório mensal.
-Agora, Relatórios, Usinas. Para cada usina, o valor cobrado e recebido, a energia e a geração, lado a lado com a potência. É a base do relatório para o produtor e da rentabilidade por usina. Em Relatórios, Clientes, veja os clientes com maior valor e a economia gerada. Exporte em Excel para montar os seus cálculos de margem.
-Agora, preencha o painel: a ocupação, da gestão de energia; o desempenho de geração, do registro mensal; recebimento e inadimplência, dos relatórios financeiros; novos clientes e churn, da carteira; e a economia média, do relatório de clientes. O semáforo mostra onde você está bem e onde precisa agir. Escreva, embaixo, um comentário de cinco linhas sobre o mês: o que foi bem, o que foi mal e o que você vai fazer.
-Por fim, os relatórios para fora. Exporte o relatório de economia de três clientes, como se fosse enviar a mensagem trimestral. E preencha o relatório mensal do produtor com os números do relatório por usina.</a:t>
+              <a:t>Em Relatórios, Executivo, filtre o mês: cobrado, recebido e vencido. Exporte em PDF.
+Nos relatórios de usinas e clientes, veja receita por usina e economia dos clientes. Exporte em Excel.
+Preencha o painel de doze indicadores e escreva cinco linhas sobre o mês.
+Exporte o relatório de economia de três clientes e monte o relatório do produtor.</a:t>
             </a:r>
             <a:endParaRPr lang="en-US" dirty="0"/>
           </a:p>
@@ -1537,6 +1541,358 @@
 </p:notes>
 </file>
 
+<file path=ppt/notesSlides/notesSlide20.xml><?xml version="1.0" encoding="utf-8"?>
+<p:notes xmlns:a="http://schemas.openxmlformats.org/drawingml/2006/main" xmlns:r="http://schemas.openxmlformats.org/officeDocument/2006/relationships" xmlns:p="http://schemas.openxmlformats.org/presentationml/2006/main">
+  <p:cSld>
+    <p:spTree>
+      <p:nvGrpSpPr>
+        <p:cNvPr id="1" name=""/>
+        <p:cNvGrpSpPr/>
+        <p:nvPr/>
+      </p:nvGrpSpPr>
+      <p:grpSpPr>
+        <a:xfrm>
+          <a:off x="0" y="0"/>
+          <a:ext cx="0" cy="0"/>
+          <a:chOff x="0" y="0"/>
+          <a:chExt cx="0" cy="0"/>
+        </a:xfrm>
+      </p:grpSpPr>
+      <p:sp>
+        <p:nvSpPr>
+          <p:cNvPr id="2" name="Slide Image Placeholder 1"/>
+          <p:cNvSpPr>
+            <a:spLocks noGrp="1" noRot="1" noChangeAspect="1"/>
+          </p:cNvSpPr>
+          <p:nvPr>
+            <p:ph type="sldImg"/>
+          </p:nvPr>
+        </p:nvSpPr>
+        <p:spPr/>
+      </p:sp>
+      <p:sp>
+        <p:nvSpPr>
+          <p:cNvPr id="3" name="Notes Placeholder 2"/>
+          <p:cNvSpPr>
+            <a:spLocks noGrp="1"/>
+          </p:cNvSpPr>
+          <p:nvPr>
+            <p:ph type="body" idx="1"/>
+          </p:nvPr>
+        </p:nvSpPr>
+        <p:spPr/>
+        <p:txBody>
+          <a:bodyPr/>
+          <a:lstStyle/>
+          <a:p>
+            <a:r>
+              <a:rPr lang="en-US" dirty="0"/>
+              <a:t/>
+            </a:r>
+            <a:endParaRPr lang="en-US" dirty="0"/>
+          </a:p>
+        </p:txBody>
+      </p:sp>
+      <p:sp>
+        <p:nvSpPr>
+          <p:cNvPr id="4" name="Slide Number Placeholder 3"/>
+          <p:cNvSpPr>
+            <a:spLocks noGrp="1"/>
+          </p:cNvSpPr>
+          <p:nvPr>
+            <p:ph type="sldNum" sz="quarter" idx="10"/>
+          </p:nvPr>
+        </p:nvSpPr>
+        <p:spPr/>
+        <p:txBody>
+          <a:bodyPr/>
+          <a:lstStyle/>
+          <a:p>
+            <a:fld id="{F7021451-1387-4CA6-816F-3879F97B5CBC}" type="slidenum">
+              <a:rPr lang="en-US"/>
+              <a:t>20</a:t>
+            </a:fld>
+            <a:endParaRPr lang="en-US"/>
+          </a:p>
+        </p:txBody>
+      </p:sp>
+    </p:spTree>
+    <p:extLst>
+      <p:ext uri="{BB962C8B-B14F-4D97-AF65-F5344CB8AC3E}">
+        <p14:creationId xmlns:p14="http://schemas.microsoft.com/office/powerpoint/2010/main" val="1024086991"/>
+      </p:ext>
+    </p:extLst>
+  </p:cSld>
+  <p:clrMapOvr>
+    <a:masterClrMapping/>
+  </p:clrMapOvr>
+</p:notes>
+</file>
+
+<file path=ppt/notesSlides/notesSlide21.xml><?xml version="1.0" encoding="utf-8"?>
+<p:notes xmlns:a="http://schemas.openxmlformats.org/drawingml/2006/main" xmlns:r="http://schemas.openxmlformats.org/officeDocument/2006/relationships" xmlns:p="http://schemas.openxmlformats.org/presentationml/2006/main">
+  <p:cSld>
+    <p:spTree>
+      <p:nvGrpSpPr>
+        <p:cNvPr id="1" name=""/>
+        <p:cNvGrpSpPr/>
+        <p:nvPr/>
+      </p:nvGrpSpPr>
+      <p:grpSpPr>
+        <a:xfrm>
+          <a:off x="0" y="0"/>
+          <a:ext cx="0" cy="0"/>
+          <a:chOff x="0" y="0"/>
+          <a:chExt cx="0" cy="0"/>
+        </a:xfrm>
+      </p:grpSpPr>
+      <p:sp>
+        <p:nvSpPr>
+          <p:cNvPr id="2" name="Slide Image Placeholder 1"/>
+          <p:cNvSpPr>
+            <a:spLocks noGrp="1" noRot="1" noChangeAspect="1"/>
+          </p:cNvSpPr>
+          <p:nvPr>
+            <p:ph type="sldImg"/>
+          </p:nvPr>
+        </p:nvSpPr>
+        <p:spPr/>
+      </p:sp>
+      <p:sp>
+        <p:nvSpPr>
+          <p:cNvPr id="3" name="Notes Placeholder 2"/>
+          <p:cNvSpPr>
+            <a:spLocks noGrp="1"/>
+          </p:cNvSpPr>
+          <p:nvPr>
+            <p:ph type="body" idx="1"/>
+          </p:nvPr>
+        </p:nvSpPr>
+        <p:spPr/>
+        <p:txBody>
+          <a:bodyPr/>
+          <a:lstStyle/>
+          <a:p>
+            <a:r>
+              <a:rPr lang="en-US" dirty="0"/>
+              <a:t/>
+            </a:r>
+            <a:endParaRPr lang="en-US" dirty="0"/>
+          </a:p>
+        </p:txBody>
+      </p:sp>
+      <p:sp>
+        <p:nvSpPr>
+          <p:cNvPr id="4" name="Slide Number Placeholder 3"/>
+          <p:cNvSpPr>
+            <a:spLocks noGrp="1"/>
+          </p:cNvSpPr>
+          <p:nvPr>
+            <p:ph type="sldNum" sz="quarter" idx="10"/>
+          </p:nvPr>
+        </p:nvSpPr>
+        <p:spPr/>
+        <p:txBody>
+          <a:bodyPr/>
+          <a:lstStyle/>
+          <a:p>
+            <a:fld id="{F7021451-1387-4CA6-816F-3879F97B5CBC}" type="slidenum">
+              <a:rPr lang="en-US"/>
+              <a:t>21</a:t>
+            </a:fld>
+            <a:endParaRPr lang="en-US"/>
+          </a:p>
+        </p:txBody>
+      </p:sp>
+    </p:spTree>
+    <p:extLst>
+      <p:ext uri="{BB962C8B-B14F-4D97-AF65-F5344CB8AC3E}">
+        <p14:creationId xmlns:p14="http://schemas.microsoft.com/office/powerpoint/2010/main" val="1024086991"/>
+      </p:ext>
+    </p:extLst>
+  </p:cSld>
+  <p:clrMapOvr>
+    <a:masterClrMapping/>
+  </p:clrMapOvr>
+</p:notes>
+</file>
+
+<file path=ppt/notesSlides/notesSlide22.xml><?xml version="1.0" encoding="utf-8"?>
+<p:notes xmlns:a="http://schemas.openxmlformats.org/drawingml/2006/main" xmlns:r="http://schemas.openxmlformats.org/officeDocument/2006/relationships" xmlns:p="http://schemas.openxmlformats.org/presentationml/2006/main">
+  <p:cSld>
+    <p:spTree>
+      <p:nvGrpSpPr>
+        <p:cNvPr id="1" name=""/>
+        <p:cNvGrpSpPr/>
+        <p:nvPr/>
+      </p:nvGrpSpPr>
+      <p:grpSpPr>
+        <a:xfrm>
+          <a:off x="0" y="0"/>
+          <a:ext cx="0" cy="0"/>
+          <a:chOff x="0" y="0"/>
+          <a:chExt cx="0" cy="0"/>
+        </a:xfrm>
+      </p:grpSpPr>
+      <p:sp>
+        <p:nvSpPr>
+          <p:cNvPr id="2" name="Slide Image Placeholder 1"/>
+          <p:cNvSpPr>
+            <a:spLocks noGrp="1" noRot="1" noChangeAspect="1"/>
+          </p:cNvSpPr>
+          <p:nvPr>
+            <p:ph type="sldImg"/>
+          </p:nvPr>
+        </p:nvSpPr>
+        <p:spPr/>
+      </p:sp>
+      <p:sp>
+        <p:nvSpPr>
+          <p:cNvPr id="3" name="Notes Placeholder 2"/>
+          <p:cNvSpPr>
+            <a:spLocks noGrp="1"/>
+          </p:cNvSpPr>
+          <p:nvPr>
+            <p:ph type="body" idx="1"/>
+          </p:nvPr>
+        </p:nvSpPr>
+        <p:spPr/>
+        <p:txBody>
+          <a:bodyPr/>
+          <a:lstStyle/>
+          <a:p>
+            <a:r>
+              <a:rPr lang="en-US" dirty="0"/>
+              <a:t/>
+            </a:r>
+            <a:endParaRPr lang="en-US" dirty="0"/>
+          </a:p>
+        </p:txBody>
+      </p:sp>
+      <p:sp>
+        <p:nvSpPr>
+          <p:cNvPr id="4" name="Slide Number Placeholder 3"/>
+          <p:cNvSpPr>
+            <a:spLocks noGrp="1"/>
+          </p:cNvSpPr>
+          <p:nvPr>
+            <p:ph type="sldNum" sz="quarter" idx="10"/>
+          </p:nvPr>
+        </p:nvSpPr>
+        <p:spPr/>
+        <p:txBody>
+          <a:bodyPr/>
+          <a:lstStyle/>
+          <a:p>
+            <a:fld id="{F7021451-1387-4CA6-816F-3879F97B5CBC}" type="slidenum">
+              <a:rPr lang="en-US"/>
+              <a:t>22</a:t>
+            </a:fld>
+            <a:endParaRPr lang="en-US"/>
+          </a:p>
+        </p:txBody>
+      </p:sp>
+    </p:spTree>
+    <p:extLst>
+      <p:ext uri="{BB962C8B-B14F-4D97-AF65-F5344CB8AC3E}">
+        <p14:creationId xmlns:p14="http://schemas.microsoft.com/office/powerpoint/2010/main" val="1024086991"/>
+      </p:ext>
+    </p:extLst>
+  </p:cSld>
+  <p:clrMapOvr>
+    <a:masterClrMapping/>
+  </p:clrMapOvr>
+</p:notes>
+</file>
+
+<file path=ppt/notesSlides/notesSlide23.xml><?xml version="1.0" encoding="utf-8"?>
+<p:notes xmlns:a="http://schemas.openxmlformats.org/drawingml/2006/main" xmlns:r="http://schemas.openxmlformats.org/officeDocument/2006/relationships" xmlns:p="http://schemas.openxmlformats.org/presentationml/2006/main">
+  <p:cSld>
+    <p:spTree>
+      <p:nvGrpSpPr>
+        <p:cNvPr id="1" name=""/>
+        <p:cNvGrpSpPr/>
+        <p:nvPr/>
+      </p:nvGrpSpPr>
+      <p:grpSpPr>
+        <a:xfrm>
+          <a:off x="0" y="0"/>
+          <a:ext cx="0" cy="0"/>
+          <a:chOff x="0" y="0"/>
+          <a:chExt cx="0" cy="0"/>
+        </a:xfrm>
+      </p:grpSpPr>
+      <p:sp>
+        <p:nvSpPr>
+          <p:cNvPr id="2" name="Slide Image Placeholder 1"/>
+          <p:cNvSpPr>
+            <a:spLocks noGrp="1" noRot="1" noChangeAspect="1"/>
+          </p:cNvSpPr>
+          <p:nvPr>
+            <p:ph type="sldImg"/>
+          </p:nvPr>
+        </p:nvSpPr>
+        <p:spPr/>
+      </p:sp>
+      <p:sp>
+        <p:nvSpPr>
+          <p:cNvPr id="3" name="Notes Placeholder 2"/>
+          <p:cNvSpPr>
+            <a:spLocks noGrp="1"/>
+          </p:cNvSpPr>
+          <p:nvPr>
+            <p:ph type="body" idx="1"/>
+          </p:nvPr>
+        </p:nvSpPr>
+        <p:spPr/>
+        <p:txBody>
+          <a:bodyPr/>
+          <a:lstStyle/>
+          <a:p>
+            <a:r>
+              <a:rPr lang="en-US" dirty="0"/>
+              <a:t/>
+            </a:r>
+            <a:endParaRPr lang="en-US" dirty="0"/>
+          </a:p>
+        </p:txBody>
+      </p:sp>
+      <p:sp>
+        <p:nvSpPr>
+          <p:cNvPr id="4" name="Slide Number Placeholder 3"/>
+          <p:cNvSpPr>
+            <a:spLocks noGrp="1"/>
+          </p:cNvSpPr>
+          <p:nvPr>
+            <p:ph type="sldNum" sz="quarter" idx="10"/>
+          </p:nvPr>
+        </p:nvSpPr>
+        <p:spPr/>
+        <p:txBody>
+          <a:bodyPr/>
+          <a:lstStyle/>
+          <a:p>
+            <a:fld id="{F7021451-1387-4CA6-816F-3879F97B5CBC}" type="slidenum">
+              <a:rPr lang="en-US"/>
+              <a:t>23</a:t>
+            </a:fld>
+            <a:endParaRPr lang="en-US"/>
+          </a:p>
+        </p:txBody>
+      </p:sp>
+    </p:spTree>
+    <p:extLst>
+      <p:ext uri="{BB962C8B-B14F-4D97-AF65-F5344CB8AC3E}">
+        <p14:creationId xmlns:p14="http://schemas.microsoft.com/office/powerpoint/2010/main" val="1024086991"/>
+      </p:ext>
+    </p:extLst>
+  </p:cSld>
+  <p:clrMapOvr>
+    <a:masterClrMapping/>
+  </p:clrMapOvr>
+</p:notes>
+</file>
+
 <file path=ppt/notesSlides/notesSlide3.xml><?xml version="1.0" encoding="utf-8"?>
 <p:notes xmlns:a="http://schemas.openxmlformats.org/drawingml/2006/main" xmlns:r="http://schemas.openxmlformats.org/officeDocument/2006/relationships" xmlns:p="http://schemas.openxmlformats.org/presentationml/2006/main">
   <p:cSld>
@@ -1583,9 +1939,9 @@
           <a:p>
             <a:r>
               <a:rPr lang="en-US" dirty="0"/>
-              <a:t>O primeiro grupo é a energia, porque é o seu estoque. Um: a taxa de ocupação, energia alocada dividida pela disponível, com meta entre noventa e noventa e oito por cento. Abaixo disso, você tem estoque parado; acima, risco. Dois: o desempenho de geração, a geração real dividida pela esperada para aquele mês, com meta de pelo menos noventa e cinco por cento. E três: a energia efetivamente compensada nas faturas dividida pela alocada, que diz se os créditos estão chegando aos clientes como deveriam. Um número baixo aqui indica problema de rateio, de distribuidora ou de cota mal dimensionada.
-O segundo grupo é o comercial. Quatro: novos clientes no mês — e, mais importante, os quilowatts-hora vendidos, porque dez residências e uma padaria podem valer o mesmo. Cinco: a conversão de proposta em cliente pagante. E seis: o custo de aquisição, o CAC, que é tudo o que você gastou para vender — comissões, anúncios, parte do salário comercial — dividido pelos novos clientes. Compare o CAC com a margem que o cliente traz por mês: se o CAC é de quatrocentos reais e o cliente deixa quarenta reais de margem por mês, você leva dez meses para recuperar o investimento nele.
-O terceiro grupo é o financeiro. Sete: a receita da gestora, a sua taxa de administração no mês. Oito: a taxa de recebimento, quanto do que foi faturado no mês foi recebido, com meta acima de noventa e cinco por cento. Nove: a inadimplência acima de trinta dias, em percentual do faturado, com meta de no máximo três por cento — aquela reserva que usamos na conta do módulo 3. E dez: a margem de contribuição por quilowatt-hora e o resultado do mês comparado com o ponto de equilíbrio. Esse último responde à pergunta mais importante do empresário: estamos ganhando ou perdendo dinheiro, e quanto falta para virar?</a:t>
+              <a:t>Energia é o seu estoque: ocupação, desempenho de geração e créditos chegando aos clientes.
+No comercial, conte quilowatts-hora vendidos, não só clientes, e compare o custo de aquisição com a margem que cada cliente traz.
+No financeiro, o indicador decisivo é o resultado contra o ponto de equilíbrio: estamos ganhando ou perdendo, e quanto falta?</a:t>
             </a:r>
             <a:endParaRPr lang="en-US" dirty="0"/>
           </a:p>
@@ -1673,8 +2029,8 @@
           <a:p>
             <a:r>
               <a:rPr lang="en-US" dirty="0"/>
-              <a:t>O quarto grupo é o cliente. Onze: o churn, os cancelamentos do mês divididos pela base de clientes. Parece pequeno, mas dois por cento ao mês significam perder quase um quarto da base em um ano. A meta é ficar perto ou abaixo de um por cento ao mês. E doze: a economia média por cliente, em reais por mês, que é o valor que você entrega, junto com uma pesquisa de satisfação, como o NPS, feita a cada trimestre. Economia média caindo — por causa do Fio B, por exemplo — é um sinal antecipado de churn.
-Coloque os doze indicadores numa página só, com a meta, o resultado e um semáforo: verde, amarelo, vermelho. Revise todo mês, no fechamento, e acompanhe semanalmente os mais sensíveis: ocupação, recebimento e inadimplência. Nas próximas aulas, você vai ver de onde tirar esses números na plataforma e como transformar alguns deles em relatórios para clientes e produtores.</a:t>
+              <a:t>Nos clientes, olhe o churn: dois por cento ao mês é quase um quarto da base em um ano. E economia média caindo antecipa cancelamentos.
+Coloque tudo numa página, com meta e semáforo, e revise todo mês.</a:t>
             </a:r>
             <a:endParaRPr lang="en-US" dirty="0"/>
           </a:p>
@@ -1850,8 +2206,8 @@
           <a:p>
             <a:r>
               <a:rPr lang="en-US" dirty="0"/>
-              <a:t>Use o relatório em cinco momentos. A cada trimestre, uma mensagem curta: "você já economizou tantos reais com a gente". No aniversário de um ano, um relatório anual, com um agradecimento. No pedido de cancelamento, como vimos no módulo 9: muitos clientes desistem de cancelar quando veem o número. Quando houver um reajuste ou a próxima etapa do Fio B, para explicar com transparência por que a economia mudou. E na renovação do contrato.
-O relatório também vende. Com a autorização dos clientes, você pode usar números agregados como prova social: "padarias da nossa carteira economizam em média tantos reais por mês". E um programa de indicação fica muito mais forte quando o cliente pode mostrar o próprio relatório para o vizinho ou para o colega de setor.</a:t>
+              <a:t>Use o relatório de economia nos momentos da tela, principalmente no pedido de cancelamento.
+Ele também vende: números agregados viram prova social, e o cliente pode mostrar o próprio relatório a quem indicar.</a:t>
             </a:r>
             <a:endParaRPr lang="en-US" dirty="0"/>
           </a:p>
@@ -1939,7 +2295,7 @@
           <a:p>
             <a:r>
               <a:rPr lang="en-US" dirty="0"/>
-              <a:t>No portal, logo na visão geral, o cliente vê o total economizado desde que entrou e a economia média por mês, além do histórico de consumo. No relatório de economia, ele vê o detalhamento mês a mês: o valor original da energia compensada, o que pagou com o desconto e a diferença. E pode exportar em PDF ou Excel — útil para empresas, que levam o número para o contador ou para a diretoria. A economia é calculada como o valor original menos o valor final de cada cobrança.</a:t>
+              <a:t>Total economizado economia média/mês mês a mês PDF e Excel</a:t>
             </a:r>
             <a:endParaRPr lang="en-US" dirty="0"/>
           </a:p>
@@ -2027,7 +2383,7 @@
           <a:p>
             <a:r>
               <a:rPr lang="en-US" dirty="0"/>
-              <a:t>Resumindo: o relatório de economia é a sua principal ferramenta de retenção. Mostre o número antes de o cliente esquecer — a cada trimestre, no aniversário, no pedido de cancelamento, no reajuste e na renovação — e use os números agregados como prova social. Na próxima aula, os relatórios para quem financia as usinas.</a:t>
+              <a:t/>
             </a:r>
             <a:endParaRPr lang="en-US" dirty="0"/>
           </a:p>
@@ -3403,7 +3759,7 @@
         <p:spPr>
           <a:xfrm>
             <a:off x="822960" y="2286000"/>
-            <a:ext cx="2965704" cy="3749040"/>
+            <a:ext cx="2965704" cy="2286000"/>
           </a:xfrm>
           <a:prstGeom prst="rect">
             <a:avLst/>
@@ -3425,7 +3781,7 @@
               <a:buChar char="●"/>
             </a:pPr>
             <a:r>
-              <a:rPr lang="en-US" sz="1500" dirty="0">
+              <a:rPr lang="en-US" sz="1100" dirty="0">
                 <a:solidFill>
                   <a:srgbClr val="1F2937"/>
                 </a:solidFill>
@@ -3435,7 +3791,7 @@
               </a:rPr>
               <a:t>Geração do mês × esperada × mesmo mês do ano anterior</a:t>
             </a:r>
-            <a:endParaRPr lang="en-US" sz="1500" dirty="0"/>
+            <a:endParaRPr lang="en-US" sz="1100" dirty="0"/>
           </a:p>
           <a:p>
             <a:pPr marL="342900" indent="-342900">
@@ -3446,7 +3802,7 @@
               <a:buChar char="●"/>
             </a:pPr>
             <a:r>
-              <a:rPr lang="en-US" sz="1500" dirty="0">
+              <a:rPr lang="en-US" sz="1100" dirty="0">
                 <a:solidFill>
                   <a:srgbClr val="1F2937"/>
                 </a:solidFill>
@@ -3456,7 +3812,7 @@
               </a:rPr>
               <a:t>Ocupação da usina e nº de clientes</a:t>
             </a:r>
-            <a:endParaRPr lang="en-US" sz="1500" dirty="0"/>
+            <a:endParaRPr lang="en-US" sz="1100" dirty="0"/>
           </a:p>
           <a:p>
             <a:pPr marL="342900" indent="-342900">
@@ -3467,7 +3823,7 @@
               <a:buChar char="●"/>
             </a:pPr>
             <a:r>
-              <a:rPr lang="en-US" sz="1500" dirty="0">
+              <a:rPr lang="en-US" sz="1100" dirty="0">
                 <a:solidFill>
                   <a:srgbClr val="1F2937"/>
                 </a:solidFill>
@@ -3477,7 +3833,7 @@
               </a:rPr>
               <a:t>Energia compensada nos clientes</a:t>
             </a:r>
-            <a:endParaRPr lang="en-US" sz="1500" dirty="0"/>
+            <a:endParaRPr lang="en-US" sz="1100" dirty="0"/>
           </a:p>
           <a:p>
             <a:pPr marL="342900" indent="-342900">
@@ -3488,7 +3844,7 @@
               <a:buChar char="●"/>
             </a:pPr>
             <a:r>
-              <a:rPr lang="en-US" sz="1500" dirty="0">
+              <a:rPr lang="en-US" sz="1100" dirty="0">
                 <a:solidFill>
                   <a:srgbClr val="1F2937"/>
                 </a:solidFill>
@@ -3498,7 +3854,7 @@
               </a:rPr>
               <a:t>Valor do crédito no mês · receita da usina · taxa de administração · repasse</a:t>
             </a:r>
-            <a:endParaRPr lang="en-US" sz="1500" dirty="0"/>
+            <a:endParaRPr lang="en-US" sz="1100" dirty="0"/>
           </a:p>
           <a:p>
             <a:pPr marL="342900" indent="-342900">
@@ -3509,7 +3865,7 @@
               <a:buChar char="●"/>
             </a:pPr>
             <a:r>
-              <a:rPr lang="en-US" sz="1500" dirty="0">
+              <a:rPr lang="en-US" sz="1100" dirty="0">
                 <a:solidFill>
                   <a:srgbClr val="1F2937"/>
                 </a:solidFill>
@@ -3519,13 +3875,72 @@
               </a:rPr>
               <a:t>Ocorrências (O&amp;M, paradas) e próximos passos</a:t>
             </a:r>
-            <a:endParaRPr lang="en-US" sz="1500" dirty="0"/>
+            <a:endParaRPr lang="en-US" sz="1100" dirty="0"/>
           </a:p>
         </p:txBody>
       </p:sp>
       <p:sp>
         <p:nvSpPr>
           <p:cNvPr id="13" name="Shape 10"/>
+          <p:cNvSpPr/>
+          <p:nvPr/>
+        </p:nvSpPr>
+        <p:spPr>
+          <a:xfrm>
+            <a:off x="822960" y="4663440"/>
+            <a:ext cx="2965704" cy="18288"/>
+          </a:xfrm>
+          <a:prstGeom prst="rect">
+            <a:avLst/>
+          </a:prstGeom>
+          <a:solidFill>
+            <a:srgbClr val="D8E0EC"/>
+          </a:solidFill>
+          <a:ln/>
+        </p:spPr>
+      </p:sp>
+      <p:sp>
+        <p:nvSpPr>
+          <p:cNvPr id="14" name="Text 11"/>
+          <p:cNvSpPr/>
+          <p:nvPr/>
+        </p:nvSpPr>
+        <p:spPr>
+          <a:xfrm>
+            <a:off x="822960" y="4754880"/>
+            <a:ext cx="2965704" cy="1371600"/>
+          </a:xfrm>
+          <a:prstGeom prst="rect">
+            <a:avLst/>
+          </a:prstGeom>
+          <a:noFill/>
+          <a:ln/>
+        </p:spPr>
+        <p:txBody>
+          <a:bodyPr wrap="square" rtlCol="0" anchor="t"/>
+          <a:lstStyle/>
+          <a:p>
+            <a:pPr indent="0" marL="0">
+              <a:buNone/>
+            </a:pPr>
+            <a:r>
+              <a:rPr lang="en-US" sz="1300" i="1" dirty="0">
+                <a:solidFill>
+                  <a:srgbClr val="64748B"/>
+                </a:solidFill>
+                <a:latin typeface="Arial" pitchFamily="34" charset="0"/>
+                <a:ea typeface="Arial" pitchFamily="34" charset="-122"/>
+                <a:cs typeface="Arial" pitchFamily="34" charset="-120"/>
+              </a:rPr>
+              <a:t>Para o produtor, uma página por mês com os itens da tela, e um repasse que bate com o extrato.</a:t>
+            </a:r>
+            <a:endParaRPr lang="en-US" sz="1300" dirty="0"/>
+          </a:p>
+        </p:txBody>
+      </p:sp>
+      <p:sp>
+        <p:nvSpPr>
+          <p:cNvPr id="15" name="Shape 12"/>
           <p:cNvSpPr/>
           <p:nvPr/>
         </p:nvSpPr>
@@ -3559,7 +3974,7 @@
       </p:sp>
       <p:sp>
         <p:nvSpPr>
-          <p:cNvPr id="14" name="Shape 11"/>
+          <p:cNvPr id="16" name="Shape 13"/>
           <p:cNvSpPr/>
           <p:nvPr/>
         </p:nvSpPr>
@@ -3579,7 +3994,7 @@
       </p:sp>
       <p:sp>
         <p:nvSpPr>
-          <p:cNvPr id="15" name="Text 12"/>
+          <p:cNvPr id="17" name="Text 14"/>
           <p:cNvSpPr/>
           <p:nvPr/>
         </p:nvSpPr>
@@ -3620,14 +4035,14 @@
       </p:sp>
       <p:sp>
         <p:nvSpPr>
-          <p:cNvPr id="16" name="Text 13"/>
+          <p:cNvPr id="18" name="Text 15"/>
           <p:cNvSpPr/>
           <p:nvPr/>
         </p:nvSpPr>
         <p:spPr>
           <a:xfrm>
             <a:off x="4611624" y="2286000"/>
-            <a:ext cx="2965704" cy="3749040"/>
+            <a:ext cx="2965704" cy="2286000"/>
           </a:xfrm>
           <a:prstGeom prst="rect">
             <a:avLst/>
@@ -3649,7 +4064,7 @@
               <a:buChar char="●"/>
             </a:pPr>
             <a:r>
-              <a:rPr lang="en-US" sz="1700" dirty="0">
+              <a:rPr lang="en-US" sz="1300" dirty="0">
                 <a:solidFill>
                   <a:srgbClr val="1F2937"/>
                 </a:solidFill>
@@ -3659,7 +4074,7 @@
               </a:rPr>
               <a:t>Portfólio: usinas, MWp, MWh/mês, ocupação média</a:t>
             </a:r>
-            <a:endParaRPr lang="en-US" sz="1700" dirty="0"/>
+            <a:endParaRPr lang="en-US" sz="1300" dirty="0"/>
           </a:p>
           <a:p>
             <a:pPr marL="342900" indent="-342900">
@@ -3670,7 +4085,7 @@
               <a:buChar char="●"/>
             </a:pPr>
             <a:r>
-              <a:rPr lang="en-US" sz="1700" dirty="0">
+              <a:rPr lang="en-US" sz="1300" dirty="0">
                 <a:solidFill>
                   <a:srgbClr val="1F2937"/>
                 </a:solidFill>
@@ -3680,7 +4095,7 @@
               </a:rPr>
               <a:t>Receita por usina e rentabilidade anualizada (repasse ÷ investimento)</a:t>
             </a:r>
-            <a:endParaRPr lang="en-US" sz="1700" dirty="0"/>
+            <a:endParaRPr lang="en-US" sz="1300" dirty="0"/>
           </a:p>
           <a:p>
             <a:pPr marL="342900" indent="-342900">
@@ -3691,7 +4106,7 @@
               <a:buChar char="●"/>
             </a:pPr>
             <a:r>
-              <a:rPr lang="en-US" sz="1700" dirty="0">
+              <a:rPr lang="en-US" sz="1300" dirty="0">
                 <a:solidFill>
                   <a:srgbClr val="1F2937"/>
                 </a:solidFill>
@@ -3701,7 +4116,7 @@
               </a:rPr>
               <a:t>Histórico: geração real × projetada; inadimplência; churn</a:t>
             </a:r>
-            <a:endParaRPr lang="en-US" sz="1700" dirty="0"/>
+            <a:endParaRPr lang="en-US" sz="1300" dirty="0"/>
           </a:p>
           <a:p>
             <a:pPr marL="342900" indent="-342900">
@@ -3712,7 +4127,7 @@
               <a:buChar char="●"/>
             </a:pPr>
             <a:r>
-              <a:rPr lang="en-US" sz="1700" dirty="0">
+              <a:rPr lang="en-US" sz="1300" dirty="0">
                 <a:solidFill>
                   <a:srgbClr val="1F2937"/>
                 </a:solidFill>
@@ -3722,13 +4137,72 @@
               </a:rPr>
               <a:t>Riscos e regulação (Fio B, 2029)</a:t>
             </a:r>
-            <a:endParaRPr lang="en-US" sz="1700" dirty="0"/>
-          </a:p>
-        </p:txBody>
-      </p:sp>
-      <p:sp>
-        <p:nvSpPr>
-          <p:cNvPr id="17" name="Shape 14"/>
+            <a:endParaRPr lang="en-US" sz="1300" dirty="0"/>
+          </a:p>
+        </p:txBody>
+      </p:sp>
+      <p:sp>
+        <p:nvSpPr>
+          <p:cNvPr id="19" name="Shape 16"/>
+          <p:cNvSpPr/>
+          <p:nvPr/>
+        </p:nvSpPr>
+        <p:spPr>
+          <a:xfrm>
+            <a:off x="4611624" y="4663440"/>
+            <a:ext cx="2965704" cy="18288"/>
+          </a:xfrm>
+          <a:prstGeom prst="rect">
+            <a:avLst/>
+          </a:prstGeom>
+          <a:solidFill>
+            <a:srgbClr val="D8E0EC"/>
+          </a:solidFill>
+          <a:ln/>
+        </p:spPr>
+      </p:sp>
+      <p:sp>
+        <p:nvSpPr>
+          <p:cNvPr id="20" name="Text 17"/>
+          <p:cNvSpPr/>
+          <p:nvPr/>
+        </p:nvSpPr>
+        <p:spPr>
+          <a:xfrm>
+            <a:off x="4611624" y="4754880"/>
+            <a:ext cx="2965704" cy="1371600"/>
+          </a:xfrm>
+          <a:prstGeom prst="rect">
+            <a:avLst/>
+          </a:prstGeom>
+          <a:noFill/>
+          <a:ln/>
+        </p:spPr>
+        <p:txBody>
+          <a:bodyPr wrap="square" rtlCol="0" anchor="t"/>
+          <a:lstStyle/>
+          <a:p>
+            <a:pPr indent="0" marL="0">
+              <a:buNone/>
+            </a:pPr>
+            <a:r>
+              <a:rPr lang="en-US" sz="1300" i="1" dirty="0">
+                <a:solidFill>
+                  <a:srgbClr val="64748B"/>
+                </a:solidFill>
+                <a:latin typeface="Arial" pitchFamily="34" charset="0"/>
+                <a:ea typeface="Arial" pitchFamily="34" charset="-122"/>
+                <a:cs typeface="Arial" pitchFamily="34" charset="-120"/>
+              </a:rPr>
+              <a:t>Para o investidor, um relatório trimestral de portfólio, com uma seção honesta de riscos.</a:t>
+            </a:r>
+            <a:endParaRPr lang="en-US" sz="1300" dirty="0"/>
+          </a:p>
+        </p:txBody>
+      </p:sp>
+      <p:sp>
+        <p:nvSpPr>
+          <p:cNvPr id="21" name="Shape 18"/>
           <p:cNvSpPr/>
           <p:nvPr/>
         </p:nvSpPr>
@@ -3762,7 +4236,7 @@
       </p:sp>
       <p:sp>
         <p:nvSpPr>
-          <p:cNvPr id="18" name="Shape 15"/>
+          <p:cNvPr id="22" name="Shape 19"/>
           <p:cNvSpPr/>
           <p:nvPr/>
         </p:nvSpPr>
@@ -3782,7 +4256,7 @@
       </p:sp>
       <p:sp>
         <p:nvSpPr>
-          <p:cNvPr id="19" name="Text 16"/>
+          <p:cNvPr id="23" name="Text 20"/>
           <p:cNvSpPr/>
           <p:nvPr/>
         </p:nvSpPr>
@@ -3823,14 +4297,14 @@
       </p:sp>
       <p:sp>
         <p:nvSpPr>
-          <p:cNvPr id="20" name="Text 17"/>
+          <p:cNvPr id="24" name="Text 21"/>
           <p:cNvSpPr/>
           <p:nvPr/>
         </p:nvSpPr>
         <p:spPr>
           <a:xfrm>
             <a:off x="8400288" y="2286000"/>
-            <a:ext cx="2965704" cy="3749040"/>
+            <a:ext cx="2965704" cy="2286000"/>
           </a:xfrm>
           <a:prstGeom prst="rect">
             <a:avLst/>
@@ -3926,6 +4400,65 @@
               <a:t>más notícias primeiro</a:t>
             </a:r>
             <a:endParaRPr lang="en-US" sz="1700" dirty="0"/>
+          </a:p>
+        </p:txBody>
+      </p:sp>
+      <p:sp>
+        <p:nvSpPr>
+          <p:cNvPr id="25" name="Shape 22"/>
+          <p:cNvSpPr/>
+          <p:nvPr/>
+        </p:nvSpPr>
+        <p:spPr>
+          <a:xfrm>
+            <a:off x="8400288" y="4663440"/>
+            <a:ext cx="2965704" cy="18288"/>
+          </a:xfrm>
+          <a:prstGeom prst="rect">
+            <a:avLst/>
+          </a:prstGeom>
+          <a:solidFill>
+            <a:srgbClr val="D8E0EC"/>
+          </a:solidFill>
+          <a:ln/>
+        </p:spPr>
+      </p:sp>
+      <p:sp>
+        <p:nvSpPr>
+          <p:cNvPr id="26" name="Text 23"/>
+          <p:cNvSpPr/>
+          <p:nvPr/>
+        </p:nvSpPr>
+        <p:spPr>
+          <a:xfrm>
+            <a:off x="8400288" y="4754880"/>
+            <a:ext cx="2965704" cy="1371600"/>
+          </a:xfrm>
+          <a:prstGeom prst="rect">
+            <a:avLst/>
+          </a:prstGeom>
+          <a:noFill/>
+          <a:ln/>
+        </p:spPr>
+        <p:txBody>
+          <a:bodyPr wrap="square" rtlCol="0" anchor="t"/>
+          <a:lstStyle/>
+          <a:p>
+            <a:pPr indent="0" marL="0">
+              <a:buNone/>
+            </a:pPr>
+            <a:r>
+              <a:rPr lang="en-US" sz="1300" i="1" dirty="0">
+                <a:solidFill>
+                  <a:srgbClr val="64748B"/>
+                </a:solidFill>
+                <a:latin typeface="Arial" pitchFamily="34" charset="0"/>
+                <a:ea typeface="Arial" pitchFamily="34" charset="-122"/>
+                <a:cs typeface="Arial" pitchFamily="34" charset="-120"/>
+              </a:rPr>
+              <a:t>Mesma data, mesmo formato, números que batem e más notícias contadas primeiro. É isso que faz o produtor renovar.</a:t>
+            </a:r>
+            <a:endParaRPr lang="en-US" sz="1300" dirty="0"/>
           </a:p>
         </p:txBody>
       </p:sp>
@@ -5334,7 +5867,7 @@
         <p:spPr>
           <a:xfrm>
             <a:off x="548640" y="1325880"/>
-            <a:ext cx="3544824" cy="4892040"/>
+            <a:ext cx="3544824" cy="3977640"/>
           </a:xfrm>
           <a:prstGeom prst="roundRect">
             <a:avLst>
@@ -5427,7 +5960,7 @@
         <p:spPr>
           <a:xfrm>
             <a:off x="1325880" y="1435608"/>
-            <a:ext cx="2630424" cy="4672584"/>
+            <a:ext cx="2630424" cy="3758184"/>
           </a:xfrm>
           <a:prstGeom prst="rect">
             <a:avLst/>
@@ -5468,7 +6001,7 @@
         <p:spPr>
           <a:xfrm>
             <a:off x="4322064" y="1325880"/>
-            <a:ext cx="3544824" cy="4892040"/>
+            <a:ext cx="3544824" cy="3977640"/>
           </a:xfrm>
           <a:prstGeom prst="roundRect">
             <a:avLst>
@@ -5561,7 +6094,7 @@
         <p:spPr>
           <a:xfrm>
             <a:off x="5099304" y="1435608"/>
-            <a:ext cx="2630424" cy="4672584"/>
+            <a:ext cx="2630424" cy="3758184"/>
           </a:xfrm>
           <a:prstGeom prst="rect">
             <a:avLst/>
@@ -5602,7 +6135,7 @@
         <p:spPr>
           <a:xfrm>
             <a:off x="8095488" y="1325880"/>
-            <a:ext cx="3544824" cy="4892040"/>
+            <a:ext cx="3544824" cy="3977640"/>
           </a:xfrm>
           <a:prstGeom prst="roundRect">
             <a:avLst>
@@ -5695,7 +6228,7 @@
         <p:spPr>
           <a:xfrm>
             <a:off x="8872728" y="1435608"/>
-            <a:ext cx="2630424" cy="4672584"/>
+            <a:ext cx="2630424" cy="3758184"/>
           </a:xfrm>
           <a:prstGeom prst="rect">
             <a:avLst/>
@@ -5724,6 +6257,92 @@
               <a:t>até quando)</a:t>
             </a:r>
             <a:endParaRPr lang="en-US" sz="1800" dirty="0"/>
+          </a:p>
+        </p:txBody>
+      </p:sp>
+      <p:sp>
+        <p:nvSpPr>
+          <p:cNvPr id="21" name="Shape 18"/>
+          <p:cNvSpPr/>
+          <p:nvPr/>
+        </p:nvSpPr>
+        <p:spPr>
+          <a:xfrm>
+            <a:off x="548640" y="5413248"/>
+            <a:ext cx="11091672" cy="868680"/>
+          </a:xfrm>
+          <a:prstGeom prst="roundRect">
+            <a:avLst>
+              <a:gd name="adj" fmla="val 8421"/>
+            </a:avLst>
+          </a:prstGeom>
+          <a:solidFill>
+            <a:srgbClr val="EEF3FA"/>
+          </a:solidFill>
+          <a:ln w="6350">
+            <a:solidFill>
+              <a:srgbClr val="D8E0EC"/>
+            </a:solidFill>
+            <a:prstDash val="solid"/>
+          </a:ln>
+        </p:spPr>
+      </p:sp>
+      <p:sp>
+        <p:nvSpPr>
+          <p:cNvPr id="22" name="Shape 19"/>
+          <p:cNvSpPr/>
+          <p:nvPr/>
+        </p:nvSpPr>
+        <p:spPr>
+          <a:xfrm>
+            <a:off x="548640" y="5413248"/>
+            <a:ext cx="91440" cy="868680"/>
+          </a:xfrm>
+          <a:prstGeom prst="rect">
+            <a:avLst/>
+          </a:prstGeom>
+          <a:solidFill>
+            <a:srgbClr val="F7A23B"/>
+          </a:solidFill>
+          <a:ln/>
+        </p:spPr>
+      </p:sp>
+      <p:sp>
+        <p:nvSpPr>
+          <p:cNvPr id="23" name="Text 20"/>
+          <p:cNvSpPr/>
+          <p:nvPr/>
+        </p:nvSpPr>
+        <p:spPr>
+          <a:xfrm>
+            <a:off x="777240" y="5458968"/>
+            <a:ext cx="10744200" cy="777240"/>
+          </a:xfrm>
+          <a:prstGeom prst="rect">
+            <a:avLst/>
+          </a:prstGeom>
+          <a:noFill/>
+          <a:ln/>
+        </p:spPr>
+        <p:txBody>
+          <a:bodyPr wrap="square" rtlCol="0" anchor="ctr"/>
+          <a:lstStyle/>
+          <a:p>
+            <a:pPr indent="0" marL="0">
+              <a:buNone/>
+            </a:pPr>
+            <a:r>
+              <a:rPr lang="en-US" sz="1500" dirty="0">
+                <a:solidFill>
+                  <a:srgbClr val="1F2937"/>
+                </a:solidFill>
+                <a:latin typeface="Arial" pitchFamily="34" charset="0"/>
+                <a:ea typeface="Arial" pitchFamily="34" charset="-122"/>
+                <a:cs typeface="Arial" pitchFamily="34" charset="-120"/>
+              </a:rPr>
+              <a:t>Escreva três decisões concretas, cada uma com o quê, quem e até quando. Decisão concreta transforma painel em gestão.</a:t>
+            </a:r>
+            <a:endParaRPr lang="en-US" sz="1500" dirty="0"/>
           </a:p>
         </p:txBody>
       </p:sp>
@@ -6200,7 +6819,7 @@
                 <a:ea typeface="Arial" pitchFamily="34" charset="-122"/>
                 <a:cs typeface="Arial" pitchFamily="34" charset="-120"/>
               </a:rPr>
-              <a:t>Dashboard = o dia a dia: filas, a receber, falhas</a:t>
+              <a:t>No dashboard: filas, valores a receber e falhas de pagamento. O que está travado hoje?</a:t>
             </a:r>
             <a:endParaRPr lang="en-US" sz="1500" dirty="0"/>
           </a:p>
@@ -6251,7 +6870,7 @@
                 <a:ea typeface="Arial" pitchFamily="34" charset="-122"/>
                 <a:cs typeface="Arial" pitchFamily="34" charset="-120"/>
               </a:rPr>
-              <a:t>Cockpit: energia disponível × alocada × saldo · usinas críticas · clientes sem usina</a:t>
+              <a:t>No cockpit, em Relatórios, Relatório Geral: energia da frota, usinas críticas e clientes sem usina.</a:t>
             </a:r>
             <a:endParaRPr lang="en-US" sz="1500" dirty="0"/>
           </a:p>
@@ -6302,7 +6921,7 @@
                 <a:ea typeface="Arial" pitchFamily="34" charset="-122"/>
                 <a:cs typeface="Arial" pitchFamily="34" charset="-120"/>
               </a:rPr>
-              <a:t>Funil de faturas · alertas abertos · ranking de consultores · ações pendentes com link</a:t>
+              <a:t>Veja o funil de faturas, os alertas abertos, o ranking de consultores e as ações pendentes com link.</a:t>
             </a:r>
             <a:endParaRPr lang="en-US" sz="1500" dirty="0"/>
           </a:p>
@@ -7505,7 +8124,7 @@
                 <a:ea typeface="Arial" pitchFamily="34" charset="-122"/>
                 <a:cs typeface="Arial" pitchFamily="34" charset="-120"/>
               </a:rPr>
-              <a:t>Executivo e Financeiro: valor faturado · recebido · vencido · por status</a:t>
+              <a:t>Em Relatórios, Executivo, filtre o mês: cobrado, recebido e vencido. Exporte em PDF.</a:t>
             </a:r>
             <a:endParaRPr lang="en-US" sz="1500" dirty="0"/>
           </a:p>
@@ -7556,7 +8175,7 @@
                 <a:ea typeface="Arial" pitchFamily="34" charset="-122"/>
                 <a:cs typeface="Arial" pitchFamily="34" charset="-120"/>
               </a:rPr>
-              <a:t>Usinas: receita e energia por usina · Clientes: top clientes e economia</a:t>
+              <a:t>Nos relatórios de usinas e clientes, veja receita por usina e economia dos clientes. Exporte em Excel.</a:t>
             </a:r>
             <a:endParaRPr lang="en-US" sz="1500" dirty="0"/>
           </a:p>
@@ -7607,7 +8226,7 @@
                 <a:ea typeface="Arial" pitchFamily="34" charset="-122"/>
                 <a:cs typeface="Arial" pitchFamily="34" charset="-120"/>
               </a:rPr>
-              <a:t>12 indicadores · meta × resultado · semáforo</a:t>
+              <a:t>Preencha o painel de doze indicadores e escreva cinco linhas sobre o mês.</a:t>
             </a:r>
             <a:endParaRPr lang="en-US" sz="1500" dirty="0"/>
           </a:p>
@@ -7658,7 +8277,7 @@
                 <a:ea typeface="Arial" pitchFamily="34" charset="-122"/>
                 <a:cs typeface="Arial" pitchFamily="34" charset="-120"/>
               </a:rPr>
-              <a:t>Para os clientes: relatório de economia · Para o produtor: relatório mensal de 1 página</a:t>
+              <a:t>Exporte o relatório de economia de três clientes e monte o relatório do produtor.</a:t>
             </a:r>
             <a:endParaRPr lang="en-US" sz="1500" dirty="0"/>
           </a:p>
@@ -8230,7 +8849,7 @@
                 <a:ea typeface="Arial" pitchFamily="34" charset="-122"/>
                 <a:cs typeface="Arial" pitchFamily="34" charset="-120"/>
               </a:rPr>
-              <a:t>M10 · Fechamento</a:t>
+              <a:t>M10 · Teste rápido</a:t>
             </a:r>
             <a:endParaRPr lang="en-US" sz="900" dirty="0"/>
           </a:p>
@@ -8289,7 +8908,7 @@
                 <a:ea typeface="Arial" pitchFamily="34" charset="-122"/>
                 <a:cs typeface="Arial" pitchFamily="34" charset="-120"/>
               </a:rPr>
-              <a:t>FECHAMENTO DO MÓDULO</a:t>
+              <a:t>QUESTÕES 1–2 DE 5</a:t>
             </a:r>
             <a:endParaRPr lang="en-US" sz="1000" dirty="0"/>
           </a:p>
@@ -8330,7 +8949,7 @@
                 <a:ea typeface="Arial" pitchFamily="34" charset="-122"/>
                 <a:cs typeface="Arial" pitchFamily="34" charset="-120"/>
               </a:rPr>
-              <a:t>Pratique e entregue</a:t>
+              <a:t>Teste rápido</a:t>
             </a:r>
             <a:endParaRPr lang="en-US" sz="2600" dirty="0"/>
           </a:p>
@@ -8338,142 +8957,17 @@
       </p:sp>
       <p:sp>
         <p:nvSpPr>
-          <p:cNvPr id="9" name="Text 6"/>
+          <p:cNvPr id="9" name="Shape 6"/>
           <p:cNvSpPr/>
           <p:nvPr/>
         </p:nvSpPr>
         <p:spPr>
           <a:xfrm>
             <a:off x="548640" y="1325880"/>
-            <a:ext cx="5394960" cy="411480"/>
-          </a:xfrm>
-          <a:prstGeom prst="rect">
-            <a:avLst/>
-          </a:prstGeom>
-          <a:noFill/>
-          <a:ln/>
-        </p:spPr>
-        <p:txBody>
-          <a:bodyPr wrap="square" rtlCol="0" anchor="ctr"/>
-          <a:lstStyle/>
-          <a:p>
-            <a:pPr indent="0" marL="0">
-              <a:buNone/>
-            </a:pPr>
-            <a:r>
-              <a:rPr lang="en-US" sz="1600" b="1" dirty="0">
-                <a:solidFill>
-                  <a:srgbClr val="1B3A6B"/>
-                </a:solidFill>
-                <a:latin typeface="Arial" pitchFamily="34" charset="0"/>
-                <a:ea typeface="Arial" pitchFamily="34" charset="-122"/>
-                <a:cs typeface="Arial" pitchFamily="34" charset="-120"/>
-              </a:rPr>
-              <a:t>Exercícios</a:t>
-            </a:r>
-            <a:endParaRPr lang="en-US" sz="1600" dirty="0"/>
-          </a:p>
-        </p:txBody>
-      </p:sp>
-      <p:sp>
-        <p:nvSpPr>
-          <p:cNvPr id="10" name="Text 7"/>
-          <p:cNvSpPr/>
-          <p:nvPr/>
-        </p:nvSpPr>
-        <p:spPr>
-          <a:xfrm>
-            <a:off x="548640" y="1783080"/>
-            <a:ext cx="5394960" cy="4480560"/>
-          </a:xfrm>
-          <a:prstGeom prst="rect">
-            <a:avLst/>
-          </a:prstGeom>
-          <a:noFill/>
-          <a:ln/>
-        </p:spPr>
-        <p:txBody>
-          <a:bodyPr wrap="square" rtlCol="0" anchor="t">
-            <a:normAutofit/>
-          </a:bodyPr>
-          <a:lstStyle/>
-          <a:p>
-            <a:pPr indent="0" marL="0">
-              <a:spcAft>
-                <a:spcPts val="800"/>
-              </a:spcAft>
-              <a:buNone/>
-            </a:pPr>
-            <a:r>
-              <a:rPr lang="en-US" sz="1600" dirty="0">
-                <a:solidFill>
-                  <a:srgbClr val="1F2937"/>
-                </a:solidFill>
-                <a:latin typeface="Arial" pitchFamily="34" charset="0"/>
-                <a:ea typeface="Arial" pitchFamily="34" charset="-122"/>
-                <a:cs typeface="Arial" pitchFamily="34" charset="-120"/>
-              </a:rPr>
-              <a:t>1. Usina com 60.000 kWh disponíveis e 54.600 kWh alocados: taxa de ocupação?</a:t>
-            </a:r>
-            <a:endParaRPr lang="en-US" sz="1600" dirty="0"/>
-          </a:p>
-          <a:p>
-            <a:pPr indent="0" marL="0">
-              <a:spcAft>
-                <a:spcPts val="800"/>
-              </a:spcAft>
-              <a:buNone/>
-            </a:pPr>
-            <a:r>
-              <a:rPr lang="en-US" sz="1600" dirty="0">
-                <a:solidFill>
-                  <a:srgbClr val="1F2937"/>
-                </a:solidFill>
-                <a:latin typeface="Arial" pitchFamily="34" charset="0"/>
-                <a:ea typeface="Arial" pitchFamily="34" charset="-122"/>
-                <a:cs typeface="Arial" pitchFamily="34" charset="-120"/>
-              </a:rPr>
-              <a:t>2. Faturado R$ 30.000, recebido no mês R$ 27.300 de cobranças do mês: taxa de recebimento?</a:t>
-            </a:r>
-            <a:endParaRPr lang="en-US" sz="1600" dirty="0"/>
-          </a:p>
-          <a:p>
-            <a:pPr indent="0" marL="0">
-              <a:spcAft>
-                <a:spcPts val="800"/>
-              </a:spcAft>
-              <a:buNone/>
-            </a:pPr>
-            <a:r>
-              <a:rPr lang="en-US" sz="1600" dirty="0">
-                <a:solidFill>
-                  <a:srgbClr val="1F2937"/>
-                </a:solidFill>
-                <a:latin typeface="Arial" pitchFamily="34" charset="0"/>
-                <a:ea typeface="Arial" pitchFamily="34" charset="-122"/>
-                <a:cs typeface="Arial" pitchFamily="34" charset="-120"/>
-              </a:rPr>
-              <a:t>3. 300 clientes, 6 cancelamentos no mês: churn mensal? E anual aproximado?</a:t>
-            </a:r>
-            <a:endParaRPr lang="en-US" sz="1600" dirty="0"/>
-          </a:p>
-        </p:txBody>
-      </p:sp>
-      <p:sp>
-        <p:nvSpPr>
-          <p:cNvPr id="11" name="Shape 8"/>
-          <p:cNvSpPr/>
-          <p:nvPr/>
-        </p:nvSpPr>
-        <p:spPr>
-          <a:xfrm>
-            <a:off x="6172200" y="1325880"/>
-            <a:ext cx="5468112" cy="4937760"/>
-          </a:xfrm>
-          <a:prstGeom prst="roundRect">
-            <a:avLst>
-              <a:gd name="adj" fmla="val 1852"/>
-            </a:avLst>
+            <a:ext cx="502920" cy="502920"/>
+          </a:xfrm>
+          <a:prstGeom prst="ellipse">
+            <a:avLst/>
           </a:prstGeom>
           <a:solidFill>
             <a:srgbClr val="1B3A6B"/>
@@ -8483,32 +8977,135 @@
       </p:sp>
       <p:sp>
         <p:nvSpPr>
-          <p:cNvPr id="12" name="Text 9"/>
-          <p:cNvSpPr/>
-          <p:nvPr/>
-        </p:nvSpPr>
-        <p:spPr>
-          <a:xfrm>
-            <a:off x="6492240" y="1554480"/>
-            <a:ext cx="4828032" cy="4480560"/>
-          </a:xfrm>
-          <a:prstGeom prst="rect">
-            <a:avLst/>
-          </a:prstGeom>
-          <a:noFill/>
-          <a:ln/>
-        </p:spPr>
-        <p:txBody>
-          <a:bodyPr wrap="square" rtlCol="0" anchor="t">
-            <a:normAutofit/>
-          </a:bodyPr>
-          <a:lstStyle/>
-          <a:p>
-            <a:pPr indent="0" marL="0">
-              <a:buNone/>
-            </a:pPr>
-            <a:r>
-              <a:rPr lang="en-US" sz="1300" b="1" spc="100" kern="0" dirty="0">
+          <p:cNvPr id="10" name="Text 7"/>
+          <p:cNvSpPr/>
+          <p:nvPr/>
+        </p:nvSpPr>
+        <p:spPr>
+          <a:xfrm>
+            <a:off x="548640" y="1325880"/>
+            <a:ext cx="502920" cy="502920"/>
+          </a:xfrm>
+          <a:prstGeom prst="rect">
+            <a:avLst/>
+          </a:prstGeom>
+          <a:noFill/>
+          <a:ln/>
+        </p:spPr>
+        <p:txBody>
+          <a:bodyPr wrap="square" rtlCol="0" anchor="ctr"/>
+          <a:lstStyle/>
+          <a:p>
+            <a:pPr algn="ctr" indent="0" marL="0">
+              <a:buNone/>
+            </a:pPr>
+            <a:r>
+              <a:rPr lang="en-US" sz="1600" b="1" dirty="0">
+                <a:solidFill>
+                  <a:srgbClr val="FFFFFF"/>
+                </a:solidFill>
+                <a:latin typeface="Arial" pitchFamily="34" charset="0"/>
+                <a:ea typeface="Arial" pitchFamily="34" charset="-122"/>
+                <a:cs typeface="Arial" pitchFamily="34" charset="-120"/>
+              </a:rPr>
+              <a:t>1</a:t>
+            </a:r>
+            <a:endParaRPr lang="en-US" sz="1600" dirty="0"/>
+          </a:p>
+        </p:txBody>
+      </p:sp>
+      <p:sp>
+        <p:nvSpPr>
+          <p:cNvPr id="11" name="Text 8"/>
+          <p:cNvSpPr/>
+          <p:nvPr/>
+        </p:nvSpPr>
+        <p:spPr>
+          <a:xfrm>
+            <a:off x="1234440" y="1280160"/>
+            <a:ext cx="10424160" cy="640080"/>
+          </a:xfrm>
+          <a:prstGeom prst="rect">
+            <a:avLst/>
+          </a:prstGeom>
+          <a:noFill/>
+          <a:ln/>
+        </p:spPr>
+        <p:txBody>
+          <a:bodyPr wrap="square" rtlCol="0" anchor="ctr"/>
+          <a:lstStyle/>
+          <a:p>
+            <a:pPr indent="0" marL="0">
+              <a:buNone/>
+            </a:pPr>
+            <a:r>
+              <a:rPr lang="en-US" sz="1800" b="1" dirty="0">
+                <a:solidFill>
+                  <a:srgbClr val="1B3A6B"/>
+                </a:solidFill>
+                <a:latin typeface="Arial" pitchFamily="34" charset="0"/>
+                <a:ea typeface="Arial" pitchFamily="34" charset="-122"/>
+                <a:cs typeface="Arial" pitchFamily="34" charset="-120"/>
+              </a:rPr>
+              <a:t>Taxa de ocupação da usina =</a:t>
+            </a:r>
+            <a:endParaRPr lang="en-US" sz="1800" dirty="0"/>
+          </a:p>
+        </p:txBody>
+      </p:sp>
+      <p:sp>
+        <p:nvSpPr>
+          <p:cNvPr id="12" name="Shape 9"/>
+          <p:cNvSpPr/>
+          <p:nvPr/>
+        </p:nvSpPr>
+        <p:spPr>
+          <a:xfrm>
+            <a:off x="548640" y="2057400"/>
+            <a:ext cx="2601468" cy="1463040"/>
+          </a:xfrm>
+          <a:prstGeom prst="roundRect">
+            <a:avLst>
+              <a:gd name="adj" fmla="val 5000"/>
+            </a:avLst>
+          </a:prstGeom>
+          <a:solidFill>
+            <a:srgbClr val="FFFFFF"/>
+          </a:solidFill>
+          <a:ln w="9525">
+            <a:solidFill>
+              <a:srgbClr val="D8E0EC"/>
+            </a:solidFill>
+            <a:prstDash val="solid"/>
+          </a:ln>
+        </p:spPr>
+      </p:sp>
+      <p:sp>
+        <p:nvSpPr>
+          <p:cNvPr id="13" name="Text 10"/>
+          <p:cNvSpPr/>
+          <p:nvPr/>
+        </p:nvSpPr>
+        <p:spPr>
+          <a:xfrm>
+            <a:off x="685800" y="2148840"/>
+            <a:ext cx="365760" cy="365760"/>
+          </a:xfrm>
+          <a:prstGeom prst="rect">
+            <a:avLst/>
+          </a:prstGeom>
+          <a:noFill/>
+          <a:ln/>
+        </p:spPr>
+        <p:txBody>
+          <a:bodyPr wrap="square" rtlCol="0" anchor="ctr"/>
+          <a:lstStyle/>
+          <a:p>
+            <a:pPr indent="0" marL="0">
+              <a:buNone/>
+            </a:pPr>
+            <a:r>
+              <a:rPr lang="en-US" sz="1400" b="1" dirty="0">
                 <a:solidFill>
                   <a:srgbClr val="F7A23B"/>
                 </a:solidFill>
@@ -8516,14 +9113,412 @@
                 <a:ea typeface="Arial" pitchFamily="34" charset="-122"/>
                 <a:cs typeface="Arial" pitchFamily="34" charset="-120"/>
               </a:rPr>
-              <a:t>ENTREGÁVEL DO MÓDULO
-</a:t>
-            </a:r>
-            <a:pPr indent="0" marL="0">
-              <a:buNone/>
-            </a:pPr>
-            <a:r>
-              <a:rPr lang="en-US" sz="1600" dirty="0">
+              <a:t>A</a:t>
+            </a:r>
+            <a:endParaRPr lang="en-US" sz="1400" dirty="0"/>
+          </a:p>
+        </p:txBody>
+      </p:sp>
+      <p:sp>
+        <p:nvSpPr>
+          <p:cNvPr id="14" name="Text 11"/>
+          <p:cNvSpPr/>
+          <p:nvPr/>
+        </p:nvSpPr>
+        <p:spPr>
+          <a:xfrm>
+            <a:off x="685800" y="2514600"/>
+            <a:ext cx="2327148" cy="914400"/>
+          </a:xfrm>
+          <a:prstGeom prst="rect">
+            <a:avLst/>
+          </a:prstGeom>
+          <a:noFill/>
+          <a:ln/>
+        </p:spPr>
+        <p:txBody>
+          <a:bodyPr wrap="square" rtlCol="0" anchor="t"/>
+          <a:lstStyle/>
+          <a:p>
+            <a:pPr indent="0" marL="0">
+              <a:buNone/>
+            </a:pPr>
+            <a:r>
+              <a:rPr lang="en-US" sz="1500" dirty="0">
+                <a:solidFill>
+                  <a:srgbClr val="1F2937"/>
+                </a:solidFill>
+                <a:latin typeface="Arial" pitchFamily="34" charset="0"/>
+                <a:ea typeface="Arial" pitchFamily="34" charset="-122"/>
+                <a:cs typeface="Arial" pitchFamily="34" charset="-120"/>
+              </a:rPr>
+              <a:t>energia alocada ÷ energia disponível</a:t>
+            </a:r>
+            <a:endParaRPr lang="en-US" sz="1500" dirty="0"/>
+          </a:p>
+        </p:txBody>
+      </p:sp>
+      <p:sp>
+        <p:nvSpPr>
+          <p:cNvPr id="15" name="Shape 12"/>
+          <p:cNvSpPr/>
+          <p:nvPr/>
+        </p:nvSpPr>
+        <p:spPr>
+          <a:xfrm>
+            <a:off x="3378708" y="2057400"/>
+            <a:ext cx="2601468" cy="1463040"/>
+          </a:xfrm>
+          <a:prstGeom prst="roundRect">
+            <a:avLst>
+              <a:gd name="adj" fmla="val 5000"/>
+            </a:avLst>
+          </a:prstGeom>
+          <a:solidFill>
+            <a:srgbClr val="FFFFFF"/>
+          </a:solidFill>
+          <a:ln w="9525">
+            <a:solidFill>
+              <a:srgbClr val="D8E0EC"/>
+            </a:solidFill>
+            <a:prstDash val="solid"/>
+          </a:ln>
+        </p:spPr>
+      </p:sp>
+      <p:sp>
+        <p:nvSpPr>
+          <p:cNvPr id="16" name="Text 13"/>
+          <p:cNvSpPr/>
+          <p:nvPr/>
+        </p:nvSpPr>
+        <p:spPr>
+          <a:xfrm>
+            <a:off x="3515868" y="2148840"/>
+            <a:ext cx="365760" cy="365760"/>
+          </a:xfrm>
+          <a:prstGeom prst="rect">
+            <a:avLst/>
+          </a:prstGeom>
+          <a:noFill/>
+          <a:ln/>
+        </p:spPr>
+        <p:txBody>
+          <a:bodyPr wrap="square" rtlCol="0" anchor="ctr"/>
+          <a:lstStyle/>
+          <a:p>
+            <a:pPr indent="0" marL="0">
+              <a:buNone/>
+            </a:pPr>
+            <a:r>
+              <a:rPr lang="en-US" sz="1400" b="1" dirty="0">
+                <a:solidFill>
+                  <a:srgbClr val="F7A23B"/>
+                </a:solidFill>
+                <a:latin typeface="Arial" pitchFamily="34" charset="0"/>
+                <a:ea typeface="Arial" pitchFamily="34" charset="-122"/>
+                <a:cs typeface="Arial" pitchFamily="34" charset="-120"/>
+              </a:rPr>
+              <a:t>B</a:t>
+            </a:r>
+            <a:endParaRPr lang="en-US" sz="1400" dirty="0"/>
+          </a:p>
+        </p:txBody>
+      </p:sp>
+      <p:sp>
+        <p:nvSpPr>
+          <p:cNvPr id="17" name="Text 14"/>
+          <p:cNvSpPr/>
+          <p:nvPr/>
+        </p:nvSpPr>
+        <p:spPr>
+          <a:xfrm>
+            <a:off x="3515868" y="2514600"/>
+            <a:ext cx="2327148" cy="914400"/>
+          </a:xfrm>
+          <a:prstGeom prst="rect">
+            <a:avLst/>
+          </a:prstGeom>
+          <a:noFill/>
+          <a:ln/>
+        </p:spPr>
+        <p:txBody>
+          <a:bodyPr wrap="square" rtlCol="0" anchor="t"/>
+          <a:lstStyle/>
+          <a:p>
+            <a:pPr indent="0" marL="0">
+              <a:buNone/>
+            </a:pPr>
+            <a:r>
+              <a:rPr lang="en-US" sz="1500" dirty="0">
+                <a:solidFill>
+                  <a:srgbClr val="1F2937"/>
+                </a:solidFill>
+                <a:latin typeface="Arial" pitchFamily="34" charset="0"/>
+                <a:ea typeface="Arial" pitchFamily="34" charset="-122"/>
+                <a:cs typeface="Arial" pitchFamily="34" charset="-120"/>
+              </a:rPr>
+              <a:t>clientes ÷ usinas</a:t>
+            </a:r>
+            <a:endParaRPr lang="en-US" sz="1500" dirty="0"/>
+          </a:p>
+        </p:txBody>
+      </p:sp>
+      <p:sp>
+        <p:nvSpPr>
+          <p:cNvPr id="18" name="Shape 15"/>
+          <p:cNvSpPr/>
+          <p:nvPr/>
+        </p:nvSpPr>
+        <p:spPr>
+          <a:xfrm>
+            <a:off x="6208776" y="2057400"/>
+            <a:ext cx="2601468" cy="1463040"/>
+          </a:xfrm>
+          <a:prstGeom prst="roundRect">
+            <a:avLst>
+              <a:gd name="adj" fmla="val 5000"/>
+            </a:avLst>
+          </a:prstGeom>
+          <a:solidFill>
+            <a:srgbClr val="FFFFFF"/>
+          </a:solidFill>
+          <a:ln w="9525">
+            <a:solidFill>
+              <a:srgbClr val="D8E0EC"/>
+            </a:solidFill>
+            <a:prstDash val="solid"/>
+          </a:ln>
+        </p:spPr>
+      </p:sp>
+      <p:sp>
+        <p:nvSpPr>
+          <p:cNvPr id="19" name="Text 16"/>
+          <p:cNvSpPr/>
+          <p:nvPr/>
+        </p:nvSpPr>
+        <p:spPr>
+          <a:xfrm>
+            <a:off x="6345936" y="2148840"/>
+            <a:ext cx="365760" cy="365760"/>
+          </a:xfrm>
+          <a:prstGeom prst="rect">
+            <a:avLst/>
+          </a:prstGeom>
+          <a:noFill/>
+          <a:ln/>
+        </p:spPr>
+        <p:txBody>
+          <a:bodyPr wrap="square" rtlCol="0" anchor="ctr"/>
+          <a:lstStyle/>
+          <a:p>
+            <a:pPr indent="0" marL="0">
+              <a:buNone/>
+            </a:pPr>
+            <a:r>
+              <a:rPr lang="en-US" sz="1400" b="1" dirty="0">
+                <a:solidFill>
+                  <a:srgbClr val="F7A23B"/>
+                </a:solidFill>
+                <a:latin typeface="Arial" pitchFamily="34" charset="0"/>
+                <a:ea typeface="Arial" pitchFamily="34" charset="-122"/>
+                <a:cs typeface="Arial" pitchFamily="34" charset="-120"/>
+              </a:rPr>
+              <a:t>C</a:t>
+            </a:r>
+            <a:endParaRPr lang="en-US" sz="1400" dirty="0"/>
+          </a:p>
+        </p:txBody>
+      </p:sp>
+      <p:sp>
+        <p:nvSpPr>
+          <p:cNvPr id="20" name="Text 17"/>
+          <p:cNvSpPr/>
+          <p:nvPr/>
+        </p:nvSpPr>
+        <p:spPr>
+          <a:xfrm>
+            <a:off x="6345936" y="2514600"/>
+            <a:ext cx="2327148" cy="914400"/>
+          </a:xfrm>
+          <a:prstGeom prst="rect">
+            <a:avLst/>
+          </a:prstGeom>
+          <a:noFill/>
+          <a:ln/>
+        </p:spPr>
+        <p:txBody>
+          <a:bodyPr wrap="square" rtlCol="0" anchor="t"/>
+          <a:lstStyle/>
+          <a:p>
+            <a:pPr indent="0" marL="0">
+              <a:buNone/>
+            </a:pPr>
+            <a:r>
+              <a:rPr lang="en-US" sz="1500" dirty="0">
+                <a:solidFill>
+                  <a:srgbClr val="1F2937"/>
+                </a:solidFill>
+                <a:latin typeface="Arial" pitchFamily="34" charset="0"/>
+                <a:ea typeface="Arial" pitchFamily="34" charset="-122"/>
+                <a:cs typeface="Arial" pitchFamily="34" charset="-120"/>
+              </a:rPr>
+              <a:t>geração ÷ potência</a:t>
+            </a:r>
+            <a:endParaRPr lang="en-US" sz="1500" dirty="0"/>
+          </a:p>
+        </p:txBody>
+      </p:sp>
+      <p:sp>
+        <p:nvSpPr>
+          <p:cNvPr id="21" name="Shape 18"/>
+          <p:cNvSpPr/>
+          <p:nvPr/>
+        </p:nvSpPr>
+        <p:spPr>
+          <a:xfrm>
+            <a:off x="9038844" y="2057400"/>
+            <a:ext cx="2601468" cy="1463040"/>
+          </a:xfrm>
+          <a:prstGeom prst="roundRect">
+            <a:avLst>
+              <a:gd name="adj" fmla="val 5000"/>
+            </a:avLst>
+          </a:prstGeom>
+          <a:solidFill>
+            <a:srgbClr val="FFFFFF"/>
+          </a:solidFill>
+          <a:ln w="9525">
+            <a:solidFill>
+              <a:srgbClr val="D8E0EC"/>
+            </a:solidFill>
+            <a:prstDash val="solid"/>
+          </a:ln>
+        </p:spPr>
+      </p:sp>
+      <p:sp>
+        <p:nvSpPr>
+          <p:cNvPr id="22" name="Text 19"/>
+          <p:cNvSpPr/>
+          <p:nvPr/>
+        </p:nvSpPr>
+        <p:spPr>
+          <a:xfrm>
+            <a:off x="9176004" y="2148840"/>
+            <a:ext cx="365760" cy="365760"/>
+          </a:xfrm>
+          <a:prstGeom prst="rect">
+            <a:avLst/>
+          </a:prstGeom>
+          <a:noFill/>
+          <a:ln/>
+        </p:spPr>
+        <p:txBody>
+          <a:bodyPr wrap="square" rtlCol="0" anchor="ctr"/>
+          <a:lstStyle/>
+          <a:p>
+            <a:pPr indent="0" marL="0">
+              <a:buNone/>
+            </a:pPr>
+            <a:r>
+              <a:rPr lang="en-US" sz="1400" b="1" dirty="0">
+                <a:solidFill>
+                  <a:srgbClr val="F7A23B"/>
+                </a:solidFill>
+                <a:latin typeface="Arial" pitchFamily="34" charset="0"/>
+                <a:ea typeface="Arial" pitchFamily="34" charset="-122"/>
+                <a:cs typeface="Arial" pitchFamily="34" charset="-120"/>
+              </a:rPr>
+              <a:t>D</a:t>
+            </a:r>
+            <a:endParaRPr lang="en-US" sz="1400" dirty="0"/>
+          </a:p>
+        </p:txBody>
+      </p:sp>
+      <p:sp>
+        <p:nvSpPr>
+          <p:cNvPr id="23" name="Text 20"/>
+          <p:cNvSpPr/>
+          <p:nvPr/>
+        </p:nvSpPr>
+        <p:spPr>
+          <a:xfrm>
+            <a:off x="9176004" y="2514600"/>
+            <a:ext cx="2327148" cy="914400"/>
+          </a:xfrm>
+          <a:prstGeom prst="rect">
+            <a:avLst/>
+          </a:prstGeom>
+          <a:noFill/>
+          <a:ln/>
+        </p:spPr>
+        <p:txBody>
+          <a:bodyPr wrap="square" rtlCol="0" anchor="t"/>
+          <a:lstStyle/>
+          <a:p>
+            <a:pPr indent="0" marL="0">
+              <a:buNone/>
+            </a:pPr>
+            <a:r>
+              <a:rPr lang="en-US" sz="1500" dirty="0">
+                <a:solidFill>
+                  <a:srgbClr val="1F2937"/>
+                </a:solidFill>
+                <a:latin typeface="Arial" pitchFamily="34" charset="0"/>
+                <a:ea typeface="Arial" pitchFamily="34" charset="-122"/>
+                <a:cs typeface="Arial" pitchFamily="34" charset="-120"/>
+              </a:rPr>
+              <a:t>recebido ÷ faturado</a:t>
+            </a:r>
+            <a:endParaRPr lang="en-US" sz="1500" dirty="0"/>
+          </a:p>
+        </p:txBody>
+      </p:sp>
+      <p:sp>
+        <p:nvSpPr>
+          <p:cNvPr id="24" name="Shape 21"/>
+          <p:cNvSpPr/>
+          <p:nvPr/>
+        </p:nvSpPr>
+        <p:spPr>
+          <a:xfrm>
+            <a:off x="548640" y="3840480"/>
+            <a:ext cx="502920" cy="502920"/>
+          </a:xfrm>
+          <a:prstGeom prst="ellipse">
+            <a:avLst/>
+          </a:prstGeom>
+          <a:solidFill>
+            <a:srgbClr val="1B3A6B"/>
+          </a:solidFill>
+          <a:ln/>
+        </p:spPr>
+      </p:sp>
+      <p:sp>
+        <p:nvSpPr>
+          <p:cNvPr id="25" name="Text 22"/>
+          <p:cNvSpPr/>
+          <p:nvPr/>
+        </p:nvSpPr>
+        <p:spPr>
+          <a:xfrm>
+            <a:off x="548640" y="3840480"/>
+            <a:ext cx="502920" cy="502920"/>
+          </a:xfrm>
+          <a:prstGeom prst="rect">
+            <a:avLst/>
+          </a:prstGeom>
+          <a:noFill/>
+          <a:ln/>
+        </p:spPr>
+        <p:txBody>
+          <a:bodyPr wrap="square" rtlCol="0" anchor="ctr"/>
+          <a:lstStyle/>
+          <a:p>
+            <a:pPr algn="ctr" indent="0" marL="0">
+              <a:buNone/>
+            </a:pPr>
+            <a:r>
+              <a:rPr lang="en-US" sz="1600" b="1" dirty="0">
                 <a:solidFill>
                   <a:srgbClr val="FFFFFF"/>
                 </a:solidFill>
@@ -8531,9 +9526,468 @@
                 <a:ea typeface="Arial" pitchFamily="34" charset="-122"/>
                 <a:cs typeface="Arial" pitchFamily="34" charset="-120"/>
               </a:rPr>
-              <a:t>Relatório mensal da minha operação (meses 1 e 2 do laboratório): painel de 12 indicadores com meta e resultado, comentário de 5 linhas sobre o mês, relatório da usina para o produtor e o relatório de economia de 3 clientes exportados.</a:t>
-            </a:r>
-            <a:endParaRPr lang="en-US" sz="1300" dirty="0"/>
+              <a:t>2</a:t>
+            </a:r>
+            <a:endParaRPr lang="en-US" sz="1600" dirty="0"/>
+          </a:p>
+        </p:txBody>
+      </p:sp>
+      <p:sp>
+        <p:nvSpPr>
+          <p:cNvPr id="26" name="Text 23"/>
+          <p:cNvSpPr/>
+          <p:nvPr/>
+        </p:nvSpPr>
+        <p:spPr>
+          <a:xfrm>
+            <a:off x="1234440" y="3794760"/>
+            <a:ext cx="10424160" cy="640080"/>
+          </a:xfrm>
+          <a:prstGeom prst="rect">
+            <a:avLst/>
+          </a:prstGeom>
+          <a:noFill/>
+          <a:ln/>
+        </p:spPr>
+        <p:txBody>
+          <a:bodyPr wrap="square" rtlCol="0" anchor="ctr"/>
+          <a:lstStyle/>
+          <a:p>
+            <a:pPr indent="0" marL="0">
+              <a:buNone/>
+            </a:pPr>
+            <a:r>
+              <a:rPr lang="en-US" sz="1800" b="1" dirty="0">
+                <a:solidFill>
+                  <a:srgbClr val="1B3A6B"/>
+                </a:solidFill>
+                <a:latin typeface="Arial" pitchFamily="34" charset="0"/>
+                <a:ea typeface="Arial" pitchFamily="34" charset="-122"/>
+                <a:cs typeface="Arial" pitchFamily="34" charset="-120"/>
+              </a:rPr>
+              <a:t>Churn mede:</a:t>
+            </a:r>
+            <a:endParaRPr lang="en-US" sz="1800" dirty="0"/>
+          </a:p>
+        </p:txBody>
+      </p:sp>
+      <p:sp>
+        <p:nvSpPr>
+          <p:cNvPr id="27" name="Shape 24"/>
+          <p:cNvSpPr/>
+          <p:nvPr/>
+        </p:nvSpPr>
+        <p:spPr>
+          <a:xfrm>
+            <a:off x="548640" y="4572000"/>
+            <a:ext cx="2601468" cy="1463040"/>
+          </a:xfrm>
+          <a:prstGeom prst="roundRect">
+            <a:avLst>
+              <a:gd name="adj" fmla="val 5000"/>
+            </a:avLst>
+          </a:prstGeom>
+          <a:solidFill>
+            <a:srgbClr val="FFFFFF"/>
+          </a:solidFill>
+          <a:ln w="9525">
+            <a:solidFill>
+              <a:srgbClr val="D8E0EC"/>
+            </a:solidFill>
+            <a:prstDash val="solid"/>
+          </a:ln>
+        </p:spPr>
+      </p:sp>
+      <p:sp>
+        <p:nvSpPr>
+          <p:cNvPr id="28" name="Text 25"/>
+          <p:cNvSpPr/>
+          <p:nvPr/>
+        </p:nvSpPr>
+        <p:spPr>
+          <a:xfrm>
+            <a:off x="685800" y="4663440"/>
+            <a:ext cx="365760" cy="365760"/>
+          </a:xfrm>
+          <a:prstGeom prst="rect">
+            <a:avLst/>
+          </a:prstGeom>
+          <a:noFill/>
+          <a:ln/>
+        </p:spPr>
+        <p:txBody>
+          <a:bodyPr wrap="square" rtlCol="0" anchor="ctr"/>
+          <a:lstStyle/>
+          <a:p>
+            <a:pPr indent="0" marL="0">
+              <a:buNone/>
+            </a:pPr>
+            <a:r>
+              <a:rPr lang="en-US" sz="1400" b="1" dirty="0">
+                <a:solidFill>
+                  <a:srgbClr val="F7A23B"/>
+                </a:solidFill>
+                <a:latin typeface="Arial" pitchFamily="34" charset="0"/>
+                <a:ea typeface="Arial" pitchFamily="34" charset="-122"/>
+                <a:cs typeface="Arial" pitchFamily="34" charset="-120"/>
+              </a:rPr>
+              <a:t>A</a:t>
+            </a:r>
+            <a:endParaRPr lang="en-US" sz="1400" dirty="0"/>
+          </a:p>
+        </p:txBody>
+      </p:sp>
+      <p:sp>
+        <p:nvSpPr>
+          <p:cNvPr id="29" name="Text 26"/>
+          <p:cNvSpPr/>
+          <p:nvPr/>
+        </p:nvSpPr>
+        <p:spPr>
+          <a:xfrm>
+            <a:off x="685800" y="5029200"/>
+            <a:ext cx="2327148" cy="914400"/>
+          </a:xfrm>
+          <a:prstGeom prst="rect">
+            <a:avLst/>
+          </a:prstGeom>
+          <a:noFill/>
+          <a:ln/>
+        </p:spPr>
+        <p:txBody>
+          <a:bodyPr wrap="square" rtlCol="0" anchor="t"/>
+          <a:lstStyle/>
+          <a:p>
+            <a:pPr indent="0" marL="0">
+              <a:buNone/>
+            </a:pPr>
+            <a:r>
+              <a:rPr lang="en-US" sz="1500" dirty="0">
+                <a:solidFill>
+                  <a:srgbClr val="1F2937"/>
+                </a:solidFill>
+                <a:latin typeface="Arial" pitchFamily="34" charset="0"/>
+                <a:ea typeface="Arial" pitchFamily="34" charset="-122"/>
+                <a:cs typeface="Arial" pitchFamily="34" charset="-120"/>
+              </a:rPr>
+              <a:t>novos clientes</a:t>
+            </a:r>
+            <a:endParaRPr lang="en-US" sz="1500" dirty="0"/>
+          </a:p>
+        </p:txBody>
+      </p:sp>
+      <p:sp>
+        <p:nvSpPr>
+          <p:cNvPr id="30" name="Shape 27"/>
+          <p:cNvSpPr/>
+          <p:nvPr/>
+        </p:nvSpPr>
+        <p:spPr>
+          <a:xfrm>
+            <a:off x="3378708" y="4572000"/>
+            <a:ext cx="2601468" cy="1463040"/>
+          </a:xfrm>
+          <a:prstGeom prst="roundRect">
+            <a:avLst>
+              <a:gd name="adj" fmla="val 5000"/>
+            </a:avLst>
+          </a:prstGeom>
+          <a:solidFill>
+            <a:srgbClr val="FFFFFF"/>
+          </a:solidFill>
+          <a:ln w="9525">
+            <a:solidFill>
+              <a:srgbClr val="D8E0EC"/>
+            </a:solidFill>
+            <a:prstDash val="solid"/>
+          </a:ln>
+        </p:spPr>
+      </p:sp>
+      <p:sp>
+        <p:nvSpPr>
+          <p:cNvPr id="31" name="Text 28"/>
+          <p:cNvSpPr/>
+          <p:nvPr/>
+        </p:nvSpPr>
+        <p:spPr>
+          <a:xfrm>
+            <a:off x="3515868" y="4663440"/>
+            <a:ext cx="365760" cy="365760"/>
+          </a:xfrm>
+          <a:prstGeom prst="rect">
+            <a:avLst/>
+          </a:prstGeom>
+          <a:noFill/>
+          <a:ln/>
+        </p:spPr>
+        <p:txBody>
+          <a:bodyPr wrap="square" rtlCol="0" anchor="ctr"/>
+          <a:lstStyle/>
+          <a:p>
+            <a:pPr indent="0" marL="0">
+              <a:buNone/>
+            </a:pPr>
+            <a:r>
+              <a:rPr lang="en-US" sz="1400" b="1" dirty="0">
+                <a:solidFill>
+                  <a:srgbClr val="F7A23B"/>
+                </a:solidFill>
+                <a:latin typeface="Arial" pitchFamily="34" charset="0"/>
+                <a:ea typeface="Arial" pitchFamily="34" charset="-122"/>
+                <a:cs typeface="Arial" pitchFamily="34" charset="-120"/>
+              </a:rPr>
+              <a:t>B</a:t>
+            </a:r>
+            <a:endParaRPr lang="en-US" sz="1400" dirty="0"/>
+          </a:p>
+        </p:txBody>
+      </p:sp>
+      <p:sp>
+        <p:nvSpPr>
+          <p:cNvPr id="32" name="Text 29"/>
+          <p:cNvSpPr/>
+          <p:nvPr/>
+        </p:nvSpPr>
+        <p:spPr>
+          <a:xfrm>
+            <a:off x="3515868" y="5029200"/>
+            <a:ext cx="2327148" cy="914400"/>
+          </a:xfrm>
+          <a:prstGeom prst="rect">
+            <a:avLst/>
+          </a:prstGeom>
+          <a:noFill/>
+          <a:ln/>
+        </p:spPr>
+        <p:txBody>
+          <a:bodyPr wrap="square" rtlCol="0" anchor="t"/>
+          <a:lstStyle/>
+          <a:p>
+            <a:pPr indent="0" marL="0">
+              <a:buNone/>
+            </a:pPr>
+            <a:r>
+              <a:rPr lang="en-US" sz="1500" dirty="0">
+                <a:solidFill>
+                  <a:srgbClr val="1F2937"/>
+                </a:solidFill>
+                <a:latin typeface="Arial" pitchFamily="34" charset="0"/>
+                <a:ea typeface="Arial" pitchFamily="34" charset="-122"/>
+                <a:cs typeface="Arial" pitchFamily="34" charset="-120"/>
+              </a:rPr>
+              <a:t>clientes que cancelam no período</a:t>
+            </a:r>
+            <a:endParaRPr lang="en-US" sz="1500" dirty="0"/>
+          </a:p>
+        </p:txBody>
+      </p:sp>
+      <p:sp>
+        <p:nvSpPr>
+          <p:cNvPr id="33" name="Shape 30"/>
+          <p:cNvSpPr/>
+          <p:nvPr/>
+        </p:nvSpPr>
+        <p:spPr>
+          <a:xfrm>
+            <a:off x="6208776" y="4572000"/>
+            <a:ext cx="2601468" cy="1463040"/>
+          </a:xfrm>
+          <a:prstGeom prst="roundRect">
+            <a:avLst>
+              <a:gd name="adj" fmla="val 5000"/>
+            </a:avLst>
+          </a:prstGeom>
+          <a:solidFill>
+            <a:srgbClr val="FFFFFF"/>
+          </a:solidFill>
+          <a:ln w="9525">
+            <a:solidFill>
+              <a:srgbClr val="D8E0EC"/>
+            </a:solidFill>
+            <a:prstDash val="solid"/>
+          </a:ln>
+        </p:spPr>
+      </p:sp>
+      <p:sp>
+        <p:nvSpPr>
+          <p:cNvPr id="34" name="Text 31"/>
+          <p:cNvSpPr/>
+          <p:nvPr/>
+        </p:nvSpPr>
+        <p:spPr>
+          <a:xfrm>
+            <a:off x="6345936" y="4663440"/>
+            <a:ext cx="365760" cy="365760"/>
+          </a:xfrm>
+          <a:prstGeom prst="rect">
+            <a:avLst/>
+          </a:prstGeom>
+          <a:noFill/>
+          <a:ln/>
+        </p:spPr>
+        <p:txBody>
+          <a:bodyPr wrap="square" rtlCol="0" anchor="ctr"/>
+          <a:lstStyle/>
+          <a:p>
+            <a:pPr indent="0" marL="0">
+              <a:buNone/>
+            </a:pPr>
+            <a:r>
+              <a:rPr lang="en-US" sz="1400" b="1" dirty="0">
+                <a:solidFill>
+                  <a:srgbClr val="F7A23B"/>
+                </a:solidFill>
+                <a:latin typeface="Arial" pitchFamily="34" charset="0"/>
+                <a:ea typeface="Arial" pitchFamily="34" charset="-122"/>
+                <a:cs typeface="Arial" pitchFamily="34" charset="-120"/>
+              </a:rPr>
+              <a:t>C</a:t>
+            </a:r>
+            <a:endParaRPr lang="en-US" sz="1400" dirty="0"/>
+          </a:p>
+        </p:txBody>
+      </p:sp>
+      <p:sp>
+        <p:nvSpPr>
+          <p:cNvPr id="35" name="Text 32"/>
+          <p:cNvSpPr/>
+          <p:nvPr/>
+        </p:nvSpPr>
+        <p:spPr>
+          <a:xfrm>
+            <a:off x="6345936" y="5029200"/>
+            <a:ext cx="2327148" cy="914400"/>
+          </a:xfrm>
+          <a:prstGeom prst="rect">
+            <a:avLst/>
+          </a:prstGeom>
+          <a:noFill/>
+          <a:ln/>
+        </p:spPr>
+        <p:txBody>
+          <a:bodyPr wrap="square" rtlCol="0" anchor="t"/>
+          <a:lstStyle/>
+          <a:p>
+            <a:pPr indent="0" marL="0">
+              <a:buNone/>
+            </a:pPr>
+            <a:r>
+              <a:rPr lang="en-US" sz="1500" dirty="0">
+                <a:solidFill>
+                  <a:srgbClr val="1F2937"/>
+                </a:solidFill>
+                <a:latin typeface="Arial" pitchFamily="34" charset="0"/>
+                <a:ea typeface="Arial" pitchFamily="34" charset="-122"/>
+                <a:cs typeface="Arial" pitchFamily="34" charset="-120"/>
+              </a:rPr>
+              <a:t>inadimplência</a:t>
+            </a:r>
+            <a:endParaRPr lang="en-US" sz="1500" dirty="0"/>
+          </a:p>
+        </p:txBody>
+      </p:sp>
+      <p:sp>
+        <p:nvSpPr>
+          <p:cNvPr id="36" name="Shape 33"/>
+          <p:cNvSpPr/>
+          <p:nvPr/>
+        </p:nvSpPr>
+        <p:spPr>
+          <a:xfrm>
+            <a:off x="9038844" y="4572000"/>
+            <a:ext cx="2601468" cy="1463040"/>
+          </a:xfrm>
+          <a:prstGeom prst="roundRect">
+            <a:avLst>
+              <a:gd name="adj" fmla="val 5000"/>
+            </a:avLst>
+          </a:prstGeom>
+          <a:solidFill>
+            <a:srgbClr val="FFFFFF"/>
+          </a:solidFill>
+          <a:ln w="9525">
+            <a:solidFill>
+              <a:srgbClr val="D8E0EC"/>
+            </a:solidFill>
+            <a:prstDash val="solid"/>
+          </a:ln>
+        </p:spPr>
+      </p:sp>
+      <p:sp>
+        <p:nvSpPr>
+          <p:cNvPr id="37" name="Text 34"/>
+          <p:cNvSpPr/>
+          <p:nvPr/>
+        </p:nvSpPr>
+        <p:spPr>
+          <a:xfrm>
+            <a:off x="9176004" y="4663440"/>
+            <a:ext cx="365760" cy="365760"/>
+          </a:xfrm>
+          <a:prstGeom prst="rect">
+            <a:avLst/>
+          </a:prstGeom>
+          <a:noFill/>
+          <a:ln/>
+        </p:spPr>
+        <p:txBody>
+          <a:bodyPr wrap="square" rtlCol="0" anchor="ctr"/>
+          <a:lstStyle/>
+          <a:p>
+            <a:pPr indent="0" marL="0">
+              <a:buNone/>
+            </a:pPr>
+            <a:r>
+              <a:rPr lang="en-US" sz="1400" b="1" dirty="0">
+                <a:solidFill>
+                  <a:srgbClr val="F7A23B"/>
+                </a:solidFill>
+                <a:latin typeface="Arial" pitchFamily="34" charset="0"/>
+                <a:ea typeface="Arial" pitchFamily="34" charset="-122"/>
+                <a:cs typeface="Arial" pitchFamily="34" charset="-120"/>
+              </a:rPr>
+              <a:t>D</a:t>
+            </a:r>
+            <a:endParaRPr lang="en-US" sz="1400" dirty="0"/>
+          </a:p>
+        </p:txBody>
+      </p:sp>
+      <p:sp>
+        <p:nvSpPr>
+          <p:cNvPr id="38" name="Text 35"/>
+          <p:cNvSpPr/>
+          <p:nvPr/>
+        </p:nvSpPr>
+        <p:spPr>
+          <a:xfrm>
+            <a:off x="9176004" y="5029200"/>
+            <a:ext cx="2327148" cy="914400"/>
+          </a:xfrm>
+          <a:prstGeom prst="rect">
+            <a:avLst/>
+          </a:prstGeom>
+          <a:noFill/>
+          <a:ln/>
+        </p:spPr>
+        <p:txBody>
+          <a:bodyPr wrap="square" rtlCol="0" anchor="t"/>
+          <a:lstStyle/>
+          <a:p>
+            <a:pPr indent="0" marL="0">
+              <a:buNone/>
+            </a:pPr>
+            <a:r>
+              <a:rPr lang="en-US" sz="1500" dirty="0">
+                <a:solidFill>
+                  <a:srgbClr val="1F2937"/>
+                </a:solidFill>
+                <a:latin typeface="Arial" pitchFamily="34" charset="0"/>
+                <a:ea typeface="Arial" pitchFamily="34" charset="-122"/>
+                <a:cs typeface="Arial" pitchFamily="34" charset="-120"/>
+              </a:rPr>
+              <a:t>energia perdida</a:t>
+            </a:r>
+            <a:endParaRPr lang="en-US" sz="1500" dirty="0"/>
           </a:p>
         </p:txBody>
       </p:sp>
@@ -9036,6 +10490,3554 @@
 </p:sld>
 </file>
 
+<file path=ppt/slides/slide20.xml><?xml version="1.0" encoding="utf-8"?>
+<p:sld xmlns:a="http://schemas.openxmlformats.org/drawingml/2006/main" xmlns:r="http://schemas.openxmlformats.org/officeDocument/2006/relationships" xmlns:p="http://schemas.openxmlformats.org/presentationml/2006/main">
+  <p:cSld name="Slide 20">
+    <p:bg>
+      <p:bgPr>
+        <a:solidFill>
+          <a:srgbClr val="F6F8FB"/>
+        </a:solidFill>
+      </p:bgPr>
+    </p:bg>
+    <p:spTree>
+      <p:nvGrpSpPr>
+        <p:cNvPr id="1" name=""/>
+        <p:cNvGrpSpPr/>
+        <p:nvPr/>
+      </p:nvGrpSpPr>
+      <p:grpSpPr>
+        <a:xfrm>
+          <a:off x="0" y="0"/>
+          <a:ext cx="0" cy="0"/>
+          <a:chOff x="0" y="0"/>
+          <a:chExt cx="0" cy="0"/>
+        </a:xfrm>
+      </p:grpSpPr>
+      <p:sp>
+        <p:nvSpPr>
+          <p:cNvPr id="2" name="Shape 0"/>
+          <p:cNvSpPr/>
+          <p:nvPr/>
+        </p:nvSpPr>
+        <p:spPr>
+          <a:xfrm>
+            <a:off x="0" y="6510528"/>
+            <a:ext cx="12191695" cy="347472"/>
+          </a:xfrm>
+          <a:prstGeom prst="rect">
+            <a:avLst/>
+          </a:prstGeom>
+          <a:solidFill>
+            <a:srgbClr val="FFFFFF"/>
+          </a:solidFill>
+          <a:ln w="6350">
+            <a:solidFill>
+              <a:srgbClr val="D8E0EC"/>
+            </a:solidFill>
+            <a:prstDash val="solid"/>
+          </a:ln>
+        </p:spPr>
+      </p:sp>
+      <p:pic>
+        <p:nvPicPr>
+          <p:cNvPr id="3" name="Image 0" descr="/www/wwwroot/rexar/gdsolar/docs/curso/slides/assets/logo-gdsolar.png">    </p:cNvPr>
+          <p:cNvPicPr>
+            <a:picLocks noChangeAspect="1"/>
+          </p:cNvPicPr>
+          <p:nvPr/>
+        </p:nvPicPr>
+        <p:blipFill>
+          <a:blip r:embed="rId1"/>
+          <a:stretch>
+            <a:fillRect/>
+          </a:stretch>
+        </p:blipFill>
+        <p:spPr>
+          <a:xfrm>
+            <a:off x="548640" y="6547104"/>
+            <a:ext cx="274320" cy="274320"/>
+          </a:xfrm>
+          <a:prstGeom prst="rect">
+            <a:avLst/>
+          </a:prstGeom>
+        </p:spPr>
+      </p:pic>
+      <p:sp>
+        <p:nvSpPr>
+          <p:cNvPr id="4" name="Text 1"/>
+          <p:cNvSpPr/>
+          <p:nvPr/>
+        </p:nvSpPr>
+        <p:spPr>
+          <a:xfrm>
+            <a:off x="886968" y="6528816"/>
+            <a:ext cx="6400800" cy="310896"/>
+          </a:xfrm>
+          <a:prstGeom prst="rect">
+            <a:avLst/>
+          </a:prstGeom>
+          <a:noFill/>
+          <a:ln/>
+        </p:spPr>
+        <p:txBody>
+          <a:bodyPr wrap="square" rtlCol="0" anchor="ctr"/>
+          <a:lstStyle/>
+          <a:p>
+            <a:pPr indent="0" marL="0">
+              <a:buNone/>
+            </a:pPr>
+            <a:r>
+              <a:rPr lang="en-US" sz="900" b="1" dirty="0">
+                <a:solidFill>
+                  <a:srgbClr val="64748B"/>
+                </a:solidFill>
+                <a:latin typeface="Arial" pitchFamily="34" charset="0"/>
+                <a:ea typeface="Arial" pitchFamily="34" charset="-122"/>
+                <a:cs typeface="Arial" pitchFamily="34" charset="-120"/>
+              </a:rPr>
+              <a:t>GD Solar  ·  Formação em Energia por Assinatura</a:t>
+            </a:r>
+            <a:endParaRPr lang="en-US" sz="900" dirty="0"/>
+          </a:p>
+        </p:txBody>
+      </p:sp>
+      <p:sp>
+        <p:nvSpPr>
+          <p:cNvPr id="5" name="Text 2"/>
+          <p:cNvSpPr/>
+          <p:nvPr/>
+        </p:nvSpPr>
+        <p:spPr>
+          <a:xfrm>
+            <a:off x="7132320" y="6528816"/>
+            <a:ext cx="4023360" cy="310896"/>
+          </a:xfrm>
+          <a:prstGeom prst="rect">
+            <a:avLst/>
+          </a:prstGeom>
+          <a:noFill/>
+          <a:ln/>
+        </p:spPr>
+        <p:txBody>
+          <a:bodyPr wrap="square" rtlCol="0" anchor="ctr"/>
+          <a:lstStyle/>
+          <a:p>
+            <a:pPr algn="r" indent="0" marL="0">
+              <a:buNone/>
+            </a:pPr>
+            <a:r>
+              <a:rPr lang="en-US" sz="900" dirty="0">
+                <a:solidFill>
+                  <a:srgbClr val="64748B"/>
+                </a:solidFill>
+                <a:latin typeface="Arial" pitchFamily="34" charset="0"/>
+                <a:ea typeface="Arial" pitchFamily="34" charset="-122"/>
+                <a:cs typeface="Arial" pitchFamily="34" charset="-120"/>
+              </a:rPr>
+              <a:t>M10 · Teste rápido</a:t>
+            </a:r>
+            <a:endParaRPr lang="en-US" sz="900" dirty="0"/>
+          </a:p>
+        </p:txBody>
+      </p:sp>
+      <p:sp>
+        <p:nvSpPr>
+          <p:cNvPr id="6" name="Shape 3"/>
+          <p:cNvSpPr/>
+          <p:nvPr/>
+        </p:nvSpPr>
+        <p:spPr>
+          <a:xfrm>
+            <a:off x="548640" y="384048"/>
+            <a:ext cx="82296" cy="658368"/>
+          </a:xfrm>
+          <a:prstGeom prst="rect">
+            <a:avLst/>
+          </a:prstGeom>
+          <a:solidFill>
+            <a:srgbClr val="F7A23B"/>
+          </a:solidFill>
+          <a:ln/>
+        </p:spPr>
+      </p:sp>
+      <p:sp>
+        <p:nvSpPr>
+          <p:cNvPr id="7" name="Text 4"/>
+          <p:cNvSpPr/>
+          <p:nvPr/>
+        </p:nvSpPr>
+        <p:spPr>
+          <a:xfrm>
+            <a:off x="777240" y="292608"/>
+            <a:ext cx="10972800" cy="274320"/>
+          </a:xfrm>
+          <a:prstGeom prst="rect">
+            <a:avLst/>
+          </a:prstGeom>
+          <a:noFill/>
+          <a:ln/>
+        </p:spPr>
+        <p:txBody>
+          <a:bodyPr wrap="square" rtlCol="0" anchor="ctr"/>
+          <a:lstStyle/>
+          <a:p>
+            <a:pPr indent="0" marL="0">
+              <a:buNone/>
+            </a:pPr>
+            <a:r>
+              <a:rPr lang="en-US" sz="1000" b="1" spc="100" kern="0" dirty="0">
+                <a:solidFill>
+                  <a:srgbClr val="F7A23B"/>
+                </a:solidFill>
+                <a:latin typeface="Arial" pitchFamily="34" charset="0"/>
+                <a:ea typeface="Arial" pitchFamily="34" charset="-122"/>
+                <a:cs typeface="Arial" pitchFamily="34" charset="-120"/>
+              </a:rPr>
+              <a:t>QUESTÕES 3–4 DE 5</a:t>
+            </a:r>
+            <a:endParaRPr lang="en-US" sz="1000" dirty="0"/>
+          </a:p>
+        </p:txBody>
+      </p:sp>
+      <p:sp>
+        <p:nvSpPr>
+          <p:cNvPr id="8" name="Text 5"/>
+          <p:cNvSpPr/>
+          <p:nvPr/>
+        </p:nvSpPr>
+        <p:spPr>
+          <a:xfrm>
+            <a:off x="777240" y="530352"/>
+            <a:ext cx="10881360" cy="566928"/>
+          </a:xfrm>
+          <a:prstGeom prst="rect">
+            <a:avLst/>
+          </a:prstGeom>
+          <a:noFill/>
+          <a:ln/>
+        </p:spPr>
+        <p:txBody>
+          <a:bodyPr wrap="square" rtlCol="0" anchor="ctr">
+            <a:normAutofit/>
+          </a:bodyPr>
+          <a:lstStyle/>
+          <a:p>
+            <a:pPr indent="0" marL="0">
+              <a:buNone/>
+            </a:pPr>
+            <a:r>
+              <a:rPr lang="en-US" sz="2600" b="1" dirty="0">
+                <a:solidFill>
+                  <a:srgbClr val="1B3A6B"/>
+                </a:solidFill>
+                <a:latin typeface="Arial" pitchFamily="34" charset="0"/>
+                <a:ea typeface="Arial" pitchFamily="34" charset="-122"/>
+                <a:cs typeface="Arial" pitchFamily="34" charset="-120"/>
+              </a:rPr>
+              <a:t>Teste rápido</a:t>
+            </a:r>
+            <a:endParaRPr lang="en-US" sz="2600" dirty="0"/>
+          </a:p>
+        </p:txBody>
+      </p:sp>
+      <p:sp>
+        <p:nvSpPr>
+          <p:cNvPr id="9" name="Shape 6"/>
+          <p:cNvSpPr/>
+          <p:nvPr/>
+        </p:nvSpPr>
+        <p:spPr>
+          <a:xfrm>
+            <a:off x="548640" y="1325880"/>
+            <a:ext cx="502920" cy="502920"/>
+          </a:xfrm>
+          <a:prstGeom prst="ellipse">
+            <a:avLst/>
+          </a:prstGeom>
+          <a:solidFill>
+            <a:srgbClr val="1B3A6B"/>
+          </a:solidFill>
+          <a:ln/>
+        </p:spPr>
+      </p:sp>
+      <p:sp>
+        <p:nvSpPr>
+          <p:cNvPr id="10" name="Text 7"/>
+          <p:cNvSpPr/>
+          <p:nvPr/>
+        </p:nvSpPr>
+        <p:spPr>
+          <a:xfrm>
+            <a:off x="548640" y="1325880"/>
+            <a:ext cx="502920" cy="502920"/>
+          </a:xfrm>
+          <a:prstGeom prst="rect">
+            <a:avLst/>
+          </a:prstGeom>
+          <a:noFill/>
+          <a:ln/>
+        </p:spPr>
+        <p:txBody>
+          <a:bodyPr wrap="square" rtlCol="0" anchor="ctr"/>
+          <a:lstStyle/>
+          <a:p>
+            <a:pPr algn="ctr" indent="0" marL="0">
+              <a:buNone/>
+            </a:pPr>
+            <a:r>
+              <a:rPr lang="en-US" sz="1600" b="1" dirty="0">
+                <a:solidFill>
+                  <a:srgbClr val="FFFFFF"/>
+                </a:solidFill>
+                <a:latin typeface="Arial" pitchFamily="34" charset="0"/>
+                <a:ea typeface="Arial" pitchFamily="34" charset="-122"/>
+                <a:cs typeface="Arial" pitchFamily="34" charset="-120"/>
+              </a:rPr>
+              <a:t>3</a:t>
+            </a:r>
+            <a:endParaRPr lang="en-US" sz="1600" dirty="0"/>
+          </a:p>
+        </p:txBody>
+      </p:sp>
+      <p:sp>
+        <p:nvSpPr>
+          <p:cNvPr id="11" name="Text 8"/>
+          <p:cNvSpPr/>
+          <p:nvPr/>
+        </p:nvSpPr>
+        <p:spPr>
+          <a:xfrm>
+            <a:off x="1234440" y="1280160"/>
+            <a:ext cx="10424160" cy="640080"/>
+          </a:xfrm>
+          <a:prstGeom prst="rect">
+            <a:avLst/>
+          </a:prstGeom>
+          <a:noFill/>
+          <a:ln/>
+        </p:spPr>
+        <p:txBody>
+          <a:bodyPr wrap="square" rtlCol="0" anchor="ctr"/>
+          <a:lstStyle/>
+          <a:p>
+            <a:pPr indent="0" marL="0">
+              <a:buNone/>
+            </a:pPr>
+            <a:r>
+              <a:rPr lang="en-US" sz="1800" b="1" dirty="0">
+                <a:solidFill>
+                  <a:srgbClr val="1B3A6B"/>
+                </a:solidFill>
+                <a:latin typeface="Arial" pitchFamily="34" charset="0"/>
+                <a:ea typeface="Arial" pitchFamily="34" charset="-122"/>
+                <a:cs typeface="Arial" pitchFamily="34" charset="-120"/>
+              </a:rPr>
+              <a:t>O relatório de economia serve principalmente para:</a:t>
+            </a:r>
+            <a:endParaRPr lang="en-US" sz="1800" dirty="0"/>
+          </a:p>
+        </p:txBody>
+      </p:sp>
+      <p:sp>
+        <p:nvSpPr>
+          <p:cNvPr id="12" name="Shape 9"/>
+          <p:cNvSpPr/>
+          <p:nvPr/>
+        </p:nvSpPr>
+        <p:spPr>
+          <a:xfrm>
+            <a:off x="548640" y="2057400"/>
+            <a:ext cx="2601468" cy="1463040"/>
+          </a:xfrm>
+          <a:prstGeom prst="roundRect">
+            <a:avLst>
+              <a:gd name="adj" fmla="val 5000"/>
+            </a:avLst>
+          </a:prstGeom>
+          <a:solidFill>
+            <a:srgbClr val="FFFFFF"/>
+          </a:solidFill>
+          <a:ln w="9525">
+            <a:solidFill>
+              <a:srgbClr val="D8E0EC"/>
+            </a:solidFill>
+            <a:prstDash val="solid"/>
+          </a:ln>
+        </p:spPr>
+      </p:sp>
+      <p:sp>
+        <p:nvSpPr>
+          <p:cNvPr id="13" name="Text 10"/>
+          <p:cNvSpPr/>
+          <p:nvPr/>
+        </p:nvSpPr>
+        <p:spPr>
+          <a:xfrm>
+            <a:off x="685800" y="2148840"/>
+            <a:ext cx="365760" cy="365760"/>
+          </a:xfrm>
+          <a:prstGeom prst="rect">
+            <a:avLst/>
+          </a:prstGeom>
+          <a:noFill/>
+          <a:ln/>
+        </p:spPr>
+        <p:txBody>
+          <a:bodyPr wrap="square" rtlCol="0" anchor="ctr"/>
+          <a:lstStyle/>
+          <a:p>
+            <a:pPr indent="0" marL="0">
+              <a:buNone/>
+            </a:pPr>
+            <a:r>
+              <a:rPr lang="en-US" sz="1400" b="1" dirty="0">
+                <a:solidFill>
+                  <a:srgbClr val="F7A23B"/>
+                </a:solidFill>
+                <a:latin typeface="Arial" pitchFamily="34" charset="0"/>
+                <a:ea typeface="Arial" pitchFamily="34" charset="-122"/>
+                <a:cs typeface="Arial" pitchFamily="34" charset="-120"/>
+              </a:rPr>
+              <a:t>A</a:t>
+            </a:r>
+            <a:endParaRPr lang="en-US" sz="1400" dirty="0"/>
+          </a:p>
+        </p:txBody>
+      </p:sp>
+      <p:sp>
+        <p:nvSpPr>
+          <p:cNvPr id="14" name="Text 11"/>
+          <p:cNvSpPr/>
+          <p:nvPr/>
+        </p:nvSpPr>
+        <p:spPr>
+          <a:xfrm>
+            <a:off x="685800" y="2514600"/>
+            <a:ext cx="2327148" cy="914400"/>
+          </a:xfrm>
+          <a:prstGeom prst="rect">
+            <a:avLst/>
+          </a:prstGeom>
+          <a:noFill/>
+          <a:ln/>
+        </p:spPr>
+        <p:txBody>
+          <a:bodyPr wrap="square" rtlCol="0" anchor="t"/>
+          <a:lstStyle/>
+          <a:p>
+            <a:pPr indent="0" marL="0">
+              <a:buNone/>
+            </a:pPr>
+            <a:r>
+              <a:rPr lang="en-US" sz="1500" dirty="0">
+                <a:solidFill>
+                  <a:srgbClr val="1F2937"/>
+                </a:solidFill>
+                <a:latin typeface="Arial" pitchFamily="34" charset="0"/>
+                <a:ea typeface="Arial" pitchFamily="34" charset="-122"/>
+                <a:cs typeface="Arial" pitchFamily="34" charset="-120"/>
+              </a:rPr>
+              <a:t>mostrar ao cliente quanto ele economizou e reduzir cancelamentos</a:t>
+            </a:r>
+            <a:endParaRPr lang="en-US" sz="1500" dirty="0"/>
+          </a:p>
+        </p:txBody>
+      </p:sp>
+      <p:sp>
+        <p:nvSpPr>
+          <p:cNvPr id="15" name="Shape 12"/>
+          <p:cNvSpPr/>
+          <p:nvPr/>
+        </p:nvSpPr>
+        <p:spPr>
+          <a:xfrm>
+            <a:off x="3378708" y="2057400"/>
+            <a:ext cx="2601468" cy="1463040"/>
+          </a:xfrm>
+          <a:prstGeom prst="roundRect">
+            <a:avLst>
+              <a:gd name="adj" fmla="val 5000"/>
+            </a:avLst>
+          </a:prstGeom>
+          <a:solidFill>
+            <a:srgbClr val="FFFFFF"/>
+          </a:solidFill>
+          <a:ln w="9525">
+            <a:solidFill>
+              <a:srgbClr val="D8E0EC"/>
+            </a:solidFill>
+            <a:prstDash val="solid"/>
+          </a:ln>
+        </p:spPr>
+      </p:sp>
+      <p:sp>
+        <p:nvSpPr>
+          <p:cNvPr id="16" name="Text 13"/>
+          <p:cNvSpPr/>
+          <p:nvPr/>
+        </p:nvSpPr>
+        <p:spPr>
+          <a:xfrm>
+            <a:off x="3515868" y="2148840"/>
+            <a:ext cx="365760" cy="365760"/>
+          </a:xfrm>
+          <a:prstGeom prst="rect">
+            <a:avLst/>
+          </a:prstGeom>
+          <a:noFill/>
+          <a:ln/>
+        </p:spPr>
+        <p:txBody>
+          <a:bodyPr wrap="square" rtlCol="0" anchor="ctr"/>
+          <a:lstStyle/>
+          <a:p>
+            <a:pPr indent="0" marL="0">
+              <a:buNone/>
+            </a:pPr>
+            <a:r>
+              <a:rPr lang="en-US" sz="1400" b="1" dirty="0">
+                <a:solidFill>
+                  <a:srgbClr val="F7A23B"/>
+                </a:solidFill>
+                <a:latin typeface="Arial" pitchFamily="34" charset="0"/>
+                <a:ea typeface="Arial" pitchFamily="34" charset="-122"/>
+                <a:cs typeface="Arial" pitchFamily="34" charset="-120"/>
+              </a:rPr>
+              <a:t>B</a:t>
+            </a:r>
+            <a:endParaRPr lang="en-US" sz="1400" dirty="0"/>
+          </a:p>
+        </p:txBody>
+      </p:sp>
+      <p:sp>
+        <p:nvSpPr>
+          <p:cNvPr id="17" name="Text 14"/>
+          <p:cNvSpPr/>
+          <p:nvPr/>
+        </p:nvSpPr>
+        <p:spPr>
+          <a:xfrm>
+            <a:off x="3515868" y="2514600"/>
+            <a:ext cx="2327148" cy="914400"/>
+          </a:xfrm>
+          <a:prstGeom prst="rect">
+            <a:avLst/>
+          </a:prstGeom>
+          <a:noFill/>
+          <a:ln/>
+        </p:spPr>
+        <p:txBody>
+          <a:bodyPr wrap="square" rtlCol="0" anchor="t"/>
+          <a:lstStyle/>
+          <a:p>
+            <a:pPr indent="0" marL="0">
+              <a:buNone/>
+            </a:pPr>
+            <a:r>
+              <a:rPr lang="en-US" sz="1500" dirty="0">
+                <a:solidFill>
+                  <a:srgbClr val="1F2937"/>
+                </a:solidFill>
+                <a:latin typeface="Arial" pitchFamily="34" charset="0"/>
+                <a:ea typeface="Arial" pitchFamily="34" charset="-122"/>
+                <a:cs typeface="Arial" pitchFamily="34" charset="-120"/>
+              </a:rPr>
+              <a:t>calcular impostos</a:t>
+            </a:r>
+            <a:endParaRPr lang="en-US" sz="1500" dirty="0"/>
+          </a:p>
+        </p:txBody>
+      </p:sp>
+      <p:sp>
+        <p:nvSpPr>
+          <p:cNvPr id="18" name="Shape 15"/>
+          <p:cNvSpPr/>
+          <p:nvPr/>
+        </p:nvSpPr>
+        <p:spPr>
+          <a:xfrm>
+            <a:off x="6208776" y="2057400"/>
+            <a:ext cx="2601468" cy="1463040"/>
+          </a:xfrm>
+          <a:prstGeom prst="roundRect">
+            <a:avLst>
+              <a:gd name="adj" fmla="val 5000"/>
+            </a:avLst>
+          </a:prstGeom>
+          <a:solidFill>
+            <a:srgbClr val="FFFFFF"/>
+          </a:solidFill>
+          <a:ln w="9525">
+            <a:solidFill>
+              <a:srgbClr val="D8E0EC"/>
+            </a:solidFill>
+            <a:prstDash val="solid"/>
+          </a:ln>
+        </p:spPr>
+      </p:sp>
+      <p:sp>
+        <p:nvSpPr>
+          <p:cNvPr id="19" name="Text 16"/>
+          <p:cNvSpPr/>
+          <p:nvPr/>
+        </p:nvSpPr>
+        <p:spPr>
+          <a:xfrm>
+            <a:off x="6345936" y="2148840"/>
+            <a:ext cx="365760" cy="365760"/>
+          </a:xfrm>
+          <a:prstGeom prst="rect">
+            <a:avLst/>
+          </a:prstGeom>
+          <a:noFill/>
+          <a:ln/>
+        </p:spPr>
+        <p:txBody>
+          <a:bodyPr wrap="square" rtlCol="0" anchor="ctr"/>
+          <a:lstStyle/>
+          <a:p>
+            <a:pPr indent="0" marL="0">
+              <a:buNone/>
+            </a:pPr>
+            <a:r>
+              <a:rPr lang="en-US" sz="1400" b="1" dirty="0">
+                <a:solidFill>
+                  <a:srgbClr val="F7A23B"/>
+                </a:solidFill>
+                <a:latin typeface="Arial" pitchFamily="34" charset="0"/>
+                <a:ea typeface="Arial" pitchFamily="34" charset="-122"/>
+                <a:cs typeface="Arial" pitchFamily="34" charset="-120"/>
+              </a:rPr>
+              <a:t>C</a:t>
+            </a:r>
+            <a:endParaRPr lang="en-US" sz="1400" dirty="0"/>
+          </a:p>
+        </p:txBody>
+      </p:sp>
+      <p:sp>
+        <p:nvSpPr>
+          <p:cNvPr id="20" name="Text 17"/>
+          <p:cNvSpPr/>
+          <p:nvPr/>
+        </p:nvSpPr>
+        <p:spPr>
+          <a:xfrm>
+            <a:off x="6345936" y="2514600"/>
+            <a:ext cx="2327148" cy="914400"/>
+          </a:xfrm>
+          <a:prstGeom prst="rect">
+            <a:avLst/>
+          </a:prstGeom>
+          <a:noFill/>
+          <a:ln/>
+        </p:spPr>
+        <p:txBody>
+          <a:bodyPr wrap="square" rtlCol="0" anchor="t"/>
+          <a:lstStyle/>
+          <a:p>
+            <a:pPr indent="0" marL="0">
+              <a:buNone/>
+            </a:pPr>
+            <a:r>
+              <a:rPr lang="en-US" sz="1500" dirty="0">
+                <a:solidFill>
+                  <a:srgbClr val="1F2937"/>
+                </a:solidFill>
+                <a:latin typeface="Arial" pitchFamily="34" charset="0"/>
+                <a:ea typeface="Arial" pitchFamily="34" charset="-122"/>
+                <a:cs typeface="Arial" pitchFamily="34" charset="-120"/>
+              </a:rPr>
+              <a:t>registrar a geração</a:t>
+            </a:r>
+            <a:endParaRPr lang="en-US" sz="1500" dirty="0"/>
+          </a:p>
+        </p:txBody>
+      </p:sp>
+      <p:sp>
+        <p:nvSpPr>
+          <p:cNvPr id="21" name="Shape 18"/>
+          <p:cNvSpPr/>
+          <p:nvPr/>
+        </p:nvSpPr>
+        <p:spPr>
+          <a:xfrm>
+            <a:off x="9038844" y="2057400"/>
+            <a:ext cx="2601468" cy="1463040"/>
+          </a:xfrm>
+          <a:prstGeom prst="roundRect">
+            <a:avLst>
+              <a:gd name="adj" fmla="val 5000"/>
+            </a:avLst>
+          </a:prstGeom>
+          <a:solidFill>
+            <a:srgbClr val="FFFFFF"/>
+          </a:solidFill>
+          <a:ln w="9525">
+            <a:solidFill>
+              <a:srgbClr val="D8E0EC"/>
+            </a:solidFill>
+            <a:prstDash val="solid"/>
+          </a:ln>
+        </p:spPr>
+      </p:sp>
+      <p:sp>
+        <p:nvSpPr>
+          <p:cNvPr id="22" name="Text 19"/>
+          <p:cNvSpPr/>
+          <p:nvPr/>
+        </p:nvSpPr>
+        <p:spPr>
+          <a:xfrm>
+            <a:off x="9176004" y="2148840"/>
+            <a:ext cx="365760" cy="365760"/>
+          </a:xfrm>
+          <a:prstGeom prst="rect">
+            <a:avLst/>
+          </a:prstGeom>
+          <a:noFill/>
+          <a:ln/>
+        </p:spPr>
+        <p:txBody>
+          <a:bodyPr wrap="square" rtlCol="0" anchor="ctr"/>
+          <a:lstStyle/>
+          <a:p>
+            <a:pPr indent="0" marL="0">
+              <a:buNone/>
+            </a:pPr>
+            <a:r>
+              <a:rPr lang="en-US" sz="1400" b="1" dirty="0">
+                <a:solidFill>
+                  <a:srgbClr val="F7A23B"/>
+                </a:solidFill>
+                <a:latin typeface="Arial" pitchFamily="34" charset="0"/>
+                <a:ea typeface="Arial" pitchFamily="34" charset="-122"/>
+                <a:cs typeface="Arial" pitchFamily="34" charset="-120"/>
+              </a:rPr>
+              <a:t>D</a:t>
+            </a:r>
+            <a:endParaRPr lang="en-US" sz="1400" dirty="0"/>
+          </a:p>
+        </p:txBody>
+      </p:sp>
+      <p:sp>
+        <p:nvSpPr>
+          <p:cNvPr id="23" name="Text 20"/>
+          <p:cNvSpPr/>
+          <p:nvPr/>
+        </p:nvSpPr>
+        <p:spPr>
+          <a:xfrm>
+            <a:off x="9176004" y="2514600"/>
+            <a:ext cx="2327148" cy="914400"/>
+          </a:xfrm>
+          <a:prstGeom prst="rect">
+            <a:avLst/>
+          </a:prstGeom>
+          <a:noFill/>
+          <a:ln/>
+        </p:spPr>
+        <p:txBody>
+          <a:bodyPr wrap="square" rtlCol="0" anchor="t"/>
+          <a:lstStyle/>
+          <a:p>
+            <a:pPr indent="0" marL="0">
+              <a:buNone/>
+            </a:pPr>
+            <a:r>
+              <a:rPr lang="en-US" sz="1500" dirty="0">
+                <a:solidFill>
+                  <a:srgbClr val="1F2937"/>
+                </a:solidFill>
+                <a:latin typeface="Arial" pitchFamily="34" charset="0"/>
+                <a:ea typeface="Arial" pitchFamily="34" charset="-122"/>
+                <a:cs typeface="Arial" pitchFamily="34" charset="-120"/>
+              </a:rPr>
+              <a:t>aprovar faturas</a:t>
+            </a:r>
+            <a:endParaRPr lang="en-US" sz="1500" dirty="0"/>
+          </a:p>
+        </p:txBody>
+      </p:sp>
+      <p:sp>
+        <p:nvSpPr>
+          <p:cNvPr id="24" name="Shape 21"/>
+          <p:cNvSpPr/>
+          <p:nvPr/>
+        </p:nvSpPr>
+        <p:spPr>
+          <a:xfrm>
+            <a:off x="548640" y="3840480"/>
+            <a:ext cx="502920" cy="502920"/>
+          </a:xfrm>
+          <a:prstGeom prst="ellipse">
+            <a:avLst/>
+          </a:prstGeom>
+          <a:solidFill>
+            <a:srgbClr val="1B3A6B"/>
+          </a:solidFill>
+          <a:ln/>
+        </p:spPr>
+      </p:sp>
+      <p:sp>
+        <p:nvSpPr>
+          <p:cNvPr id="25" name="Text 22"/>
+          <p:cNvSpPr/>
+          <p:nvPr/>
+        </p:nvSpPr>
+        <p:spPr>
+          <a:xfrm>
+            <a:off x="548640" y="3840480"/>
+            <a:ext cx="502920" cy="502920"/>
+          </a:xfrm>
+          <a:prstGeom prst="rect">
+            <a:avLst/>
+          </a:prstGeom>
+          <a:noFill/>
+          <a:ln/>
+        </p:spPr>
+        <p:txBody>
+          <a:bodyPr wrap="square" rtlCol="0" anchor="ctr"/>
+          <a:lstStyle/>
+          <a:p>
+            <a:pPr algn="ctr" indent="0" marL="0">
+              <a:buNone/>
+            </a:pPr>
+            <a:r>
+              <a:rPr lang="en-US" sz="1600" b="1" dirty="0">
+                <a:solidFill>
+                  <a:srgbClr val="FFFFFF"/>
+                </a:solidFill>
+                <a:latin typeface="Arial" pitchFamily="34" charset="0"/>
+                <a:ea typeface="Arial" pitchFamily="34" charset="-122"/>
+                <a:cs typeface="Arial" pitchFamily="34" charset="-120"/>
+              </a:rPr>
+              <a:t>4</a:t>
+            </a:r>
+            <a:endParaRPr lang="en-US" sz="1600" dirty="0"/>
+          </a:p>
+        </p:txBody>
+      </p:sp>
+      <p:sp>
+        <p:nvSpPr>
+          <p:cNvPr id="26" name="Text 23"/>
+          <p:cNvSpPr/>
+          <p:nvPr/>
+        </p:nvSpPr>
+        <p:spPr>
+          <a:xfrm>
+            <a:off x="1234440" y="3794760"/>
+            <a:ext cx="10424160" cy="640080"/>
+          </a:xfrm>
+          <a:prstGeom prst="rect">
+            <a:avLst/>
+          </a:prstGeom>
+          <a:noFill/>
+          <a:ln/>
+        </p:spPr>
+        <p:txBody>
+          <a:bodyPr wrap="square" rtlCol="0" anchor="ctr"/>
+          <a:lstStyle/>
+          <a:p>
+            <a:pPr indent="0" marL="0">
+              <a:buNone/>
+            </a:pPr>
+            <a:r>
+              <a:rPr lang="en-US" sz="1800" b="1" dirty="0">
+                <a:solidFill>
+                  <a:srgbClr val="1B3A6B"/>
+                </a:solidFill>
+                <a:latin typeface="Arial" pitchFamily="34" charset="0"/>
+                <a:ea typeface="Arial" pitchFamily="34" charset="-122"/>
+                <a:cs typeface="Arial" pitchFamily="34" charset="-120"/>
+              </a:rPr>
+              <a:t>Para o produtor, o indicador mais importante é:</a:t>
+            </a:r>
+            <a:endParaRPr lang="en-US" sz="1800" dirty="0"/>
+          </a:p>
+        </p:txBody>
+      </p:sp>
+      <p:sp>
+        <p:nvSpPr>
+          <p:cNvPr id="27" name="Shape 24"/>
+          <p:cNvSpPr/>
+          <p:nvPr/>
+        </p:nvSpPr>
+        <p:spPr>
+          <a:xfrm>
+            <a:off x="548640" y="4572000"/>
+            <a:ext cx="2601468" cy="1463040"/>
+          </a:xfrm>
+          <a:prstGeom prst="roundRect">
+            <a:avLst>
+              <a:gd name="adj" fmla="val 5000"/>
+            </a:avLst>
+          </a:prstGeom>
+          <a:solidFill>
+            <a:srgbClr val="FFFFFF"/>
+          </a:solidFill>
+          <a:ln w="9525">
+            <a:solidFill>
+              <a:srgbClr val="D8E0EC"/>
+            </a:solidFill>
+            <a:prstDash val="solid"/>
+          </a:ln>
+        </p:spPr>
+      </p:sp>
+      <p:sp>
+        <p:nvSpPr>
+          <p:cNvPr id="28" name="Text 25"/>
+          <p:cNvSpPr/>
+          <p:nvPr/>
+        </p:nvSpPr>
+        <p:spPr>
+          <a:xfrm>
+            <a:off x="685800" y="4663440"/>
+            <a:ext cx="365760" cy="365760"/>
+          </a:xfrm>
+          <a:prstGeom prst="rect">
+            <a:avLst/>
+          </a:prstGeom>
+          <a:noFill/>
+          <a:ln/>
+        </p:spPr>
+        <p:txBody>
+          <a:bodyPr wrap="square" rtlCol="0" anchor="ctr"/>
+          <a:lstStyle/>
+          <a:p>
+            <a:pPr indent="0" marL="0">
+              <a:buNone/>
+            </a:pPr>
+            <a:r>
+              <a:rPr lang="en-US" sz="1400" b="1" dirty="0">
+                <a:solidFill>
+                  <a:srgbClr val="F7A23B"/>
+                </a:solidFill>
+                <a:latin typeface="Arial" pitchFamily="34" charset="0"/>
+                <a:ea typeface="Arial" pitchFamily="34" charset="-122"/>
+                <a:cs typeface="Arial" pitchFamily="34" charset="-120"/>
+              </a:rPr>
+              <a:t>A</a:t>
+            </a:r>
+            <a:endParaRPr lang="en-US" sz="1400" dirty="0"/>
+          </a:p>
+        </p:txBody>
+      </p:sp>
+      <p:sp>
+        <p:nvSpPr>
+          <p:cNvPr id="29" name="Text 26"/>
+          <p:cNvSpPr/>
+          <p:nvPr/>
+        </p:nvSpPr>
+        <p:spPr>
+          <a:xfrm>
+            <a:off x="685800" y="5029200"/>
+            <a:ext cx="2327148" cy="914400"/>
+          </a:xfrm>
+          <a:prstGeom prst="rect">
+            <a:avLst/>
+          </a:prstGeom>
+          <a:noFill/>
+          <a:ln/>
+        </p:spPr>
+        <p:txBody>
+          <a:bodyPr wrap="square" rtlCol="0" anchor="t"/>
+          <a:lstStyle/>
+          <a:p>
+            <a:pPr indent="0" marL="0">
+              <a:buNone/>
+            </a:pPr>
+            <a:r>
+              <a:rPr lang="en-US" sz="1500" dirty="0">
+                <a:solidFill>
+                  <a:srgbClr val="1F2937"/>
+                </a:solidFill>
+                <a:latin typeface="Arial" pitchFamily="34" charset="0"/>
+                <a:ea typeface="Arial" pitchFamily="34" charset="-122"/>
+                <a:cs typeface="Arial" pitchFamily="34" charset="-120"/>
+              </a:rPr>
+              <a:t>número de consultores</a:t>
+            </a:r>
+            <a:endParaRPr lang="en-US" sz="1500" dirty="0"/>
+          </a:p>
+        </p:txBody>
+      </p:sp>
+      <p:sp>
+        <p:nvSpPr>
+          <p:cNvPr id="30" name="Shape 27"/>
+          <p:cNvSpPr/>
+          <p:nvPr/>
+        </p:nvSpPr>
+        <p:spPr>
+          <a:xfrm>
+            <a:off x="3378708" y="4572000"/>
+            <a:ext cx="2601468" cy="1463040"/>
+          </a:xfrm>
+          <a:prstGeom prst="roundRect">
+            <a:avLst>
+              <a:gd name="adj" fmla="val 5000"/>
+            </a:avLst>
+          </a:prstGeom>
+          <a:solidFill>
+            <a:srgbClr val="FFFFFF"/>
+          </a:solidFill>
+          <a:ln w="9525">
+            <a:solidFill>
+              <a:srgbClr val="D8E0EC"/>
+            </a:solidFill>
+            <a:prstDash val="solid"/>
+          </a:ln>
+        </p:spPr>
+      </p:sp>
+      <p:sp>
+        <p:nvSpPr>
+          <p:cNvPr id="31" name="Text 28"/>
+          <p:cNvSpPr/>
+          <p:nvPr/>
+        </p:nvSpPr>
+        <p:spPr>
+          <a:xfrm>
+            <a:off x="3515868" y="4663440"/>
+            <a:ext cx="365760" cy="365760"/>
+          </a:xfrm>
+          <a:prstGeom prst="rect">
+            <a:avLst/>
+          </a:prstGeom>
+          <a:noFill/>
+          <a:ln/>
+        </p:spPr>
+        <p:txBody>
+          <a:bodyPr wrap="square" rtlCol="0" anchor="ctr"/>
+          <a:lstStyle/>
+          <a:p>
+            <a:pPr indent="0" marL="0">
+              <a:buNone/>
+            </a:pPr>
+            <a:r>
+              <a:rPr lang="en-US" sz="1400" b="1" dirty="0">
+                <a:solidFill>
+                  <a:srgbClr val="F7A23B"/>
+                </a:solidFill>
+                <a:latin typeface="Arial" pitchFamily="34" charset="0"/>
+                <a:ea typeface="Arial" pitchFamily="34" charset="-122"/>
+                <a:cs typeface="Arial" pitchFamily="34" charset="-120"/>
+              </a:rPr>
+              <a:t>C</a:t>
+            </a:r>
+            <a:endParaRPr lang="en-US" sz="1400" dirty="0"/>
+          </a:p>
+        </p:txBody>
+      </p:sp>
+      <p:sp>
+        <p:nvSpPr>
+          <p:cNvPr id="32" name="Text 29"/>
+          <p:cNvSpPr/>
+          <p:nvPr/>
+        </p:nvSpPr>
+        <p:spPr>
+          <a:xfrm>
+            <a:off x="3515868" y="5029200"/>
+            <a:ext cx="2327148" cy="914400"/>
+          </a:xfrm>
+          <a:prstGeom prst="rect">
+            <a:avLst/>
+          </a:prstGeom>
+          <a:noFill/>
+          <a:ln/>
+        </p:spPr>
+        <p:txBody>
+          <a:bodyPr wrap="square" rtlCol="0" anchor="t"/>
+          <a:lstStyle/>
+          <a:p>
+            <a:pPr indent="0" marL="0">
+              <a:buNone/>
+            </a:pPr>
+            <a:r>
+              <a:rPr lang="en-US" sz="1500" dirty="0">
+                <a:solidFill>
+                  <a:srgbClr val="1F2937"/>
+                </a:solidFill>
+                <a:latin typeface="Arial" pitchFamily="34" charset="0"/>
+                <a:ea typeface="Arial" pitchFamily="34" charset="-122"/>
+                <a:cs typeface="Arial" pitchFamily="34" charset="-120"/>
+              </a:rPr>
+              <a:t>bandeira tarifária</a:t>
+            </a:r>
+            <a:endParaRPr lang="en-US" sz="1500" dirty="0"/>
+          </a:p>
+        </p:txBody>
+      </p:sp>
+      <p:sp>
+        <p:nvSpPr>
+          <p:cNvPr id="33" name="Shape 30"/>
+          <p:cNvSpPr/>
+          <p:nvPr/>
+        </p:nvSpPr>
+        <p:spPr>
+          <a:xfrm>
+            <a:off x="6208776" y="4572000"/>
+            <a:ext cx="2601468" cy="1463040"/>
+          </a:xfrm>
+          <a:prstGeom prst="roundRect">
+            <a:avLst>
+              <a:gd name="adj" fmla="val 5000"/>
+            </a:avLst>
+          </a:prstGeom>
+          <a:solidFill>
+            <a:srgbClr val="FFFFFF"/>
+          </a:solidFill>
+          <a:ln w="9525">
+            <a:solidFill>
+              <a:srgbClr val="D8E0EC"/>
+            </a:solidFill>
+            <a:prstDash val="solid"/>
+          </a:ln>
+        </p:spPr>
+      </p:sp>
+      <p:sp>
+        <p:nvSpPr>
+          <p:cNvPr id="34" name="Text 31"/>
+          <p:cNvSpPr/>
+          <p:nvPr/>
+        </p:nvSpPr>
+        <p:spPr>
+          <a:xfrm>
+            <a:off x="6345936" y="4663440"/>
+            <a:ext cx="365760" cy="365760"/>
+          </a:xfrm>
+          <a:prstGeom prst="rect">
+            <a:avLst/>
+          </a:prstGeom>
+          <a:noFill/>
+          <a:ln/>
+        </p:spPr>
+        <p:txBody>
+          <a:bodyPr wrap="square" rtlCol="0" anchor="ctr"/>
+          <a:lstStyle/>
+          <a:p>
+            <a:pPr indent="0" marL="0">
+              <a:buNone/>
+            </a:pPr>
+            <a:r>
+              <a:rPr lang="en-US" sz="1400" b="1" dirty="0">
+                <a:solidFill>
+                  <a:srgbClr val="F7A23B"/>
+                </a:solidFill>
+                <a:latin typeface="Arial" pitchFamily="34" charset="0"/>
+                <a:ea typeface="Arial" pitchFamily="34" charset="-122"/>
+                <a:cs typeface="Arial" pitchFamily="34" charset="-120"/>
+              </a:rPr>
+              <a:t>D</a:t>
+            </a:r>
+            <a:endParaRPr lang="en-US" sz="1400" dirty="0"/>
+          </a:p>
+        </p:txBody>
+      </p:sp>
+      <p:sp>
+        <p:nvSpPr>
+          <p:cNvPr id="35" name="Text 32"/>
+          <p:cNvSpPr/>
+          <p:nvPr/>
+        </p:nvSpPr>
+        <p:spPr>
+          <a:xfrm>
+            <a:off x="6345936" y="5029200"/>
+            <a:ext cx="2327148" cy="914400"/>
+          </a:xfrm>
+          <a:prstGeom prst="rect">
+            <a:avLst/>
+          </a:prstGeom>
+          <a:noFill/>
+          <a:ln/>
+        </p:spPr>
+        <p:txBody>
+          <a:bodyPr wrap="square" rtlCol="0" anchor="t"/>
+          <a:lstStyle/>
+          <a:p>
+            <a:pPr indent="0" marL="0">
+              <a:buNone/>
+            </a:pPr>
+            <a:r>
+              <a:rPr lang="en-US" sz="1500" dirty="0">
+                <a:solidFill>
+                  <a:srgbClr val="1F2937"/>
+                </a:solidFill>
+                <a:latin typeface="Arial" pitchFamily="34" charset="0"/>
+                <a:ea typeface="Arial" pitchFamily="34" charset="-122"/>
+                <a:cs typeface="Arial" pitchFamily="34" charset="-120"/>
+              </a:rPr>
+              <a:t>número de chamados</a:t>
+            </a:r>
+            <a:endParaRPr lang="en-US" sz="1500" dirty="0"/>
+          </a:p>
+        </p:txBody>
+      </p:sp>
+      <p:sp>
+        <p:nvSpPr>
+          <p:cNvPr id="25" name="Slide Number Placeholder 0"/>
+          <p:cNvSpPr>
+            <a:spLocks noGrp="1"/>
+          </p:cNvSpPr>
+          <p:nvPr>
+            <p:ph type="sldNum" sz="quarter" idx="4294967295"/>
+          </p:nvPr>
+        </p:nvSpPr>
+        <p:spPr>
+          <a:xfrm>
+            <a:off x="11292840" y="6556248"/>
+            <a:ext cx="548640" cy="256032"/>
+          </a:xfrm>
+          <a:prstGeom prst="rect">
+            <a:avLst/>
+          </a:prstGeom>
+          <a:extLst>
+            <a:ext uri="{C572A759-6A51-4108-AA02-DFA0A04FC94B}">
+              <ma14:wrappingTextBoxFlag xmlns:ma14="http://schemas.microsoft.com/office/mac/drawingml/2011/main" val="0"/>
+            </a:ext>
+          </a:extLst>
+        </p:spPr>
+        <p:txBody>
+          <a:bodyPr/>
+          <a:lstStyle>
+            <a:lvl1pPr>
+              <a:defRPr sz="900">
+                <a:solidFill>
+                  <a:srgbClr val="1B3A6B"/>
+                </a:solidFill>
+                <a:latin typeface="Arial"/>
+                <a:ea typeface="Arial"/>
+                <a:cs typeface="Arial"/>
+              </a:defRPr>
+            </a:lvl1pPr>
+          </a:lstStyle>
+          <a:p>
+            <a:pPr algn="r"/>
+            <a:fld id="{F7021451-1387-4CA6-816F-3879F97B5CBC}" type="slidenum">
+              <a:rPr b="1" lang="en-US"/>
+              <a:t>20</a:t>
+            </a:fld>
+            <a:endParaRPr lang="en-US"/>
+          </a:p>
+        </p:txBody>
+      </p:sp>
+    </p:spTree>
+  </p:cSld>
+  <p:clrMapOvr>
+    <a:masterClrMapping/>
+  </p:clrMapOvr>
+</p:sld>
+</file>
+
+<file path=ppt/slides/slide21.xml><?xml version="1.0" encoding="utf-8"?>
+<p:sld xmlns:a="http://schemas.openxmlformats.org/drawingml/2006/main" xmlns:r="http://schemas.openxmlformats.org/officeDocument/2006/relationships" xmlns:p="http://schemas.openxmlformats.org/presentationml/2006/main">
+  <p:cSld name="Slide 21">
+    <p:bg>
+      <p:bgPr>
+        <a:solidFill>
+          <a:srgbClr val="F6F8FB"/>
+        </a:solidFill>
+      </p:bgPr>
+    </p:bg>
+    <p:spTree>
+      <p:nvGrpSpPr>
+        <p:cNvPr id="1" name=""/>
+        <p:cNvGrpSpPr/>
+        <p:nvPr/>
+      </p:nvGrpSpPr>
+      <p:grpSpPr>
+        <a:xfrm>
+          <a:off x="0" y="0"/>
+          <a:ext cx="0" cy="0"/>
+          <a:chOff x="0" y="0"/>
+          <a:chExt cx="0" cy="0"/>
+        </a:xfrm>
+      </p:grpSpPr>
+      <p:sp>
+        <p:nvSpPr>
+          <p:cNvPr id="2" name="Shape 0"/>
+          <p:cNvSpPr/>
+          <p:nvPr/>
+        </p:nvSpPr>
+        <p:spPr>
+          <a:xfrm>
+            <a:off x="0" y="6510528"/>
+            <a:ext cx="12191695" cy="347472"/>
+          </a:xfrm>
+          <a:prstGeom prst="rect">
+            <a:avLst/>
+          </a:prstGeom>
+          <a:solidFill>
+            <a:srgbClr val="FFFFFF"/>
+          </a:solidFill>
+          <a:ln w="6350">
+            <a:solidFill>
+              <a:srgbClr val="D8E0EC"/>
+            </a:solidFill>
+            <a:prstDash val="solid"/>
+          </a:ln>
+        </p:spPr>
+      </p:sp>
+      <p:pic>
+        <p:nvPicPr>
+          <p:cNvPr id="3" name="Image 0" descr="/www/wwwroot/rexar/gdsolar/docs/curso/slides/assets/logo-gdsolar.png">    </p:cNvPr>
+          <p:cNvPicPr>
+            <a:picLocks noChangeAspect="1"/>
+          </p:cNvPicPr>
+          <p:nvPr/>
+        </p:nvPicPr>
+        <p:blipFill>
+          <a:blip r:embed="rId1"/>
+          <a:stretch>
+            <a:fillRect/>
+          </a:stretch>
+        </p:blipFill>
+        <p:spPr>
+          <a:xfrm>
+            <a:off x="548640" y="6547104"/>
+            <a:ext cx="274320" cy="274320"/>
+          </a:xfrm>
+          <a:prstGeom prst="rect">
+            <a:avLst/>
+          </a:prstGeom>
+        </p:spPr>
+      </p:pic>
+      <p:sp>
+        <p:nvSpPr>
+          <p:cNvPr id="4" name="Text 1"/>
+          <p:cNvSpPr/>
+          <p:nvPr/>
+        </p:nvSpPr>
+        <p:spPr>
+          <a:xfrm>
+            <a:off x="886968" y="6528816"/>
+            <a:ext cx="6400800" cy="310896"/>
+          </a:xfrm>
+          <a:prstGeom prst="rect">
+            <a:avLst/>
+          </a:prstGeom>
+          <a:noFill/>
+          <a:ln/>
+        </p:spPr>
+        <p:txBody>
+          <a:bodyPr wrap="square" rtlCol="0" anchor="ctr"/>
+          <a:lstStyle/>
+          <a:p>
+            <a:pPr indent="0" marL="0">
+              <a:buNone/>
+            </a:pPr>
+            <a:r>
+              <a:rPr lang="en-US" sz="900" b="1" dirty="0">
+                <a:solidFill>
+                  <a:srgbClr val="64748B"/>
+                </a:solidFill>
+                <a:latin typeface="Arial" pitchFamily="34" charset="0"/>
+                <a:ea typeface="Arial" pitchFamily="34" charset="-122"/>
+                <a:cs typeface="Arial" pitchFamily="34" charset="-120"/>
+              </a:rPr>
+              <a:t>GD Solar  ·  Formação em Energia por Assinatura</a:t>
+            </a:r>
+            <a:endParaRPr lang="en-US" sz="900" dirty="0"/>
+          </a:p>
+        </p:txBody>
+      </p:sp>
+      <p:sp>
+        <p:nvSpPr>
+          <p:cNvPr id="5" name="Text 2"/>
+          <p:cNvSpPr/>
+          <p:nvPr/>
+        </p:nvSpPr>
+        <p:spPr>
+          <a:xfrm>
+            <a:off x="7132320" y="6528816"/>
+            <a:ext cx="4023360" cy="310896"/>
+          </a:xfrm>
+          <a:prstGeom prst="rect">
+            <a:avLst/>
+          </a:prstGeom>
+          <a:noFill/>
+          <a:ln/>
+        </p:spPr>
+        <p:txBody>
+          <a:bodyPr wrap="square" rtlCol="0" anchor="ctr"/>
+          <a:lstStyle/>
+          <a:p>
+            <a:pPr algn="r" indent="0" marL="0">
+              <a:buNone/>
+            </a:pPr>
+            <a:r>
+              <a:rPr lang="en-US" sz="900" dirty="0">
+                <a:solidFill>
+                  <a:srgbClr val="64748B"/>
+                </a:solidFill>
+                <a:latin typeface="Arial" pitchFamily="34" charset="0"/>
+                <a:ea typeface="Arial" pitchFamily="34" charset="-122"/>
+                <a:cs typeface="Arial" pitchFamily="34" charset="-120"/>
+              </a:rPr>
+              <a:t>M10 · Teste rápido</a:t>
+            </a:r>
+            <a:endParaRPr lang="en-US" sz="900" dirty="0"/>
+          </a:p>
+        </p:txBody>
+      </p:sp>
+      <p:sp>
+        <p:nvSpPr>
+          <p:cNvPr id="6" name="Shape 3"/>
+          <p:cNvSpPr/>
+          <p:nvPr/>
+        </p:nvSpPr>
+        <p:spPr>
+          <a:xfrm>
+            <a:off x="548640" y="384048"/>
+            <a:ext cx="82296" cy="658368"/>
+          </a:xfrm>
+          <a:prstGeom prst="rect">
+            <a:avLst/>
+          </a:prstGeom>
+          <a:solidFill>
+            <a:srgbClr val="F7A23B"/>
+          </a:solidFill>
+          <a:ln/>
+        </p:spPr>
+      </p:sp>
+      <p:sp>
+        <p:nvSpPr>
+          <p:cNvPr id="7" name="Text 4"/>
+          <p:cNvSpPr/>
+          <p:nvPr/>
+        </p:nvSpPr>
+        <p:spPr>
+          <a:xfrm>
+            <a:off x="777240" y="292608"/>
+            <a:ext cx="10972800" cy="274320"/>
+          </a:xfrm>
+          <a:prstGeom prst="rect">
+            <a:avLst/>
+          </a:prstGeom>
+          <a:noFill/>
+          <a:ln/>
+        </p:spPr>
+        <p:txBody>
+          <a:bodyPr wrap="square" rtlCol="0" anchor="ctr"/>
+          <a:lstStyle/>
+          <a:p>
+            <a:pPr indent="0" marL="0">
+              <a:buNone/>
+            </a:pPr>
+            <a:r>
+              <a:rPr lang="en-US" sz="1000" b="1" spc="100" kern="0" dirty="0">
+                <a:solidFill>
+                  <a:srgbClr val="F7A23B"/>
+                </a:solidFill>
+                <a:latin typeface="Arial" pitchFamily="34" charset="0"/>
+                <a:ea typeface="Arial" pitchFamily="34" charset="-122"/>
+                <a:cs typeface="Arial" pitchFamily="34" charset="-120"/>
+              </a:rPr>
+              <a:t>QUESTÕES 5–5 DE 5</a:t>
+            </a:r>
+            <a:endParaRPr lang="en-US" sz="1000" dirty="0"/>
+          </a:p>
+        </p:txBody>
+      </p:sp>
+      <p:sp>
+        <p:nvSpPr>
+          <p:cNvPr id="8" name="Text 5"/>
+          <p:cNvSpPr/>
+          <p:nvPr/>
+        </p:nvSpPr>
+        <p:spPr>
+          <a:xfrm>
+            <a:off x="777240" y="530352"/>
+            <a:ext cx="10881360" cy="566928"/>
+          </a:xfrm>
+          <a:prstGeom prst="rect">
+            <a:avLst/>
+          </a:prstGeom>
+          <a:noFill/>
+          <a:ln/>
+        </p:spPr>
+        <p:txBody>
+          <a:bodyPr wrap="square" rtlCol="0" anchor="ctr">
+            <a:normAutofit/>
+          </a:bodyPr>
+          <a:lstStyle/>
+          <a:p>
+            <a:pPr indent="0" marL="0">
+              <a:buNone/>
+            </a:pPr>
+            <a:r>
+              <a:rPr lang="en-US" sz="2600" b="1" dirty="0">
+                <a:solidFill>
+                  <a:srgbClr val="1B3A6B"/>
+                </a:solidFill>
+                <a:latin typeface="Arial" pitchFamily="34" charset="0"/>
+                <a:ea typeface="Arial" pitchFamily="34" charset="-122"/>
+                <a:cs typeface="Arial" pitchFamily="34" charset="-120"/>
+              </a:rPr>
+              <a:t>Teste rápido</a:t>
+            </a:r>
+            <a:endParaRPr lang="en-US" sz="2600" dirty="0"/>
+          </a:p>
+        </p:txBody>
+      </p:sp>
+      <p:sp>
+        <p:nvSpPr>
+          <p:cNvPr id="9" name="Shape 6"/>
+          <p:cNvSpPr/>
+          <p:nvPr/>
+        </p:nvSpPr>
+        <p:spPr>
+          <a:xfrm>
+            <a:off x="548640" y="1325880"/>
+            <a:ext cx="502920" cy="502920"/>
+          </a:xfrm>
+          <a:prstGeom prst="ellipse">
+            <a:avLst/>
+          </a:prstGeom>
+          <a:solidFill>
+            <a:srgbClr val="1B3A6B"/>
+          </a:solidFill>
+          <a:ln/>
+        </p:spPr>
+      </p:sp>
+      <p:sp>
+        <p:nvSpPr>
+          <p:cNvPr id="10" name="Text 7"/>
+          <p:cNvSpPr/>
+          <p:nvPr/>
+        </p:nvSpPr>
+        <p:spPr>
+          <a:xfrm>
+            <a:off x="548640" y="1325880"/>
+            <a:ext cx="502920" cy="502920"/>
+          </a:xfrm>
+          <a:prstGeom prst="rect">
+            <a:avLst/>
+          </a:prstGeom>
+          <a:noFill/>
+          <a:ln/>
+        </p:spPr>
+        <p:txBody>
+          <a:bodyPr wrap="square" rtlCol="0" anchor="ctr"/>
+          <a:lstStyle/>
+          <a:p>
+            <a:pPr algn="ctr" indent="0" marL="0">
+              <a:buNone/>
+            </a:pPr>
+            <a:r>
+              <a:rPr lang="en-US" sz="1600" b="1" dirty="0">
+                <a:solidFill>
+                  <a:srgbClr val="FFFFFF"/>
+                </a:solidFill>
+                <a:latin typeface="Arial" pitchFamily="34" charset="0"/>
+                <a:ea typeface="Arial" pitchFamily="34" charset="-122"/>
+                <a:cs typeface="Arial" pitchFamily="34" charset="-120"/>
+              </a:rPr>
+              <a:t>5</a:t>
+            </a:r>
+            <a:endParaRPr lang="en-US" sz="1600" dirty="0"/>
+          </a:p>
+        </p:txBody>
+      </p:sp>
+      <p:sp>
+        <p:nvSpPr>
+          <p:cNvPr id="11" name="Text 8"/>
+          <p:cNvSpPr/>
+          <p:nvPr/>
+        </p:nvSpPr>
+        <p:spPr>
+          <a:xfrm>
+            <a:off x="1234440" y="1280160"/>
+            <a:ext cx="10424160" cy="640080"/>
+          </a:xfrm>
+          <a:prstGeom prst="rect">
+            <a:avLst/>
+          </a:prstGeom>
+          <a:noFill/>
+          <a:ln/>
+        </p:spPr>
+        <p:txBody>
+          <a:bodyPr wrap="square" rtlCol="0" anchor="ctr"/>
+          <a:lstStyle/>
+          <a:p>
+            <a:pPr indent="0" marL="0">
+              <a:buNone/>
+            </a:pPr>
+            <a:r>
+              <a:rPr lang="en-US" sz="1800" b="1" dirty="0">
+                <a:solidFill>
+                  <a:srgbClr val="1B3A6B"/>
+                </a:solidFill>
+                <a:latin typeface="Arial" pitchFamily="34" charset="0"/>
+                <a:ea typeface="Arial" pitchFamily="34" charset="-122"/>
+                <a:cs typeface="Arial" pitchFamily="34" charset="-120"/>
+              </a:rPr>
+              <a:t>A margem de contribuição por kWh deve ser comparada com:</a:t>
+            </a:r>
+            <a:endParaRPr lang="en-US" sz="1800" dirty="0"/>
+          </a:p>
+        </p:txBody>
+      </p:sp>
+      <p:sp>
+        <p:nvSpPr>
+          <p:cNvPr id="12" name="Shape 9"/>
+          <p:cNvSpPr/>
+          <p:nvPr/>
+        </p:nvSpPr>
+        <p:spPr>
+          <a:xfrm>
+            <a:off x="548640" y="2057400"/>
+            <a:ext cx="2601468" cy="1463040"/>
+          </a:xfrm>
+          <a:prstGeom prst="roundRect">
+            <a:avLst>
+              <a:gd name="adj" fmla="val 5000"/>
+            </a:avLst>
+          </a:prstGeom>
+          <a:solidFill>
+            <a:srgbClr val="FFFFFF"/>
+          </a:solidFill>
+          <a:ln w="9525">
+            <a:solidFill>
+              <a:srgbClr val="D8E0EC"/>
+            </a:solidFill>
+            <a:prstDash val="solid"/>
+          </a:ln>
+        </p:spPr>
+      </p:sp>
+      <p:sp>
+        <p:nvSpPr>
+          <p:cNvPr id="13" name="Text 10"/>
+          <p:cNvSpPr/>
+          <p:nvPr/>
+        </p:nvSpPr>
+        <p:spPr>
+          <a:xfrm>
+            <a:off x="685800" y="2148840"/>
+            <a:ext cx="365760" cy="365760"/>
+          </a:xfrm>
+          <a:prstGeom prst="rect">
+            <a:avLst/>
+          </a:prstGeom>
+          <a:noFill/>
+          <a:ln/>
+        </p:spPr>
+        <p:txBody>
+          <a:bodyPr wrap="square" rtlCol="0" anchor="ctr"/>
+          <a:lstStyle/>
+          <a:p>
+            <a:pPr indent="0" marL="0">
+              <a:buNone/>
+            </a:pPr>
+            <a:r>
+              <a:rPr lang="en-US" sz="1400" b="1" dirty="0">
+                <a:solidFill>
+                  <a:srgbClr val="F7A23B"/>
+                </a:solidFill>
+                <a:latin typeface="Arial" pitchFamily="34" charset="0"/>
+                <a:ea typeface="Arial" pitchFamily="34" charset="-122"/>
+                <a:cs typeface="Arial" pitchFamily="34" charset="-120"/>
+              </a:rPr>
+              <a:t>A</a:t>
+            </a:r>
+            <a:endParaRPr lang="en-US" sz="1400" dirty="0"/>
+          </a:p>
+        </p:txBody>
+      </p:sp>
+      <p:sp>
+        <p:nvSpPr>
+          <p:cNvPr id="14" name="Text 11"/>
+          <p:cNvSpPr/>
+          <p:nvPr/>
+        </p:nvSpPr>
+        <p:spPr>
+          <a:xfrm>
+            <a:off x="685800" y="2514600"/>
+            <a:ext cx="2327148" cy="914400"/>
+          </a:xfrm>
+          <a:prstGeom prst="rect">
+            <a:avLst/>
+          </a:prstGeom>
+          <a:noFill/>
+          <a:ln/>
+        </p:spPr>
+        <p:txBody>
+          <a:bodyPr wrap="square" rtlCol="0" anchor="t"/>
+          <a:lstStyle/>
+          <a:p>
+            <a:pPr indent="0" marL="0">
+              <a:buNone/>
+            </a:pPr>
+            <a:r>
+              <a:rPr lang="en-US" sz="1500" dirty="0">
+                <a:solidFill>
+                  <a:srgbClr val="1F2937"/>
+                </a:solidFill>
+                <a:latin typeface="Arial" pitchFamily="34" charset="0"/>
+                <a:ea typeface="Arial" pitchFamily="34" charset="-122"/>
+                <a:cs typeface="Arial" pitchFamily="34" charset="-120"/>
+              </a:rPr>
+              <a:t>a tarifa cheia</a:t>
+            </a:r>
+            <a:endParaRPr lang="en-US" sz="1500" dirty="0"/>
+          </a:p>
+        </p:txBody>
+      </p:sp>
+      <p:sp>
+        <p:nvSpPr>
+          <p:cNvPr id="15" name="Shape 12"/>
+          <p:cNvSpPr/>
+          <p:nvPr/>
+        </p:nvSpPr>
+        <p:spPr>
+          <a:xfrm>
+            <a:off x="3378708" y="2057400"/>
+            <a:ext cx="2601468" cy="1463040"/>
+          </a:xfrm>
+          <a:prstGeom prst="roundRect">
+            <a:avLst>
+              <a:gd name="adj" fmla="val 5000"/>
+            </a:avLst>
+          </a:prstGeom>
+          <a:solidFill>
+            <a:srgbClr val="FFFFFF"/>
+          </a:solidFill>
+          <a:ln w="9525">
+            <a:solidFill>
+              <a:srgbClr val="D8E0EC"/>
+            </a:solidFill>
+            <a:prstDash val="solid"/>
+          </a:ln>
+        </p:spPr>
+      </p:sp>
+      <p:sp>
+        <p:nvSpPr>
+          <p:cNvPr id="16" name="Text 13"/>
+          <p:cNvSpPr/>
+          <p:nvPr/>
+        </p:nvSpPr>
+        <p:spPr>
+          <a:xfrm>
+            <a:off x="3515868" y="2148840"/>
+            <a:ext cx="365760" cy="365760"/>
+          </a:xfrm>
+          <a:prstGeom prst="rect">
+            <a:avLst/>
+          </a:prstGeom>
+          <a:noFill/>
+          <a:ln/>
+        </p:spPr>
+        <p:txBody>
+          <a:bodyPr wrap="square" rtlCol="0" anchor="ctr"/>
+          <a:lstStyle/>
+          <a:p>
+            <a:pPr indent="0" marL="0">
+              <a:buNone/>
+            </a:pPr>
+            <a:r>
+              <a:rPr lang="en-US" sz="1400" b="1" dirty="0">
+                <a:solidFill>
+                  <a:srgbClr val="F7A23B"/>
+                </a:solidFill>
+                <a:latin typeface="Arial" pitchFamily="34" charset="0"/>
+                <a:ea typeface="Arial" pitchFamily="34" charset="-122"/>
+                <a:cs typeface="Arial" pitchFamily="34" charset="-120"/>
+              </a:rPr>
+              <a:t>B</a:t>
+            </a:r>
+            <a:endParaRPr lang="en-US" sz="1400" dirty="0"/>
+          </a:p>
+        </p:txBody>
+      </p:sp>
+      <p:sp>
+        <p:nvSpPr>
+          <p:cNvPr id="17" name="Text 14"/>
+          <p:cNvSpPr/>
+          <p:nvPr/>
+        </p:nvSpPr>
+        <p:spPr>
+          <a:xfrm>
+            <a:off x="3515868" y="2514600"/>
+            <a:ext cx="2327148" cy="914400"/>
+          </a:xfrm>
+          <a:prstGeom prst="rect">
+            <a:avLst/>
+          </a:prstGeom>
+          <a:noFill/>
+          <a:ln/>
+        </p:spPr>
+        <p:txBody>
+          <a:bodyPr wrap="square" rtlCol="0" anchor="t"/>
+          <a:lstStyle/>
+          <a:p>
+            <a:pPr indent="0" marL="0">
+              <a:buNone/>
+            </a:pPr>
+            <a:r>
+              <a:rPr lang="en-US" sz="1500" dirty="0">
+                <a:solidFill>
+                  <a:srgbClr val="1F2937"/>
+                </a:solidFill>
+                <a:latin typeface="Arial" pitchFamily="34" charset="0"/>
+                <a:ea typeface="Arial" pitchFamily="34" charset="-122"/>
+                <a:cs typeface="Arial" pitchFamily="34" charset="-120"/>
+              </a:rPr>
+              <a:t>o custo fixo, para calcular o ponto de equilíbrio</a:t>
+            </a:r>
+            <a:endParaRPr lang="en-US" sz="1500" dirty="0"/>
+          </a:p>
+        </p:txBody>
+      </p:sp>
+      <p:sp>
+        <p:nvSpPr>
+          <p:cNvPr id="18" name="Shape 15"/>
+          <p:cNvSpPr/>
+          <p:nvPr/>
+        </p:nvSpPr>
+        <p:spPr>
+          <a:xfrm>
+            <a:off x="6208776" y="2057400"/>
+            <a:ext cx="2601468" cy="1463040"/>
+          </a:xfrm>
+          <a:prstGeom prst="roundRect">
+            <a:avLst>
+              <a:gd name="adj" fmla="val 5000"/>
+            </a:avLst>
+          </a:prstGeom>
+          <a:solidFill>
+            <a:srgbClr val="FFFFFF"/>
+          </a:solidFill>
+          <a:ln w="9525">
+            <a:solidFill>
+              <a:srgbClr val="D8E0EC"/>
+            </a:solidFill>
+            <a:prstDash val="solid"/>
+          </a:ln>
+        </p:spPr>
+      </p:sp>
+      <p:sp>
+        <p:nvSpPr>
+          <p:cNvPr id="19" name="Text 16"/>
+          <p:cNvSpPr/>
+          <p:nvPr/>
+        </p:nvSpPr>
+        <p:spPr>
+          <a:xfrm>
+            <a:off x="6345936" y="2148840"/>
+            <a:ext cx="365760" cy="365760"/>
+          </a:xfrm>
+          <a:prstGeom prst="rect">
+            <a:avLst/>
+          </a:prstGeom>
+          <a:noFill/>
+          <a:ln/>
+        </p:spPr>
+        <p:txBody>
+          <a:bodyPr wrap="square" rtlCol="0" anchor="ctr"/>
+          <a:lstStyle/>
+          <a:p>
+            <a:pPr indent="0" marL="0">
+              <a:buNone/>
+            </a:pPr>
+            <a:r>
+              <a:rPr lang="en-US" sz="1400" b="1" dirty="0">
+                <a:solidFill>
+                  <a:srgbClr val="F7A23B"/>
+                </a:solidFill>
+                <a:latin typeface="Arial" pitchFamily="34" charset="0"/>
+                <a:ea typeface="Arial" pitchFamily="34" charset="-122"/>
+                <a:cs typeface="Arial" pitchFamily="34" charset="-120"/>
+              </a:rPr>
+              <a:t>C</a:t>
+            </a:r>
+            <a:endParaRPr lang="en-US" sz="1400" dirty="0"/>
+          </a:p>
+        </p:txBody>
+      </p:sp>
+      <p:sp>
+        <p:nvSpPr>
+          <p:cNvPr id="20" name="Text 17"/>
+          <p:cNvSpPr/>
+          <p:nvPr/>
+        </p:nvSpPr>
+        <p:spPr>
+          <a:xfrm>
+            <a:off x="6345936" y="2514600"/>
+            <a:ext cx="2327148" cy="914400"/>
+          </a:xfrm>
+          <a:prstGeom prst="rect">
+            <a:avLst/>
+          </a:prstGeom>
+          <a:noFill/>
+          <a:ln/>
+        </p:spPr>
+        <p:txBody>
+          <a:bodyPr wrap="square" rtlCol="0" anchor="t"/>
+          <a:lstStyle/>
+          <a:p>
+            <a:pPr indent="0" marL="0">
+              <a:buNone/>
+            </a:pPr>
+            <a:r>
+              <a:rPr lang="en-US" sz="1500" dirty="0">
+                <a:solidFill>
+                  <a:srgbClr val="1F2937"/>
+                </a:solidFill>
+                <a:latin typeface="Arial" pitchFamily="34" charset="0"/>
+                <a:ea typeface="Arial" pitchFamily="34" charset="-122"/>
+                <a:cs typeface="Arial" pitchFamily="34" charset="-120"/>
+              </a:rPr>
+              <a:t>a geração</a:t>
+            </a:r>
+            <a:endParaRPr lang="en-US" sz="1500" dirty="0"/>
+          </a:p>
+        </p:txBody>
+      </p:sp>
+      <p:sp>
+        <p:nvSpPr>
+          <p:cNvPr id="21" name="Shape 18"/>
+          <p:cNvSpPr/>
+          <p:nvPr/>
+        </p:nvSpPr>
+        <p:spPr>
+          <a:xfrm>
+            <a:off x="9038844" y="2057400"/>
+            <a:ext cx="2601468" cy="1463040"/>
+          </a:xfrm>
+          <a:prstGeom prst="roundRect">
+            <a:avLst>
+              <a:gd name="adj" fmla="val 5000"/>
+            </a:avLst>
+          </a:prstGeom>
+          <a:solidFill>
+            <a:srgbClr val="FFFFFF"/>
+          </a:solidFill>
+          <a:ln w="9525">
+            <a:solidFill>
+              <a:srgbClr val="D8E0EC"/>
+            </a:solidFill>
+            <a:prstDash val="solid"/>
+          </a:ln>
+        </p:spPr>
+      </p:sp>
+      <p:sp>
+        <p:nvSpPr>
+          <p:cNvPr id="22" name="Text 19"/>
+          <p:cNvSpPr/>
+          <p:nvPr/>
+        </p:nvSpPr>
+        <p:spPr>
+          <a:xfrm>
+            <a:off x="9176004" y="2148840"/>
+            <a:ext cx="365760" cy="365760"/>
+          </a:xfrm>
+          <a:prstGeom prst="rect">
+            <a:avLst/>
+          </a:prstGeom>
+          <a:noFill/>
+          <a:ln/>
+        </p:spPr>
+        <p:txBody>
+          <a:bodyPr wrap="square" rtlCol="0" anchor="ctr"/>
+          <a:lstStyle/>
+          <a:p>
+            <a:pPr indent="0" marL="0">
+              <a:buNone/>
+            </a:pPr>
+            <a:r>
+              <a:rPr lang="en-US" sz="1400" b="1" dirty="0">
+                <a:solidFill>
+                  <a:srgbClr val="F7A23B"/>
+                </a:solidFill>
+                <a:latin typeface="Arial" pitchFamily="34" charset="0"/>
+                <a:ea typeface="Arial" pitchFamily="34" charset="-122"/>
+                <a:cs typeface="Arial" pitchFamily="34" charset="-120"/>
+              </a:rPr>
+              <a:t>D</a:t>
+            </a:r>
+            <a:endParaRPr lang="en-US" sz="1400" dirty="0"/>
+          </a:p>
+        </p:txBody>
+      </p:sp>
+      <p:sp>
+        <p:nvSpPr>
+          <p:cNvPr id="23" name="Text 20"/>
+          <p:cNvSpPr/>
+          <p:nvPr/>
+        </p:nvSpPr>
+        <p:spPr>
+          <a:xfrm>
+            <a:off x="9176004" y="2514600"/>
+            <a:ext cx="2327148" cy="914400"/>
+          </a:xfrm>
+          <a:prstGeom prst="rect">
+            <a:avLst/>
+          </a:prstGeom>
+          <a:noFill/>
+          <a:ln/>
+        </p:spPr>
+        <p:txBody>
+          <a:bodyPr wrap="square" rtlCol="0" anchor="t"/>
+          <a:lstStyle/>
+          <a:p>
+            <a:pPr indent="0" marL="0">
+              <a:buNone/>
+            </a:pPr>
+            <a:r>
+              <a:rPr lang="en-US" sz="1500" dirty="0">
+                <a:solidFill>
+                  <a:srgbClr val="1F2937"/>
+                </a:solidFill>
+                <a:latin typeface="Arial" pitchFamily="34" charset="0"/>
+                <a:ea typeface="Arial" pitchFamily="34" charset="-122"/>
+                <a:cs typeface="Arial" pitchFamily="34" charset="-120"/>
+              </a:rPr>
+              <a:t>o desconto do cliente</a:t>
+            </a:r>
+            <a:endParaRPr lang="en-US" sz="1500" dirty="0"/>
+          </a:p>
+        </p:txBody>
+      </p:sp>
+      <p:sp>
+        <p:nvSpPr>
+          <p:cNvPr id="25" name="Slide Number Placeholder 0"/>
+          <p:cNvSpPr>
+            <a:spLocks noGrp="1"/>
+          </p:cNvSpPr>
+          <p:nvPr>
+            <p:ph type="sldNum" sz="quarter" idx="4294967295"/>
+          </p:nvPr>
+        </p:nvSpPr>
+        <p:spPr>
+          <a:xfrm>
+            <a:off x="11292840" y="6556248"/>
+            <a:ext cx="548640" cy="256032"/>
+          </a:xfrm>
+          <a:prstGeom prst="rect">
+            <a:avLst/>
+          </a:prstGeom>
+          <a:extLst>
+            <a:ext uri="{C572A759-6A51-4108-AA02-DFA0A04FC94B}">
+              <ma14:wrappingTextBoxFlag xmlns:ma14="http://schemas.microsoft.com/office/mac/drawingml/2011/main" val="0"/>
+            </a:ext>
+          </a:extLst>
+        </p:spPr>
+        <p:txBody>
+          <a:bodyPr/>
+          <a:lstStyle>
+            <a:lvl1pPr>
+              <a:defRPr sz="900">
+                <a:solidFill>
+                  <a:srgbClr val="1B3A6B"/>
+                </a:solidFill>
+                <a:latin typeface="Arial"/>
+                <a:ea typeface="Arial"/>
+                <a:cs typeface="Arial"/>
+              </a:defRPr>
+            </a:lvl1pPr>
+          </a:lstStyle>
+          <a:p>
+            <a:pPr algn="r"/>
+            <a:fld id="{F7021451-1387-4CA6-816F-3879F97B5CBC}" type="slidenum">
+              <a:rPr b="1" lang="en-US"/>
+              <a:t>21</a:t>
+            </a:fld>
+            <a:endParaRPr lang="en-US"/>
+          </a:p>
+        </p:txBody>
+      </p:sp>
+    </p:spTree>
+  </p:cSld>
+  <p:clrMapOvr>
+    <a:masterClrMapping/>
+  </p:clrMapOvr>
+</p:sld>
+</file>
+
+<file path=ppt/slides/slide22.xml><?xml version="1.0" encoding="utf-8"?>
+<p:sld xmlns:a="http://schemas.openxmlformats.org/drawingml/2006/main" xmlns:r="http://schemas.openxmlformats.org/officeDocument/2006/relationships" xmlns:p="http://schemas.openxmlformats.org/presentationml/2006/main">
+  <p:cSld name="Slide 22">
+    <p:bg>
+      <p:bgPr>
+        <a:solidFill>
+          <a:srgbClr val="EEF3FA"/>
+        </a:solidFill>
+      </p:bgPr>
+    </p:bg>
+    <p:spTree>
+      <p:nvGrpSpPr>
+        <p:cNvPr id="1" name=""/>
+        <p:cNvGrpSpPr/>
+        <p:nvPr/>
+      </p:nvGrpSpPr>
+      <p:grpSpPr>
+        <a:xfrm>
+          <a:off x="0" y="0"/>
+          <a:ext cx="0" cy="0"/>
+          <a:chOff x="0" y="0"/>
+          <a:chExt cx="0" cy="0"/>
+        </a:xfrm>
+      </p:grpSpPr>
+      <p:sp>
+        <p:nvSpPr>
+          <p:cNvPr id="2" name="Shape 0"/>
+          <p:cNvSpPr/>
+          <p:nvPr/>
+        </p:nvSpPr>
+        <p:spPr>
+          <a:xfrm>
+            <a:off x="0" y="6510528"/>
+            <a:ext cx="12191695" cy="347472"/>
+          </a:xfrm>
+          <a:prstGeom prst="rect">
+            <a:avLst/>
+          </a:prstGeom>
+          <a:solidFill>
+            <a:srgbClr val="FFFFFF"/>
+          </a:solidFill>
+          <a:ln w="6350">
+            <a:solidFill>
+              <a:srgbClr val="D8E0EC"/>
+            </a:solidFill>
+            <a:prstDash val="solid"/>
+          </a:ln>
+        </p:spPr>
+      </p:sp>
+      <p:pic>
+        <p:nvPicPr>
+          <p:cNvPr id="3" name="Image 0" descr="/www/wwwroot/rexar/gdsolar/docs/curso/slides/assets/logo-gdsolar.png">    </p:cNvPr>
+          <p:cNvPicPr>
+            <a:picLocks noChangeAspect="1"/>
+          </p:cNvPicPr>
+          <p:nvPr/>
+        </p:nvPicPr>
+        <p:blipFill>
+          <a:blip r:embed="rId1"/>
+          <a:stretch>
+            <a:fillRect/>
+          </a:stretch>
+        </p:blipFill>
+        <p:spPr>
+          <a:xfrm>
+            <a:off x="548640" y="6547104"/>
+            <a:ext cx="274320" cy="274320"/>
+          </a:xfrm>
+          <a:prstGeom prst="rect">
+            <a:avLst/>
+          </a:prstGeom>
+        </p:spPr>
+      </p:pic>
+      <p:sp>
+        <p:nvSpPr>
+          <p:cNvPr id="4" name="Text 1"/>
+          <p:cNvSpPr/>
+          <p:nvPr/>
+        </p:nvSpPr>
+        <p:spPr>
+          <a:xfrm>
+            <a:off x="886968" y="6528816"/>
+            <a:ext cx="6400800" cy="310896"/>
+          </a:xfrm>
+          <a:prstGeom prst="rect">
+            <a:avLst/>
+          </a:prstGeom>
+          <a:noFill/>
+          <a:ln/>
+        </p:spPr>
+        <p:txBody>
+          <a:bodyPr wrap="square" rtlCol="0" anchor="ctr"/>
+          <a:lstStyle/>
+          <a:p>
+            <a:pPr indent="0" marL="0">
+              <a:buNone/>
+            </a:pPr>
+            <a:r>
+              <a:rPr lang="en-US" sz="900" b="1" dirty="0">
+                <a:solidFill>
+                  <a:srgbClr val="64748B"/>
+                </a:solidFill>
+                <a:latin typeface="Arial" pitchFamily="34" charset="0"/>
+                <a:ea typeface="Arial" pitchFamily="34" charset="-122"/>
+                <a:cs typeface="Arial" pitchFamily="34" charset="-120"/>
+              </a:rPr>
+              <a:t>GD Solar  ·  Formação em Energia por Assinatura</a:t>
+            </a:r>
+            <a:endParaRPr lang="en-US" sz="900" dirty="0"/>
+          </a:p>
+        </p:txBody>
+      </p:sp>
+      <p:sp>
+        <p:nvSpPr>
+          <p:cNvPr id="5" name="Text 2"/>
+          <p:cNvSpPr/>
+          <p:nvPr/>
+        </p:nvSpPr>
+        <p:spPr>
+          <a:xfrm>
+            <a:off x="7132320" y="6528816"/>
+            <a:ext cx="4023360" cy="310896"/>
+          </a:xfrm>
+          <a:prstGeom prst="rect">
+            <a:avLst/>
+          </a:prstGeom>
+          <a:noFill/>
+          <a:ln/>
+        </p:spPr>
+        <p:txBody>
+          <a:bodyPr wrap="square" rtlCol="0" anchor="ctr"/>
+          <a:lstStyle/>
+          <a:p>
+            <a:pPr algn="r" indent="0" marL="0">
+              <a:buNone/>
+            </a:pPr>
+            <a:r>
+              <a:rPr lang="en-US" sz="900" dirty="0">
+                <a:solidFill>
+                  <a:srgbClr val="64748B"/>
+                </a:solidFill>
+                <a:latin typeface="Arial" pitchFamily="34" charset="0"/>
+                <a:ea typeface="Arial" pitchFamily="34" charset="-122"/>
+                <a:cs typeface="Arial" pitchFamily="34" charset="-120"/>
+              </a:rPr>
+              <a:t>M10 · Teste rápido</a:t>
+            </a:r>
+            <a:endParaRPr lang="en-US" sz="900" dirty="0"/>
+          </a:p>
+        </p:txBody>
+      </p:sp>
+      <p:sp>
+        <p:nvSpPr>
+          <p:cNvPr id="6" name="Shape 3"/>
+          <p:cNvSpPr/>
+          <p:nvPr/>
+        </p:nvSpPr>
+        <p:spPr>
+          <a:xfrm>
+            <a:off x="548640" y="384048"/>
+            <a:ext cx="82296" cy="658368"/>
+          </a:xfrm>
+          <a:prstGeom prst="rect">
+            <a:avLst/>
+          </a:prstGeom>
+          <a:solidFill>
+            <a:srgbClr val="F7A23B"/>
+          </a:solidFill>
+          <a:ln/>
+        </p:spPr>
+      </p:sp>
+      <p:sp>
+        <p:nvSpPr>
+          <p:cNvPr id="7" name="Text 4"/>
+          <p:cNvSpPr/>
+          <p:nvPr/>
+        </p:nvSpPr>
+        <p:spPr>
+          <a:xfrm>
+            <a:off x="777240" y="292608"/>
+            <a:ext cx="10972800" cy="274320"/>
+          </a:xfrm>
+          <a:prstGeom prst="rect">
+            <a:avLst/>
+          </a:prstGeom>
+          <a:noFill/>
+          <a:ln/>
+        </p:spPr>
+        <p:txBody>
+          <a:bodyPr wrap="square" rtlCol="0" anchor="ctr"/>
+          <a:lstStyle/>
+          <a:p>
+            <a:pPr indent="0" marL="0">
+              <a:buNone/>
+            </a:pPr>
+            <a:r>
+              <a:rPr lang="en-US" sz="1000" b="1" spc="100" kern="0" dirty="0">
+                <a:solidFill>
+                  <a:srgbClr val="F7A23B"/>
+                </a:solidFill>
+                <a:latin typeface="Arial" pitchFamily="34" charset="0"/>
+                <a:ea typeface="Arial" pitchFamily="34" charset="-122"/>
+                <a:cs typeface="Arial" pitchFamily="34" charset="-120"/>
+              </a:rPr>
+              <a:t>CONFIRA SUAS RESPOSTAS</a:t>
+            </a:r>
+            <a:endParaRPr lang="en-US" sz="1000" dirty="0"/>
+          </a:p>
+        </p:txBody>
+      </p:sp>
+      <p:sp>
+        <p:nvSpPr>
+          <p:cNvPr id="8" name="Text 5"/>
+          <p:cNvSpPr/>
+          <p:nvPr/>
+        </p:nvSpPr>
+        <p:spPr>
+          <a:xfrm>
+            <a:off x="777240" y="530352"/>
+            <a:ext cx="10881360" cy="566928"/>
+          </a:xfrm>
+          <a:prstGeom prst="rect">
+            <a:avLst/>
+          </a:prstGeom>
+          <a:noFill/>
+          <a:ln/>
+        </p:spPr>
+        <p:txBody>
+          <a:bodyPr wrap="square" rtlCol="0" anchor="ctr">
+            <a:normAutofit/>
+          </a:bodyPr>
+          <a:lstStyle/>
+          <a:p>
+            <a:pPr indent="0" marL="0">
+              <a:buNone/>
+            </a:pPr>
+            <a:r>
+              <a:rPr lang="en-US" sz="2600" b="1" dirty="0">
+                <a:solidFill>
+                  <a:srgbClr val="1B3A6B"/>
+                </a:solidFill>
+                <a:latin typeface="Arial" pitchFamily="34" charset="0"/>
+                <a:ea typeface="Arial" pitchFamily="34" charset="-122"/>
+                <a:cs typeface="Arial" pitchFamily="34" charset="-120"/>
+              </a:rPr>
+              <a:t>Gabarito do teste rápido</a:t>
+            </a:r>
+            <a:endParaRPr lang="en-US" sz="2600" dirty="0"/>
+          </a:p>
+        </p:txBody>
+      </p:sp>
+      <p:sp>
+        <p:nvSpPr>
+          <p:cNvPr id="9" name="Shape 6"/>
+          <p:cNvSpPr/>
+          <p:nvPr/>
+        </p:nvSpPr>
+        <p:spPr>
+          <a:xfrm>
+            <a:off x="548640" y="1325880"/>
+            <a:ext cx="3544824" cy="2331720"/>
+          </a:xfrm>
+          <a:prstGeom prst="roundRect">
+            <a:avLst>
+              <a:gd name="adj" fmla="val 3137"/>
+            </a:avLst>
+          </a:prstGeom>
+          <a:solidFill>
+            <a:srgbClr val="FFFFFF"/>
+          </a:solidFill>
+          <a:ln w="9525">
+            <a:solidFill>
+              <a:srgbClr val="D8E0EC"/>
+            </a:solidFill>
+            <a:prstDash val="solid"/>
+          </a:ln>
+          <a:effectLst>
+            <a:outerShdw sx="100000" sy="100000" kx="0" ky="0" algn="bl" rotWithShape="0" blurRad="38100" dist="12700" dir="5400000">
+              <a:srgbClr val="000000">
+                <a:alpha val="8000"/>
+              </a:srgbClr>
+            </a:outerShdw>
+          </a:effectLst>
+        </p:spPr>
+      </p:sp>
+      <p:sp>
+        <p:nvSpPr>
+          <p:cNvPr id="10" name="Shape 7"/>
+          <p:cNvSpPr/>
+          <p:nvPr/>
+        </p:nvSpPr>
+        <p:spPr>
+          <a:xfrm>
+            <a:off x="731520" y="1508760"/>
+            <a:ext cx="457200" cy="457200"/>
+          </a:xfrm>
+          <a:prstGeom prst="ellipse">
+            <a:avLst/>
+          </a:prstGeom>
+          <a:solidFill>
+            <a:srgbClr val="1B3A6B"/>
+          </a:solidFill>
+          <a:ln/>
+        </p:spPr>
+      </p:sp>
+      <p:sp>
+        <p:nvSpPr>
+          <p:cNvPr id="11" name="Text 8"/>
+          <p:cNvSpPr/>
+          <p:nvPr/>
+        </p:nvSpPr>
+        <p:spPr>
+          <a:xfrm>
+            <a:off x="731520" y="1508760"/>
+            <a:ext cx="457200" cy="457200"/>
+          </a:xfrm>
+          <a:prstGeom prst="rect">
+            <a:avLst/>
+          </a:prstGeom>
+          <a:noFill/>
+          <a:ln/>
+        </p:spPr>
+        <p:txBody>
+          <a:bodyPr wrap="square" rtlCol="0" anchor="ctr"/>
+          <a:lstStyle/>
+          <a:p>
+            <a:pPr algn="ctr" indent="0" marL="0">
+              <a:buNone/>
+            </a:pPr>
+            <a:r>
+              <a:rPr lang="en-US" sz="1400" b="1" dirty="0">
+                <a:solidFill>
+                  <a:srgbClr val="FFFFFF"/>
+                </a:solidFill>
+                <a:latin typeface="Arial" pitchFamily="34" charset="0"/>
+                <a:ea typeface="Arial" pitchFamily="34" charset="-122"/>
+                <a:cs typeface="Arial" pitchFamily="34" charset="-120"/>
+              </a:rPr>
+              <a:t>1</a:t>
+            </a:r>
+            <a:endParaRPr lang="en-US" sz="1400" dirty="0"/>
+          </a:p>
+        </p:txBody>
+      </p:sp>
+      <p:sp>
+        <p:nvSpPr>
+          <p:cNvPr id="12" name="Text 9"/>
+          <p:cNvSpPr/>
+          <p:nvPr/>
+        </p:nvSpPr>
+        <p:spPr>
+          <a:xfrm>
+            <a:off x="1325880" y="1435608"/>
+            <a:ext cx="2630424" cy="2112264"/>
+          </a:xfrm>
+          <a:prstGeom prst="rect">
+            <a:avLst/>
+          </a:prstGeom>
+          <a:noFill/>
+          <a:ln/>
+        </p:spPr>
+        <p:txBody>
+          <a:bodyPr wrap="square" rtlCol="0" anchor="ctr">
+            <a:normAutofit/>
+          </a:bodyPr>
+          <a:lstStyle/>
+          <a:p>
+            <a:pPr indent="0" marL="0">
+              <a:buNone/>
+            </a:pPr>
+            <a:r>
+              <a:rPr lang="en-US" sz="1800" dirty="0">
+                <a:solidFill>
+                  <a:srgbClr val="1F2937"/>
+                </a:solidFill>
+                <a:latin typeface="Arial" pitchFamily="34" charset="0"/>
+                <a:ea typeface="Arial" pitchFamily="34" charset="-122"/>
+                <a:cs typeface="Arial" pitchFamily="34" charset="-120"/>
+              </a:rPr>
+              <a:t>A) energia alocada ÷ energia disponível</a:t>
+            </a:r>
+            <a:endParaRPr lang="en-US" sz="1800" dirty="0"/>
+          </a:p>
+        </p:txBody>
+      </p:sp>
+      <p:sp>
+        <p:nvSpPr>
+          <p:cNvPr id="13" name="Shape 10"/>
+          <p:cNvSpPr/>
+          <p:nvPr/>
+        </p:nvSpPr>
+        <p:spPr>
+          <a:xfrm>
+            <a:off x="4322064" y="1325880"/>
+            <a:ext cx="3544824" cy="2331720"/>
+          </a:xfrm>
+          <a:prstGeom prst="roundRect">
+            <a:avLst>
+              <a:gd name="adj" fmla="val 3137"/>
+            </a:avLst>
+          </a:prstGeom>
+          <a:solidFill>
+            <a:srgbClr val="FFFFFF"/>
+          </a:solidFill>
+          <a:ln w="9525">
+            <a:solidFill>
+              <a:srgbClr val="D8E0EC"/>
+            </a:solidFill>
+            <a:prstDash val="solid"/>
+          </a:ln>
+          <a:effectLst>
+            <a:outerShdw sx="100000" sy="100000" kx="0" ky="0" algn="bl" rotWithShape="0" blurRad="38100" dist="12700" dir="5400000">
+              <a:srgbClr val="000000">
+                <a:alpha val="8000"/>
+              </a:srgbClr>
+            </a:outerShdw>
+          </a:effectLst>
+        </p:spPr>
+      </p:sp>
+      <p:sp>
+        <p:nvSpPr>
+          <p:cNvPr id="14" name="Shape 11"/>
+          <p:cNvSpPr/>
+          <p:nvPr/>
+        </p:nvSpPr>
+        <p:spPr>
+          <a:xfrm>
+            <a:off x="4504944" y="1508760"/>
+            <a:ext cx="457200" cy="457200"/>
+          </a:xfrm>
+          <a:prstGeom prst="ellipse">
+            <a:avLst/>
+          </a:prstGeom>
+          <a:solidFill>
+            <a:srgbClr val="F7A23B"/>
+          </a:solidFill>
+          <a:ln/>
+        </p:spPr>
+      </p:sp>
+      <p:sp>
+        <p:nvSpPr>
+          <p:cNvPr id="15" name="Text 12"/>
+          <p:cNvSpPr/>
+          <p:nvPr/>
+        </p:nvSpPr>
+        <p:spPr>
+          <a:xfrm>
+            <a:off x="4504944" y="1508760"/>
+            <a:ext cx="457200" cy="457200"/>
+          </a:xfrm>
+          <a:prstGeom prst="rect">
+            <a:avLst/>
+          </a:prstGeom>
+          <a:noFill/>
+          <a:ln/>
+        </p:spPr>
+        <p:txBody>
+          <a:bodyPr wrap="square" rtlCol="0" anchor="ctr"/>
+          <a:lstStyle/>
+          <a:p>
+            <a:pPr algn="ctr" indent="0" marL="0">
+              <a:buNone/>
+            </a:pPr>
+            <a:r>
+              <a:rPr lang="en-US" sz="1400" b="1" dirty="0">
+                <a:solidFill>
+                  <a:srgbClr val="FFFFFF"/>
+                </a:solidFill>
+                <a:latin typeface="Arial" pitchFamily="34" charset="0"/>
+                <a:ea typeface="Arial" pitchFamily="34" charset="-122"/>
+                <a:cs typeface="Arial" pitchFamily="34" charset="-120"/>
+              </a:rPr>
+              <a:t>2</a:t>
+            </a:r>
+            <a:endParaRPr lang="en-US" sz="1400" dirty="0"/>
+          </a:p>
+        </p:txBody>
+      </p:sp>
+      <p:sp>
+        <p:nvSpPr>
+          <p:cNvPr id="16" name="Text 13"/>
+          <p:cNvSpPr/>
+          <p:nvPr/>
+        </p:nvSpPr>
+        <p:spPr>
+          <a:xfrm>
+            <a:off x="5099304" y="1435608"/>
+            <a:ext cx="2630424" cy="2112264"/>
+          </a:xfrm>
+          <a:prstGeom prst="rect">
+            <a:avLst/>
+          </a:prstGeom>
+          <a:noFill/>
+          <a:ln/>
+        </p:spPr>
+        <p:txBody>
+          <a:bodyPr wrap="square" rtlCol="0" anchor="ctr">
+            <a:normAutofit/>
+          </a:bodyPr>
+          <a:lstStyle/>
+          <a:p>
+            <a:pPr indent="0" marL="0">
+              <a:buNone/>
+            </a:pPr>
+            <a:r>
+              <a:rPr lang="en-US" sz="1800" dirty="0">
+                <a:solidFill>
+                  <a:srgbClr val="1F2937"/>
+                </a:solidFill>
+                <a:latin typeface="Arial" pitchFamily="34" charset="0"/>
+                <a:ea typeface="Arial" pitchFamily="34" charset="-122"/>
+                <a:cs typeface="Arial" pitchFamily="34" charset="-120"/>
+              </a:rPr>
+              <a:t>B) clientes que cancelam no período</a:t>
+            </a:r>
+            <a:endParaRPr lang="en-US" sz="1800" dirty="0"/>
+          </a:p>
+        </p:txBody>
+      </p:sp>
+      <p:sp>
+        <p:nvSpPr>
+          <p:cNvPr id="17" name="Shape 14"/>
+          <p:cNvSpPr/>
+          <p:nvPr/>
+        </p:nvSpPr>
+        <p:spPr>
+          <a:xfrm>
+            <a:off x="8095488" y="1325880"/>
+            <a:ext cx="3544824" cy="2331720"/>
+          </a:xfrm>
+          <a:prstGeom prst="roundRect">
+            <a:avLst>
+              <a:gd name="adj" fmla="val 3137"/>
+            </a:avLst>
+          </a:prstGeom>
+          <a:solidFill>
+            <a:srgbClr val="FFFFFF"/>
+          </a:solidFill>
+          <a:ln w="9525">
+            <a:solidFill>
+              <a:srgbClr val="D8E0EC"/>
+            </a:solidFill>
+            <a:prstDash val="solid"/>
+          </a:ln>
+          <a:effectLst>
+            <a:outerShdw sx="100000" sy="100000" kx="0" ky="0" algn="bl" rotWithShape="0" blurRad="38100" dist="12700" dir="5400000">
+              <a:srgbClr val="000000">
+                <a:alpha val="8000"/>
+              </a:srgbClr>
+            </a:outerShdw>
+          </a:effectLst>
+        </p:spPr>
+      </p:sp>
+      <p:sp>
+        <p:nvSpPr>
+          <p:cNvPr id="18" name="Shape 15"/>
+          <p:cNvSpPr/>
+          <p:nvPr/>
+        </p:nvSpPr>
+        <p:spPr>
+          <a:xfrm>
+            <a:off x="8278368" y="1508760"/>
+            <a:ext cx="457200" cy="457200"/>
+          </a:xfrm>
+          <a:prstGeom prst="ellipse">
+            <a:avLst/>
+          </a:prstGeom>
+          <a:solidFill>
+            <a:srgbClr val="1B3A6B"/>
+          </a:solidFill>
+          <a:ln/>
+        </p:spPr>
+      </p:sp>
+      <p:sp>
+        <p:nvSpPr>
+          <p:cNvPr id="19" name="Text 16"/>
+          <p:cNvSpPr/>
+          <p:nvPr/>
+        </p:nvSpPr>
+        <p:spPr>
+          <a:xfrm>
+            <a:off x="8278368" y="1508760"/>
+            <a:ext cx="457200" cy="457200"/>
+          </a:xfrm>
+          <a:prstGeom prst="rect">
+            <a:avLst/>
+          </a:prstGeom>
+          <a:noFill/>
+          <a:ln/>
+        </p:spPr>
+        <p:txBody>
+          <a:bodyPr wrap="square" rtlCol="0" anchor="ctr"/>
+          <a:lstStyle/>
+          <a:p>
+            <a:pPr algn="ctr" indent="0" marL="0">
+              <a:buNone/>
+            </a:pPr>
+            <a:r>
+              <a:rPr lang="en-US" sz="1400" b="1" dirty="0">
+                <a:solidFill>
+                  <a:srgbClr val="FFFFFF"/>
+                </a:solidFill>
+                <a:latin typeface="Arial" pitchFamily="34" charset="0"/>
+                <a:ea typeface="Arial" pitchFamily="34" charset="-122"/>
+                <a:cs typeface="Arial" pitchFamily="34" charset="-120"/>
+              </a:rPr>
+              <a:t>3</a:t>
+            </a:r>
+            <a:endParaRPr lang="en-US" sz="1400" dirty="0"/>
+          </a:p>
+        </p:txBody>
+      </p:sp>
+      <p:sp>
+        <p:nvSpPr>
+          <p:cNvPr id="20" name="Text 17"/>
+          <p:cNvSpPr/>
+          <p:nvPr/>
+        </p:nvSpPr>
+        <p:spPr>
+          <a:xfrm>
+            <a:off x="8872728" y="1435608"/>
+            <a:ext cx="2630424" cy="2112264"/>
+          </a:xfrm>
+          <a:prstGeom prst="rect">
+            <a:avLst/>
+          </a:prstGeom>
+          <a:noFill/>
+          <a:ln/>
+        </p:spPr>
+        <p:txBody>
+          <a:bodyPr wrap="square" rtlCol="0" anchor="ctr">
+            <a:normAutofit/>
+          </a:bodyPr>
+          <a:lstStyle/>
+          <a:p>
+            <a:pPr indent="0" marL="0">
+              <a:buNone/>
+            </a:pPr>
+            <a:r>
+              <a:rPr lang="en-US" sz="1800" dirty="0">
+                <a:solidFill>
+                  <a:srgbClr val="1F2937"/>
+                </a:solidFill>
+                <a:latin typeface="Arial" pitchFamily="34" charset="0"/>
+                <a:ea typeface="Arial" pitchFamily="34" charset="-122"/>
+                <a:cs typeface="Arial" pitchFamily="34" charset="-120"/>
+              </a:rPr>
+              <a:t>A) mostrar ao cliente quanto ele economizou e reduzir cancelamentos</a:t>
+            </a:r>
+            <a:endParaRPr lang="en-US" sz="1800" dirty="0"/>
+          </a:p>
+        </p:txBody>
+      </p:sp>
+      <p:sp>
+        <p:nvSpPr>
+          <p:cNvPr id="21" name="Shape 18"/>
+          <p:cNvSpPr/>
+          <p:nvPr/>
+        </p:nvSpPr>
+        <p:spPr>
+          <a:xfrm>
+            <a:off x="548640" y="3886200"/>
+            <a:ext cx="3544824" cy="2331720"/>
+          </a:xfrm>
+          <a:prstGeom prst="roundRect">
+            <a:avLst>
+              <a:gd name="adj" fmla="val 3137"/>
+            </a:avLst>
+          </a:prstGeom>
+          <a:solidFill>
+            <a:srgbClr val="FFFFFF"/>
+          </a:solidFill>
+          <a:ln w="9525">
+            <a:solidFill>
+              <a:srgbClr val="D8E0EC"/>
+            </a:solidFill>
+            <a:prstDash val="solid"/>
+          </a:ln>
+          <a:effectLst>
+            <a:outerShdw sx="100000" sy="100000" kx="0" ky="0" algn="bl" rotWithShape="0" blurRad="38100" dist="12700" dir="5400000">
+              <a:srgbClr val="000000">
+                <a:alpha val="8000"/>
+              </a:srgbClr>
+            </a:outerShdw>
+          </a:effectLst>
+        </p:spPr>
+      </p:sp>
+      <p:sp>
+        <p:nvSpPr>
+          <p:cNvPr id="22" name="Shape 19"/>
+          <p:cNvSpPr/>
+          <p:nvPr/>
+        </p:nvSpPr>
+        <p:spPr>
+          <a:xfrm>
+            <a:off x="731520" y="4069080"/>
+            <a:ext cx="457200" cy="457200"/>
+          </a:xfrm>
+          <a:prstGeom prst="ellipse">
+            <a:avLst/>
+          </a:prstGeom>
+          <a:solidFill>
+            <a:srgbClr val="F7A23B"/>
+          </a:solidFill>
+          <a:ln/>
+        </p:spPr>
+      </p:sp>
+      <p:sp>
+        <p:nvSpPr>
+          <p:cNvPr id="23" name="Text 20"/>
+          <p:cNvSpPr/>
+          <p:nvPr/>
+        </p:nvSpPr>
+        <p:spPr>
+          <a:xfrm>
+            <a:off x="731520" y="4069080"/>
+            <a:ext cx="457200" cy="457200"/>
+          </a:xfrm>
+          <a:prstGeom prst="rect">
+            <a:avLst/>
+          </a:prstGeom>
+          <a:noFill/>
+          <a:ln/>
+        </p:spPr>
+        <p:txBody>
+          <a:bodyPr wrap="square" rtlCol="0" anchor="ctr"/>
+          <a:lstStyle/>
+          <a:p>
+            <a:pPr algn="ctr" indent="0" marL="0">
+              <a:buNone/>
+            </a:pPr>
+            <a:r>
+              <a:rPr lang="en-US" sz="1400" b="1" dirty="0">
+                <a:solidFill>
+                  <a:srgbClr val="FFFFFF"/>
+                </a:solidFill>
+                <a:latin typeface="Arial" pitchFamily="34" charset="0"/>
+                <a:ea typeface="Arial" pitchFamily="34" charset="-122"/>
+                <a:cs typeface="Arial" pitchFamily="34" charset="-120"/>
+              </a:rPr>
+              <a:t>4</a:t>
+            </a:r>
+            <a:endParaRPr lang="en-US" sz="1400" dirty="0"/>
+          </a:p>
+        </p:txBody>
+      </p:sp>
+      <p:sp>
+        <p:nvSpPr>
+          <p:cNvPr id="24" name="Text 21"/>
+          <p:cNvSpPr/>
+          <p:nvPr/>
+        </p:nvSpPr>
+        <p:spPr>
+          <a:xfrm>
+            <a:off x="1325880" y="3995928"/>
+            <a:ext cx="2630424" cy="2112264"/>
+          </a:xfrm>
+          <a:prstGeom prst="rect">
+            <a:avLst/>
+          </a:prstGeom>
+          <a:noFill/>
+          <a:ln/>
+        </p:spPr>
+        <p:txBody>
+          <a:bodyPr wrap="square" rtlCol="0" anchor="ctr">
+            <a:normAutofit/>
+          </a:bodyPr>
+          <a:lstStyle/>
+          <a:p>
+            <a:pPr indent="0" marL="0">
+              <a:buNone/>
+            </a:pPr>
+            <a:r>
+              <a:rPr lang="en-US" sz="1800" dirty="0">
+                <a:solidFill>
+                  <a:srgbClr val="1F2937"/>
+                </a:solidFill>
+                <a:latin typeface="Arial" pitchFamily="34" charset="0"/>
+                <a:ea typeface="Arial" pitchFamily="34" charset="-122"/>
+                <a:cs typeface="Arial" pitchFamily="34" charset="-120"/>
+              </a:rPr>
+              <a:t>-) </a:t>
+            </a:r>
+            <a:endParaRPr lang="en-US" sz="1800" dirty="0"/>
+          </a:p>
+        </p:txBody>
+      </p:sp>
+      <p:sp>
+        <p:nvSpPr>
+          <p:cNvPr id="25" name="Shape 22"/>
+          <p:cNvSpPr/>
+          <p:nvPr/>
+        </p:nvSpPr>
+        <p:spPr>
+          <a:xfrm>
+            <a:off x="4322064" y="3886200"/>
+            <a:ext cx="3544824" cy="2331720"/>
+          </a:xfrm>
+          <a:prstGeom prst="roundRect">
+            <a:avLst>
+              <a:gd name="adj" fmla="val 3137"/>
+            </a:avLst>
+          </a:prstGeom>
+          <a:solidFill>
+            <a:srgbClr val="FFFFFF"/>
+          </a:solidFill>
+          <a:ln w="9525">
+            <a:solidFill>
+              <a:srgbClr val="D8E0EC"/>
+            </a:solidFill>
+            <a:prstDash val="solid"/>
+          </a:ln>
+          <a:effectLst>
+            <a:outerShdw sx="100000" sy="100000" kx="0" ky="0" algn="bl" rotWithShape="0" blurRad="38100" dist="12700" dir="5400000">
+              <a:srgbClr val="000000">
+                <a:alpha val="8000"/>
+              </a:srgbClr>
+            </a:outerShdw>
+          </a:effectLst>
+        </p:spPr>
+      </p:sp>
+      <p:sp>
+        <p:nvSpPr>
+          <p:cNvPr id="26" name="Shape 23"/>
+          <p:cNvSpPr/>
+          <p:nvPr/>
+        </p:nvSpPr>
+        <p:spPr>
+          <a:xfrm>
+            <a:off x="4504944" y="4069080"/>
+            <a:ext cx="457200" cy="457200"/>
+          </a:xfrm>
+          <a:prstGeom prst="ellipse">
+            <a:avLst/>
+          </a:prstGeom>
+          <a:solidFill>
+            <a:srgbClr val="1B3A6B"/>
+          </a:solidFill>
+          <a:ln/>
+        </p:spPr>
+      </p:sp>
+      <p:sp>
+        <p:nvSpPr>
+          <p:cNvPr id="27" name="Text 24"/>
+          <p:cNvSpPr/>
+          <p:nvPr/>
+        </p:nvSpPr>
+        <p:spPr>
+          <a:xfrm>
+            <a:off x="4504944" y="4069080"/>
+            <a:ext cx="457200" cy="457200"/>
+          </a:xfrm>
+          <a:prstGeom prst="rect">
+            <a:avLst/>
+          </a:prstGeom>
+          <a:noFill/>
+          <a:ln/>
+        </p:spPr>
+        <p:txBody>
+          <a:bodyPr wrap="square" rtlCol="0" anchor="ctr"/>
+          <a:lstStyle/>
+          <a:p>
+            <a:pPr algn="ctr" indent="0" marL="0">
+              <a:buNone/>
+            </a:pPr>
+            <a:r>
+              <a:rPr lang="en-US" sz="1400" b="1" dirty="0">
+                <a:solidFill>
+                  <a:srgbClr val="FFFFFF"/>
+                </a:solidFill>
+                <a:latin typeface="Arial" pitchFamily="34" charset="0"/>
+                <a:ea typeface="Arial" pitchFamily="34" charset="-122"/>
+                <a:cs typeface="Arial" pitchFamily="34" charset="-120"/>
+              </a:rPr>
+              <a:t>5</a:t>
+            </a:r>
+            <a:endParaRPr lang="en-US" sz="1400" dirty="0"/>
+          </a:p>
+        </p:txBody>
+      </p:sp>
+      <p:sp>
+        <p:nvSpPr>
+          <p:cNvPr id="28" name="Text 25"/>
+          <p:cNvSpPr/>
+          <p:nvPr/>
+        </p:nvSpPr>
+        <p:spPr>
+          <a:xfrm>
+            <a:off x="5099304" y="3995928"/>
+            <a:ext cx="2630424" cy="2112264"/>
+          </a:xfrm>
+          <a:prstGeom prst="rect">
+            <a:avLst/>
+          </a:prstGeom>
+          <a:noFill/>
+          <a:ln/>
+        </p:spPr>
+        <p:txBody>
+          <a:bodyPr wrap="square" rtlCol="0" anchor="ctr">
+            <a:normAutofit/>
+          </a:bodyPr>
+          <a:lstStyle/>
+          <a:p>
+            <a:pPr indent="0" marL="0">
+              <a:buNone/>
+            </a:pPr>
+            <a:r>
+              <a:rPr lang="en-US" sz="1800" dirty="0">
+                <a:solidFill>
+                  <a:srgbClr val="1F2937"/>
+                </a:solidFill>
+                <a:latin typeface="Arial" pitchFamily="34" charset="0"/>
+                <a:ea typeface="Arial" pitchFamily="34" charset="-122"/>
+                <a:cs typeface="Arial" pitchFamily="34" charset="-120"/>
+              </a:rPr>
+              <a:t>B) o custo fixo, para calcular o ponto de equilíbrio</a:t>
+            </a:r>
+            <a:endParaRPr lang="en-US" sz="1800" dirty="0"/>
+          </a:p>
+        </p:txBody>
+      </p:sp>
+      <p:sp>
+        <p:nvSpPr>
+          <p:cNvPr id="25" name="Slide Number Placeholder 0"/>
+          <p:cNvSpPr>
+            <a:spLocks noGrp="1"/>
+          </p:cNvSpPr>
+          <p:nvPr>
+            <p:ph type="sldNum" sz="quarter" idx="4294967295"/>
+          </p:nvPr>
+        </p:nvSpPr>
+        <p:spPr>
+          <a:xfrm>
+            <a:off x="11292840" y="6556248"/>
+            <a:ext cx="548640" cy="256032"/>
+          </a:xfrm>
+          <a:prstGeom prst="rect">
+            <a:avLst/>
+          </a:prstGeom>
+          <a:extLst>
+            <a:ext uri="{C572A759-6A51-4108-AA02-DFA0A04FC94B}">
+              <ma14:wrappingTextBoxFlag xmlns:ma14="http://schemas.microsoft.com/office/mac/drawingml/2011/main" val="0"/>
+            </a:ext>
+          </a:extLst>
+        </p:spPr>
+        <p:txBody>
+          <a:bodyPr/>
+          <a:lstStyle>
+            <a:lvl1pPr>
+              <a:defRPr sz="900">
+                <a:solidFill>
+                  <a:srgbClr val="1B3A6B"/>
+                </a:solidFill>
+                <a:latin typeface="Arial"/>
+                <a:ea typeface="Arial"/>
+                <a:cs typeface="Arial"/>
+              </a:defRPr>
+            </a:lvl1pPr>
+          </a:lstStyle>
+          <a:p>
+            <a:pPr algn="r"/>
+            <a:fld id="{F7021451-1387-4CA6-816F-3879F97B5CBC}" type="slidenum">
+              <a:rPr b="1" lang="en-US"/>
+              <a:t>22</a:t>
+            </a:fld>
+            <a:endParaRPr lang="en-US"/>
+          </a:p>
+        </p:txBody>
+      </p:sp>
+    </p:spTree>
+  </p:cSld>
+  <p:clrMapOvr>
+    <a:masterClrMapping/>
+  </p:clrMapOvr>
+</p:sld>
+</file>
+
+<file path=ppt/slides/slide23.xml><?xml version="1.0" encoding="utf-8"?>
+<p:sld xmlns:a="http://schemas.openxmlformats.org/drawingml/2006/main" xmlns:r="http://schemas.openxmlformats.org/officeDocument/2006/relationships" xmlns:p="http://schemas.openxmlformats.org/presentationml/2006/main">
+  <p:cSld name="Slide 23">
+    <p:bg>
+      <p:bgPr>
+        <a:solidFill>
+          <a:srgbClr val="F6F8FB"/>
+        </a:solidFill>
+      </p:bgPr>
+    </p:bg>
+    <p:spTree>
+      <p:nvGrpSpPr>
+        <p:cNvPr id="1" name=""/>
+        <p:cNvGrpSpPr/>
+        <p:nvPr/>
+      </p:nvGrpSpPr>
+      <p:grpSpPr>
+        <a:xfrm>
+          <a:off x="0" y="0"/>
+          <a:ext cx="0" cy="0"/>
+          <a:chOff x="0" y="0"/>
+          <a:chExt cx="0" cy="0"/>
+        </a:xfrm>
+      </p:grpSpPr>
+      <p:sp>
+        <p:nvSpPr>
+          <p:cNvPr id="2" name="Shape 0"/>
+          <p:cNvSpPr/>
+          <p:nvPr/>
+        </p:nvSpPr>
+        <p:spPr>
+          <a:xfrm>
+            <a:off x="0" y="6510528"/>
+            <a:ext cx="12191695" cy="347472"/>
+          </a:xfrm>
+          <a:prstGeom prst="rect">
+            <a:avLst/>
+          </a:prstGeom>
+          <a:solidFill>
+            <a:srgbClr val="FFFFFF"/>
+          </a:solidFill>
+          <a:ln w="6350">
+            <a:solidFill>
+              <a:srgbClr val="D8E0EC"/>
+            </a:solidFill>
+            <a:prstDash val="solid"/>
+          </a:ln>
+        </p:spPr>
+      </p:sp>
+      <p:pic>
+        <p:nvPicPr>
+          <p:cNvPr id="3" name="Image 0" descr="/www/wwwroot/rexar/gdsolar/docs/curso/slides/assets/logo-gdsolar.png">    </p:cNvPr>
+          <p:cNvPicPr>
+            <a:picLocks noChangeAspect="1"/>
+          </p:cNvPicPr>
+          <p:nvPr/>
+        </p:nvPicPr>
+        <p:blipFill>
+          <a:blip r:embed="rId1"/>
+          <a:stretch>
+            <a:fillRect/>
+          </a:stretch>
+        </p:blipFill>
+        <p:spPr>
+          <a:xfrm>
+            <a:off x="548640" y="6547104"/>
+            <a:ext cx="274320" cy="274320"/>
+          </a:xfrm>
+          <a:prstGeom prst="rect">
+            <a:avLst/>
+          </a:prstGeom>
+        </p:spPr>
+      </p:pic>
+      <p:sp>
+        <p:nvSpPr>
+          <p:cNvPr id="4" name="Text 1"/>
+          <p:cNvSpPr/>
+          <p:nvPr/>
+        </p:nvSpPr>
+        <p:spPr>
+          <a:xfrm>
+            <a:off x="886968" y="6528816"/>
+            <a:ext cx="6400800" cy="310896"/>
+          </a:xfrm>
+          <a:prstGeom prst="rect">
+            <a:avLst/>
+          </a:prstGeom>
+          <a:noFill/>
+          <a:ln/>
+        </p:spPr>
+        <p:txBody>
+          <a:bodyPr wrap="square" rtlCol="0" anchor="ctr"/>
+          <a:lstStyle/>
+          <a:p>
+            <a:pPr indent="0" marL="0">
+              <a:buNone/>
+            </a:pPr>
+            <a:r>
+              <a:rPr lang="en-US" sz="900" b="1" dirty="0">
+                <a:solidFill>
+                  <a:srgbClr val="64748B"/>
+                </a:solidFill>
+                <a:latin typeface="Arial" pitchFamily="34" charset="0"/>
+                <a:ea typeface="Arial" pitchFamily="34" charset="-122"/>
+                <a:cs typeface="Arial" pitchFamily="34" charset="-120"/>
+              </a:rPr>
+              <a:t>GD Solar  ·  Formação em Energia por Assinatura</a:t>
+            </a:r>
+            <a:endParaRPr lang="en-US" sz="900" dirty="0"/>
+          </a:p>
+        </p:txBody>
+      </p:sp>
+      <p:sp>
+        <p:nvSpPr>
+          <p:cNvPr id="5" name="Text 2"/>
+          <p:cNvSpPr/>
+          <p:nvPr/>
+        </p:nvSpPr>
+        <p:spPr>
+          <a:xfrm>
+            <a:off x="7132320" y="6528816"/>
+            <a:ext cx="4023360" cy="310896"/>
+          </a:xfrm>
+          <a:prstGeom prst="rect">
+            <a:avLst/>
+          </a:prstGeom>
+          <a:noFill/>
+          <a:ln/>
+        </p:spPr>
+        <p:txBody>
+          <a:bodyPr wrap="square" rtlCol="0" anchor="ctr"/>
+          <a:lstStyle/>
+          <a:p>
+            <a:pPr algn="r" indent="0" marL="0">
+              <a:buNone/>
+            </a:pPr>
+            <a:r>
+              <a:rPr lang="en-US" sz="900" dirty="0">
+                <a:solidFill>
+                  <a:srgbClr val="64748B"/>
+                </a:solidFill>
+                <a:latin typeface="Arial" pitchFamily="34" charset="0"/>
+                <a:ea typeface="Arial" pitchFamily="34" charset="-122"/>
+                <a:cs typeface="Arial" pitchFamily="34" charset="-120"/>
+              </a:rPr>
+              <a:t>M10 · Fechamento</a:t>
+            </a:r>
+            <a:endParaRPr lang="en-US" sz="900" dirty="0"/>
+          </a:p>
+        </p:txBody>
+      </p:sp>
+      <p:sp>
+        <p:nvSpPr>
+          <p:cNvPr id="6" name="Shape 3"/>
+          <p:cNvSpPr/>
+          <p:nvPr/>
+        </p:nvSpPr>
+        <p:spPr>
+          <a:xfrm>
+            <a:off x="548640" y="384048"/>
+            <a:ext cx="82296" cy="658368"/>
+          </a:xfrm>
+          <a:prstGeom prst="rect">
+            <a:avLst/>
+          </a:prstGeom>
+          <a:solidFill>
+            <a:srgbClr val="F7A23B"/>
+          </a:solidFill>
+          <a:ln/>
+        </p:spPr>
+      </p:sp>
+      <p:sp>
+        <p:nvSpPr>
+          <p:cNvPr id="7" name="Text 4"/>
+          <p:cNvSpPr/>
+          <p:nvPr/>
+        </p:nvSpPr>
+        <p:spPr>
+          <a:xfrm>
+            <a:off x="777240" y="292608"/>
+            <a:ext cx="10972800" cy="274320"/>
+          </a:xfrm>
+          <a:prstGeom prst="rect">
+            <a:avLst/>
+          </a:prstGeom>
+          <a:noFill/>
+          <a:ln/>
+        </p:spPr>
+        <p:txBody>
+          <a:bodyPr wrap="square" rtlCol="0" anchor="ctr"/>
+          <a:lstStyle/>
+          <a:p>
+            <a:pPr indent="0" marL="0">
+              <a:buNone/>
+            </a:pPr>
+            <a:r>
+              <a:rPr lang="en-US" sz="1000" b="1" spc="100" kern="0" dirty="0">
+                <a:solidFill>
+                  <a:srgbClr val="F7A23B"/>
+                </a:solidFill>
+                <a:latin typeface="Arial" pitchFamily="34" charset="0"/>
+                <a:ea typeface="Arial" pitchFamily="34" charset="-122"/>
+                <a:cs typeface="Arial" pitchFamily="34" charset="-120"/>
+              </a:rPr>
+              <a:t>FECHAMENTO DO MÓDULO</a:t>
+            </a:r>
+            <a:endParaRPr lang="en-US" sz="1000" dirty="0"/>
+          </a:p>
+        </p:txBody>
+      </p:sp>
+      <p:sp>
+        <p:nvSpPr>
+          <p:cNvPr id="8" name="Text 5"/>
+          <p:cNvSpPr/>
+          <p:nvPr/>
+        </p:nvSpPr>
+        <p:spPr>
+          <a:xfrm>
+            <a:off x="777240" y="530352"/>
+            <a:ext cx="10881360" cy="566928"/>
+          </a:xfrm>
+          <a:prstGeom prst="rect">
+            <a:avLst/>
+          </a:prstGeom>
+          <a:noFill/>
+          <a:ln/>
+        </p:spPr>
+        <p:txBody>
+          <a:bodyPr wrap="square" rtlCol="0" anchor="ctr">
+            <a:normAutofit/>
+          </a:bodyPr>
+          <a:lstStyle/>
+          <a:p>
+            <a:pPr indent="0" marL="0">
+              <a:buNone/>
+            </a:pPr>
+            <a:r>
+              <a:rPr lang="en-US" sz="2600" b="1" dirty="0">
+                <a:solidFill>
+                  <a:srgbClr val="1B3A6B"/>
+                </a:solidFill>
+                <a:latin typeface="Arial" pitchFamily="34" charset="0"/>
+                <a:ea typeface="Arial" pitchFamily="34" charset="-122"/>
+                <a:cs typeface="Arial" pitchFamily="34" charset="-120"/>
+              </a:rPr>
+              <a:t>Pratique e entregue</a:t>
+            </a:r>
+            <a:endParaRPr lang="en-US" sz="2600" dirty="0"/>
+          </a:p>
+        </p:txBody>
+      </p:sp>
+      <p:sp>
+        <p:nvSpPr>
+          <p:cNvPr id="9" name="Text 6"/>
+          <p:cNvSpPr/>
+          <p:nvPr/>
+        </p:nvSpPr>
+        <p:spPr>
+          <a:xfrm>
+            <a:off x="548640" y="1325880"/>
+            <a:ext cx="5394960" cy="411480"/>
+          </a:xfrm>
+          <a:prstGeom prst="rect">
+            <a:avLst/>
+          </a:prstGeom>
+          <a:noFill/>
+          <a:ln/>
+        </p:spPr>
+        <p:txBody>
+          <a:bodyPr wrap="square" rtlCol="0" anchor="ctr"/>
+          <a:lstStyle/>
+          <a:p>
+            <a:pPr indent="0" marL="0">
+              <a:buNone/>
+            </a:pPr>
+            <a:r>
+              <a:rPr lang="en-US" sz="1600" b="1" dirty="0">
+                <a:solidFill>
+                  <a:srgbClr val="1B3A6B"/>
+                </a:solidFill>
+                <a:latin typeface="Arial" pitchFamily="34" charset="0"/>
+                <a:ea typeface="Arial" pitchFamily="34" charset="-122"/>
+                <a:cs typeface="Arial" pitchFamily="34" charset="-120"/>
+              </a:rPr>
+              <a:t>Exercícios</a:t>
+            </a:r>
+            <a:endParaRPr lang="en-US" sz="1600" dirty="0"/>
+          </a:p>
+        </p:txBody>
+      </p:sp>
+      <p:sp>
+        <p:nvSpPr>
+          <p:cNvPr id="10" name="Text 7"/>
+          <p:cNvSpPr/>
+          <p:nvPr/>
+        </p:nvSpPr>
+        <p:spPr>
+          <a:xfrm>
+            <a:off x="548640" y="1783080"/>
+            <a:ext cx="5394960" cy="4480560"/>
+          </a:xfrm>
+          <a:prstGeom prst="rect">
+            <a:avLst/>
+          </a:prstGeom>
+          <a:noFill/>
+          <a:ln/>
+        </p:spPr>
+        <p:txBody>
+          <a:bodyPr wrap="square" rtlCol="0" anchor="t">
+            <a:normAutofit/>
+          </a:bodyPr>
+          <a:lstStyle/>
+          <a:p>
+            <a:pPr indent="0" marL="0">
+              <a:spcAft>
+                <a:spcPts val="800"/>
+              </a:spcAft>
+              <a:buNone/>
+            </a:pPr>
+            <a:r>
+              <a:rPr lang="en-US" sz="1600" dirty="0">
+                <a:solidFill>
+                  <a:srgbClr val="1F2937"/>
+                </a:solidFill>
+                <a:latin typeface="Arial" pitchFamily="34" charset="0"/>
+                <a:ea typeface="Arial" pitchFamily="34" charset="-122"/>
+                <a:cs typeface="Arial" pitchFamily="34" charset="-120"/>
+              </a:rPr>
+              <a:t>1. Usina com 60.000 kWh disponíveis e 54.600 kWh alocados: taxa de ocupação?</a:t>
+            </a:r>
+            <a:endParaRPr lang="en-US" sz="1600" dirty="0"/>
+          </a:p>
+          <a:p>
+            <a:pPr indent="0" marL="0">
+              <a:spcAft>
+                <a:spcPts val="800"/>
+              </a:spcAft>
+              <a:buNone/>
+            </a:pPr>
+            <a:r>
+              <a:rPr lang="en-US" sz="1600" dirty="0">
+                <a:solidFill>
+                  <a:srgbClr val="1F2937"/>
+                </a:solidFill>
+                <a:latin typeface="Arial" pitchFamily="34" charset="0"/>
+                <a:ea typeface="Arial" pitchFamily="34" charset="-122"/>
+                <a:cs typeface="Arial" pitchFamily="34" charset="-120"/>
+              </a:rPr>
+              <a:t>2. Faturado R$ 30.000, recebido no mês R$ 27.300 de cobranças do mês: taxa de recebimento?</a:t>
+            </a:r>
+            <a:endParaRPr lang="en-US" sz="1600" dirty="0"/>
+          </a:p>
+          <a:p>
+            <a:pPr indent="0" marL="0">
+              <a:spcAft>
+                <a:spcPts val="800"/>
+              </a:spcAft>
+              <a:buNone/>
+            </a:pPr>
+            <a:r>
+              <a:rPr lang="en-US" sz="1600" dirty="0">
+                <a:solidFill>
+                  <a:srgbClr val="1F2937"/>
+                </a:solidFill>
+                <a:latin typeface="Arial" pitchFamily="34" charset="0"/>
+                <a:ea typeface="Arial" pitchFamily="34" charset="-122"/>
+                <a:cs typeface="Arial" pitchFamily="34" charset="-120"/>
+              </a:rPr>
+              <a:t>3. 300 clientes, 6 cancelamentos no mês: churn mensal? E anual aproximado?</a:t>
+            </a:r>
+            <a:endParaRPr lang="en-US" sz="1600" dirty="0"/>
+          </a:p>
+        </p:txBody>
+      </p:sp>
+      <p:sp>
+        <p:nvSpPr>
+          <p:cNvPr id="11" name="Shape 8"/>
+          <p:cNvSpPr/>
+          <p:nvPr/>
+        </p:nvSpPr>
+        <p:spPr>
+          <a:xfrm>
+            <a:off x="6172200" y="1325880"/>
+            <a:ext cx="5468112" cy="4937760"/>
+          </a:xfrm>
+          <a:prstGeom prst="roundRect">
+            <a:avLst>
+              <a:gd name="adj" fmla="val 1852"/>
+            </a:avLst>
+          </a:prstGeom>
+          <a:solidFill>
+            <a:srgbClr val="1B3A6B"/>
+          </a:solidFill>
+          <a:ln/>
+        </p:spPr>
+      </p:sp>
+      <p:sp>
+        <p:nvSpPr>
+          <p:cNvPr id="12" name="Text 9"/>
+          <p:cNvSpPr/>
+          <p:nvPr/>
+        </p:nvSpPr>
+        <p:spPr>
+          <a:xfrm>
+            <a:off x="6492240" y="1554480"/>
+            <a:ext cx="4828032" cy="4480560"/>
+          </a:xfrm>
+          <a:prstGeom prst="rect">
+            <a:avLst/>
+          </a:prstGeom>
+          <a:noFill/>
+          <a:ln/>
+        </p:spPr>
+        <p:txBody>
+          <a:bodyPr wrap="square" rtlCol="0" anchor="t">
+            <a:normAutofit/>
+          </a:bodyPr>
+          <a:lstStyle/>
+          <a:p>
+            <a:pPr indent="0" marL="0">
+              <a:buNone/>
+            </a:pPr>
+            <a:r>
+              <a:rPr lang="en-US" sz="1300" b="1" spc="100" kern="0" dirty="0">
+                <a:solidFill>
+                  <a:srgbClr val="F7A23B"/>
+                </a:solidFill>
+                <a:latin typeface="Arial" pitchFamily="34" charset="0"/>
+                <a:ea typeface="Arial" pitchFamily="34" charset="-122"/>
+                <a:cs typeface="Arial" pitchFamily="34" charset="-120"/>
+              </a:rPr>
+              <a:t>ENTREGÁVEL DO MÓDULO
+</a:t>
+            </a:r>
+            <a:pPr indent="0" marL="0">
+              <a:buNone/>
+            </a:pPr>
+            <a:r>
+              <a:rPr lang="en-US" sz="1600" dirty="0">
+                <a:solidFill>
+                  <a:srgbClr val="FFFFFF"/>
+                </a:solidFill>
+                <a:latin typeface="Arial" pitchFamily="34" charset="0"/>
+                <a:ea typeface="Arial" pitchFamily="34" charset="-122"/>
+                <a:cs typeface="Arial" pitchFamily="34" charset="-120"/>
+              </a:rPr>
+              <a:t>Relatório mensal da minha operação (meses 1 e 2 do laboratório): painel de 12 indicadores com meta e resultado, comentário de 5 linhas sobre o mês, relatório da usina para o produtor e o relatório de economia de 3 clientes exportados.</a:t>
+            </a:r>
+            <a:endParaRPr lang="en-US" sz="1300" dirty="0"/>
+          </a:p>
+        </p:txBody>
+      </p:sp>
+      <p:sp>
+        <p:nvSpPr>
+          <p:cNvPr id="25" name="Slide Number Placeholder 0"/>
+          <p:cNvSpPr>
+            <a:spLocks noGrp="1"/>
+          </p:cNvSpPr>
+          <p:nvPr>
+            <p:ph type="sldNum" sz="quarter" idx="4294967295"/>
+          </p:nvPr>
+        </p:nvSpPr>
+        <p:spPr>
+          <a:xfrm>
+            <a:off x="11292840" y="6556248"/>
+            <a:ext cx="548640" cy="256032"/>
+          </a:xfrm>
+          <a:prstGeom prst="rect">
+            <a:avLst/>
+          </a:prstGeom>
+          <a:extLst>
+            <a:ext uri="{C572A759-6A51-4108-AA02-DFA0A04FC94B}">
+              <ma14:wrappingTextBoxFlag xmlns:ma14="http://schemas.microsoft.com/office/mac/drawingml/2011/main" val="0"/>
+            </a:ext>
+          </a:extLst>
+        </p:spPr>
+        <p:txBody>
+          <a:bodyPr/>
+          <a:lstStyle>
+            <a:lvl1pPr>
+              <a:defRPr sz="900">
+                <a:solidFill>
+                  <a:srgbClr val="1B3A6B"/>
+                </a:solidFill>
+                <a:latin typeface="Arial"/>
+                <a:ea typeface="Arial"/>
+                <a:cs typeface="Arial"/>
+              </a:defRPr>
+            </a:lvl1pPr>
+          </a:lstStyle>
+          <a:p>
+            <a:pPr algn="r"/>
+            <a:fld id="{F7021451-1387-4CA6-816F-3879F97B5CBC}" type="slidenum">
+              <a:rPr b="1" lang="en-US"/>
+              <a:t>23</a:t>
+            </a:fld>
+            <a:endParaRPr lang="en-US"/>
+          </a:p>
+        </p:txBody>
+      </p:sp>
+    </p:spTree>
+  </p:cSld>
+  <p:clrMapOvr>
+    <a:masterClrMapping/>
+  </p:clrMapOvr>
+</p:sld>
+</file>
+
 <file path=ppt/slides/slide3.xml><?xml version="1.0" encoding="utf-8"?>
 <p:sld xmlns:a="http://schemas.openxmlformats.org/drawingml/2006/main" xmlns:r="http://schemas.openxmlformats.org/officeDocument/2006/relationships" xmlns:p="http://schemas.openxmlformats.org/presentationml/2006/main">
   <p:cSld name="Slide 3">
@@ -9391,7 +14393,7 @@
         <p:spPr>
           <a:xfrm>
             <a:off x="822960" y="2286000"/>
-            <a:ext cx="2965704" cy="3749040"/>
+            <a:ext cx="2965704" cy="2286000"/>
           </a:xfrm>
           <a:prstGeom prst="rect">
             <a:avLst/>
@@ -9412,7 +14414,7 @@
               <a:buNone/>
             </a:pPr>
             <a:r>
-              <a:rPr lang="en-US" sz="1700" dirty="0">
+              <a:rPr lang="en-US" sz="1400" dirty="0">
                 <a:solidFill>
                   <a:srgbClr val="1F2937"/>
                 </a:solidFill>
@@ -9422,7 +14424,7 @@
               </a:rPr>
               <a:t>1. Taxa de ocupação = alocada ÷ disponível · meta 90–98%</a:t>
             </a:r>
-            <a:endParaRPr lang="en-US" sz="1700" dirty="0"/>
+            <a:endParaRPr lang="en-US" sz="1400" dirty="0"/>
           </a:p>
           <a:p>
             <a:pPr indent="0" marL="0">
@@ -9432,7 +14434,7 @@
               <a:buNone/>
             </a:pPr>
             <a:r>
-              <a:rPr lang="en-US" sz="1700" dirty="0">
+              <a:rPr lang="en-US" sz="1400" dirty="0">
                 <a:solidFill>
                   <a:srgbClr val="1F2937"/>
                 </a:solidFill>
@@ -9442,7 +14444,7 @@
               </a:rPr>
               <a:t>2. Desempenho de geração = gerada ÷ esperada no mês · meta ≥ 95%</a:t>
             </a:r>
-            <a:endParaRPr lang="en-US" sz="1700" dirty="0"/>
+            <a:endParaRPr lang="en-US" sz="1400" dirty="0"/>
           </a:p>
           <a:p>
             <a:pPr indent="0" marL="0">
@@ -9452,7 +14454,7 @@
               <a:buNone/>
             </a:pPr>
             <a:r>
-              <a:rPr lang="en-US" sz="1700" dirty="0">
+              <a:rPr lang="en-US" sz="1400" dirty="0">
                 <a:solidFill>
                   <a:srgbClr val="1F2937"/>
                 </a:solidFill>
@@ -9462,13 +14464,72 @@
               </a:rPr>
               <a:t>3. Energia compensada ÷ alocada · meta ≥ 95% (créditos chegando)</a:t>
             </a:r>
-            <a:endParaRPr lang="en-US" sz="1700" dirty="0"/>
+            <a:endParaRPr lang="en-US" sz="1400" dirty="0"/>
           </a:p>
         </p:txBody>
       </p:sp>
       <p:sp>
         <p:nvSpPr>
           <p:cNvPr id="13" name="Shape 10"/>
+          <p:cNvSpPr/>
+          <p:nvPr/>
+        </p:nvSpPr>
+        <p:spPr>
+          <a:xfrm>
+            <a:off x="822960" y="4663440"/>
+            <a:ext cx="2965704" cy="18288"/>
+          </a:xfrm>
+          <a:prstGeom prst="rect">
+            <a:avLst/>
+          </a:prstGeom>
+          <a:solidFill>
+            <a:srgbClr val="D8E0EC"/>
+          </a:solidFill>
+          <a:ln/>
+        </p:spPr>
+      </p:sp>
+      <p:sp>
+        <p:nvSpPr>
+          <p:cNvPr id="14" name="Text 11"/>
+          <p:cNvSpPr/>
+          <p:nvPr/>
+        </p:nvSpPr>
+        <p:spPr>
+          <a:xfrm>
+            <a:off x="822960" y="4754880"/>
+            <a:ext cx="2965704" cy="1371600"/>
+          </a:xfrm>
+          <a:prstGeom prst="rect">
+            <a:avLst/>
+          </a:prstGeom>
+          <a:noFill/>
+          <a:ln/>
+        </p:spPr>
+        <p:txBody>
+          <a:bodyPr wrap="square" rtlCol="0" anchor="t"/>
+          <a:lstStyle/>
+          <a:p>
+            <a:pPr indent="0" marL="0">
+              <a:buNone/>
+            </a:pPr>
+            <a:r>
+              <a:rPr lang="en-US" sz="1300" i="1" dirty="0">
+                <a:solidFill>
+                  <a:srgbClr val="64748B"/>
+                </a:solidFill>
+                <a:latin typeface="Arial" pitchFamily="34" charset="0"/>
+                <a:ea typeface="Arial" pitchFamily="34" charset="-122"/>
+                <a:cs typeface="Arial" pitchFamily="34" charset="-120"/>
+              </a:rPr>
+              <a:t>Energia é o seu estoque: ocupação, desempenho de geração e créditos chegando aos clientes.</a:t>
+            </a:r>
+            <a:endParaRPr lang="en-US" sz="1300" dirty="0"/>
+          </a:p>
+        </p:txBody>
+      </p:sp>
+      <p:sp>
+        <p:nvSpPr>
+          <p:cNvPr id="15" name="Shape 12"/>
           <p:cNvSpPr/>
           <p:nvPr/>
         </p:nvSpPr>
@@ -9502,7 +14563,7 @@
       </p:sp>
       <p:sp>
         <p:nvSpPr>
-          <p:cNvPr id="14" name="Shape 11"/>
+          <p:cNvPr id="16" name="Shape 13"/>
           <p:cNvSpPr/>
           <p:nvPr/>
         </p:nvSpPr>
@@ -9522,7 +14583,7 @@
       </p:sp>
       <p:sp>
         <p:nvSpPr>
-          <p:cNvPr id="15" name="Text 12"/>
+          <p:cNvPr id="17" name="Text 14"/>
           <p:cNvSpPr/>
           <p:nvPr/>
         </p:nvSpPr>
@@ -9563,14 +14624,14 @@
       </p:sp>
       <p:sp>
         <p:nvSpPr>
-          <p:cNvPr id="16" name="Text 13"/>
+          <p:cNvPr id="18" name="Text 15"/>
           <p:cNvSpPr/>
           <p:nvPr/>
         </p:nvSpPr>
         <p:spPr>
           <a:xfrm>
             <a:off x="4611624" y="2286000"/>
-            <a:ext cx="2965704" cy="3749040"/>
+            <a:ext cx="2965704" cy="2286000"/>
           </a:xfrm>
           <a:prstGeom prst="rect">
             <a:avLst/>
@@ -9591,7 +14652,7 @@
               <a:buNone/>
             </a:pPr>
             <a:r>
-              <a:rPr lang="en-US" sz="1700" dirty="0">
+              <a:rPr lang="en-US" sz="1300" dirty="0">
                 <a:solidFill>
                   <a:srgbClr val="1F2937"/>
                 </a:solidFill>
@@ -9601,7 +14662,7 @@
               </a:rPr>
               <a:t>4. Novos clientes (e kWh vendidos) no mês · meta do plano</a:t>
             </a:r>
-            <a:endParaRPr lang="en-US" sz="1700" dirty="0"/>
+            <a:endParaRPr lang="en-US" sz="1300" dirty="0"/>
           </a:p>
           <a:p>
             <a:pPr indent="0" marL="0">
@@ -9611,7 +14672,7 @@
               <a:buNone/>
             </a:pPr>
             <a:r>
-              <a:rPr lang="en-US" sz="1700" dirty="0">
+              <a:rPr lang="en-US" sz="1300" dirty="0">
                 <a:solidFill>
                   <a:srgbClr val="1F2937"/>
                 </a:solidFill>
@@ -9621,7 +14682,7 @@
               </a:rPr>
               <a:t>5. Conversão: proposta → cliente pagante · referência 25–40%</a:t>
             </a:r>
-            <a:endParaRPr lang="en-US" sz="1700" dirty="0"/>
+            <a:endParaRPr lang="en-US" sz="1300" dirty="0"/>
           </a:p>
           <a:p>
             <a:pPr indent="0" marL="0">
@@ -9631,7 +14692,7 @@
               <a:buNone/>
             </a:pPr>
             <a:r>
-              <a:rPr lang="en-US" sz="1700" dirty="0">
+              <a:rPr lang="en-US" sz="1300" dirty="0">
                 <a:solidFill>
                   <a:srgbClr val="1F2937"/>
                 </a:solidFill>
@@ -9641,13 +14702,72 @@
               </a:rPr>
               <a:t>6. Custo de aquisição (CAC) = gasto comercial ÷ novos clientes</a:t>
             </a:r>
-            <a:endParaRPr lang="en-US" sz="1700" dirty="0"/>
-          </a:p>
-        </p:txBody>
-      </p:sp>
-      <p:sp>
-        <p:nvSpPr>
-          <p:cNvPr id="17" name="Shape 14"/>
+            <a:endParaRPr lang="en-US" sz="1300" dirty="0"/>
+          </a:p>
+        </p:txBody>
+      </p:sp>
+      <p:sp>
+        <p:nvSpPr>
+          <p:cNvPr id="19" name="Shape 16"/>
+          <p:cNvSpPr/>
+          <p:nvPr/>
+        </p:nvSpPr>
+        <p:spPr>
+          <a:xfrm>
+            <a:off x="4611624" y="4663440"/>
+            <a:ext cx="2965704" cy="18288"/>
+          </a:xfrm>
+          <a:prstGeom prst="rect">
+            <a:avLst/>
+          </a:prstGeom>
+          <a:solidFill>
+            <a:srgbClr val="D8E0EC"/>
+          </a:solidFill>
+          <a:ln/>
+        </p:spPr>
+      </p:sp>
+      <p:sp>
+        <p:nvSpPr>
+          <p:cNvPr id="20" name="Text 17"/>
+          <p:cNvSpPr/>
+          <p:nvPr/>
+        </p:nvSpPr>
+        <p:spPr>
+          <a:xfrm>
+            <a:off x="4611624" y="4754880"/>
+            <a:ext cx="2965704" cy="1371600"/>
+          </a:xfrm>
+          <a:prstGeom prst="rect">
+            <a:avLst/>
+          </a:prstGeom>
+          <a:noFill/>
+          <a:ln/>
+        </p:spPr>
+        <p:txBody>
+          <a:bodyPr wrap="square" rtlCol="0" anchor="t"/>
+          <a:lstStyle/>
+          <a:p>
+            <a:pPr indent="0" marL="0">
+              <a:buNone/>
+            </a:pPr>
+            <a:r>
+              <a:rPr lang="en-US" sz="1300" i="1" dirty="0">
+                <a:solidFill>
+                  <a:srgbClr val="64748B"/>
+                </a:solidFill>
+                <a:latin typeface="Arial" pitchFamily="34" charset="0"/>
+                <a:ea typeface="Arial" pitchFamily="34" charset="-122"/>
+                <a:cs typeface="Arial" pitchFamily="34" charset="-120"/>
+              </a:rPr>
+              <a:t>No comercial, conte quilowatts-hora vendidos, não só clientes, e compare o custo de aquisição com a margem que cada cliente traz.</a:t>
+            </a:r>
+            <a:endParaRPr lang="en-US" sz="1300" dirty="0"/>
+          </a:p>
+        </p:txBody>
+      </p:sp>
+      <p:sp>
+        <p:nvSpPr>
+          <p:cNvPr id="21" name="Shape 18"/>
           <p:cNvSpPr/>
           <p:nvPr/>
         </p:nvSpPr>
@@ -9681,7 +14801,7 @@
       </p:sp>
       <p:sp>
         <p:nvSpPr>
-          <p:cNvPr id="18" name="Shape 15"/>
+          <p:cNvPr id="22" name="Shape 19"/>
           <p:cNvSpPr/>
           <p:nvPr/>
         </p:nvSpPr>
@@ -9701,7 +14821,7 @@
       </p:sp>
       <p:sp>
         <p:nvSpPr>
-          <p:cNvPr id="19" name="Text 16"/>
+          <p:cNvPr id="23" name="Text 20"/>
           <p:cNvSpPr/>
           <p:nvPr/>
         </p:nvSpPr>
@@ -9742,14 +14862,14 @@
       </p:sp>
       <p:sp>
         <p:nvSpPr>
-          <p:cNvPr id="20" name="Text 17"/>
+          <p:cNvPr id="24" name="Text 21"/>
           <p:cNvSpPr/>
           <p:nvPr/>
         </p:nvSpPr>
         <p:spPr>
           <a:xfrm>
             <a:off x="8400288" y="2286000"/>
-            <a:ext cx="2965704" cy="3749040"/>
+            <a:ext cx="2965704" cy="2286000"/>
           </a:xfrm>
           <a:prstGeom prst="rect">
             <a:avLst/>
@@ -9770,7 +14890,7 @@
               <a:buNone/>
             </a:pPr>
             <a:r>
-              <a:rPr lang="en-US" sz="1600" dirty="0">
+              <a:rPr lang="en-US" sz="1200" dirty="0">
                 <a:solidFill>
                   <a:srgbClr val="1F2937"/>
                 </a:solidFill>
@@ -9780,7 +14900,7 @@
               </a:rPr>
               <a:t>7. Receita da gestora (taxa de administração) no mês</a:t>
             </a:r>
-            <a:endParaRPr lang="en-US" sz="1600" dirty="0"/>
+            <a:endParaRPr lang="en-US" sz="1200" dirty="0"/>
           </a:p>
           <a:p>
             <a:pPr indent="0" marL="0">
@@ -9790,7 +14910,7 @@
               <a:buNone/>
             </a:pPr>
             <a:r>
-              <a:rPr lang="en-US" sz="1600" dirty="0">
+              <a:rPr lang="en-US" sz="1200" dirty="0">
                 <a:solidFill>
                   <a:srgbClr val="1F2937"/>
                 </a:solidFill>
@@ -9800,7 +14920,7 @@
               </a:rPr>
               <a:t>8. Taxa de recebimento = recebido ÷ faturado no mês · meta ≥ 95%</a:t>
             </a:r>
-            <a:endParaRPr lang="en-US" sz="1600" dirty="0"/>
+            <a:endParaRPr lang="en-US" sz="1200" dirty="0"/>
           </a:p>
           <a:p>
             <a:pPr indent="0" marL="0">
@@ -9810,7 +14930,7 @@
               <a:buNone/>
             </a:pPr>
             <a:r>
-              <a:rPr lang="en-US" sz="1600" dirty="0">
+              <a:rPr lang="en-US" sz="1200" dirty="0">
                 <a:solidFill>
                   <a:srgbClr val="1F2937"/>
                 </a:solidFill>
@@ -9820,7 +14940,7 @@
               </a:rPr>
               <a:t>9. Inadimplência &gt; 30 dias (% do faturado) · meta ≤ 3%</a:t>
             </a:r>
-            <a:endParaRPr lang="en-US" sz="1600" dirty="0"/>
+            <a:endParaRPr lang="en-US" sz="1200" dirty="0"/>
           </a:p>
           <a:p>
             <a:pPr indent="0" marL="0">
@@ -9830,7 +14950,7 @@
               <a:buNone/>
             </a:pPr>
             <a:r>
-              <a:rPr lang="en-US" sz="1600" dirty="0">
+              <a:rPr lang="en-US" sz="1200" dirty="0">
                 <a:solidFill>
                   <a:srgbClr val="1F2937"/>
                 </a:solidFill>
@@ -9840,7 +14960,66 @@
               </a:rPr>
               <a:t>10. Margem de contribuição por kWh e resultado vs. ponto de equilíbrio</a:t>
             </a:r>
-            <a:endParaRPr lang="en-US" sz="1600" dirty="0"/>
+            <a:endParaRPr lang="en-US" sz="1200" dirty="0"/>
+          </a:p>
+        </p:txBody>
+      </p:sp>
+      <p:sp>
+        <p:nvSpPr>
+          <p:cNvPr id="25" name="Shape 22"/>
+          <p:cNvSpPr/>
+          <p:nvPr/>
+        </p:nvSpPr>
+        <p:spPr>
+          <a:xfrm>
+            <a:off x="8400288" y="4663440"/>
+            <a:ext cx="2965704" cy="18288"/>
+          </a:xfrm>
+          <a:prstGeom prst="rect">
+            <a:avLst/>
+          </a:prstGeom>
+          <a:solidFill>
+            <a:srgbClr val="D8E0EC"/>
+          </a:solidFill>
+          <a:ln/>
+        </p:spPr>
+      </p:sp>
+      <p:sp>
+        <p:nvSpPr>
+          <p:cNvPr id="26" name="Text 23"/>
+          <p:cNvSpPr/>
+          <p:nvPr/>
+        </p:nvSpPr>
+        <p:spPr>
+          <a:xfrm>
+            <a:off x="8400288" y="4754880"/>
+            <a:ext cx="2965704" cy="1371600"/>
+          </a:xfrm>
+          <a:prstGeom prst="rect">
+            <a:avLst/>
+          </a:prstGeom>
+          <a:noFill/>
+          <a:ln/>
+        </p:spPr>
+        <p:txBody>
+          <a:bodyPr wrap="square" rtlCol="0" anchor="t"/>
+          <a:lstStyle/>
+          <a:p>
+            <a:pPr indent="0" marL="0">
+              <a:buNone/>
+            </a:pPr>
+            <a:r>
+              <a:rPr lang="en-US" sz="1300" i="1" dirty="0">
+                <a:solidFill>
+                  <a:srgbClr val="64748B"/>
+                </a:solidFill>
+                <a:latin typeface="Arial" pitchFamily="34" charset="0"/>
+                <a:ea typeface="Arial" pitchFamily="34" charset="-122"/>
+                <a:cs typeface="Arial" pitchFamily="34" charset="-120"/>
+              </a:rPr>
+              <a:t>No financeiro, o indicador decisivo é o resultado contra o ponto de equilíbrio: estamos ganhando ou perdendo, e quanto falta?</a:t>
+            </a:r>
+            <a:endParaRPr lang="en-US" sz="1300" dirty="0"/>
           </a:p>
         </p:txBody>
       </p:sp>
@@ -10255,7 +15434,7 @@
         <p:spPr>
           <a:xfrm>
             <a:off x="822960" y="2286000"/>
-            <a:ext cx="4860036" cy="3749040"/>
+            <a:ext cx="4860036" cy="2286000"/>
           </a:xfrm>
           <a:prstGeom prst="rect">
             <a:avLst/>
@@ -10313,6 +15492,65 @@
       <p:sp>
         <p:nvSpPr>
           <p:cNvPr id="13" name="Shape 10"/>
+          <p:cNvSpPr/>
+          <p:nvPr/>
+        </p:nvSpPr>
+        <p:spPr>
+          <a:xfrm>
+            <a:off x="822960" y="4663440"/>
+            <a:ext cx="4860036" cy="18288"/>
+          </a:xfrm>
+          <a:prstGeom prst="rect">
+            <a:avLst/>
+          </a:prstGeom>
+          <a:solidFill>
+            <a:srgbClr val="D8E0EC"/>
+          </a:solidFill>
+          <a:ln/>
+        </p:spPr>
+      </p:sp>
+      <p:sp>
+        <p:nvSpPr>
+          <p:cNvPr id="14" name="Text 11"/>
+          <p:cNvSpPr/>
+          <p:nvPr/>
+        </p:nvSpPr>
+        <p:spPr>
+          <a:xfrm>
+            <a:off x="822960" y="4754880"/>
+            <a:ext cx="4860036" cy="1371600"/>
+          </a:xfrm>
+          <a:prstGeom prst="rect">
+            <a:avLst/>
+          </a:prstGeom>
+          <a:noFill/>
+          <a:ln/>
+        </p:spPr>
+        <p:txBody>
+          <a:bodyPr wrap="square" rtlCol="0" anchor="t"/>
+          <a:lstStyle/>
+          <a:p>
+            <a:pPr indent="0" marL="0">
+              <a:buNone/>
+            </a:pPr>
+            <a:r>
+              <a:rPr lang="en-US" sz="1300" i="1" dirty="0">
+                <a:solidFill>
+                  <a:srgbClr val="64748B"/>
+                </a:solidFill>
+                <a:latin typeface="Arial" pitchFamily="34" charset="0"/>
+                <a:ea typeface="Arial" pitchFamily="34" charset="-122"/>
+                <a:cs typeface="Arial" pitchFamily="34" charset="-120"/>
+              </a:rPr>
+              <a:t>Nos clientes, olhe o churn: dois por cento ao mês é quase um quarto da base em um ano. E economia média caindo antecipa cancelamentos.</a:t>
+            </a:r>
+            <a:endParaRPr lang="en-US" sz="1300" dirty="0"/>
+          </a:p>
+        </p:txBody>
+      </p:sp>
+      <p:sp>
+        <p:nvSpPr>
+          <p:cNvPr id="15" name="Shape 12"/>
           <p:cNvSpPr/>
           <p:nvPr/>
         </p:nvSpPr>
@@ -10346,7 +15584,7 @@
       </p:sp>
       <p:sp>
         <p:nvSpPr>
-          <p:cNvPr id="14" name="Shape 11"/>
+          <p:cNvPr id="16" name="Shape 13"/>
           <p:cNvSpPr/>
           <p:nvPr/>
         </p:nvSpPr>
@@ -10366,7 +15604,7 @@
       </p:sp>
       <p:sp>
         <p:nvSpPr>
-          <p:cNvPr id="15" name="Text 12"/>
+          <p:cNvPr id="17" name="Text 14"/>
           <p:cNvSpPr/>
           <p:nvPr/>
         </p:nvSpPr>
@@ -10407,14 +15645,14 @@
       </p:sp>
       <p:sp>
         <p:nvSpPr>
-          <p:cNvPr id="16" name="Text 13"/>
+          <p:cNvPr id="18" name="Text 15"/>
           <p:cNvSpPr/>
           <p:nvPr/>
         </p:nvSpPr>
         <p:spPr>
           <a:xfrm>
             <a:off x="6505956" y="2286000"/>
-            <a:ext cx="4860036" cy="3749040"/>
+            <a:ext cx="4860036" cy="2286000"/>
           </a:xfrm>
           <a:prstGeom prst="rect">
             <a:avLst/>
@@ -10510,6 +15748,65 @@
               <a:t>revisão mensal (e semanal para ocupação, recebimento e inadimplência)</a:t>
             </a:r>
             <a:endParaRPr lang="en-US" sz="1700" dirty="0"/>
+          </a:p>
+        </p:txBody>
+      </p:sp>
+      <p:sp>
+        <p:nvSpPr>
+          <p:cNvPr id="19" name="Shape 16"/>
+          <p:cNvSpPr/>
+          <p:nvPr/>
+        </p:nvSpPr>
+        <p:spPr>
+          <a:xfrm>
+            <a:off x="6505956" y="4663440"/>
+            <a:ext cx="4860036" cy="18288"/>
+          </a:xfrm>
+          <a:prstGeom prst="rect">
+            <a:avLst/>
+          </a:prstGeom>
+          <a:solidFill>
+            <a:srgbClr val="D8E0EC"/>
+          </a:solidFill>
+          <a:ln/>
+        </p:spPr>
+      </p:sp>
+      <p:sp>
+        <p:nvSpPr>
+          <p:cNvPr id="20" name="Text 17"/>
+          <p:cNvSpPr/>
+          <p:nvPr/>
+        </p:nvSpPr>
+        <p:spPr>
+          <a:xfrm>
+            <a:off x="6505956" y="4754880"/>
+            <a:ext cx="4860036" cy="1371600"/>
+          </a:xfrm>
+          <a:prstGeom prst="rect">
+            <a:avLst/>
+          </a:prstGeom>
+          <a:noFill/>
+          <a:ln/>
+        </p:spPr>
+        <p:txBody>
+          <a:bodyPr wrap="square" rtlCol="0" anchor="t"/>
+          <a:lstStyle/>
+          <a:p>
+            <a:pPr indent="0" marL="0">
+              <a:buNone/>
+            </a:pPr>
+            <a:r>
+              <a:rPr lang="en-US" sz="1300" i="1" dirty="0">
+                <a:solidFill>
+                  <a:srgbClr val="64748B"/>
+                </a:solidFill>
+                <a:latin typeface="Arial" pitchFamily="34" charset="0"/>
+                <a:ea typeface="Arial" pitchFamily="34" charset="-122"/>
+                <a:cs typeface="Arial" pitchFamily="34" charset="-120"/>
+              </a:rPr>
+              <a:t>Coloque tudo numa página, com meta e semáforo, e revise todo mês.</a:t>
+            </a:r>
+            <a:endParaRPr lang="en-US" sz="1300" dirty="0"/>
           </a:p>
         </p:txBody>
       </p:sp>
@@ -11325,7 +16622,7 @@
         <p:spPr>
           <a:xfrm>
             <a:off x="822960" y="2286000"/>
-            <a:ext cx="4860036" cy="3749040"/>
+            <a:ext cx="4860036" cy="2286000"/>
           </a:xfrm>
           <a:prstGeom prst="rect">
             <a:avLst/>
@@ -11448,6 +16745,65 @@
       <p:sp>
         <p:nvSpPr>
           <p:cNvPr id="13" name="Shape 10"/>
+          <p:cNvSpPr/>
+          <p:nvPr/>
+        </p:nvSpPr>
+        <p:spPr>
+          <a:xfrm>
+            <a:off x="822960" y="4663440"/>
+            <a:ext cx="4860036" cy="18288"/>
+          </a:xfrm>
+          <a:prstGeom prst="rect">
+            <a:avLst/>
+          </a:prstGeom>
+          <a:solidFill>
+            <a:srgbClr val="D8E0EC"/>
+          </a:solidFill>
+          <a:ln/>
+        </p:spPr>
+      </p:sp>
+      <p:sp>
+        <p:nvSpPr>
+          <p:cNvPr id="14" name="Text 11"/>
+          <p:cNvSpPr/>
+          <p:nvPr/>
+        </p:nvSpPr>
+        <p:spPr>
+          <a:xfrm>
+            <a:off x="822960" y="4754880"/>
+            <a:ext cx="4860036" cy="1371600"/>
+          </a:xfrm>
+          <a:prstGeom prst="rect">
+            <a:avLst/>
+          </a:prstGeom>
+          <a:noFill/>
+          <a:ln/>
+        </p:spPr>
+        <p:txBody>
+          <a:bodyPr wrap="square" rtlCol="0" anchor="t"/>
+          <a:lstStyle/>
+          <a:p>
+            <a:pPr indent="0" marL="0">
+              <a:buNone/>
+            </a:pPr>
+            <a:r>
+              <a:rPr lang="en-US" sz="1300" i="1" dirty="0">
+                <a:solidFill>
+                  <a:srgbClr val="64748B"/>
+                </a:solidFill>
+                <a:latin typeface="Arial" pitchFamily="34" charset="0"/>
+                <a:ea typeface="Arial" pitchFamily="34" charset="-122"/>
+                <a:cs typeface="Arial" pitchFamily="34" charset="-120"/>
+              </a:rPr>
+              <a:t>Use o relatório de economia nos momentos da tela, principalmente no pedido de cancelamento.</a:t>
+            </a:r>
+            <a:endParaRPr lang="en-US" sz="1300" dirty="0"/>
+          </a:p>
+        </p:txBody>
+      </p:sp>
+      <p:sp>
+        <p:nvSpPr>
+          <p:cNvPr id="15" name="Shape 12"/>
           <p:cNvSpPr/>
           <p:nvPr/>
         </p:nvSpPr>
@@ -11481,7 +16837,7 @@
       </p:sp>
       <p:sp>
         <p:nvSpPr>
-          <p:cNvPr id="14" name="Shape 11"/>
+          <p:cNvPr id="16" name="Shape 13"/>
           <p:cNvSpPr/>
           <p:nvPr/>
         </p:nvSpPr>
@@ -11501,7 +16857,7 @@
       </p:sp>
       <p:sp>
         <p:nvSpPr>
-          <p:cNvPr id="15" name="Text 12"/>
+          <p:cNvPr id="17" name="Text 14"/>
           <p:cNvSpPr/>
           <p:nvPr/>
         </p:nvSpPr>
@@ -11542,14 +16898,14 @@
       </p:sp>
       <p:sp>
         <p:nvSpPr>
-          <p:cNvPr id="16" name="Text 13"/>
+          <p:cNvPr id="18" name="Text 15"/>
           <p:cNvSpPr/>
           <p:nvPr/>
         </p:nvSpPr>
         <p:spPr>
           <a:xfrm>
             <a:off x="6505956" y="2286000"/>
-            <a:ext cx="4860036" cy="3749040"/>
+            <a:ext cx="4860036" cy="2286000"/>
           </a:xfrm>
           <a:prstGeom prst="rect">
             <a:avLst/>
@@ -11624,6 +16980,65 @@
               <a:t>indicação: 'mostre seu relatório para um amigo'</a:t>
             </a:r>
             <a:endParaRPr lang="en-US" sz="1700" dirty="0"/>
+          </a:p>
+        </p:txBody>
+      </p:sp>
+      <p:sp>
+        <p:nvSpPr>
+          <p:cNvPr id="19" name="Shape 16"/>
+          <p:cNvSpPr/>
+          <p:nvPr/>
+        </p:nvSpPr>
+        <p:spPr>
+          <a:xfrm>
+            <a:off x="6505956" y="4663440"/>
+            <a:ext cx="4860036" cy="18288"/>
+          </a:xfrm>
+          <a:prstGeom prst="rect">
+            <a:avLst/>
+          </a:prstGeom>
+          <a:solidFill>
+            <a:srgbClr val="D8E0EC"/>
+          </a:solidFill>
+          <a:ln/>
+        </p:spPr>
+      </p:sp>
+      <p:sp>
+        <p:nvSpPr>
+          <p:cNvPr id="20" name="Text 17"/>
+          <p:cNvSpPr/>
+          <p:nvPr/>
+        </p:nvSpPr>
+        <p:spPr>
+          <a:xfrm>
+            <a:off x="6505956" y="4754880"/>
+            <a:ext cx="4860036" cy="1371600"/>
+          </a:xfrm>
+          <a:prstGeom prst="rect">
+            <a:avLst/>
+          </a:prstGeom>
+          <a:noFill/>
+          <a:ln/>
+        </p:spPr>
+        <p:txBody>
+          <a:bodyPr wrap="square" rtlCol="0" anchor="t"/>
+          <a:lstStyle/>
+          <a:p>
+            <a:pPr indent="0" marL="0">
+              <a:buNone/>
+            </a:pPr>
+            <a:r>
+              <a:rPr lang="en-US" sz="1300" i="1" dirty="0">
+                <a:solidFill>
+                  <a:srgbClr val="64748B"/>
+                </a:solidFill>
+                <a:latin typeface="Arial" pitchFamily="34" charset="0"/>
+                <a:ea typeface="Arial" pitchFamily="34" charset="-122"/>
+                <a:cs typeface="Arial" pitchFamily="34" charset="-120"/>
+              </a:rPr>
+              <a:t>Ele também vende: números agregados viram prova social, e o cliente pode mostrar o próprio relatório a quem indicar.</a:t>
+            </a:r>
+            <a:endParaRPr lang="en-US" sz="1300" dirty="0"/>
           </a:p>
         </p:txBody>
       </p:sp>

--- a/docs/curso/slides/m10-indicadores.pptx
+++ b/docs/curso/slides/m10-indicadores.pptx
@@ -2206,7 +2206,8 @@
           <a:p>
             <a:r>
               <a:rPr lang="en-US" dirty="0"/>
-              <a:t>Use o relatório de economia nos momentos da tela, principalmente no pedido de cancelamento.
+              <a:t>
+Use o relatório de economia nos momentos da tela, principalmente no pedido de cancelamento.
 Ele também vende: números agregados viram prova social, e o cliente pode mostrar o próprio relatório a quem indicar.</a:t>
             </a:r>
             <a:endParaRPr lang="en-US" dirty="0"/>
@@ -2295,7 +2296,7 @@
           <a:p>
             <a:r>
               <a:rPr lang="en-US" dirty="0"/>
-              <a:t>Total economizado economia média/mês mês a mês PDF e Excel</a:t>
+              <a:t/>
             </a:r>
             <a:endParaRPr lang="en-US" dirty="0"/>
           </a:p>
@@ -3216,7 +3217,7 @@
                 <a:ea typeface="Arial" pitchFamily="34" charset="-122"/>
                 <a:cs typeface="Arial" pitchFamily="34" charset="-120"/>
               </a:rPr>
-              <a:t>4. o cockpit executivo</a:t>
+              <a:t>4. O cockpit executivo</a:t>
             </a:r>
             <a:endParaRPr lang="en-US" sz="1400" dirty="0"/>
           </a:p>
@@ -3236,7 +3237,7 @@
                 <a:ea typeface="Arial" pitchFamily="34" charset="-122"/>
                 <a:cs typeface="Arial" pitchFamily="34" charset="-120"/>
               </a:rPr>
-              <a:t>5. o relatório mensal da sua operação</a:t>
+              <a:t>5. O relatório mensal da sua operação</a:t>
             </a:r>
             <a:endParaRPr lang="en-US" sz="1400" dirty="0"/>
           </a:p>
@@ -3924,7 +3925,7 @@
               <a:buNone/>
             </a:pPr>
             <a:r>
-              <a:rPr lang="en-US" sz="1300" i="1" dirty="0">
+              <a:rPr lang="en-US" sz="1400" i="1" dirty="0">
                 <a:solidFill>
                   <a:srgbClr val="64748B"/>
                 </a:solidFill>
@@ -3934,7 +3935,7 @@
               </a:rPr>
               <a:t>Para o produtor, uma página por mês com os itens da tela, e um repasse que bate com o extrato.</a:t>
             </a:r>
-            <a:endParaRPr lang="en-US" sz="1300" dirty="0"/>
+            <a:endParaRPr lang="en-US" sz="1400" dirty="0"/>
           </a:p>
         </p:txBody>
       </p:sp>
@@ -4186,7 +4187,7 @@
               <a:buNone/>
             </a:pPr>
             <a:r>
-              <a:rPr lang="en-US" sz="1300" i="1" dirty="0">
+              <a:rPr lang="en-US" sz="1400" i="1" dirty="0">
                 <a:solidFill>
                   <a:srgbClr val="64748B"/>
                 </a:solidFill>
@@ -4196,7 +4197,7 @@
               </a:rPr>
               <a:t>Para o investidor, um relatório trimestral de portfólio, com uma seção honesta de riscos.</a:t>
             </a:r>
-            <a:endParaRPr lang="en-US" sz="1300" dirty="0"/>
+            <a:endParaRPr lang="en-US" sz="1400" dirty="0"/>
           </a:p>
         </p:txBody>
       </p:sp>
@@ -4448,7 +4449,7 @@
               <a:buNone/>
             </a:pPr>
             <a:r>
-              <a:rPr lang="en-US" sz="1300" i="1" dirty="0">
+              <a:rPr lang="en-US" sz="1400" i="1" dirty="0">
                 <a:solidFill>
                   <a:srgbClr val="64748B"/>
                 </a:solidFill>
@@ -4458,7 +4459,7 @@
               </a:rPr>
               <a:t>Mesma data, mesmo formato, números que batem e más notícias contadas primeiro. É isso que faz o produtor renovar.</a:t>
             </a:r>
-            <a:endParaRPr lang="en-US" sz="1300" dirty="0"/>
+            <a:endParaRPr lang="en-US" sz="1400" dirty="0"/>
           </a:p>
         </p:txBody>
       </p:sp>
@@ -5298,7 +5299,7 @@
             <a:r>
               <a:rPr lang="en-US" sz="11000" b="1" dirty="0">
                 <a:solidFill>
-                  <a:srgbClr val="11396F"/>
+                  <a:srgbClr val="F7A23B"/>
                 </a:solidFill>
                 <a:latin typeface="Arial" pitchFamily="34" charset="0"/>
                 <a:ea typeface="Arial" pitchFamily="34" charset="-122"/>
@@ -5486,7 +5487,7 @@
                 <a:ea typeface="Arial" pitchFamily="34" charset="-122"/>
                 <a:cs typeface="Arial" pitchFamily="34" charset="-120"/>
               </a:rPr>
-              <a:t>o cockpit executivo</a:t>
+              <a:t>O cockpit executivo</a:t>
             </a:r>
             <a:endParaRPr lang="en-US" sz="3200" dirty="0"/>
           </a:p>
@@ -7419,7 +7420,7 @@
             <a:r>
               <a:rPr lang="en-US" sz="11000" b="1" dirty="0">
                 <a:solidFill>
-                  <a:srgbClr val="11396F"/>
+                  <a:srgbClr val="F7A23B"/>
                 </a:solidFill>
                 <a:latin typeface="Arial" pitchFamily="34" charset="0"/>
                 <a:ea typeface="Arial" pitchFamily="34" charset="-122"/>
@@ -7607,7 +7608,7 @@
                 <a:ea typeface="Arial" pitchFamily="34" charset="-122"/>
                 <a:cs typeface="Arial" pitchFamily="34" charset="-120"/>
               </a:rPr>
-              <a:t>o relatório mensal da sua operação</a:t>
+              <a:t>O relatório mensal da sua operação</a:t>
             </a:r>
             <a:endParaRPr lang="en-US" sz="3200" dirty="0"/>
           </a:p>
@@ -10118,7 +10119,7 @@
             <a:r>
               <a:rPr lang="en-US" sz="11000" b="1" dirty="0">
                 <a:solidFill>
-                  <a:srgbClr val="11396F"/>
+                  <a:srgbClr val="F7A23B"/>
                 </a:solidFill>
                 <a:latin typeface="Arial" pitchFamily="34" charset="0"/>
                 <a:ea typeface="Arial" pitchFamily="34" charset="-122"/>
@@ -10241,7 +10242,7 @@
                 <a:ea typeface="Arial" pitchFamily="34" charset="-122"/>
                 <a:cs typeface="Arial" pitchFamily="34" charset="-120"/>
               </a:rPr>
-              <a:t>Aula</a:t>
+              <a:t>Aula teórica</a:t>
             </a:r>
             <a:endParaRPr lang="en-US" sz="1400" dirty="0"/>
           </a:p>
@@ -14513,7 +14514,7 @@
               <a:buNone/>
             </a:pPr>
             <a:r>
-              <a:rPr lang="en-US" sz="1300" i="1" dirty="0">
+              <a:rPr lang="en-US" sz="1400" i="1" dirty="0">
                 <a:solidFill>
                   <a:srgbClr val="64748B"/>
                 </a:solidFill>
@@ -14523,7 +14524,7 @@
               </a:rPr>
               <a:t>Energia é o seu estoque: ocupação, desempenho de geração e créditos chegando aos clientes.</a:t>
             </a:r>
-            <a:endParaRPr lang="en-US" sz="1300" dirty="0"/>
+            <a:endParaRPr lang="en-US" sz="1400" dirty="0"/>
           </a:p>
         </p:txBody>
       </p:sp>
@@ -14751,7 +14752,7 @@
               <a:buNone/>
             </a:pPr>
             <a:r>
-              <a:rPr lang="en-US" sz="1300" i="1" dirty="0">
+              <a:rPr lang="en-US" sz="1400" i="1" dirty="0">
                 <a:solidFill>
                   <a:srgbClr val="64748B"/>
                 </a:solidFill>
@@ -14761,7 +14762,7 @@
               </a:rPr>
               <a:t>No comercial, conte quilowatts-hora vendidos, não só clientes, e compare o custo de aquisição com a margem que cada cliente traz.</a:t>
             </a:r>
-            <a:endParaRPr lang="en-US" sz="1300" dirty="0"/>
+            <a:endParaRPr lang="en-US" sz="1400" dirty="0"/>
           </a:p>
         </p:txBody>
       </p:sp>
@@ -15009,7 +15010,7 @@
               <a:buNone/>
             </a:pPr>
             <a:r>
-              <a:rPr lang="en-US" sz="1300" i="1" dirty="0">
+              <a:rPr lang="en-US" sz="1400" i="1" dirty="0">
                 <a:solidFill>
                   <a:srgbClr val="64748B"/>
                 </a:solidFill>
@@ -15019,7 +15020,7 @@
               </a:rPr>
               <a:t>No financeiro, o indicador decisivo é o resultado contra o ponto de equilíbrio: estamos ganhando ou perdendo, e quanto falta?</a:t>
             </a:r>
-            <a:endParaRPr lang="en-US" sz="1300" dirty="0"/>
+            <a:endParaRPr lang="en-US" sz="1400" dirty="0"/>
           </a:p>
         </p:txBody>
       </p:sp>
@@ -15534,7 +15535,7 @@
               <a:buNone/>
             </a:pPr>
             <a:r>
-              <a:rPr lang="en-US" sz="1300" i="1" dirty="0">
+              <a:rPr lang="en-US" sz="1400" i="1" dirty="0">
                 <a:solidFill>
                   <a:srgbClr val="64748B"/>
                 </a:solidFill>
@@ -15544,7 +15545,7 @@
               </a:rPr>
               <a:t>Nos clientes, olhe o churn: dois por cento ao mês é quase um quarto da base em um ano. E economia média caindo antecipa cancelamentos.</a:t>
             </a:r>
-            <a:endParaRPr lang="en-US" sz="1300" dirty="0"/>
+            <a:endParaRPr lang="en-US" sz="1400" dirty="0"/>
           </a:p>
         </p:txBody>
       </p:sp>
@@ -15796,7 +15797,7 @@
               <a:buNone/>
             </a:pPr>
             <a:r>
-              <a:rPr lang="en-US" sz="1300" i="1" dirty="0">
+              <a:rPr lang="en-US" sz="1400" i="1" dirty="0">
                 <a:solidFill>
                   <a:srgbClr val="64748B"/>
                 </a:solidFill>
@@ -15806,7 +15807,7 @@
               </a:rPr>
               <a:t>Coloque tudo numa página, com meta e semáforo, e revise todo mês.</a:t>
             </a:r>
-            <a:endParaRPr lang="en-US" sz="1300" dirty="0"/>
+            <a:endParaRPr lang="en-US" sz="1400" dirty="0"/>
           </a:p>
         </p:txBody>
       </p:sp>
@@ -15937,7 +15938,7 @@
             <a:r>
               <a:rPr lang="en-US" sz="11000" b="1" dirty="0">
                 <a:solidFill>
-                  <a:srgbClr val="11396F"/>
+                  <a:srgbClr val="F7A23B"/>
                 </a:solidFill>
                 <a:latin typeface="Arial" pitchFamily="34" charset="0"/>
                 <a:ea typeface="Arial" pitchFamily="34" charset="-122"/>
@@ -16060,7 +16061,7 @@
                 <a:ea typeface="Arial" pitchFamily="34" charset="-122"/>
                 <a:cs typeface="Arial" pitchFamily="34" charset="-120"/>
               </a:rPr>
-              <a:t>Aula</a:t>
+              <a:t>Aula teórica</a:t>
             </a:r>
             <a:endParaRPr lang="en-US" sz="1400" dirty="0"/>
           </a:p>
@@ -16211,7 +16212,7 @@
                 <a:ea typeface="Arial" pitchFamily="34" charset="-122"/>
                 <a:cs typeface="Arial" pitchFamily="34" charset="-120"/>
               </a:rPr>
-              <a:t>Como usar na retenção</a:t>
+              <a:t>O que o relatório mostra</a:t>
             </a:r>
             <a:endParaRPr lang="en-US" sz="1500" dirty="0"/>
           </a:p>
@@ -16232,7 +16233,7 @@
                 <a:ea typeface="Arial" pitchFamily="34" charset="-122"/>
                 <a:cs typeface="Arial" pitchFamily="34" charset="-120"/>
               </a:rPr>
-              <a:t>Como usar na venda</a:t>
+              <a:t>Como usar na retenção</a:t>
             </a:r>
             <a:endParaRPr lang="en-US" sz="1500" dirty="0"/>
           </a:p>
@@ -16253,7 +16254,7 @@
                 <a:ea typeface="Arial" pitchFamily="34" charset="-122"/>
                 <a:cs typeface="Arial" pitchFamily="34" charset="-120"/>
               </a:rPr>
-              <a:t>Passo a passo na plataforma</a:t>
+              <a:t>Como usar na venda</a:t>
             </a:r>
             <a:endParaRPr lang="en-US" sz="1500" dirty="0"/>
           </a:p>
@@ -16527,11 +16528,11 @@
         <p:spPr>
           <a:xfrm>
             <a:off x="548640" y="1325880"/>
-            <a:ext cx="5408676" cy="4937760"/>
+            <a:ext cx="3514344" cy="4937760"/>
           </a:xfrm>
           <a:prstGeom prst="roundRect">
             <a:avLst>
-              <a:gd name="adj" fmla="val 1481"/>
+              <a:gd name="adj" fmla="val 2082"/>
             </a:avLst>
           </a:prstGeom>
           <a:solidFill>
@@ -16561,7 +16562,7 @@
         <p:spPr>
           <a:xfrm>
             <a:off x="548640" y="1325880"/>
-            <a:ext cx="5408676" cy="109728"/>
+            <a:ext cx="3514344" cy="109728"/>
           </a:xfrm>
           <a:prstGeom prst="rect">
             <a:avLst/>
@@ -16581,7 +16582,7 @@
         <p:spPr>
           <a:xfrm>
             <a:off x="822960" y="1554480"/>
-            <a:ext cx="4860036" cy="685800"/>
+            <a:ext cx="2965704" cy="685800"/>
           </a:xfrm>
           <a:prstGeom prst="rect">
             <a:avLst/>
@@ -16607,7 +16608,7 @@
                 <a:ea typeface="Arial" pitchFamily="34" charset="-122"/>
                 <a:cs typeface="Arial" pitchFamily="34" charset="-120"/>
               </a:rPr>
-              <a:t>Como usar na retenção</a:t>
+              <a:t>O que o relatório mostra</a:t>
             </a:r>
             <a:endParaRPr lang="en-US" sz="1600" dirty="0"/>
           </a:p>
@@ -16622,7 +16623,7 @@
         <p:spPr>
           <a:xfrm>
             <a:off x="822960" y="2286000"/>
-            <a:ext cx="4860036" cy="2286000"/>
+            <a:ext cx="2965704" cy="3749040"/>
           </a:xfrm>
           <a:prstGeom prst="rect">
             <a:avLst/>
@@ -16652,7 +16653,7 @@
                 <a:ea typeface="Arial" pitchFamily="34" charset="-122"/>
                 <a:cs typeface="Arial" pitchFamily="34" charset="-120"/>
               </a:rPr>
-              <a:t>Trimestral: 'Você já economizou R$ X'</a:t>
+              <a:t>Total economizado</a:t>
             </a:r>
             <a:endParaRPr lang="en-US" sz="1700" dirty="0"/>
           </a:p>
@@ -16673,7 +16674,7 @@
                 <a:ea typeface="Arial" pitchFamily="34" charset="-122"/>
                 <a:cs typeface="Arial" pitchFamily="34" charset="-120"/>
               </a:rPr>
-              <a:t>Aniversário de 1 ano</a:t>
+              <a:t>economia média/mês</a:t>
             </a:r>
             <a:endParaRPr lang="en-US" sz="1700" dirty="0"/>
           </a:p>
@@ -16694,7 +16695,7 @@
                 <a:ea typeface="Arial" pitchFamily="34" charset="-122"/>
                 <a:cs typeface="Arial" pitchFamily="34" charset="-120"/>
               </a:rPr>
-              <a:t>Pedido de cancelamento</a:t>
+              <a:t>mês a mês</a:t>
             </a:r>
             <a:endParaRPr lang="en-US" sz="1700" dirty="0"/>
           </a:p>
@@ -16715,31 +16716,10 @@
                 <a:ea typeface="Arial" pitchFamily="34" charset="-122"/>
                 <a:cs typeface="Arial" pitchFamily="34" charset="-120"/>
               </a:rPr>
-              <a:t>Reajuste/Fio B</a:t>
+              <a:t>PDF e Excel</a:t>
             </a:r>
             <a:endParaRPr lang="en-US" sz="1700" dirty="0"/>
           </a:p>
-          <a:p>
-            <a:pPr marL="342900" indent="-342900">
-              <a:spcAft>
-                <a:spcPts val="600"/>
-              </a:spcAft>
-              <a:buSzPct val="100000"/>
-              <a:buChar char="●"/>
-            </a:pPr>
-            <a:r>
-              <a:rPr lang="en-US" sz="1700" dirty="0">
-                <a:solidFill>
-                  <a:srgbClr val="1F2937"/>
-                </a:solidFill>
-                <a:latin typeface="Arial" pitchFamily="34" charset="0"/>
-                <a:ea typeface="Arial" pitchFamily="34" charset="-122"/>
-                <a:cs typeface="Arial" pitchFamily="34" charset="-120"/>
-              </a:rPr>
-              <a:t>Renovação de contrato</a:t>
-            </a:r>
-            <a:endParaRPr lang="en-US" sz="1700" dirty="0"/>
-          </a:p>
         </p:txBody>
       </p:sp>
       <p:sp>
@@ -16750,71 +16730,12 @@
         </p:nvSpPr>
         <p:spPr>
           <a:xfrm>
-            <a:off x="822960" y="4663440"/>
-            <a:ext cx="4860036" cy="18288"/>
-          </a:xfrm>
-          <a:prstGeom prst="rect">
-            <a:avLst/>
-          </a:prstGeom>
-          <a:solidFill>
-            <a:srgbClr val="D8E0EC"/>
-          </a:solidFill>
-          <a:ln/>
-        </p:spPr>
-      </p:sp>
-      <p:sp>
-        <p:nvSpPr>
-          <p:cNvPr id="14" name="Text 11"/>
-          <p:cNvSpPr/>
-          <p:nvPr/>
-        </p:nvSpPr>
-        <p:spPr>
-          <a:xfrm>
-            <a:off x="822960" y="4754880"/>
-            <a:ext cx="4860036" cy="1371600"/>
-          </a:xfrm>
-          <a:prstGeom prst="rect">
-            <a:avLst/>
-          </a:prstGeom>
-          <a:noFill/>
-          <a:ln/>
-        </p:spPr>
-        <p:txBody>
-          <a:bodyPr wrap="square" rtlCol="0" anchor="t"/>
-          <a:lstStyle/>
-          <a:p>
-            <a:pPr indent="0" marL="0">
-              <a:buNone/>
-            </a:pPr>
-            <a:r>
-              <a:rPr lang="en-US" sz="1300" i="1" dirty="0">
-                <a:solidFill>
-                  <a:srgbClr val="64748B"/>
-                </a:solidFill>
-                <a:latin typeface="Arial" pitchFamily="34" charset="0"/>
-                <a:ea typeface="Arial" pitchFamily="34" charset="-122"/>
-                <a:cs typeface="Arial" pitchFamily="34" charset="-120"/>
-              </a:rPr>
-              <a:t>Use o relatório de economia nos momentos da tela, principalmente no pedido de cancelamento.</a:t>
-            </a:r>
-            <a:endParaRPr lang="en-US" sz="1300" dirty="0"/>
-          </a:p>
-        </p:txBody>
-      </p:sp>
-      <p:sp>
-        <p:nvSpPr>
-          <p:cNvPr id="15" name="Shape 12"/>
-          <p:cNvSpPr/>
-          <p:nvPr/>
-        </p:nvSpPr>
-        <p:spPr>
-          <a:xfrm>
-            <a:off x="6231636" y="1325880"/>
-            <a:ext cx="5408676" cy="4937760"/>
+            <a:off x="4337304" y="1325880"/>
+            <a:ext cx="3514344" cy="4937760"/>
           </a:xfrm>
           <a:prstGeom prst="roundRect">
             <a:avLst>
-              <a:gd name="adj" fmla="val 1481"/>
+              <a:gd name="adj" fmla="val 2082"/>
             </a:avLst>
           </a:prstGeom>
           <a:solidFill>
@@ -16837,14 +16758,14 @@
       </p:sp>
       <p:sp>
         <p:nvSpPr>
-          <p:cNvPr id="16" name="Shape 13"/>
-          <p:cNvSpPr/>
-          <p:nvPr/>
-        </p:nvSpPr>
-        <p:spPr>
-          <a:xfrm>
-            <a:off x="6231636" y="1325880"/>
-            <a:ext cx="5408676" cy="109728"/>
+          <p:cNvPr id="14" name="Shape 11"/>
+          <p:cNvSpPr/>
+          <p:nvPr/>
+        </p:nvSpPr>
+        <p:spPr>
+          <a:xfrm>
+            <a:off x="4337304" y="1325880"/>
+            <a:ext cx="3514344" cy="109728"/>
           </a:xfrm>
           <a:prstGeom prst="rect">
             <a:avLst/>
@@ -16857,14 +16778,14 @@
       </p:sp>
       <p:sp>
         <p:nvSpPr>
-          <p:cNvPr id="17" name="Text 14"/>
-          <p:cNvSpPr/>
-          <p:nvPr/>
-        </p:nvSpPr>
-        <p:spPr>
-          <a:xfrm>
-            <a:off x="6505956" y="1554480"/>
-            <a:ext cx="4860036" cy="685800"/>
+          <p:cNvPr id="15" name="Text 12"/>
+          <p:cNvSpPr/>
+          <p:nvPr/>
+        </p:nvSpPr>
+        <p:spPr>
+          <a:xfrm>
+            <a:off x="4611624" y="1554480"/>
+            <a:ext cx="2965704" cy="685800"/>
           </a:xfrm>
           <a:prstGeom prst="rect">
             <a:avLst/>
@@ -16890,7 +16811,7 @@
                 <a:ea typeface="Arial" pitchFamily="34" charset="-122"/>
                 <a:cs typeface="Arial" pitchFamily="34" charset="-120"/>
               </a:rPr>
-              <a:t>Como usar na venda</a:t>
+              <a:t>Como usar na retenção</a:t>
             </a:r>
             <a:endParaRPr lang="en-US" sz="1600" dirty="0"/>
           </a:p>
@@ -16898,14 +16819,14 @@
       </p:sp>
       <p:sp>
         <p:nvSpPr>
-          <p:cNvPr id="18" name="Text 15"/>
-          <p:cNvSpPr/>
-          <p:nvPr/>
-        </p:nvSpPr>
-        <p:spPr>
-          <a:xfrm>
-            <a:off x="6505956" y="2286000"/>
-            <a:ext cx="4860036" cy="2286000"/>
+          <p:cNvPr id="16" name="Text 13"/>
+          <p:cNvSpPr/>
+          <p:nvPr/>
+        </p:nvSpPr>
+        <p:spPr>
+          <a:xfrm>
+            <a:off x="4611624" y="2286000"/>
+            <a:ext cx="2965704" cy="2286000"/>
           </a:xfrm>
           <a:prstGeom prst="rect">
             <a:avLst/>
@@ -16935,7 +16856,7 @@
                 <a:ea typeface="Arial" pitchFamily="34" charset="-122"/>
                 <a:cs typeface="Arial" pitchFamily="34" charset="-120"/>
               </a:rPr>
-              <a:t>Prova social com números</a:t>
+              <a:t>Trimestral: 'Você já economizou R$ X'</a:t>
             </a:r>
             <a:endParaRPr lang="en-US" sz="1700" dirty="0"/>
           </a:p>
@@ -16956,7 +16877,7 @@
                 <a:ea typeface="Arial" pitchFamily="34" charset="-122"/>
                 <a:cs typeface="Arial" pitchFamily="34" charset="-120"/>
               </a:rPr>
-              <a:t>'clientes do seu setor economizam em média R$ X/mês'</a:t>
+              <a:t>Aniversário de 1 ano</a:t>
             </a:r>
             <a:endParaRPr lang="en-US" sz="1700" dirty="0"/>
           </a:p>
@@ -16977,22 +16898,64 @@
                 <a:ea typeface="Arial" pitchFamily="34" charset="-122"/>
                 <a:cs typeface="Arial" pitchFamily="34" charset="-120"/>
               </a:rPr>
-              <a:t>indicação: 'mostre seu relatório para um amigo'</a:t>
+              <a:t>Pedido de cancelamento</a:t>
             </a:r>
             <a:endParaRPr lang="en-US" sz="1700" dirty="0"/>
           </a:p>
-        </p:txBody>
-      </p:sp>
-      <p:sp>
-        <p:nvSpPr>
-          <p:cNvPr id="19" name="Shape 16"/>
-          <p:cNvSpPr/>
-          <p:nvPr/>
-        </p:nvSpPr>
-        <p:spPr>
-          <a:xfrm>
-            <a:off x="6505956" y="4663440"/>
-            <a:ext cx="4860036" cy="18288"/>
+          <a:p>
+            <a:pPr marL="342900" indent="-342900">
+              <a:spcAft>
+                <a:spcPts val="600"/>
+              </a:spcAft>
+              <a:buSzPct val="100000"/>
+              <a:buChar char="●"/>
+            </a:pPr>
+            <a:r>
+              <a:rPr lang="en-US" sz="1700" dirty="0">
+                <a:solidFill>
+                  <a:srgbClr val="1F2937"/>
+                </a:solidFill>
+                <a:latin typeface="Arial" pitchFamily="34" charset="0"/>
+                <a:ea typeface="Arial" pitchFamily="34" charset="-122"/>
+                <a:cs typeface="Arial" pitchFamily="34" charset="-120"/>
+              </a:rPr>
+              <a:t>Reajuste/Fio B</a:t>
+            </a:r>
+            <a:endParaRPr lang="en-US" sz="1700" dirty="0"/>
+          </a:p>
+          <a:p>
+            <a:pPr marL="342900" indent="-342900">
+              <a:spcAft>
+                <a:spcPts val="600"/>
+              </a:spcAft>
+              <a:buSzPct val="100000"/>
+              <a:buChar char="●"/>
+            </a:pPr>
+            <a:r>
+              <a:rPr lang="en-US" sz="1700" dirty="0">
+                <a:solidFill>
+                  <a:srgbClr val="1F2937"/>
+                </a:solidFill>
+                <a:latin typeface="Arial" pitchFamily="34" charset="0"/>
+                <a:ea typeface="Arial" pitchFamily="34" charset="-122"/>
+                <a:cs typeface="Arial" pitchFamily="34" charset="-120"/>
+              </a:rPr>
+              <a:t>Renovação de contrato</a:t>
+            </a:r>
+            <a:endParaRPr lang="en-US" sz="1700" dirty="0"/>
+          </a:p>
+        </p:txBody>
+      </p:sp>
+      <p:sp>
+        <p:nvSpPr>
+          <p:cNvPr id="17" name="Shape 14"/>
+          <p:cNvSpPr/>
+          <p:nvPr/>
+        </p:nvSpPr>
+        <p:spPr>
+          <a:xfrm>
+            <a:off x="4611624" y="4663440"/>
+            <a:ext cx="2965704" cy="18288"/>
           </a:xfrm>
           <a:prstGeom prst="rect">
             <a:avLst/>
@@ -17005,14 +16968,14 @@
       </p:sp>
       <p:sp>
         <p:nvSpPr>
-          <p:cNvPr id="20" name="Text 17"/>
-          <p:cNvSpPr/>
-          <p:nvPr/>
-        </p:nvSpPr>
-        <p:spPr>
-          <a:xfrm>
-            <a:off x="6505956" y="4754880"/>
-            <a:ext cx="4860036" cy="1371600"/>
+          <p:cNvPr id="18" name="Text 15"/>
+          <p:cNvSpPr/>
+          <p:nvPr/>
+        </p:nvSpPr>
+        <p:spPr>
+          <a:xfrm>
+            <a:off x="4611624" y="4754880"/>
+            <a:ext cx="2965704" cy="1371600"/>
           </a:xfrm>
           <a:prstGeom prst="rect">
             <a:avLst/>
@@ -17028,7 +16991,7 @@
               <a:buNone/>
             </a:pPr>
             <a:r>
-              <a:rPr lang="en-US" sz="1300" i="1" dirty="0">
+              <a:rPr lang="en-US" sz="1400" i="1" dirty="0">
                 <a:solidFill>
                   <a:srgbClr val="64748B"/>
                 </a:solidFill>
@@ -17036,9 +16999,250 @@
                 <a:ea typeface="Arial" pitchFamily="34" charset="-122"/>
                 <a:cs typeface="Arial" pitchFamily="34" charset="-120"/>
               </a:rPr>
+              <a:t>Use o relatório de economia nos momentos da tela, principalmente no pedido de cancelamento.</a:t>
+            </a:r>
+            <a:endParaRPr lang="en-US" sz="1400" dirty="0"/>
+          </a:p>
+        </p:txBody>
+      </p:sp>
+      <p:sp>
+        <p:nvSpPr>
+          <p:cNvPr id="19" name="Shape 16"/>
+          <p:cNvSpPr/>
+          <p:nvPr/>
+        </p:nvSpPr>
+        <p:spPr>
+          <a:xfrm>
+            <a:off x="8125968" y="1325880"/>
+            <a:ext cx="3514344" cy="4937760"/>
+          </a:xfrm>
+          <a:prstGeom prst="roundRect">
+            <a:avLst>
+              <a:gd name="adj" fmla="val 2082"/>
+            </a:avLst>
+          </a:prstGeom>
+          <a:solidFill>
+            <a:srgbClr val="FFFFFF"/>
+          </a:solidFill>
+          <a:ln w="9525">
+            <a:solidFill>
+              <a:srgbClr val="D8E0EC"/>
+            </a:solidFill>
+            <a:prstDash val="solid"/>
+          </a:ln>
+          <a:effectLst>
+            <a:outerShdw sx="100000" sy="100000" kx="0" ky="0" algn="bl" rotWithShape="0" blurRad="38100" dist="12700" dir="5400000">
+              <a:srgbClr val="000000">
+                <a:alpha val="8000"/>
+              </a:srgbClr>
+            </a:outerShdw>
+          </a:effectLst>
+        </p:spPr>
+      </p:sp>
+      <p:sp>
+        <p:nvSpPr>
+          <p:cNvPr id="20" name="Shape 17"/>
+          <p:cNvSpPr/>
+          <p:nvPr/>
+        </p:nvSpPr>
+        <p:spPr>
+          <a:xfrm>
+            <a:off x="8125968" y="1325880"/>
+            <a:ext cx="3514344" cy="109728"/>
+          </a:xfrm>
+          <a:prstGeom prst="rect">
+            <a:avLst/>
+          </a:prstGeom>
+          <a:solidFill>
+            <a:srgbClr val="1B3A6B"/>
+          </a:solidFill>
+          <a:ln/>
+        </p:spPr>
+      </p:sp>
+      <p:sp>
+        <p:nvSpPr>
+          <p:cNvPr id="21" name="Text 18"/>
+          <p:cNvSpPr/>
+          <p:nvPr/>
+        </p:nvSpPr>
+        <p:spPr>
+          <a:xfrm>
+            <a:off x="8400288" y="1554480"/>
+            <a:ext cx="2965704" cy="685800"/>
+          </a:xfrm>
+          <a:prstGeom prst="rect">
+            <a:avLst/>
+          </a:prstGeom>
+          <a:noFill/>
+          <a:ln/>
+        </p:spPr>
+        <p:txBody>
+          <a:bodyPr wrap="square" rtlCol="0" anchor="t">
+            <a:normAutofit/>
+          </a:bodyPr>
+          <a:lstStyle/>
+          <a:p>
+            <a:pPr indent="0" marL="0">
+              <a:buNone/>
+            </a:pPr>
+            <a:r>
+              <a:rPr lang="en-US" sz="1600" b="1" dirty="0">
+                <a:solidFill>
+                  <a:srgbClr val="1B3A6B"/>
+                </a:solidFill>
+                <a:latin typeface="Arial" pitchFamily="34" charset="0"/>
+                <a:ea typeface="Arial" pitchFamily="34" charset="-122"/>
+                <a:cs typeface="Arial" pitchFamily="34" charset="-120"/>
+              </a:rPr>
+              <a:t>Como usar na venda</a:t>
+            </a:r>
+            <a:endParaRPr lang="en-US" sz="1600" dirty="0"/>
+          </a:p>
+        </p:txBody>
+      </p:sp>
+      <p:sp>
+        <p:nvSpPr>
+          <p:cNvPr id="22" name="Text 19"/>
+          <p:cNvSpPr/>
+          <p:nvPr/>
+        </p:nvSpPr>
+        <p:spPr>
+          <a:xfrm>
+            <a:off x="8400288" y="2286000"/>
+            <a:ext cx="2965704" cy="2286000"/>
+          </a:xfrm>
+          <a:prstGeom prst="rect">
+            <a:avLst/>
+          </a:prstGeom>
+          <a:noFill/>
+          <a:ln/>
+        </p:spPr>
+        <p:txBody>
+          <a:bodyPr wrap="square" rtlCol="0" anchor="t">
+            <a:normAutofit/>
+          </a:bodyPr>
+          <a:lstStyle/>
+          <a:p>
+            <a:pPr marL="342900" indent="-342900">
+              <a:spcAft>
+                <a:spcPts val="600"/>
+              </a:spcAft>
+              <a:buSzPct val="100000"/>
+              <a:buChar char="●"/>
+            </a:pPr>
+            <a:r>
+              <a:rPr lang="en-US" sz="1600" dirty="0">
+                <a:solidFill>
+                  <a:srgbClr val="1F2937"/>
+                </a:solidFill>
+                <a:latin typeface="Arial" pitchFamily="34" charset="0"/>
+                <a:ea typeface="Arial" pitchFamily="34" charset="-122"/>
+                <a:cs typeface="Arial" pitchFamily="34" charset="-120"/>
+              </a:rPr>
+              <a:t>Prova social com números</a:t>
+            </a:r>
+            <a:endParaRPr lang="en-US" sz="1600" dirty="0"/>
+          </a:p>
+          <a:p>
+            <a:pPr marL="342900" indent="-342900">
+              <a:spcAft>
+                <a:spcPts val="600"/>
+              </a:spcAft>
+              <a:buSzPct val="100000"/>
+              <a:buChar char="●"/>
+            </a:pPr>
+            <a:r>
+              <a:rPr lang="en-US" sz="1600" dirty="0">
+                <a:solidFill>
+                  <a:srgbClr val="1F2937"/>
+                </a:solidFill>
+                <a:latin typeface="Arial" pitchFamily="34" charset="0"/>
+                <a:ea typeface="Arial" pitchFamily="34" charset="-122"/>
+                <a:cs typeface="Arial" pitchFamily="34" charset="-120"/>
+              </a:rPr>
+              <a:t>'clientes do seu setor economizam em média R$ X/mês'</a:t>
+            </a:r>
+            <a:endParaRPr lang="en-US" sz="1600" dirty="0"/>
+          </a:p>
+          <a:p>
+            <a:pPr marL="342900" indent="-342900">
+              <a:spcAft>
+                <a:spcPts val="600"/>
+              </a:spcAft>
+              <a:buSzPct val="100000"/>
+              <a:buChar char="●"/>
+            </a:pPr>
+            <a:r>
+              <a:rPr lang="en-US" sz="1600" dirty="0">
+                <a:solidFill>
+                  <a:srgbClr val="1F2937"/>
+                </a:solidFill>
+                <a:latin typeface="Arial" pitchFamily="34" charset="0"/>
+                <a:ea typeface="Arial" pitchFamily="34" charset="-122"/>
+                <a:cs typeface="Arial" pitchFamily="34" charset="-120"/>
+              </a:rPr>
+              <a:t>indicação: 'mostre seu relatório para um amigo'</a:t>
+            </a:r>
+            <a:endParaRPr lang="en-US" sz="1600" dirty="0"/>
+          </a:p>
+        </p:txBody>
+      </p:sp>
+      <p:sp>
+        <p:nvSpPr>
+          <p:cNvPr id="23" name="Shape 20"/>
+          <p:cNvSpPr/>
+          <p:nvPr/>
+        </p:nvSpPr>
+        <p:spPr>
+          <a:xfrm>
+            <a:off x="8400288" y="4663440"/>
+            <a:ext cx="2965704" cy="18288"/>
+          </a:xfrm>
+          <a:prstGeom prst="rect">
+            <a:avLst/>
+          </a:prstGeom>
+          <a:solidFill>
+            <a:srgbClr val="D8E0EC"/>
+          </a:solidFill>
+          <a:ln/>
+        </p:spPr>
+      </p:sp>
+      <p:sp>
+        <p:nvSpPr>
+          <p:cNvPr id="24" name="Text 21"/>
+          <p:cNvSpPr/>
+          <p:nvPr/>
+        </p:nvSpPr>
+        <p:spPr>
+          <a:xfrm>
+            <a:off x="8400288" y="4754880"/>
+            <a:ext cx="2965704" cy="1371600"/>
+          </a:xfrm>
+          <a:prstGeom prst="rect">
+            <a:avLst/>
+          </a:prstGeom>
+          <a:noFill/>
+          <a:ln/>
+        </p:spPr>
+        <p:txBody>
+          <a:bodyPr wrap="square" rtlCol="0" anchor="t"/>
+          <a:lstStyle/>
+          <a:p>
+            <a:pPr indent="0" marL="0">
+              <a:buNone/>
+            </a:pPr>
+            <a:r>
+              <a:rPr lang="en-US" sz="1400" i="1" dirty="0">
+                <a:solidFill>
+                  <a:srgbClr val="64748B"/>
+                </a:solidFill>
+                <a:latin typeface="Arial" pitchFamily="34" charset="0"/>
+                <a:ea typeface="Arial" pitchFamily="34" charset="-122"/>
+                <a:cs typeface="Arial" pitchFamily="34" charset="-120"/>
+              </a:rPr>
               <a:t>Ele também vende: números agregados viram prova social, e o cliente pode mostrar o próprio relatório a quem indicar.</a:t>
             </a:r>
-            <a:endParaRPr lang="en-US" sz="1300" dirty="0"/>
+            <a:endParaRPr lang="en-US" sz="1400" dirty="0"/>
           </a:p>
         </p:txBody>
       </p:sp>
@@ -17302,7 +17506,7 @@
                 <a:ea typeface="Arial" pitchFamily="34" charset="-122"/>
                 <a:cs typeface="Arial" pitchFamily="34" charset="-120"/>
               </a:rPr>
-              <a:t>AULA 2 · O RELATÓRIO DE ECONOMIA COMO FERRAMENTA DE RETENÇÃO</a:t>
+              <a:t>AULA 2 · NA PLATAFORMA</a:t>
             </a:r>
             <a:endParaRPr lang="en-US" sz="1000" dirty="0"/>
           </a:p>
@@ -17343,7 +17547,7 @@
                 <a:ea typeface="Arial" pitchFamily="34" charset="-122"/>
                 <a:cs typeface="Arial" pitchFamily="34" charset="-120"/>
               </a:rPr>
-              <a:t>Passo a passo na plataforma</a:t>
+              <a:t>Relatório de economia do cliente</a:t>
             </a:r>
             <a:endParaRPr lang="en-US" sz="2600" dirty="0"/>
           </a:p>
@@ -17357,12 +17561,12 @@
         </p:nvSpPr>
         <p:spPr>
           <a:xfrm>
-            <a:off x="420624" y="1289304"/>
-            <a:ext cx="7114032" cy="4033647"/>
+            <a:off x="1380744" y="1225296"/>
+            <a:ext cx="9400032" cy="5319522"/>
           </a:xfrm>
           <a:prstGeom prst="roundRect">
             <a:avLst>
-              <a:gd name="adj" fmla="val 1360"/>
+              <a:gd name="adj" fmla="val 1031"/>
             </a:avLst>
           </a:prstGeom>
           <a:solidFill>
@@ -17399,128 +17603,14 @@
         </p:blipFill>
         <p:spPr>
           <a:xfrm>
-            <a:off x="457200" y="1325880"/>
-            <a:ext cx="7040880" cy="3960495"/>
+            <a:off x="1417320" y="1261872"/>
+            <a:ext cx="9326880" cy="5246370"/>
           </a:xfrm>
           <a:prstGeom prst="rect">
             <a:avLst/>
           </a:prstGeom>
         </p:spPr>
       </p:pic>
-      <p:sp>
-        <p:nvSpPr>
-          <p:cNvPr id="11" name="Text 7"/>
-          <p:cNvSpPr/>
-          <p:nvPr/>
-        </p:nvSpPr>
-        <p:spPr>
-          <a:xfrm>
-            <a:off x="457200" y="5332095"/>
-            <a:ext cx="7040880" cy="320040"/>
-          </a:xfrm>
-          <a:prstGeom prst="rect">
-            <a:avLst/>
-          </a:prstGeom>
-          <a:noFill/>
-          <a:ln/>
-        </p:spPr>
-        <p:txBody>
-          <a:bodyPr wrap="square" rtlCol="0" anchor="ctr"/>
-          <a:lstStyle/>
-          <a:p>
-            <a:pPr algn="ctr" indent="0" marL="0">
-              <a:buNone/>
-            </a:pPr>
-            <a:r>
-              <a:rPr lang="en-US" sz="1100" i="1" dirty="0">
-                <a:solidFill>
-                  <a:srgbClr val="64748B"/>
-                </a:solidFill>
-                <a:latin typeface="Arial" pitchFamily="34" charset="0"/>
-                <a:ea typeface="Arial" pitchFamily="34" charset="-122"/>
-                <a:cs typeface="Arial" pitchFamily="34" charset="-120"/>
-              </a:rPr>
-              <a:t>Relatório de economia do cliente</a:t>
-            </a:r>
-            <a:endParaRPr lang="en-US" sz="1100" dirty="0"/>
-          </a:p>
-        </p:txBody>
-      </p:sp>
-      <p:sp>
-        <p:nvSpPr>
-          <p:cNvPr id="12" name="Text 8"/>
-          <p:cNvSpPr/>
-          <p:nvPr/>
-        </p:nvSpPr>
-        <p:spPr>
-          <a:xfrm>
-            <a:off x="7818120" y="1325880"/>
-            <a:ext cx="3977640" cy="4937760"/>
-          </a:xfrm>
-          <a:prstGeom prst="rect">
-            <a:avLst/>
-          </a:prstGeom>
-          <a:noFill/>
-          <a:ln/>
-        </p:spPr>
-        <p:txBody>
-          <a:bodyPr wrap="square" rtlCol="0" anchor="t">
-            <a:normAutofit/>
-          </a:bodyPr>
-          <a:lstStyle/>
-          <a:p>
-            <a:pPr indent="0" marL="0">
-              <a:buNone/>
-            </a:pPr>
-            <a:r>
-              <a:rPr lang="en-US" sz="1500" b="1" dirty="0">
-                <a:solidFill>
-                  <a:srgbClr val="F7A23B"/>
-                </a:solidFill>
-                <a:latin typeface="Arial" pitchFamily="34" charset="0"/>
-                <a:ea typeface="Arial" pitchFamily="34" charset="-122"/>
-                <a:cs typeface="Arial" pitchFamily="34" charset="-120"/>
-              </a:rPr>
-              <a:t>1  </a:t>
-            </a:r>
-            <a:pPr indent="0" marL="0">
-              <a:buNone/>
-            </a:pPr>
-            <a:r>
-              <a:rPr lang="en-US" sz="1400" b="1" dirty="0">
-                <a:solidFill>
-                  <a:srgbClr val="1B3A6B"/>
-                </a:solidFill>
-                <a:latin typeface="Arial" pitchFamily="34" charset="0"/>
-                <a:ea typeface="Arial" pitchFamily="34" charset="-122"/>
-                <a:cs typeface="Arial" pitchFamily="34" charset="-120"/>
-              </a:rPr>
-              <a:t>O que o relatório mostra</a:t>
-            </a:r>
-            <a:endParaRPr lang="en-US" sz="1500" dirty="0"/>
-          </a:p>
-          <a:p>
-            <a:pPr indent="0" marL="0">
-              <a:spcAft>
-                <a:spcPts val="800"/>
-              </a:spcAft>
-              <a:buNone/>
-            </a:pPr>
-            <a:r>
-              <a:rPr lang="en-US" sz="1100" dirty="0">
-                <a:solidFill>
-                  <a:srgbClr val="1F2937"/>
-                </a:solidFill>
-                <a:latin typeface="Arial" pitchFamily="34" charset="0"/>
-                <a:ea typeface="Arial" pitchFamily="34" charset="-122"/>
-                <a:cs typeface="Arial" pitchFamily="34" charset="-120"/>
-              </a:rPr>
-              <a:t>Total economizado · economia média/mês · mês a mês · PDF e Excel</a:t>
-            </a:r>
-            <a:endParaRPr lang="en-US" sz="1500" dirty="0"/>
-          </a:p>
-        </p:txBody>
-      </p:sp>
       <p:sp>
         <p:nvSpPr>
           <p:cNvPr id="25" name="Slide Number Placeholder 0"/>
@@ -18357,7 +18447,7 @@
             <a:r>
               <a:rPr lang="en-US" sz="11000" b="1" dirty="0">
                 <a:solidFill>
-                  <a:srgbClr val="11396F"/>
+                  <a:srgbClr val="F7A23B"/>
                 </a:solidFill>
                 <a:latin typeface="Arial" pitchFamily="34" charset="0"/>
                 <a:ea typeface="Arial" pitchFamily="34" charset="-122"/>
@@ -18480,7 +18570,7 @@
                 <a:ea typeface="Arial" pitchFamily="34" charset="-122"/>
                 <a:cs typeface="Arial" pitchFamily="34" charset="-120"/>
               </a:rPr>
-              <a:t>Aula</a:t>
+              <a:t>Aula teórica</a:t>
             </a:r>
             <a:endParaRPr lang="en-US" sz="1400" dirty="0"/>
           </a:p>
